--- a/docs/pptx/carbo/jx-carbo-linsubhr-ratio-hosp-immune-other.pptx
+++ b/docs/pptx/carbo/jx-carbo-linsubhr-ratio-hosp-immune-other.pptx
@@ -2271,7 +2271,7 @@
           </p:nvSpPr>
           <p:spPr>
             <a:xfrm>
-              <a:off x="817517" y="5114368"/>
+              <a:off x="817517" y="5142518"/>
               <a:ext cx="7799693" cy="0"/>
             </a:xfrm>
             <a:custGeom>
@@ -2314,7 +2314,7 @@
           </p:nvSpPr>
           <p:spPr>
             <a:xfrm>
-              <a:off x="817517" y="4244691"/>
+              <a:off x="817517" y="4313054"/>
               <a:ext cx="7799693" cy="0"/>
             </a:xfrm>
             <a:custGeom>
@@ -2357,7 +2357,7 @@
           </p:nvSpPr>
           <p:spPr>
             <a:xfrm>
-              <a:off x="817517" y="3375014"/>
+              <a:off x="817517" y="3483591"/>
               <a:ext cx="7799693" cy="0"/>
             </a:xfrm>
             <a:custGeom>
@@ -2400,7 +2400,7 @@
           </p:nvSpPr>
           <p:spPr>
             <a:xfrm>
-              <a:off x="817517" y="2505337"/>
+              <a:off x="817517" y="2654127"/>
               <a:ext cx="7799693" cy="0"/>
             </a:xfrm>
             <a:custGeom>
@@ -2443,15 +2443,15 @@
           </p:nvSpPr>
           <p:spPr>
             <a:xfrm>
-              <a:off x="1615213" y="1896563"/>
-              <a:ext cx="0" cy="3826579"/>
+              <a:off x="1615213" y="2073503"/>
+              <a:ext cx="0" cy="3649639"/>
             </a:xfrm>
             <a:custGeom>
               <a:avLst/>
               <a:pathLst>
-                <a:path w="0" h="3826579">
+                <a:path w="0" h="3649639">
                   <a:moveTo>
-                    <a:pt x="0" y="3826579"/>
+                    <a:pt x="0" y="3649639"/>
                   </a:moveTo>
                   <a:lnTo>
                     <a:pt x="0" y="0"/>
@@ -2486,15 +2486,15 @@
           </p:nvSpPr>
           <p:spPr>
             <a:xfrm>
-              <a:off x="3387871" y="1896563"/>
-              <a:ext cx="0" cy="3826579"/>
+              <a:off x="3387871" y="2073503"/>
+              <a:ext cx="0" cy="3649639"/>
             </a:xfrm>
             <a:custGeom>
               <a:avLst/>
               <a:pathLst>
-                <a:path w="0" h="3826579">
+                <a:path w="0" h="3649639">
                   <a:moveTo>
-                    <a:pt x="0" y="3826579"/>
+                    <a:pt x="0" y="3649639"/>
                   </a:moveTo>
                   <a:lnTo>
                     <a:pt x="0" y="0"/>
@@ -2529,15 +2529,15 @@
           </p:nvSpPr>
           <p:spPr>
             <a:xfrm>
-              <a:off x="5160528" y="1896563"/>
-              <a:ext cx="0" cy="3826579"/>
+              <a:off x="5160528" y="2073503"/>
+              <a:ext cx="0" cy="3649639"/>
             </a:xfrm>
             <a:custGeom>
               <a:avLst/>
               <a:pathLst>
-                <a:path w="0" h="3826579">
+                <a:path w="0" h="3649639">
                   <a:moveTo>
-                    <a:pt x="0" y="3826579"/>
+                    <a:pt x="0" y="3649639"/>
                   </a:moveTo>
                   <a:lnTo>
                     <a:pt x="0" y="0"/>
@@ -2572,15 +2572,15 @@
           </p:nvSpPr>
           <p:spPr>
             <a:xfrm>
-              <a:off x="6933186" y="1896563"/>
-              <a:ext cx="0" cy="3826579"/>
+              <a:off x="6933186" y="2073503"/>
+              <a:ext cx="0" cy="3649639"/>
             </a:xfrm>
             <a:custGeom>
               <a:avLst/>
               <a:pathLst>
-                <a:path w="0" h="3826579">
+                <a:path w="0" h="3649639">
                   <a:moveTo>
-                    <a:pt x="0" y="3826579"/>
+                    <a:pt x="0" y="3649639"/>
                   </a:moveTo>
                   <a:lnTo>
                     <a:pt x="0" y="0"/>
@@ -2615,7 +2615,7 @@
           </p:nvSpPr>
           <p:spPr>
             <a:xfrm>
-              <a:off x="817517" y="5549207"/>
+              <a:off x="817517" y="5557249"/>
               <a:ext cx="7799693" cy="0"/>
             </a:xfrm>
             <a:custGeom>
@@ -2658,7 +2658,7 @@
           </p:nvSpPr>
           <p:spPr>
             <a:xfrm>
-              <a:off x="817517" y="4679530"/>
+              <a:off x="817517" y="4727786"/>
               <a:ext cx="7799693" cy="0"/>
             </a:xfrm>
             <a:custGeom>
@@ -2701,7 +2701,7 @@
           </p:nvSpPr>
           <p:spPr>
             <a:xfrm>
-              <a:off x="817517" y="3809853"/>
+              <a:off x="817517" y="3898322"/>
               <a:ext cx="7799693" cy="0"/>
             </a:xfrm>
             <a:custGeom>
@@ -2744,7 +2744,7 @@
           </p:nvSpPr>
           <p:spPr>
             <a:xfrm>
-              <a:off x="817517" y="2940175"/>
+              <a:off x="817517" y="3068859"/>
               <a:ext cx="7799693" cy="0"/>
             </a:xfrm>
             <a:custGeom>
@@ -2787,7 +2787,7 @@
           </p:nvSpPr>
           <p:spPr>
             <a:xfrm>
-              <a:off x="817517" y="2070498"/>
+              <a:off x="817517" y="2239395"/>
               <a:ext cx="7799693" cy="0"/>
             </a:xfrm>
             <a:custGeom>
@@ -2830,15 +2830,15 @@
           </p:nvSpPr>
           <p:spPr>
             <a:xfrm>
-              <a:off x="2501542" y="1896563"/>
-              <a:ext cx="0" cy="3826579"/>
+              <a:off x="2501542" y="2073503"/>
+              <a:ext cx="0" cy="3649639"/>
             </a:xfrm>
             <a:custGeom>
               <a:avLst/>
               <a:pathLst>
-                <a:path w="0" h="3826579">
+                <a:path w="0" h="3649639">
                   <a:moveTo>
-                    <a:pt x="0" y="3826579"/>
+                    <a:pt x="0" y="3649639"/>
                   </a:moveTo>
                   <a:lnTo>
                     <a:pt x="0" y="0"/>
@@ -2873,15 +2873,15 @@
           </p:nvSpPr>
           <p:spPr>
             <a:xfrm>
-              <a:off x="4274200" y="1896563"/>
-              <a:ext cx="0" cy="3826579"/>
+              <a:off x="4274200" y="2073503"/>
+              <a:ext cx="0" cy="3649639"/>
             </a:xfrm>
             <a:custGeom>
               <a:avLst/>
               <a:pathLst>
-                <a:path w="0" h="3826579">
+                <a:path w="0" h="3649639">
                   <a:moveTo>
-                    <a:pt x="0" y="3826579"/>
+                    <a:pt x="0" y="3649639"/>
                   </a:moveTo>
                   <a:lnTo>
                     <a:pt x="0" y="0"/>
@@ -2916,15 +2916,15 @@
           </p:nvSpPr>
           <p:spPr>
             <a:xfrm>
-              <a:off x="6046857" y="1896563"/>
-              <a:ext cx="0" cy="3826579"/>
+              <a:off x="6046857" y="2073503"/>
+              <a:ext cx="0" cy="3649639"/>
             </a:xfrm>
             <a:custGeom>
               <a:avLst/>
               <a:pathLst>
-                <a:path w="0" h="3826579">
+                <a:path w="0" h="3649639">
                   <a:moveTo>
-                    <a:pt x="0" y="3826579"/>
+                    <a:pt x="0" y="3649639"/>
                   </a:moveTo>
                   <a:lnTo>
                     <a:pt x="0" y="0"/>
@@ -2959,15 +2959,15 @@
           </p:nvSpPr>
           <p:spPr>
             <a:xfrm>
-              <a:off x="7819515" y="1896563"/>
-              <a:ext cx="0" cy="3826579"/>
+              <a:off x="7819515" y="2073503"/>
+              <a:ext cx="0" cy="3649639"/>
             </a:xfrm>
             <a:custGeom>
               <a:avLst/>
               <a:pathLst>
-                <a:path w="0" h="3826579">
+                <a:path w="0" h="3649639">
                   <a:moveTo>
-                    <a:pt x="0" y="3826579"/>
+                    <a:pt x="0" y="3649639"/>
                   </a:moveTo>
                   <a:lnTo>
                     <a:pt x="0" y="0"/>
@@ -3002,597 +3002,597 @@
           </p:nvSpPr>
           <p:spPr>
             <a:xfrm>
-              <a:off x="817517" y="1896563"/>
-              <a:ext cx="7403783" cy="3499253"/>
+              <a:off x="817517" y="2073503"/>
+              <a:ext cx="7403783" cy="3337449"/>
             </a:xfrm>
             <a:custGeom>
               <a:avLst/>
               <a:pathLst>
-                <a:path w="7403783" h="3499253">
+                <a:path w="7403783" h="3337449">
                   <a:moveTo>
                     <a:pt x="101168" y="0"/>
                   </a:moveTo>
                   <a:lnTo>
-                    <a:pt x="123691" y="35955"/>
-                  </a:lnTo>
-                  <a:lnTo>
-                    <a:pt x="200323" y="154291"/>
-                  </a:lnTo>
-                  <a:lnTo>
-                    <a:pt x="276956" y="268755"/>
-                  </a:lnTo>
-                  <a:lnTo>
-                    <a:pt x="353588" y="379474"/>
-                  </a:lnTo>
-                  <a:lnTo>
-                    <a:pt x="430221" y="486570"/>
-                  </a:lnTo>
-                  <a:lnTo>
-                    <a:pt x="506853" y="590162"/>
-                  </a:lnTo>
-                  <a:lnTo>
-                    <a:pt x="583486" y="690364"/>
-                  </a:lnTo>
-                  <a:lnTo>
-                    <a:pt x="660118" y="787288"/>
-                  </a:lnTo>
-                  <a:lnTo>
-                    <a:pt x="736751" y="881041"/>
-                  </a:lnTo>
-                  <a:lnTo>
-                    <a:pt x="813384" y="971726"/>
-                  </a:lnTo>
-                  <a:lnTo>
-                    <a:pt x="890016" y="1059444"/>
-                  </a:lnTo>
-                  <a:lnTo>
-                    <a:pt x="966649" y="1144292"/>
-                  </a:lnTo>
-                  <a:lnTo>
-                    <a:pt x="1043281" y="1226363"/>
-                  </a:lnTo>
-                  <a:lnTo>
-                    <a:pt x="1119914" y="1305750"/>
-                  </a:lnTo>
-                  <a:lnTo>
-                    <a:pt x="1196546" y="1382539"/>
-                  </a:lnTo>
-                  <a:lnTo>
-                    <a:pt x="1273179" y="1456815"/>
-                  </a:lnTo>
-                  <a:lnTo>
-                    <a:pt x="1349811" y="1528661"/>
-                  </a:lnTo>
-                  <a:lnTo>
-                    <a:pt x="1426444" y="1598157"/>
-                  </a:lnTo>
-                  <a:lnTo>
-                    <a:pt x="1503076" y="1665378"/>
-                  </a:lnTo>
-                  <a:lnTo>
-                    <a:pt x="1579709" y="1730400"/>
-                  </a:lnTo>
-                  <a:lnTo>
-                    <a:pt x="1656342" y="1793295"/>
-                  </a:lnTo>
-                  <a:lnTo>
-                    <a:pt x="1732974" y="1854132"/>
-                  </a:lnTo>
-                  <a:lnTo>
-                    <a:pt x="1809607" y="1912978"/>
-                  </a:lnTo>
-                  <a:lnTo>
-                    <a:pt x="1886239" y="1969898"/>
-                  </a:lnTo>
-                  <a:lnTo>
-                    <a:pt x="1962872" y="2024957"/>
-                  </a:lnTo>
-                  <a:lnTo>
-                    <a:pt x="2039504" y="2078214"/>
-                  </a:lnTo>
-                  <a:lnTo>
-                    <a:pt x="2116137" y="2129728"/>
-                  </a:lnTo>
-                  <a:lnTo>
-                    <a:pt x="2192769" y="2179557"/>
-                  </a:lnTo>
-                  <a:lnTo>
-                    <a:pt x="2269402" y="2227755"/>
-                  </a:lnTo>
-                  <a:lnTo>
-                    <a:pt x="2346034" y="2274377"/>
-                  </a:lnTo>
-                  <a:lnTo>
-                    <a:pt x="2422667" y="2319473"/>
-                  </a:lnTo>
-                  <a:lnTo>
-                    <a:pt x="2499300" y="2363093"/>
-                  </a:lnTo>
-                  <a:lnTo>
-                    <a:pt x="2575932" y="2405287"/>
-                  </a:lnTo>
-                  <a:lnTo>
-                    <a:pt x="2652565" y="2446099"/>
-                  </a:lnTo>
-                  <a:lnTo>
-                    <a:pt x="2729197" y="2485577"/>
-                  </a:lnTo>
-                  <a:lnTo>
-                    <a:pt x="2805830" y="2523762"/>
-                  </a:lnTo>
-                  <a:lnTo>
-                    <a:pt x="2882462" y="2560699"/>
-                  </a:lnTo>
-                  <a:lnTo>
-                    <a:pt x="2959095" y="2596426"/>
-                  </a:lnTo>
-                  <a:lnTo>
-                    <a:pt x="3035727" y="2630985"/>
-                  </a:lnTo>
-                  <a:lnTo>
-                    <a:pt x="3112360" y="2664413"/>
-                  </a:lnTo>
-                  <a:lnTo>
-                    <a:pt x="3188993" y="2696747"/>
-                  </a:lnTo>
-                  <a:lnTo>
-                    <a:pt x="3265625" y="2728024"/>
-                  </a:lnTo>
-                  <a:lnTo>
-                    <a:pt x="3342258" y="2758277"/>
-                  </a:lnTo>
-                  <a:lnTo>
-                    <a:pt x="3418890" y="2782583"/>
-                  </a:lnTo>
-                  <a:lnTo>
-                    <a:pt x="3495523" y="2780162"/>
-                  </a:lnTo>
-                  <a:lnTo>
-                    <a:pt x="3572155" y="2777734"/>
-                  </a:lnTo>
-                  <a:lnTo>
-                    <a:pt x="3648788" y="2775299"/>
-                  </a:lnTo>
-                  <a:lnTo>
-                    <a:pt x="3725420" y="2772858"/>
-                  </a:lnTo>
-                  <a:lnTo>
-                    <a:pt x="3802053" y="2770409"/>
-                  </a:lnTo>
-                  <a:lnTo>
-                    <a:pt x="3878685" y="2767954"/>
-                  </a:lnTo>
-                  <a:lnTo>
-                    <a:pt x="3955318" y="2765492"/>
-                  </a:lnTo>
-                  <a:lnTo>
-                    <a:pt x="4031951" y="2763023"/>
-                  </a:lnTo>
-                  <a:lnTo>
-                    <a:pt x="4108583" y="2760548"/>
-                  </a:lnTo>
-                  <a:lnTo>
-                    <a:pt x="4185216" y="2758065"/>
-                  </a:lnTo>
-                  <a:lnTo>
-                    <a:pt x="4261848" y="2755576"/>
-                  </a:lnTo>
-                  <a:lnTo>
-                    <a:pt x="4338481" y="2753079"/>
-                  </a:lnTo>
-                  <a:lnTo>
-                    <a:pt x="4415113" y="2750576"/>
-                  </a:lnTo>
-                  <a:lnTo>
-                    <a:pt x="4491746" y="2748065"/>
-                  </a:lnTo>
-                  <a:lnTo>
-                    <a:pt x="4568378" y="2745548"/>
-                  </a:lnTo>
-                  <a:lnTo>
-                    <a:pt x="4645011" y="2743024"/>
-                  </a:lnTo>
-                  <a:lnTo>
-                    <a:pt x="4721644" y="2740492"/>
-                  </a:lnTo>
-                  <a:lnTo>
-                    <a:pt x="4798276" y="2737954"/>
-                  </a:lnTo>
-                  <a:lnTo>
-                    <a:pt x="4874909" y="2735409"/>
-                  </a:lnTo>
-                  <a:lnTo>
-                    <a:pt x="4951541" y="2732856"/>
-                  </a:lnTo>
-                  <a:lnTo>
-                    <a:pt x="5028174" y="2730296"/>
-                  </a:lnTo>
-                  <a:lnTo>
-                    <a:pt x="5104806" y="2727730"/>
-                  </a:lnTo>
-                  <a:lnTo>
-                    <a:pt x="5181439" y="2725156"/>
-                  </a:lnTo>
-                  <a:lnTo>
-                    <a:pt x="5258071" y="2722575"/>
-                  </a:lnTo>
-                  <a:lnTo>
-                    <a:pt x="5334704" y="2719986"/>
-                  </a:lnTo>
-                  <a:lnTo>
-                    <a:pt x="5411336" y="2717391"/>
-                  </a:lnTo>
-                  <a:lnTo>
-                    <a:pt x="5487969" y="2714788"/>
-                  </a:lnTo>
-                  <a:lnTo>
-                    <a:pt x="5564602" y="2712178"/>
-                  </a:lnTo>
-                  <a:lnTo>
-                    <a:pt x="5641234" y="2709561"/>
-                  </a:lnTo>
-                  <a:lnTo>
-                    <a:pt x="5717867" y="2706937"/>
-                  </a:lnTo>
-                  <a:lnTo>
-                    <a:pt x="5794499" y="2704305"/>
-                  </a:lnTo>
-                  <a:lnTo>
-                    <a:pt x="5871132" y="2701666"/>
-                  </a:lnTo>
-                  <a:lnTo>
-                    <a:pt x="5947764" y="2699019"/>
-                  </a:lnTo>
-                  <a:lnTo>
-                    <a:pt x="6024397" y="2696366"/>
-                  </a:lnTo>
-                  <a:lnTo>
-                    <a:pt x="6101029" y="2693704"/>
-                  </a:lnTo>
-                  <a:lnTo>
-                    <a:pt x="6177662" y="2691036"/>
-                  </a:lnTo>
-                  <a:lnTo>
-                    <a:pt x="6254294" y="2688360"/>
-                  </a:lnTo>
-                  <a:lnTo>
-                    <a:pt x="6330927" y="2685676"/>
-                  </a:lnTo>
-                  <a:lnTo>
-                    <a:pt x="6407560" y="2682985"/>
-                  </a:lnTo>
-                  <a:lnTo>
-                    <a:pt x="6484192" y="2680287"/>
-                  </a:lnTo>
-                  <a:lnTo>
-                    <a:pt x="6560825" y="2677581"/>
-                  </a:lnTo>
-                  <a:lnTo>
-                    <a:pt x="6637457" y="2674868"/>
-                  </a:lnTo>
-                  <a:lnTo>
-                    <a:pt x="6714090" y="2672147"/>
-                  </a:lnTo>
-                  <a:lnTo>
-                    <a:pt x="6790722" y="2669418"/>
-                  </a:lnTo>
-                  <a:lnTo>
-                    <a:pt x="6867355" y="2666682"/>
-                  </a:lnTo>
-                  <a:lnTo>
-                    <a:pt x="6943987" y="2663938"/>
-                  </a:lnTo>
-                  <a:lnTo>
-                    <a:pt x="7020620" y="2661187"/>
-                  </a:lnTo>
-                  <a:lnTo>
-                    <a:pt x="7097253" y="2658427"/>
-                  </a:lnTo>
-                  <a:lnTo>
-                    <a:pt x="7173885" y="2655661"/>
-                  </a:lnTo>
-                  <a:lnTo>
-                    <a:pt x="7250518" y="2652886"/>
-                  </a:lnTo>
-                  <a:lnTo>
-                    <a:pt x="7327150" y="2650104"/>
-                  </a:lnTo>
-                  <a:lnTo>
-                    <a:pt x="7403783" y="2647314"/>
-                  </a:lnTo>
-                  <a:lnTo>
-                    <a:pt x="7403783" y="3499253"/>
-                  </a:lnTo>
-                  <a:lnTo>
-                    <a:pt x="7327150" y="3494065"/>
-                  </a:lnTo>
-                  <a:lnTo>
-                    <a:pt x="7250518" y="3488700"/>
-                  </a:lnTo>
-                  <a:lnTo>
-                    <a:pt x="7173885" y="3483155"/>
-                  </a:lnTo>
-                  <a:lnTo>
-                    <a:pt x="7097253" y="3477422"/>
-                  </a:lnTo>
-                  <a:lnTo>
-                    <a:pt x="7020620" y="3471495"/>
-                  </a:lnTo>
-                  <a:lnTo>
-                    <a:pt x="6943987" y="3465367"/>
-                  </a:lnTo>
-                  <a:lnTo>
-                    <a:pt x="6867355" y="3459032"/>
-                  </a:lnTo>
-                  <a:lnTo>
-                    <a:pt x="6790722" y="3452483"/>
-                  </a:lnTo>
-                  <a:lnTo>
-                    <a:pt x="6714090" y="3445713"/>
-                  </a:lnTo>
-                  <a:lnTo>
-                    <a:pt x="6637457" y="3438713"/>
-                  </a:lnTo>
-                  <a:lnTo>
-                    <a:pt x="6560825" y="3431476"/>
-                  </a:lnTo>
-                  <a:lnTo>
-                    <a:pt x="6484192" y="3423995"/>
-                  </a:lnTo>
-                  <a:lnTo>
-                    <a:pt x="6407560" y="3416261"/>
-                  </a:lnTo>
-                  <a:lnTo>
-                    <a:pt x="6330927" y="3408265"/>
-                  </a:lnTo>
-                  <a:lnTo>
-                    <a:pt x="6254294" y="3399999"/>
-                  </a:lnTo>
-                  <a:lnTo>
-                    <a:pt x="6177662" y="3391453"/>
-                  </a:lnTo>
-                  <a:lnTo>
-                    <a:pt x="6101029" y="3382618"/>
-                  </a:lnTo>
-                  <a:lnTo>
-                    <a:pt x="6024397" y="3373484"/>
-                  </a:lnTo>
-                  <a:lnTo>
-                    <a:pt x="5947764" y="3364041"/>
-                  </a:lnTo>
-                  <a:lnTo>
-                    <a:pt x="5871132" y="3354278"/>
-                  </a:lnTo>
-                  <a:lnTo>
-                    <a:pt x="5794499" y="3344186"/>
-                  </a:lnTo>
-                  <a:lnTo>
-                    <a:pt x="5717867" y="3333752"/>
-                  </a:lnTo>
-                  <a:lnTo>
-                    <a:pt x="5641234" y="3322965"/>
-                  </a:lnTo>
-                  <a:lnTo>
-                    <a:pt x="5564602" y="3311813"/>
-                  </a:lnTo>
-                  <a:lnTo>
-                    <a:pt x="5487969" y="3300284"/>
-                  </a:lnTo>
-                  <a:lnTo>
-                    <a:pt x="5411336" y="3288365"/>
-                  </a:lnTo>
-                  <a:lnTo>
-                    <a:pt x="5334704" y="3276043"/>
-                  </a:lnTo>
-                  <a:lnTo>
-                    <a:pt x="5258071" y="3263304"/>
-                  </a:lnTo>
-                  <a:lnTo>
-                    <a:pt x="5181439" y="3250135"/>
-                  </a:lnTo>
-                  <a:lnTo>
-                    <a:pt x="5104806" y="3236519"/>
-                  </a:lnTo>
-                  <a:lnTo>
-                    <a:pt x="5028174" y="3222443"/>
-                  </a:lnTo>
-                  <a:lnTo>
-                    <a:pt x="4951541" y="3207891"/>
-                  </a:lnTo>
-                  <a:lnTo>
-                    <a:pt x="4874909" y="3192847"/>
-                  </a:lnTo>
-                  <a:lnTo>
-                    <a:pt x="4798276" y="3177294"/>
-                  </a:lnTo>
-                  <a:lnTo>
-                    <a:pt x="4721644" y="3161215"/>
-                  </a:lnTo>
-                  <a:lnTo>
-                    <a:pt x="4645011" y="3144592"/>
-                  </a:lnTo>
-                  <a:lnTo>
-                    <a:pt x="4568378" y="3127406"/>
-                  </a:lnTo>
-                  <a:lnTo>
-                    <a:pt x="4491746" y="3109640"/>
-                  </a:lnTo>
-                  <a:lnTo>
-                    <a:pt x="4415113" y="3091272"/>
-                  </a:lnTo>
-                  <a:lnTo>
-                    <a:pt x="4338481" y="3072283"/>
-                  </a:lnTo>
-                  <a:lnTo>
-                    <a:pt x="4261848" y="3052651"/>
-                  </a:lnTo>
-                  <a:lnTo>
-                    <a:pt x="4185216" y="3032356"/>
-                  </a:lnTo>
-                  <a:lnTo>
-                    <a:pt x="4108583" y="3011374"/>
-                  </a:lnTo>
-                  <a:lnTo>
-                    <a:pt x="4031951" y="2989682"/>
-                  </a:lnTo>
-                  <a:lnTo>
-                    <a:pt x="3955318" y="2967257"/>
-                  </a:lnTo>
-                  <a:lnTo>
-                    <a:pt x="3878685" y="2944073"/>
-                  </a:lnTo>
-                  <a:lnTo>
-                    <a:pt x="3802053" y="2920105"/>
-                  </a:lnTo>
-                  <a:lnTo>
-                    <a:pt x="3725420" y="2895326"/>
-                  </a:lnTo>
-                  <a:lnTo>
-                    <a:pt x="3648788" y="2869709"/>
-                  </a:lnTo>
-                  <a:lnTo>
-                    <a:pt x="3572155" y="2843225"/>
-                  </a:lnTo>
-                  <a:lnTo>
-                    <a:pt x="3495523" y="2815846"/>
-                  </a:lnTo>
-                  <a:lnTo>
-                    <a:pt x="3418890" y="2787540"/>
-                  </a:lnTo>
-                  <a:lnTo>
-                    <a:pt x="3342258" y="2784998"/>
-                  </a:lnTo>
-                  <a:lnTo>
-                    <a:pt x="3265625" y="2787405"/>
-                  </a:lnTo>
-                  <a:lnTo>
-                    <a:pt x="3188993" y="2789807"/>
-                  </a:lnTo>
-                  <a:lnTo>
-                    <a:pt x="3112360" y="2792201"/>
-                  </a:lnTo>
-                  <a:lnTo>
-                    <a:pt x="3035727" y="2794589"/>
-                  </a:lnTo>
-                  <a:lnTo>
-                    <a:pt x="2959095" y="2796970"/>
-                  </a:lnTo>
-                  <a:lnTo>
-                    <a:pt x="2882462" y="2799345"/>
-                  </a:lnTo>
-                  <a:lnTo>
-                    <a:pt x="2805830" y="2801713"/>
-                  </a:lnTo>
-                  <a:lnTo>
-                    <a:pt x="2729197" y="2804074"/>
-                  </a:lnTo>
-                  <a:lnTo>
-                    <a:pt x="2652565" y="2806429"/>
-                  </a:lnTo>
-                  <a:lnTo>
-                    <a:pt x="2575932" y="2808777"/>
-                  </a:lnTo>
-                  <a:lnTo>
-                    <a:pt x="2499300" y="2811119"/>
-                  </a:lnTo>
-                  <a:lnTo>
-                    <a:pt x="2422667" y="2813455"/>
-                  </a:lnTo>
-                  <a:lnTo>
-                    <a:pt x="2346034" y="2815784"/>
-                  </a:lnTo>
-                  <a:lnTo>
-                    <a:pt x="2269402" y="2818106"/>
-                  </a:lnTo>
-                  <a:lnTo>
-                    <a:pt x="2192769" y="2820422"/>
-                  </a:lnTo>
-                  <a:lnTo>
-                    <a:pt x="2116137" y="2822731"/>
-                  </a:lnTo>
-                  <a:lnTo>
-                    <a:pt x="2039504" y="2825035"/>
-                  </a:lnTo>
-                  <a:lnTo>
-                    <a:pt x="1962872" y="2827331"/>
-                  </a:lnTo>
-                  <a:lnTo>
-                    <a:pt x="1886239" y="2829622"/>
-                  </a:lnTo>
-                  <a:lnTo>
-                    <a:pt x="1809607" y="2831906"/>
-                  </a:lnTo>
-                  <a:lnTo>
-                    <a:pt x="1732974" y="2834183"/>
-                  </a:lnTo>
-                  <a:lnTo>
-                    <a:pt x="1656342" y="2836455"/>
-                  </a:lnTo>
-                  <a:lnTo>
-                    <a:pt x="1579709" y="2838720"/>
-                  </a:lnTo>
-                  <a:lnTo>
-                    <a:pt x="1503076" y="2840978"/>
-                  </a:lnTo>
-                  <a:lnTo>
-                    <a:pt x="1426444" y="2843231"/>
-                  </a:lnTo>
-                  <a:lnTo>
-                    <a:pt x="1349811" y="2845477"/>
-                  </a:lnTo>
-                  <a:lnTo>
-                    <a:pt x="1273179" y="2847717"/>
-                  </a:lnTo>
-                  <a:lnTo>
-                    <a:pt x="1196546" y="2849951"/>
-                  </a:lnTo>
-                  <a:lnTo>
-                    <a:pt x="1119914" y="2852178"/>
-                  </a:lnTo>
-                  <a:lnTo>
-                    <a:pt x="1043281" y="2854400"/>
-                  </a:lnTo>
-                  <a:lnTo>
-                    <a:pt x="966649" y="2856615"/>
-                  </a:lnTo>
-                  <a:lnTo>
-                    <a:pt x="890016" y="2858824"/>
-                  </a:lnTo>
-                  <a:lnTo>
-                    <a:pt x="813384" y="2861027"/>
-                  </a:lnTo>
-                  <a:lnTo>
-                    <a:pt x="736751" y="2863224"/>
-                  </a:lnTo>
-                  <a:lnTo>
-                    <a:pt x="660118" y="2865415"/>
-                  </a:lnTo>
-                  <a:lnTo>
-                    <a:pt x="583486" y="2867599"/>
-                  </a:lnTo>
-                  <a:lnTo>
-                    <a:pt x="506853" y="2869778"/>
-                  </a:lnTo>
-                  <a:lnTo>
-                    <a:pt x="430221" y="2871951"/>
-                  </a:lnTo>
-                  <a:lnTo>
-                    <a:pt x="353588" y="2874117"/>
-                  </a:lnTo>
-                  <a:lnTo>
-                    <a:pt x="276956" y="2876278"/>
-                  </a:lnTo>
-                  <a:lnTo>
-                    <a:pt x="200323" y="2878432"/>
-                  </a:lnTo>
-                  <a:lnTo>
-                    <a:pt x="123691" y="2880581"/>
-                  </a:lnTo>
-                  <a:lnTo>
-                    <a:pt x="47058" y="2882723"/>
-                  </a:lnTo>
-                  <a:lnTo>
-                    <a:pt x="0" y="2884035"/>
+                    <a:pt x="123691" y="34293"/>
+                  </a:lnTo>
+                  <a:lnTo>
+                    <a:pt x="200323" y="147157"/>
+                  </a:lnTo>
+                  <a:lnTo>
+                    <a:pt x="276956" y="256328"/>
+                  </a:lnTo>
+                  <a:lnTo>
+                    <a:pt x="353588" y="361927"/>
+                  </a:lnTo>
+                  <a:lnTo>
+                    <a:pt x="430221" y="464071"/>
+                  </a:lnTo>
+                  <a:lnTo>
+                    <a:pt x="506853" y="562873"/>
+                  </a:lnTo>
+                  <a:lnTo>
+                    <a:pt x="583486" y="658442"/>
+                  </a:lnTo>
+                  <a:lnTo>
+                    <a:pt x="660118" y="750884"/>
+                  </a:lnTo>
+                  <a:lnTo>
+                    <a:pt x="736751" y="840302"/>
+                  </a:lnTo>
+                  <a:lnTo>
+                    <a:pt x="813384" y="926794"/>
+                  </a:lnTo>
+                  <a:lnTo>
+                    <a:pt x="890016" y="1010456"/>
+                  </a:lnTo>
+                  <a:lnTo>
+                    <a:pt x="966649" y="1091380"/>
+                  </a:lnTo>
+                  <a:lnTo>
+                    <a:pt x="1043281" y="1169657"/>
+                  </a:lnTo>
+                  <a:lnTo>
+                    <a:pt x="1119914" y="1245372"/>
+                  </a:lnTo>
+                  <a:lnTo>
+                    <a:pt x="1196546" y="1318611"/>
+                  </a:lnTo>
+                  <a:lnTo>
+                    <a:pt x="1273179" y="1389453"/>
+                  </a:lnTo>
+                  <a:lnTo>
+                    <a:pt x="1349811" y="1457976"/>
+                  </a:lnTo>
+                  <a:lnTo>
+                    <a:pt x="1426444" y="1524258"/>
+                  </a:lnTo>
+                  <a:lnTo>
+                    <a:pt x="1503076" y="1588372"/>
+                  </a:lnTo>
+                  <a:lnTo>
+                    <a:pt x="1579709" y="1650387"/>
+                  </a:lnTo>
+                  <a:lnTo>
+                    <a:pt x="1656342" y="1710374"/>
+                  </a:lnTo>
+                  <a:lnTo>
+                    <a:pt x="1732974" y="1768397"/>
+                  </a:lnTo>
+                  <a:lnTo>
+                    <a:pt x="1809607" y="1824522"/>
+                  </a:lnTo>
+                  <a:lnTo>
+                    <a:pt x="1886239" y="1878811"/>
+                  </a:lnTo>
+                  <a:lnTo>
+                    <a:pt x="1962872" y="1931324"/>
+                  </a:lnTo>
+                  <a:lnTo>
+                    <a:pt x="2039504" y="1982118"/>
+                  </a:lnTo>
+                  <a:lnTo>
+                    <a:pt x="2116137" y="2031250"/>
+                  </a:lnTo>
+                  <a:lnTo>
+                    <a:pt x="2192769" y="2078775"/>
+                  </a:lnTo>
+                  <a:lnTo>
+                    <a:pt x="2269402" y="2124745"/>
+                  </a:lnTo>
+                  <a:lnTo>
+                    <a:pt x="2346034" y="2169210"/>
+                  </a:lnTo>
+                  <a:lnTo>
+                    <a:pt x="2422667" y="2212221"/>
+                  </a:lnTo>
+                  <a:lnTo>
+                    <a:pt x="2499300" y="2253825"/>
+                  </a:lnTo>
+                  <a:lnTo>
+                    <a:pt x="2575932" y="2294067"/>
+                  </a:lnTo>
+                  <a:lnTo>
+                    <a:pt x="2652565" y="2332993"/>
+                  </a:lnTo>
+                  <a:lnTo>
+                    <a:pt x="2729197" y="2370645"/>
+                  </a:lnTo>
+                  <a:lnTo>
+                    <a:pt x="2805830" y="2407065"/>
+                  </a:lnTo>
+                  <a:lnTo>
+                    <a:pt x="2882462" y="2442293"/>
+                  </a:lnTo>
+                  <a:lnTo>
+                    <a:pt x="2959095" y="2476369"/>
+                  </a:lnTo>
+                  <a:lnTo>
+                    <a:pt x="3035727" y="2509329"/>
+                  </a:lnTo>
+                  <a:lnTo>
+                    <a:pt x="3112360" y="2541212"/>
+                  </a:lnTo>
+                  <a:lnTo>
+                    <a:pt x="3188993" y="2572051"/>
+                  </a:lnTo>
+                  <a:lnTo>
+                    <a:pt x="3265625" y="2601881"/>
+                  </a:lnTo>
+                  <a:lnTo>
+                    <a:pt x="3342258" y="2630735"/>
+                  </a:lnTo>
+                  <a:lnTo>
+                    <a:pt x="3418890" y="2653917"/>
+                  </a:lnTo>
+                  <a:lnTo>
+                    <a:pt x="3495523" y="2651608"/>
+                  </a:lnTo>
+                  <a:lnTo>
+                    <a:pt x="3572155" y="2649292"/>
+                  </a:lnTo>
+                  <a:lnTo>
+                    <a:pt x="3648788" y="2646970"/>
+                  </a:lnTo>
+                  <a:lnTo>
+                    <a:pt x="3725420" y="2644642"/>
+                  </a:lnTo>
+                  <a:lnTo>
+                    <a:pt x="3802053" y="2642306"/>
+                  </a:lnTo>
+                  <a:lnTo>
+                    <a:pt x="3878685" y="2639965"/>
+                  </a:lnTo>
+                  <a:lnTo>
+                    <a:pt x="3955318" y="2637617"/>
+                  </a:lnTo>
+                  <a:lnTo>
+                    <a:pt x="4031951" y="2635262"/>
+                  </a:lnTo>
+                  <a:lnTo>
+                    <a:pt x="4108583" y="2632901"/>
+                  </a:lnTo>
+                  <a:lnTo>
+                    <a:pt x="4185216" y="2630533"/>
+                  </a:lnTo>
+                  <a:lnTo>
+                    <a:pt x="4261848" y="2628159"/>
+                  </a:lnTo>
+                  <a:lnTo>
+                    <a:pt x="4338481" y="2625778"/>
+                  </a:lnTo>
+                  <a:lnTo>
+                    <a:pt x="4415113" y="2623390"/>
+                  </a:lnTo>
+                  <a:lnTo>
+                    <a:pt x="4491746" y="2620996"/>
+                  </a:lnTo>
+                  <a:lnTo>
+                    <a:pt x="4568378" y="2618595"/>
+                  </a:lnTo>
+                  <a:lnTo>
+                    <a:pt x="4645011" y="2616187"/>
+                  </a:lnTo>
+                  <a:lnTo>
+                    <a:pt x="4721644" y="2613773"/>
+                  </a:lnTo>
+                  <a:lnTo>
+                    <a:pt x="4798276" y="2611352"/>
+                  </a:lnTo>
+                  <a:lnTo>
+                    <a:pt x="4874909" y="2608924"/>
+                  </a:lnTo>
+                  <a:lnTo>
+                    <a:pt x="4951541" y="2606490"/>
+                  </a:lnTo>
+                  <a:lnTo>
+                    <a:pt x="5028174" y="2604048"/>
+                  </a:lnTo>
+                  <a:lnTo>
+                    <a:pt x="5104806" y="2601600"/>
+                  </a:lnTo>
+                  <a:lnTo>
+                    <a:pt x="5181439" y="2599146"/>
+                  </a:lnTo>
+                  <a:lnTo>
+                    <a:pt x="5258071" y="2596684"/>
+                  </a:lnTo>
+                  <a:lnTo>
+                    <a:pt x="5334704" y="2594215"/>
+                  </a:lnTo>
+                  <a:lnTo>
+                    <a:pt x="5411336" y="2591740"/>
+                  </a:lnTo>
+                  <a:lnTo>
+                    <a:pt x="5487969" y="2589257"/>
+                  </a:lnTo>
+                  <a:lnTo>
+                    <a:pt x="5564602" y="2586768"/>
+                  </a:lnTo>
+                  <a:lnTo>
+                    <a:pt x="5641234" y="2584272"/>
+                  </a:lnTo>
+                  <a:lnTo>
+                    <a:pt x="5717867" y="2581769"/>
+                  </a:lnTo>
+                  <a:lnTo>
+                    <a:pt x="5794499" y="2579259"/>
+                  </a:lnTo>
+                  <a:lnTo>
+                    <a:pt x="5871132" y="2576742"/>
+                  </a:lnTo>
+                  <a:lnTo>
+                    <a:pt x="5947764" y="2574218"/>
+                  </a:lnTo>
+                  <a:lnTo>
+                    <a:pt x="6024397" y="2571687"/>
+                  </a:lnTo>
+                  <a:lnTo>
+                    <a:pt x="6101029" y="2569149"/>
+                  </a:lnTo>
+                  <a:lnTo>
+                    <a:pt x="6177662" y="2566603"/>
+                  </a:lnTo>
+                  <a:lnTo>
+                    <a:pt x="6254294" y="2564051"/>
+                  </a:lnTo>
+                  <a:lnTo>
+                    <a:pt x="6330927" y="2561492"/>
+                  </a:lnTo>
+                  <a:lnTo>
+                    <a:pt x="6407560" y="2558925"/>
+                  </a:lnTo>
+                  <a:lnTo>
+                    <a:pt x="6484192" y="2556351"/>
+                  </a:lnTo>
+                  <a:lnTo>
+                    <a:pt x="6560825" y="2553771"/>
+                  </a:lnTo>
+                  <a:lnTo>
+                    <a:pt x="6637457" y="2551183"/>
+                  </a:lnTo>
+                  <a:lnTo>
+                    <a:pt x="6714090" y="2548587"/>
+                  </a:lnTo>
+                  <a:lnTo>
+                    <a:pt x="6790722" y="2545985"/>
+                  </a:lnTo>
+                  <a:lnTo>
+                    <a:pt x="6867355" y="2543375"/>
+                  </a:lnTo>
+                  <a:lnTo>
+                    <a:pt x="6943987" y="2540758"/>
+                  </a:lnTo>
+                  <a:lnTo>
+                    <a:pt x="7020620" y="2538134"/>
+                  </a:lnTo>
+                  <a:lnTo>
+                    <a:pt x="7097253" y="2535503"/>
+                  </a:lnTo>
+                  <a:lnTo>
+                    <a:pt x="7173885" y="2532864"/>
+                  </a:lnTo>
+                  <a:lnTo>
+                    <a:pt x="7250518" y="2530218"/>
+                  </a:lnTo>
+                  <a:lnTo>
+                    <a:pt x="7327150" y="2527564"/>
+                  </a:lnTo>
+                  <a:lnTo>
+                    <a:pt x="7403783" y="2524903"/>
+                  </a:lnTo>
+                  <a:lnTo>
+                    <a:pt x="7403783" y="3337449"/>
+                  </a:lnTo>
+                  <a:lnTo>
+                    <a:pt x="7327150" y="3332500"/>
+                  </a:lnTo>
+                  <a:lnTo>
+                    <a:pt x="7250518" y="3327384"/>
+                  </a:lnTo>
+                  <a:lnTo>
+                    <a:pt x="7173885" y="3322095"/>
+                  </a:lnTo>
+                  <a:lnTo>
+                    <a:pt x="7097253" y="3316627"/>
+                  </a:lnTo>
+                  <a:lnTo>
+                    <a:pt x="7020620" y="3310974"/>
+                  </a:lnTo>
+                  <a:lnTo>
+                    <a:pt x="6943987" y="3305130"/>
+                  </a:lnTo>
+                  <a:lnTo>
+                    <a:pt x="6867355" y="3299088"/>
+                  </a:lnTo>
+                  <a:lnTo>
+                    <a:pt x="6790722" y="3292842"/>
+                  </a:lnTo>
+                  <a:lnTo>
+                    <a:pt x="6714090" y="3286384"/>
+                  </a:lnTo>
+                  <a:lnTo>
+                    <a:pt x="6637457" y="3279708"/>
+                  </a:lnTo>
+                  <a:lnTo>
+                    <a:pt x="6560825" y="3272806"/>
+                  </a:lnTo>
+                  <a:lnTo>
+                    <a:pt x="6484192" y="3265671"/>
+                  </a:lnTo>
+                  <a:lnTo>
+                    <a:pt x="6407560" y="3258294"/>
+                  </a:lnTo>
+                  <a:lnTo>
+                    <a:pt x="6330927" y="3250668"/>
+                  </a:lnTo>
+                  <a:lnTo>
+                    <a:pt x="6254294" y="3242784"/>
+                  </a:lnTo>
+                  <a:lnTo>
+                    <a:pt x="6177662" y="3234633"/>
+                  </a:lnTo>
+                  <a:lnTo>
+                    <a:pt x="6101029" y="3226207"/>
+                  </a:lnTo>
+                  <a:lnTo>
+                    <a:pt x="6024397" y="3217495"/>
+                  </a:lnTo>
+                  <a:lnTo>
+                    <a:pt x="5947764" y="3208489"/>
+                  </a:lnTo>
+                  <a:lnTo>
+                    <a:pt x="5871132" y="3199178"/>
+                  </a:lnTo>
+                  <a:lnTo>
+                    <a:pt x="5794499" y="3189552"/>
+                  </a:lnTo>
+                  <a:lnTo>
+                    <a:pt x="5717867" y="3179601"/>
+                  </a:lnTo>
+                  <a:lnTo>
+                    <a:pt x="5641234" y="3169312"/>
+                  </a:lnTo>
+                  <a:lnTo>
+                    <a:pt x="5564602" y="3158676"/>
+                  </a:lnTo>
+                  <a:lnTo>
+                    <a:pt x="5487969" y="3147680"/>
+                  </a:lnTo>
+                  <a:lnTo>
+                    <a:pt x="5411336" y="3136313"/>
+                  </a:lnTo>
+                  <a:lnTo>
+                    <a:pt x="5334704" y="3124560"/>
+                  </a:lnTo>
+                  <a:lnTo>
+                    <a:pt x="5258071" y="3112410"/>
+                  </a:lnTo>
+                  <a:lnTo>
+                    <a:pt x="5181439" y="3099850"/>
+                  </a:lnTo>
+                  <a:lnTo>
+                    <a:pt x="5104806" y="3086864"/>
+                  </a:lnTo>
+                  <a:lnTo>
+                    <a:pt x="5028174" y="3073439"/>
+                  </a:lnTo>
+                  <a:lnTo>
+                    <a:pt x="4951541" y="3059560"/>
+                  </a:lnTo>
+                  <a:lnTo>
+                    <a:pt x="4874909" y="3045211"/>
+                  </a:lnTo>
+                  <a:lnTo>
+                    <a:pt x="4798276" y="3030377"/>
+                  </a:lnTo>
+                  <a:lnTo>
+                    <a:pt x="4721644" y="3015041"/>
+                  </a:lnTo>
+                  <a:lnTo>
+                    <a:pt x="4645011" y="2999187"/>
+                  </a:lnTo>
+                  <a:lnTo>
+                    <a:pt x="4568378" y="2982796"/>
+                  </a:lnTo>
+                  <a:lnTo>
+                    <a:pt x="4491746" y="2965851"/>
+                  </a:lnTo>
+                  <a:lnTo>
+                    <a:pt x="4415113" y="2948333"/>
+                  </a:lnTo>
+                  <a:lnTo>
+                    <a:pt x="4338481" y="2930222"/>
+                  </a:lnTo>
+                  <a:lnTo>
+                    <a:pt x="4261848" y="2911498"/>
+                  </a:lnTo>
+                  <a:lnTo>
+                    <a:pt x="4185216" y="2892141"/>
+                  </a:lnTo>
+                  <a:lnTo>
+                    <a:pt x="4108583" y="2872129"/>
+                  </a:lnTo>
+                  <a:lnTo>
+                    <a:pt x="4031951" y="2851441"/>
+                  </a:lnTo>
+                  <a:lnTo>
+                    <a:pt x="3955318" y="2830052"/>
+                  </a:lnTo>
+                  <a:lnTo>
+                    <a:pt x="3878685" y="2807940"/>
+                  </a:lnTo>
+                  <a:lnTo>
+                    <a:pt x="3802053" y="2785080"/>
+                  </a:lnTo>
+                  <a:lnTo>
+                    <a:pt x="3725420" y="2761447"/>
+                  </a:lnTo>
+                  <a:lnTo>
+                    <a:pt x="3648788" y="2737014"/>
+                  </a:lnTo>
+                  <a:lnTo>
+                    <a:pt x="3572155" y="2711755"/>
+                  </a:lnTo>
+                  <a:lnTo>
+                    <a:pt x="3495523" y="2685642"/>
+                  </a:lnTo>
+                  <a:lnTo>
+                    <a:pt x="3418890" y="2658645"/>
+                  </a:lnTo>
+                  <a:lnTo>
+                    <a:pt x="3342258" y="2656220"/>
+                  </a:lnTo>
+                  <a:lnTo>
+                    <a:pt x="3265625" y="2658517"/>
+                  </a:lnTo>
+                  <a:lnTo>
+                    <a:pt x="3188993" y="2660807"/>
+                  </a:lnTo>
+                  <a:lnTo>
+                    <a:pt x="3112360" y="2663091"/>
+                  </a:lnTo>
+                  <a:lnTo>
+                    <a:pt x="3035727" y="2665368"/>
+                  </a:lnTo>
+                  <a:lnTo>
+                    <a:pt x="2959095" y="2667639"/>
+                  </a:lnTo>
+                  <a:lnTo>
+                    <a:pt x="2882462" y="2669904"/>
+                  </a:lnTo>
+                  <a:lnTo>
+                    <a:pt x="2805830" y="2672163"/>
+                  </a:lnTo>
+                  <a:lnTo>
+                    <a:pt x="2729197" y="2674415"/>
+                  </a:lnTo>
+                  <a:lnTo>
+                    <a:pt x="2652565" y="2676661"/>
+                  </a:lnTo>
+                  <a:lnTo>
+                    <a:pt x="2575932" y="2678901"/>
+                  </a:lnTo>
+                  <a:lnTo>
+                    <a:pt x="2499300" y="2681134"/>
+                  </a:lnTo>
+                  <a:lnTo>
+                    <a:pt x="2422667" y="2683362"/>
+                  </a:lnTo>
+                  <a:lnTo>
+                    <a:pt x="2346034" y="2685583"/>
+                  </a:lnTo>
+                  <a:lnTo>
+                    <a:pt x="2269402" y="2687798"/>
+                  </a:lnTo>
+                  <a:lnTo>
+                    <a:pt x="2192769" y="2690007"/>
+                  </a:lnTo>
+                  <a:lnTo>
+                    <a:pt x="2116137" y="2692209"/>
+                  </a:lnTo>
+                  <a:lnTo>
+                    <a:pt x="2039504" y="2694406"/>
+                  </a:lnTo>
+                  <a:lnTo>
+                    <a:pt x="1962872" y="2696596"/>
+                  </a:lnTo>
+                  <a:lnTo>
+                    <a:pt x="1886239" y="2698781"/>
+                  </a:lnTo>
+                  <a:lnTo>
+                    <a:pt x="1809607" y="2700959"/>
+                  </a:lnTo>
+                  <a:lnTo>
+                    <a:pt x="1732974" y="2703132"/>
+                  </a:lnTo>
+                  <a:lnTo>
+                    <a:pt x="1656342" y="2705298"/>
+                  </a:lnTo>
+                  <a:lnTo>
+                    <a:pt x="1579709" y="2707458"/>
+                  </a:lnTo>
+                  <a:lnTo>
+                    <a:pt x="1503076" y="2709613"/>
+                  </a:lnTo>
+                  <a:lnTo>
+                    <a:pt x="1426444" y="2711761"/>
+                  </a:lnTo>
+                  <a:lnTo>
+                    <a:pt x="1349811" y="2713903"/>
+                  </a:lnTo>
+                  <a:lnTo>
+                    <a:pt x="1273179" y="2716040"/>
+                  </a:lnTo>
+                  <a:lnTo>
+                    <a:pt x="1196546" y="2718170"/>
+                  </a:lnTo>
+                  <a:lnTo>
+                    <a:pt x="1119914" y="2720295"/>
+                  </a:lnTo>
+                  <a:lnTo>
+                    <a:pt x="1043281" y="2722413"/>
+                  </a:lnTo>
+                  <a:lnTo>
+                    <a:pt x="966649" y="2724526"/>
+                  </a:lnTo>
+                  <a:lnTo>
+                    <a:pt x="890016" y="2726633"/>
+                  </a:lnTo>
+                  <a:lnTo>
+                    <a:pt x="813384" y="2728734"/>
+                  </a:lnTo>
+                  <a:lnTo>
+                    <a:pt x="736751" y="2730830"/>
+                  </a:lnTo>
+                  <a:lnTo>
+                    <a:pt x="660118" y="2732919"/>
+                  </a:lnTo>
+                  <a:lnTo>
+                    <a:pt x="583486" y="2735003"/>
+                  </a:lnTo>
+                  <a:lnTo>
+                    <a:pt x="506853" y="2737081"/>
+                  </a:lnTo>
+                  <a:lnTo>
+                    <a:pt x="430221" y="2739153"/>
+                  </a:lnTo>
+                  <a:lnTo>
+                    <a:pt x="353588" y="2741219"/>
+                  </a:lnTo>
+                  <a:lnTo>
+                    <a:pt x="276956" y="2743280"/>
+                  </a:lnTo>
+                  <a:lnTo>
+                    <a:pt x="200323" y="2745334"/>
+                  </a:lnTo>
+                  <a:lnTo>
+                    <a:pt x="123691" y="2747384"/>
+                  </a:lnTo>
+                  <a:lnTo>
+                    <a:pt x="47058" y="2749427"/>
+                  </a:lnTo>
+                  <a:lnTo>
+                    <a:pt x="0" y="2750679"/>
                   </a:lnTo>
                   <a:close/>
                 </a:path>
@@ -3618,303 +3618,303 @@
           </p:nvSpPr>
           <p:spPr>
             <a:xfrm>
-              <a:off x="918686" y="1896563"/>
-              <a:ext cx="7302614" cy="2782583"/>
+              <a:off x="918686" y="2073503"/>
+              <a:ext cx="7302614" cy="2653917"/>
             </a:xfrm>
             <a:custGeom>
               <a:avLst/>
               <a:pathLst>
-                <a:path w="7302614" h="2782583">
+                <a:path w="7302614" h="2653917">
                   <a:moveTo>
                     <a:pt x="0" y="0"/>
                   </a:moveTo>
                   <a:lnTo>
-                    <a:pt x="22522" y="35955"/>
-                  </a:lnTo>
-                  <a:lnTo>
-                    <a:pt x="99155" y="154291"/>
-                  </a:lnTo>
-                  <a:lnTo>
-                    <a:pt x="175787" y="268755"/>
-                  </a:lnTo>
-                  <a:lnTo>
-                    <a:pt x="252420" y="379474"/>
-                  </a:lnTo>
-                  <a:lnTo>
-                    <a:pt x="329052" y="486570"/>
-                  </a:lnTo>
-                  <a:lnTo>
-                    <a:pt x="405685" y="590162"/>
-                  </a:lnTo>
-                  <a:lnTo>
-                    <a:pt x="482317" y="690364"/>
-                  </a:lnTo>
-                  <a:lnTo>
-                    <a:pt x="558950" y="787288"/>
-                  </a:lnTo>
-                  <a:lnTo>
-                    <a:pt x="635583" y="881041"/>
-                  </a:lnTo>
-                  <a:lnTo>
-                    <a:pt x="712215" y="971726"/>
-                  </a:lnTo>
-                  <a:lnTo>
-                    <a:pt x="788848" y="1059444"/>
-                  </a:lnTo>
-                  <a:lnTo>
-                    <a:pt x="865480" y="1144292"/>
-                  </a:lnTo>
-                  <a:lnTo>
-                    <a:pt x="942113" y="1226363"/>
-                  </a:lnTo>
-                  <a:lnTo>
-                    <a:pt x="1018745" y="1305750"/>
-                  </a:lnTo>
-                  <a:lnTo>
-                    <a:pt x="1095378" y="1382539"/>
-                  </a:lnTo>
-                  <a:lnTo>
-                    <a:pt x="1172010" y="1456815"/>
-                  </a:lnTo>
-                  <a:lnTo>
-                    <a:pt x="1248643" y="1528661"/>
-                  </a:lnTo>
-                  <a:lnTo>
-                    <a:pt x="1325275" y="1598157"/>
-                  </a:lnTo>
-                  <a:lnTo>
-                    <a:pt x="1401908" y="1665378"/>
-                  </a:lnTo>
-                  <a:lnTo>
-                    <a:pt x="1478541" y="1730400"/>
-                  </a:lnTo>
-                  <a:lnTo>
-                    <a:pt x="1555173" y="1793295"/>
-                  </a:lnTo>
-                  <a:lnTo>
-                    <a:pt x="1631806" y="1854132"/>
-                  </a:lnTo>
-                  <a:lnTo>
-                    <a:pt x="1708438" y="1912978"/>
-                  </a:lnTo>
-                  <a:lnTo>
-                    <a:pt x="1785071" y="1969898"/>
-                  </a:lnTo>
-                  <a:lnTo>
-                    <a:pt x="1861703" y="2024957"/>
-                  </a:lnTo>
-                  <a:lnTo>
-                    <a:pt x="1938336" y="2078214"/>
-                  </a:lnTo>
-                  <a:lnTo>
-                    <a:pt x="2014968" y="2129728"/>
-                  </a:lnTo>
-                  <a:lnTo>
-                    <a:pt x="2091601" y="2179557"/>
-                  </a:lnTo>
-                  <a:lnTo>
-                    <a:pt x="2168234" y="2227755"/>
-                  </a:lnTo>
-                  <a:lnTo>
-                    <a:pt x="2244866" y="2274377"/>
-                  </a:lnTo>
-                  <a:lnTo>
-                    <a:pt x="2321499" y="2319473"/>
-                  </a:lnTo>
-                  <a:lnTo>
-                    <a:pt x="2398131" y="2363093"/>
-                  </a:lnTo>
-                  <a:lnTo>
-                    <a:pt x="2474764" y="2405287"/>
-                  </a:lnTo>
-                  <a:lnTo>
-                    <a:pt x="2551396" y="2446099"/>
-                  </a:lnTo>
-                  <a:lnTo>
-                    <a:pt x="2628029" y="2485577"/>
-                  </a:lnTo>
-                  <a:lnTo>
-                    <a:pt x="2704661" y="2523762"/>
-                  </a:lnTo>
-                  <a:lnTo>
-                    <a:pt x="2781294" y="2560699"/>
-                  </a:lnTo>
-                  <a:lnTo>
-                    <a:pt x="2857926" y="2596426"/>
-                  </a:lnTo>
-                  <a:lnTo>
-                    <a:pt x="2934559" y="2630985"/>
-                  </a:lnTo>
-                  <a:lnTo>
-                    <a:pt x="3011192" y="2664413"/>
-                  </a:lnTo>
-                  <a:lnTo>
-                    <a:pt x="3087824" y="2696747"/>
-                  </a:lnTo>
-                  <a:lnTo>
-                    <a:pt x="3164457" y="2728024"/>
-                  </a:lnTo>
-                  <a:lnTo>
-                    <a:pt x="3241089" y="2758277"/>
-                  </a:lnTo>
-                  <a:lnTo>
-                    <a:pt x="3317722" y="2782583"/>
-                  </a:lnTo>
-                  <a:lnTo>
-                    <a:pt x="3394354" y="2780162"/>
-                  </a:lnTo>
-                  <a:lnTo>
-                    <a:pt x="3470987" y="2777734"/>
-                  </a:lnTo>
-                  <a:lnTo>
-                    <a:pt x="3547619" y="2775299"/>
-                  </a:lnTo>
-                  <a:lnTo>
-                    <a:pt x="3624252" y="2772858"/>
-                  </a:lnTo>
-                  <a:lnTo>
-                    <a:pt x="3700885" y="2770409"/>
-                  </a:lnTo>
-                  <a:lnTo>
-                    <a:pt x="3777517" y="2767954"/>
-                  </a:lnTo>
-                  <a:lnTo>
-                    <a:pt x="3854150" y="2765492"/>
-                  </a:lnTo>
-                  <a:lnTo>
-                    <a:pt x="3930782" y="2763023"/>
-                  </a:lnTo>
-                  <a:lnTo>
-                    <a:pt x="4007415" y="2760548"/>
-                  </a:lnTo>
-                  <a:lnTo>
-                    <a:pt x="4084047" y="2758065"/>
-                  </a:lnTo>
-                  <a:lnTo>
-                    <a:pt x="4160680" y="2755576"/>
-                  </a:lnTo>
-                  <a:lnTo>
-                    <a:pt x="4237312" y="2753079"/>
-                  </a:lnTo>
-                  <a:lnTo>
-                    <a:pt x="4313945" y="2750576"/>
-                  </a:lnTo>
-                  <a:lnTo>
-                    <a:pt x="4390577" y="2748065"/>
-                  </a:lnTo>
-                  <a:lnTo>
-                    <a:pt x="4467210" y="2745548"/>
-                  </a:lnTo>
-                  <a:lnTo>
-                    <a:pt x="4543843" y="2743024"/>
-                  </a:lnTo>
-                  <a:lnTo>
-                    <a:pt x="4620475" y="2740492"/>
-                  </a:lnTo>
-                  <a:lnTo>
-                    <a:pt x="4697108" y="2737954"/>
-                  </a:lnTo>
-                  <a:lnTo>
-                    <a:pt x="4773740" y="2735409"/>
-                  </a:lnTo>
-                  <a:lnTo>
-                    <a:pt x="4850373" y="2732856"/>
-                  </a:lnTo>
-                  <a:lnTo>
-                    <a:pt x="4927005" y="2730296"/>
-                  </a:lnTo>
-                  <a:lnTo>
-                    <a:pt x="5003638" y="2727730"/>
-                  </a:lnTo>
-                  <a:lnTo>
-                    <a:pt x="5080270" y="2725156"/>
-                  </a:lnTo>
-                  <a:lnTo>
-                    <a:pt x="5156903" y="2722575"/>
-                  </a:lnTo>
-                  <a:lnTo>
-                    <a:pt x="5233535" y="2719986"/>
-                  </a:lnTo>
-                  <a:lnTo>
-                    <a:pt x="5310168" y="2717391"/>
-                  </a:lnTo>
-                  <a:lnTo>
-                    <a:pt x="5386801" y="2714788"/>
-                  </a:lnTo>
-                  <a:lnTo>
-                    <a:pt x="5463433" y="2712178"/>
-                  </a:lnTo>
-                  <a:lnTo>
-                    <a:pt x="5540066" y="2709561"/>
-                  </a:lnTo>
-                  <a:lnTo>
-                    <a:pt x="5616698" y="2706937"/>
-                  </a:lnTo>
-                  <a:lnTo>
-                    <a:pt x="5693331" y="2704305"/>
-                  </a:lnTo>
-                  <a:lnTo>
-                    <a:pt x="5769963" y="2701666"/>
-                  </a:lnTo>
-                  <a:lnTo>
-                    <a:pt x="5846596" y="2699019"/>
-                  </a:lnTo>
-                  <a:lnTo>
-                    <a:pt x="5923228" y="2696366"/>
-                  </a:lnTo>
-                  <a:lnTo>
-                    <a:pt x="5999861" y="2693704"/>
-                  </a:lnTo>
-                  <a:lnTo>
-                    <a:pt x="6076494" y="2691036"/>
-                  </a:lnTo>
-                  <a:lnTo>
-                    <a:pt x="6153126" y="2688360"/>
-                  </a:lnTo>
-                  <a:lnTo>
-                    <a:pt x="6229759" y="2685676"/>
-                  </a:lnTo>
-                  <a:lnTo>
-                    <a:pt x="6306391" y="2682985"/>
-                  </a:lnTo>
-                  <a:lnTo>
-                    <a:pt x="6383024" y="2680287"/>
-                  </a:lnTo>
-                  <a:lnTo>
-                    <a:pt x="6459656" y="2677581"/>
-                  </a:lnTo>
-                  <a:lnTo>
-                    <a:pt x="6536289" y="2674868"/>
-                  </a:lnTo>
-                  <a:lnTo>
-                    <a:pt x="6612921" y="2672147"/>
-                  </a:lnTo>
-                  <a:lnTo>
-                    <a:pt x="6689554" y="2669418"/>
-                  </a:lnTo>
-                  <a:lnTo>
-                    <a:pt x="6766186" y="2666682"/>
-                  </a:lnTo>
-                  <a:lnTo>
-                    <a:pt x="6842819" y="2663938"/>
-                  </a:lnTo>
-                  <a:lnTo>
-                    <a:pt x="6919452" y="2661187"/>
-                  </a:lnTo>
-                  <a:lnTo>
-                    <a:pt x="6996084" y="2658427"/>
-                  </a:lnTo>
-                  <a:lnTo>
-                    <a:pt x="7072717" y="2655661"/>
-                  </a:lnTo>
-                  <a:lnTo>
-                    <a:pt x="7149349" y="2652886"/>
-                  </a:lnTo>
-                  <a:lnTo>
-                    <a:pt x="7225982" y="2650104"/>
-                  </a:lnTo>
-                  <a:lnTo>
-                    <a:pt x="7302614" y="2647314"/>
+                    <a:pt x="22522" y="34293"/>
+                  </a:lnTo>
+                  <a:lnTo>
+                    <a:pt x="99155" y="147157"/>
+                  </a:lnTo>
+                  <a:lnTo>
+                    <a:pt x="175787" y="256328"/>
+                  </a:lnTo>
+                  <a:lnTo>
+                    <a:pt x="252420" y="361927"/>
+                  </a:lnTo>
+                  <a:lnTo>
+                    <a:pt x="329052" y="464071"/>
+                  </a:lnTo>
+                  <a:lnTo>
+                    <a:pt x="405685" y="562873"/>
+                  </a:lnTo>
+                  <a:lnTo>
+                    <a:pt x="482317" y="658442"/>
+                  </a:lnTo>
+                  <a:lnTo>
+                    <a:pt x="558950" y="750884"/>
+                  </a:lnTo>
+                  <a:lnTo>
+                    <a:pt x="635583" y="840302"/>
+                  </a:lnTo>
+                  <a:lnTo>
+                    <a:pt x="712215" y="926794"/>
+                  </a:lnTo>
+                  <a:lnTo>
+                    <a:pt x="788848" y="1010456"/>
+                  </a:lnTo>
+                  <a:lnTo>
+                    <a:pt x="865480" y="1091380"/>
+                  </a:lnTo>
+                  <a:lnTo>
+                    <a:pt x="942113" y="1169657"/>
+                  </a:lnTo>
+                  <a:lnTo>
+                    <a:pt x="1018745" y="1245372"/>
+                  </a:lnTo>
+                  <a:lnTo>
+                    <a:pt x="1095378" y="1318611"/>
+                  </a:lnTo>
+                  <a:lnTo>
+                    <a:pt x="1172010" y="1389453"/>
+                  </a:lnTo>
+                  <a:lnTo>
+                    <a:pt x="1248643" y="1457976"/>
+                  </a:lnTo>
+                  <a:lnTo>
+                    <a:pt x="1325275" y="1524258"/>
+                  </a:lnTo>
+                  <a:lnTo>
+                    <a:pt x="1401908" y="1588372"/>
+                  </a:lnTo>
+                  <a:lnTo>
+                    <a:pt x="1478541" y="1650387"/>
+                  </a:lnTo>
+                  <a:lnTo>
+                    <a:pt x="1555173" y="1710374"/>
+                  </a:lnTo>
+                  <a:lnTo>
+                    <a:pt x="1631806" y="1768397"/>
+                  </a:lnTo>
+                  <a:lnTo>
+                    <a:pt x="1708438" y="1824522"/>
+                  </a:lnTo>
+                  <a:lnTo>
+                    <a:pt x="1785071" y="1878811"/>
+                  </a:lnTo>
+                  <a:lnTo>
+                    <a:pt x="1861703" y="1931324"/>
+                  </a:lnTo>
+                  <a:lnTo>
+                    <a:pt x="1938336" y="1982118"/>
+                  </a:lnTo>
+                  <a:lnTo>
+                    <a:pt x="2014968" y="2031250"/>
+                  </a:lnTo>
+                  <a:lnTo>
+                    <a:pt x="2091601" y="2078775"/>
+                  </a:lnTo>
+                  <a:lnTo>
+                    <a:pt x="2168234" y="2124745"/>
+                  </a:lnTo>
+                  <a:lnTo>
+                    <a:pt x="2244866" y="2169210"/>
+                  </a:lnTo>
+                  <a:lnTo>
+                    <a:pt x="2321499" y="2212221"/>
+                  </a:lnTo>
+                  <a:lnTo>
+                    <a:pt x="2398131" y="2253825"/>
+                  </a:lnTo>
+                  <a:lnTo>
+                    <a:pt x="2474764" y="2294067"/>
+                  </a:lnTo>
+                  <a:lnTo>
+                    <a:pt x="2551396" y="2332993"/>
+                  </a:lnTo>
+                  <a:lnTo>
+                    <a:pt x="2628029" y="2370645"/>
+                  </a:lnTo>
+                  <a:lnTo>
+                    <a:pt x="2704661" y="2407065"/>
+                  </a:lnTo>
+                  <a:lnTo>
+                    <a:pt x="2781294" y="2442293"/>
+                  </a:lnTo>
+                  <a:lnTo>
+                    <a:pt x="2857926" y="2476369"/>
+                  </a:lnTo>
+                  <a:lnTo>
+                    <a:pt x="2934559" y="2509329"/>
+                  </a:lnTo>
+                  <a:lnTo>
+                    <a:pt x="3011192" y="2541212"/>
+                  </a:lnTo>
+                  <a:lnTo>
+                    <a:pt x="3087824" y="2572051"/>
+                  </a:lnTo>
+                  <a:lnTo>
+                    <a:pt x="3164457" y="2601881"/>
+                  </a:lnTo>
+                  <a:lnTo>
+                    <a:pt x="3241089" y="2630735"/>
+                  </a:lnTo>
+                  <a:lnTo>
+                    <a:pt x="3317722" y="2653917"/>
+                  </a:lnTo>
+                  <a:lnTo>
+                    <a:pt x="3394354" y="2651608"/>
+                  </a:lnTo>
+                  <a:lnTo>
+                    <a:pt x="3470987" y="2649292"/>
+                  </a:lnTo>
+                  <a:lnTo>
+                    <a:pt x="3547619" y="2646970"/>
+                  </a:lnTo>
+                  <a:lnTo>
+                    <a:pt x="3624252" y="2644642"/>
+                  </a:lnTo>
+                  <a:lnTo>
+                    <a:pt x="3700885" y="2642306"/>
+                  </a:lnTo>
+                  <a:lnTo>
+                    <a:pt x="3777517" y="2639965"/>
+                  </a:lnTo>
+                  <a:lnTo>
+                    <a:pt x="3854150" y="2637617"/>
+                  </a:lnTo>
+                  <a:lnTo>
+                    <a:pt x="3930782" y="2635262"/>
+                  </a:lnTo>
+                  <a:lnTo>
+                    <a:pt x="4007415" y="2632901"/>
+                  </a:lnTo>
+                  <a:lnTo>
+                    <a:pt x="4084047" y="2630533"/>
+                  </a:lnTo>
+                  <a:lnTo>
+                    <a:pt x="4160680" y="2628159"/>
+                  </a:lnTo>
+                  <a:lnTo>
+                    <a:pt x="4237312" y="2625778"/>
+                  </a:lnTo>
+                  <a:lnTo>
+                    <a:pt x="4313945" y="2623390"/>
+                  </a:lnTo>
+                  <a:lnTo>
+                    <a:pt x="4390577" y="2620996"/>
+                  </a:lnTo>
+                  <a:lnTo>
+                    <a:pt x="4467210" y="2618595"/>
+                  </a:lnTo>
+                  <a:lnTo>
+                    <a:pt x="4543843" y="2616187"/>
+                  </a:lnTo>
+                  <a:lnTo>
+                    <a:pt x="4620475" y="2613773"/>
+                  </a:lnTo>
+                  <a:lnTo>
+                    <a:pt x="4697108" y="2611352"/>
+                  </a:lnTo>
+                  <a:lnTo>
+                    <a:pt x="4773740" y="2608924"/>
+                  </a:lnTo>
+                  <a:lnTo>
+                    <a:pt x="4850373" y="2606490"/>
+                  </a:lnTo>
+                  <a:lnTo>
+                    <a:pt x="4927005" y="2604048"/>
+                  </a:lnTo>
+                  <a:lnTo>
+                    <a:pt x="5003638" y="2601600"/>
+                  </a:lnTo>
+                  <a:lnTo>
+                    <a:pt x="5080270" y="2599146"/>
+                  </a:lnTo>
+                  <a:lnTo>
+                    <a:pt x="5156903" y="2596684"/>
+                  </a:lnTo>
+                  <a:lnTo>
+                    <a:pt x="5233535" y="2594215"/>
+                  </a:lnTo>
+                  <a:lnTo>
+                    <a:pt x="5310168" y="2591740"/>
+                  </a:lnTo>
+                  <a:lnTo>
+                    <a:pt x="5386801" y="2589257"/>
+                  </a:lnTo>
+                  <a:lnTo>
+                    <a:pt x="5463433" y="2586768"/>
+                  </a:lnTo>
+                  <a:lnTo>
+                    <a:pt x="5540066" y="2584272"/>
+                  </a:lnTo>
+                  <a:lnTo>
+                    <a:pt x="5616698" y="2581769"/>
+                  </a:lnTo>
+                  <a:lnTo>
+                    <a:pt x="5693331" y="2579259"/>
+                  </a:lnTo>
+                  <a:lnTo>
+                    <a:pt x="5769963" y="2576742"/>
+                  </a:lnTo>
+                  <a:lnTo>
+                    <a:pt x="5846596" y="2574218"/>
+                  </a:lnTo>
+                  <a:lnTo>
+                    <a:pt x="5923228" y="2571687"/>
+                  </a:lnTo>
+                  <a:lnTo>
+                    <a:pt x="5999861" y="2569149"/>
+                  </a:lnTo>
+                  <a:lnTo>
+                    <a:pt x="6076494" y="2566603"/>
+                  </a:lnTo>
+                  <a:lnTo>
+                    <a:pt x="6153126" y="2564051"/>
+                  </a:lnTo>
+                  <a:lnTo>
+                    <a:pt x="6229759" y="2561492"/>
+                  </a:lnTo>
+                  <a:lnTo>
+                    <a:pt x="6306391" y="2558925"/>
+                  </a:lnTo>
+                  <a:lnTo>
+                    <a:pt x="6383024" y="2556351"/>
+                  </a:lnTo>
+                  <a:lnTo>
+                    <a:pt x="6459656" y="2553771"/>
+                  </a:lnTo>
+                  <a:lnTo>
+                    <a:pt x="6536289" y="2551183"/>
+                  </a:lnTo>
+                  <a:lnTo>
+                    <a:pt x="6612921" y="2548587"/>
+                  </a:lnTo>
+                  <a:lnTo>
+                    <a:pt x="6689554" y="2545985"/>
+                  </a:lnTo>
+                  <a:lnTo>
+                    <a:pt x="6766186" y="2543375"/>
+                  </a:lnTo>
+                  <a:lnTo>
+                    <a:pt x="6842819" y="2540758"/>
+                  </a:lnTo>
+                  <a:lnTo>
+                    <a:pt x="6919452" y="2538134"/>
+                  </a:lnTo>
+                  <a:lnTo>
+                    <a:pt x="6996084" y="2535503"/>
+                  </a:lnTo>
+                  <a:lnTo>
+                    <a:pt x="7072717" y="2532864"/>
+                  </a:lnTo>
+                  <a:lnTo>
+                    <a:pt x="7149349" y="2530218"/>
+                  </a:lnTo>
+                  <a:lnTo>
+                    <a:pt x="7225982" y="2527564"/>
+                  </a:lnTo>
+                  <a:lnTo>
+                    <a:pt x="7302614" y="2524903"/>
                   </a:lnTo>
                 </a:path>
               </a:pathLst>
@@ -3934,306 +3934,306 @@
           </p:nvSpPr>
           <p:spPr>
             <a:xfrm>
-              <a:off x="817517" y="4681561"/>
-              <a:ext cx="7403783" cy="714255"/>
+              <a:off x="817517" y="4729723"/>
+              <a:ext cx="7403783" cy="681228"/>
             </a:xfrm>
             <a:custGeom>
               <a:avLst/>
               <a:pathLst>
-                <a:path w="7403783" h="714255">
+                <a:path w="7403783" h="681228">
                   <a:moveTo>
-                    <a:pt x="7403783" y="714255"/>
+                    <a:pt x="7403783" y="681228"/>
                   </a:moveTo>
                   <a:lnTo>
-                    <a:pt x="7327150" y="709067"/>
-                  </a:lnTo>
-                  <a:lnTo>
-                    <a:pt x="7250518" y="703702"/>
-                  </a:lnTo>
-                  <a:lnTo>
-                    <a:pt x="7173885" y="698157"/>
-                  </a:lnTo>
-                  <a:lnTo>
-                    <a:pt x="7097253" y="692424"/>
-                  </a:lnTo>
-                  <a:lnTo>
-                    <a:pt x="7020620" y="686497"/>
-                  </a:lnTo>
-                  <a:lnTo>
-                    <a:pt x="6943987" y="680369"/>
-                  </a:lnTo>
-                  <a:lnTo>
-                    <a:pt x="6867355" y="674034"/>
-                  </a:lnTo>
-                  <a:lnTo>
-                    <a:pt x="6790722" y="667485"/>
-                  </a:lnTo>
-                  <a:lnTo>
-                    <a:pt x="6714090" y="660714"/>
-                  </a:lnTo>
-                  <a:lnTo>
-                    <a:pt x="6637457" y="653715"/>
-                  </a:lnTo>
-                  <a:lnTo>
-                    <a:pt x="6560825" y="646478"/>
-                  </a:lnTo>
-                  <a:lnTo>
-                    <a:pt x="6484192" y="638997"/>
-                  </a:lnTo>
-                  <a:lnTo>
-                    <a:pt x="6407560" y="631263"/>
-                  </a:lnTo>
-                  <a:lnTo>
-                    <a:pt x="6330927" y="623267"/>
-                  </a:lnTo>
-                  <a:lnTo>
-                    <a:pt x="6254294" y="615001"/>
-                  </a:lnTo>
-                  <a:lnTo>
-                    <a:pt x="6177662" y="606455"/>
-                  </a:lnTo>
-                  <a:lnTo>
-                    <a:pt x="6101029" y="597620"/>
-                  </a:lnTo>
-                  <a:lnTo>
-                    <a:pt x="6024397" y="588486"/>
-                  </a:lnTo>
-                  <a:lnTo>
-                    <a:pt x="5947764" y="579043"/>
-                  </a:lnTo>
-                  <a:lnTo>
-                    <a:pt x="5871132" y="569280"/>
-                  </a:lnTo>
-                  <a:lnTo>
-                    <a:pt x="5794499" y="559188"/>
-                  </a:lnTo>
-                  <a:lnTo>
-                    <a:pt x="5717867" y="548754"/>
-                  </a:lnTo>
-                  <a:lnTo>
-                    <a:pt x="5641234" y="537967"/>
-                  </a:lnTo>
-                  <a:lnTo>
-                    <a:pt x="5564602" y="526815"/>
-                  </a:lnTo>
-                  <a:lnTo>
-                    <a:pt x="5487969" y="515286"/>
-                  </a:lnTo>
-                  <a:lnTo>
-                    <a:pt x="5411336" y="503367"/>
-                  </a:lnTo>
-                  <a:lnTo>
-                    <a:pt x="5334704" y="491045"/>
-                  </a:lnTo>
-                  <a:lnTo>
-                    <a:pt x="5258071" y="478306"/>
-                  </a:lnTo>
-                  <a:lnTo>
-                    <a:pt x="5181439" y="465137"/>
-                  </a:lnTo>
-                  <a:lnTo>
-                    <a:pt x="5104806" y="451521"/>
-                  </a:lnTo>
-                  <a:lnTo>
-                    <a:pt x="5028174" y="437445"/>
-                  </a:lnTo>
-                  <a:lnTo>
-                    <a:pt x="4951541" y="422893"/>
-                  </a:lnTo>
-                  <a:lnTo>
-                    <a:pt x="4874909" y="407849"/>
-                  </a:lnTo>
-                  <a:lnTo>
-                    <a:pt x="4798276" y="392296"/>
-                  </a:lnTo>
-                  <a:lnTo>
-                    <a:pt x="4721644" y="376217"/>
-                  </a:lnTo>
-                  <a:lnTo>
-                    <a:pt x="4645011" y="359594"/>
-                  </a:lnTo>
-                  <a:lnTo>
-                    <a:pt x="4568378" y="342408"/>
-                  </a:lnTo>
-                  <a:lnTo>
-                    <a:pt x="4491746" y="324641"/>
-                  </a:lnTo>
-                  <a:lnTo>
-                    <a:pt x="4415113" y="306274"/>
-                  </a:lnTo>
-                  <a:lnTo>
-                    <a:pt x="4338481" y="287285"/>
-                  </a:lnTo>
-                  <a:lnTo>
-                    <a:pt x="4261848" y="267653"/>
-                  </a:lnTo>
-                  <a:lnTo>
-                    <a:pt x="4185216" y="247358"/>
-                  </a:lnTo>
-                  <a:lnTo>
-                    <a:pt x="4108583" y="226376"/>
-                  </a:lnTo>
-                  <a:lnTo>
-                    <a:pt x="4031951" y="204684"/>
-                  </a:lnTo>
-                  <a:lnTo>
-                    <a:pt x="3955318" y="182259"/>
-                  </a:lnTo>
-                  <a:lnTo>
-                    <a:pt x="3878685" y="159075"/>
-                  </a:lnTo>
-                  <a:lnTo>
-                    <a:pt x="3802053" y="135107"/>
-                  </a:lnTo>
-                  <a:lnTo>
-                    <a:pt x="3725420" y="110328"/>
-                  </a:lnTo>
-                  <a:lnTo>
-                    <a:pt x="3648788" y="84711"/>
-                  </a:lnTo>
-                  <a:lnTo>
-                    <a:pt x="3572155" y="58227"/>
-                  </a:lnTo>
-                  <a:lnTo>
-                    <a:pt x="3495523" y="30847"/>
-                  </a:lnTo>
-                  <a:lnTo>
-                    <a:pt x="3418890" y="2542"/>
+                    <a:pt x="7327150" y="676280"/>
+                  </a:lnTo>
+                  <a:lnTo>
+                    <a:pt x="7250518" y="671163"/>
+                  </a:lnTo>
+                  <a:lnTo>
+                    <a:pt x="7173885" y="665874"/>
+                  </a:lnTo>
+                  <a:lnTo>
+                    <a:pt x="7097253" y="660406"/>
+                  </a:lnTo>
+                  <a:lnTo>
+                    <a:pt x="7020620" y="654753"/>
+                  </a:lnTo>
+                  <a:lnTo>
+                    <a:pt x="6943987" y="648909"/>
+                  </a:lnTo>
+                  <a:lnTo>
+                    <a:pt x="6867355" y="642867"/>
+                  </a:lnTo>
+                  <a:lnTo>
+                    <a:pt x="6790722" y="636621"/>
+                  </a:lnTo>
+                  <a:lnTo>
+                    <a:pt x="6714090" y="630163"/>
+                  </a:lnTo>
+                  <a:lnTo>
+                    <a:pt x="6637457" y="623487"/>
+                  </a:lnTo>
+                  <a:lnTo>
+                    <a:pt x="6560825" y="616585"/>
+                  </a:lnTo>
+                  <a:lnTo>
+                    <a:pt x="6484192" y="609450"/>
+                  </a:lnTo>
+                  <a:lnTo>
+                    <a:pt x="6407560" y="602073"/>
+                  </a:lnTo>
+                  <a:lnTo>
+                    <a:pt x="6330927" y="594447"/>
+                  </a:lnTo>
+                  <a:lnTo>
+                    <a:pt x="6254294" y="586563"/>
+                  </a:lnTo>
+                  <a:lnTo>
+                    <a:pt x="6177662" y="578412"/>
+                  </a:lnTo>
+                  <a:lnTo>
+                    <a:pt x="6101029" y="569986"/>
+                  </a:lnTo>
+                  <a:lnTo>
+                    <a:pt x="6024397" y="561274"/>
+                  </a:lnTo>
+                  <a:lnTo>
+                    <a:pt x="5947764" y="552268"/>
+                  </a:lnTo>
+                  <a:lnTo>
+                    <a:pt x="5871132" y="542957"/>
+                  </a:lnTo>
+                  <a:lnTo>
+                    <a:pt x="5794499" y="533331"/>
+                  </a:lnTo>
+                  <a:lnTo>
+                    <a:pt x="5717867" y="523380"/>
+                  </a:lnTo>
+                  <a:lnTo>
+                    <a:pt x="5641234" y="513092"/>
+                  </a:lnTo>
+                  <a:lnTo>
+                    <a:pt x="5564602" y="502456"/>
+                  </a:lnTo>
+                  <a:lnTo>
+                    <a:pt x="5487969" y="491460"/>
+                  </a:lnTo>
+                  <a:lnTo>
+                    <a:pt x="5411336" y="480092"/>
+                  </a:lnTo>
+                  <a:lnTo>
+                    <a:pt x="5334704" y="468340"/>
+                  </a:lnTo>
+                  <a:lnTo>
+                    <a:pt x="5258071" y="456190"/>
+                  </a:lnTo>
+                  <a:lnTo>
+                    <a:pt x="5181439" y="443629"/>
+                  </a:lnTo>
+                  <a:lnTo>
+                    <a:pt x="5104806" y="430643"/>
+                  </a:lnTo>
+                  <a:lnTo>
+                    <a:pt x="5028174" y="417218"/>
+                  </a:lnTo>
+                  <a:lnTo>
+                    <a:pt x="4951541" y="403339"/>
+                  </a:lnTo>
+                  <a:lnTo>
+                    <a:pt x="4874909" y="388990"/>
+                  </a:lnTo>
+                  <a:lnTo>
+                    <a:pt x="4798276" y="374156"/>
+                  </a:lnTo>
+                  <a:lnTo>
+                    <a:pt x="4721644" y="358821"/>
+                  </a:lnTo>
+                  <a:lnTo>
+                    <a:pt x="4645011" y="342966"/>
+                  </a:lnTo>
+                  <a:lnTo>
+                    <a:pt x="4568378" y="326575"/>
+                  </a:lnTo>
+                  <a:lnTo>
+                    <a:pt x="4491746" y="309630"/>
+                  </a:lnTo>
+                  <a:lnTo>
+                    <a:pt x="4415113" y="292112"/>
+                  </a:lnTo>
+                  <a:lnTo>
+                    <a:pt x="4338481" y="274001"/>
+                  </a:lnTo>
+                  <a:lnTo>
+                    <a:pt x="4261848" y="255277"/>
+                  </a:lnTo>
+                  <a:lnTo>
+                    <a:pt x="4185216" y="235920"/>
+                  </a:lnTo>
+                  <a:lnTo>
+                    <a:pt x="4108583" y="215908"/>
+                  </a:lnTo>
+                  <a:lnTo>
+                    <a:pt x="4031951" y="195220"/>
+                  </a:lnTo>
+                  <a:lnTo>
+                    <a:pt x="3955318" y="173831"/>
+                  </a:lnTo>
+                  <a:lnTo>
+                    <a:pt x="3878685" y="151719"/>
+                  </a:lnTo>
+                  <a:lnTo>
+                    <a:pt x="3802053" y="128859"/>
+                  </a:lnTo>
+                  <a:lnTo>
+                    <a:pt x="3725420" y="105226"/>
+                  </a:lnTo>
+                  <a:lnTo>
+                    <a:pt x="3648788" y="80794"/>
+                  </a:lnTo>
+                  <a:lnTo>
+                    <a:pt x="3572155" y="55535"/>
+                  </a:lnTo>
+                  <a:lnTo>
+                    <a:pt x="3495523" y="29421"/>
+                  </a:lnTo>
+                  <a:lnTo>
+                    <a:pt x="3418890" y="2424"/>
                   </a:lnTo>
                   <a:lnTo>
                     <a:pt x="3342258" y="0"/>
                   </a:lnTo>
                   <a:lnTo>
-                    <a:pt x="3265625" y="2407"/>
-                  </a:lnTo>
-                  <a:lnTo>
-                    <a:pt x="3188993" y="4808"/>
-                  </a:lnTo>
-                  <a:lnTo>
-                    <a:pt x="3112360" y="7203"/>
-                  </a:lnTo>
-                  <a:lnTo>
-                    <a:pt x="3035727" y="9591"/>
-                  </a:lnTo>
-                  <a:lnTo>
-                    <a:pt x="2959095" y="11972"/>
-                  </a:lnTo>
-                  <a:lnTo>
-                    <a:pt x="2882462" y="14347"/>
-                  </a:lnTo>
-                  <a:lnTo>
-                    <a:pt x="2805830" y="16715"/>
-                  </a:lnTo>
-                  <a:lnTo>
-                    <a:pt x="2729197" y="19076"/>
-                  </a:lnTo>
-                  <a:lnTo>
-                    <a:pt x="2652565" y="21431"/>
-                  </a:lnTo>
-                  <a:lnTo>
-                    <a:pt x="2575932" y="23779"/>
-                  </a:lnTo>
-                  <a:lnTo>
-                    <a:pt x="2499300" y="26121"/>
-                  </a:lnTo>
-                  <a:lnTo>
-                    <a:pt x="2422667" y="28457"/>
-                  </a:lnTo>
-                  <a:lnTo>
-                    <a:pt x="2346034" y="30785"/>
-                  </a:lnTo>
-                  <a:lnTo>
-                    <a:pt x="2269402" y="33108"/>
-                  </a:lnTo>
-                  <a:lnTo>
-                    <a:pt x="2192769" y="35424"/>
-                  </a:lnTo>
-                  <a:lnTo>
-                    <a:pt x="2116137" y="37733"/>
-                  </a:lnTo>
-                  <a:lnTo>
-                    <a:pt x="2039504" y="40036"/>
-                  </a:lnTo>
-                  <a:lnTo>
-                    <a:pt x="1962872" y="42333"/>
-                  </a:lnTo>
-                  <a:lnTo>
-                    <a:pt x="1886239" y="44624"/>
-                  </a:lnTo>
-                  <a:lnTo>
-                    <a:pt x="1809607" y="46908"/>
-                  </a:lnTo>
-                  <a:lnTo>
-                    <a:pt x="1732974" y="49185"/>
-                  </a:lnTo>
-                  <a:lnTo>
-                    <a:pt x="1656342" y="51457"/>
-                  </a:lnTo>
-                  <a:lnTo>
-                    <a:pt x="1579709" y="53722"/>
-                  </a:lnTo>
-                  <a:lnTo>
-                    <a:pt x="1503076" y="55980"/>
-                  </a:lnTo>
-                  <a:lnTo>
-                    <a:pt x="1426444" y="58233"/>
-                  </a:lnTo>
-                  <a:lnTo>
-                    <a:pt x="1349811" y="60479"/>
-                  </a:lnTo>
-                  <a:lnTo>
-                    <a:pt x="1273179" y="62719"/>
-                  </a:lnTo>
-                  <a:lnTo>
-                    <a:pt x="1196546" y="64953"/>
-                  </a:lnTo>
-                  <a:lnTo>
-                    <a:pt x="1119914" y="67180"/>
-                  </a:lnTo>
-                  <a:lnTo>
-                    <a:pt x="1043281" y="69402"/>
-                  </a:lnTo>
-                  <a:lnTo>
-                    <a:pt x="966649" y="71617"/>
-                  </a:lnTo>
-                  <a:lnTo>
-                    <a:pt x="890016" y="73826"/>
-                  </a:lnTo>
-                  <a:lnTo>
-                    <a:pt x="813384" y="76029"/>
-                  </a:lnTo>
-                  <a:lnTo>
-                    <a:pt x="736751" y="78226"/>
-                  </a:lnTo>
-                  <a:lnTo>
-                    <a:pt x="660118" y="80417"/>
-                  </a:lnTo>
-                  <a:lnTo>
-                    <a:pt x="583486" y="82601"/>
-                  </a:lnTo>
-                  <a:lnTo>
-                    <a:pt x="506853" y="84780"/>
-                  </a:lnTo>
-                  <a:lnTo>
-                    <a:pt x="430221" y="86953"/>
-                  </a:lnTo>
-                  <a:lnTo>
-                    <a:pt x="353588" y="89119"/>
-                  </a:lnTo>
-                  <a:lnTo>
-                    <a:pt x="276956" y="91280"/>
-                  </a:lnTo>
-                  <a:lnTo>
-                    <a:pt x="200323" y="93434"/>
-                  </a:lnTo>
-                  <a:lnTo>
-                    <a:pt x="123691" y="95583"/>
-                  </a:lnTo>
-                  <a:lnTo>
-                    <a:pt x="47058" y="97725"/>
-                  </a:lnTo>
-                  <a:lnTo>
-                    <a:pt x="0" y="99037"/>
+                    <a:pt x="3265625" y="2296"/>
+                  </a:lnTo>
+                  <a:lnTo>
+                    <a:pt x="3188993" y="4586"/>
+                  </a:lnTo>
+                  <a:lnTo>
+                    <a:pt x="3112360" y="6870"/>
+                  </a:lnTo>
+                  <a:lnTo>
+                    <a:pt x="3035727" y="9147"/>
+                  </a:lnTo>
+                  <a:lnTo>
+                    <a:pt x="2959095" y="11418"/>
+                  </a:lnTo>
+                  <a:lnTo>
+                    <a:pt x="2882462" y="13683"/>
+                  </a:lnTo>
+                  <a:lnTo>
+                    <a:pt x="2805830" y="15942"/>
+                  </a:lnTo>
+                  <a:lnTo>
+                    <a:pt x="2729197" y="18194"/>
+                  </a:lnTo>
+                  <a:lnTo>
+                    <a:pt x="2652565" y="20440"/>
+                  </a:lnTo>
+                  <a:lnTo>
+                    <a:pt x="2575932" y="22680"/>
+                  </a:lnTo>
+                  <a:lnTo>
+                    <a:pt x="2499300" y="24913"/>
+                  </a:lnTo>
+                  <a:lnTo>
+                    <a:pt x="2422667" y="27141"/>
+                  </a:lnTo>
+                  <a:lnTo>
+                    <a:pt x="2346034" y="29362"/>
+                  </a:lnTo>
+                  <a:lnTo>
+                    <a:pt x="2269402" y="31577"/>
+                  </a:lnTo>
+                  <a:lnTo>
+                    <a:pt x="2192769" y="33786"/>
+                  </a:lnTo>
+                  <a:lnTo>
+                    <a:pt x="2116137" y="35989"/>
+                  </a:lnTo>
+                  <a:lnTo>
+                    <a:pt x="2039504" y="38185"/>
+                  </a:lnTo>
+                  <a:lnTo>
+                    <a:pt x="1962872" y="40376"/>
+                  </a:lnTo>
+                  <a:lnTo>
+                    <a:pt x="1886239" y="42560"/>
+                  </a:lnTo>
+                  <a:lnTo>
+                    <a:pt x="1809607" y="44739"/>
+                  </a:lnTo>
+                  <a:lnTo>
+                    <a:pt x="1732974" y="46911"/>
+                  </a:lnTo>
+                  <a:lnTo>
+                    <a:pt x="1656342" y="49077"/>
+                  </a:lnTo>
+                  <a:lnTo>
+                    <a:pt x="1579709" y="51237"/>
+                  </a:lnTo>
+                  <a:lnTo>
+                    <a:pt x="1503076" y="53392"/>
+                  </a:lnTo>
+                  <a:lnTo>
+                    <a:pt x="1426444" y="55540"/>
+                  </a:lnTo>
+                  <a:lnTo>
+                    <a:pt x="1349811" y="57682"/>
+                  </a:lnTo>
+                  <a:lnTo>
+                    <a:pt x="1273179" y="59819"/>
+                  </a:lnTo>
+                  <a:lnTo>
+                    <a:pt x="1196546" y="61949"/>
+                  </a:lnTo>
+                  <a:lnTo>
+                    <a:pt x="1119914" y="64074"/>
+                  </a:lnTo>
+                  <a:lnTo>
+                    <a:pt x="1043281" y="66193"/>
+                  </a:lnTo>
+                  <a:lnTo>
+                    <a:pt x="966649" y="68305"/>
+                  </a:lnTo>
+                  <a:lnTo>
+                    <a:pt x="890016" y="70412"/>
+                  </a:lnTo>
+                  <a:lnTo>
+                    <a:pt x="813384" y="72513"/>
+                  </a:lnTo>
+                  <a:lnTo>
+                    <a:pt x="736751" y="74609"/>
+                  </a:lnTo>
+                  <a:lnTo>
+                    <a:pt x="660118" y="76698"/>
+                  </a:lnTo>
+                  <a:lnTo>
+                    <a:pt x="583486" y="78782"/>
+                  </a:lnTo>
+                  <a:lnTo>
+                    <a:pt x="506853" y="80860"/>
+                  </a:lnTo>
+                  <a:lnTo>
+                    <a:pt x="430221" y="82932"/>
+                  </a:lnTo>
+                  <a:lnTo>
+                    <a:pt x="353588" y="84998"/>
+                  </a:lnTo>
+                  <a:lnTo>
+                    <a:pt x="276956" y="87059"/>
+                  </a:lnTo>
+                  <a:lnTo>
+                    <a:pt x="200323" y="89114"/>
+                  </a:lnTo>
+                  <a:lnTo>
+                    <a:pt x="123691" y="91163"/>
+                  </a:lnTo>
+                  <a:lnTo>
+                    <a:pt x="47058" y="93206"/>
+                  </a:lnTo>
+                  <a:lnTo>
+                    <a:pt x="0" y="94458"/>
                   </a:lnTo>
                 </a:path>
               </a:pathLst>
@@ -4253,306 +4253,306 @@
           </p:nvSpPr>
           <p:spPr>
             <a:xfrm>
-              <a:off x="817517" y="3836514"/>
-              <a:ext cx="7403783" cy="1319999"/>
+              <a:off x="817517" y="3923751"/>
+              <a:ext cx="7403783" cy="1258963"/>
             </a:xfrm>
             <a:custGeom>
               <a:avLst/>
               <a:pathLst>
-                <a:path w="7403783" h="1319999">
+                <a:path w="7403783" h="1258963">
                   <a:moveTo>
                     <a:pt x="0" y="0"/>
                   </a:moveTo>
                   <a:lnTo>
-                    <a:pt x="47058" y="16004"/>
-                  </a:lnTo>
-                  <a:lnTo>
-                    <a:pt x="123691" y="41672"/>
-                  </a:lnTo>
-                  <a:lnTo>
-                    <a:pt x="200323" y="66951"/>
-                  </a:lnTo>
-                  <a:lnTo>
-                    <a:pt x="276956" y="91848"/>
-                  </a:lnTo>
-                  <a:lnTo>
-                    <a:pt x="353588" y="116369"/>
-                  </a:lnTo>
-                  <a:lnTo>
-                    <a:pt x="430221" y="140518"/>
-                  </a:lnTo>
-                  <a:lnTo>
-                    <a:pt x="506853" y="164302"/>
-                  </a:lnTo>
-                  <a:lnTo>
-                    <a:pt x="583486" y="187727"/>
-                  </a:lnTo>
-                  <a:lnTo>
-                    <a:pt x="660118" y="210797"/>
-                  </a:lnTo>
-                  <a:lnTo>
-                    <a:pt x="736751" y="233518"/>
-                  </a:lnTo>
-                  <a:lnTo>
-                    <a:pt x="813384" y="255895"/>
-                  </a:lnTo>
-                  <a:lnTo>
-                    <a:pt x="890016" y="277934"/>
-                  </a:lnTo>
-                  <a:lnTo>
-                    <a:pt x="966649" y="299639"/>
-                  </a:lnTo>
-                  <a:lnTo>
-                    <a:pt x="1043281" y="321016"/>
-                  </a:lnTo>
-                  <a:lnTo>
-                    <a:pt x="1119914" y="342070"/>
-                  </a:lnTo>
-                  <a:lnTo>
-                    <a:pt x="1196546" y="362805"/>
-                  </a:lnTo>
-                  <a:lnTo>
-                    <a:pt x="1273179" y="383226"/>
-                  </a:lnTo>
-                  <a:lnTo>
-                    <a:pt x="1349811" y="403339"/>
-                  </a:lnTo>
-                  <a:lnTo>
-                    <a:pt x="1426444" y="423147"/>
-                  </a:lnTo>
-                  <a:lnTo>
-                    <a:pt x="1503076" y="442655"/>
-                  </a:lnTo>
-                  <a:lnTo>
-                    <a:pt x="1579709" y="461869"/>
-                  </a:lnTo>
-                  <a:lnTo>
-                    <a:pt x="1656342" y="480791"/>
-                  </a:lnTo>
-                  <a:lnTo>
-                    <a:pt x="1732974" y="499428"/>
-                  </a:lnTo>
-                  <a:lnTo>
-                    <a:pt x="1809607" y="517782"/>
-                  </a:lnTo>
-                  <a:lnTo>
-                    <a:pt x="1886239" y="535859"/>
-                  </a:lnTo>
-                  <a:lnTo>
-                    <a:pt x="1962872" y="553663"/>
-                  </a:lnTo>
-                  <a:lnTo>
-                    <a:pt x="2039504" y="571197"/>
-                  </a:lnTo>
-                  <a:lnTo>
-                    <a:pt x="2116137" y="588466"/>
-                  </a:lnTo>
-                  <a:lnTo>
-                    <a:pt x="2192769" y="605473"/>
-                  </a:lnTo>
-                  <a:lnTo>
-                    <a:pt x="2269402" y="622223"/>
-                  </a:lnTo>
-                  <a:lnTo>
-                    <a:pt x="2346034" y="638720"/>
-                  </a:lnTo>
-                  <a:lnTo>
-                    <a:pt x="2422667" y="654967"/>
-                  </a:lnTo>
-                  <a:lnTo>
-                    <a:pt x="2499300" y="670969"/>
-                  </a:lnTo>
-                  <a:lnTo>
-                    <a:pt x="2575932" y="686728"/>
-                  </a:lnTo>
-                  <a:lnTo>
-                    <a:pt x="2652565" y="702249"/>
-                  </a:lnTo>
-                  <a:lnTo>
-                    <a:pt x="2729197" y="717536"/>
-                  </a:lnTo>
-                  <a:lnTo>
-                    <a:pt x="2805830" y="732590"/>
-                  </a:lnTo>
-                  <a:lnTo>
-                    <a:pt x="2882462" y="747418"/>
-                  </a:lnTo>
-                  <a:lnTo>
-                    <a:pt x="2959095" y="762021"/>
-                  </a:lnTo>
-                  <a:lnTo>
-                    <a:pt x="3035727" y="776403"/>
-                  </a:lnTo>
-                  <a:lnTo>
-                    <a:pt x="3112360" y="790567"/>
-                  </a:lnTo>
-                  <a:lnTo>
-                    <a:pt x="3188993" y="804517"/>
-                  </a:lnTo>
-                  <a:lnTo>
-                    <a:pt x="3265625" y="818256"/>
-                  </a:lnTo>
-                  <a:lnTo>
-                    <a:pt x="3342258" y="831787"/>
-                  </a:lnTo>
-                  <a:lnTo>
-                    <a:pt x="3418890" y="845114"/>
-                  </a:lnTo>
-                  <a:lnTo>
-                    <a:pt x="3495523" y="858239"/>
-                  </a:lnTo>
-                  <a:lnTo>
-                    <a:pt x="3572155" y="871165"/>
-                  </a:lnTo>
-                  <a:lnTo>
-                    <a:pt x="3648788" y="883896"/>
-                  </a:lnTo>
-                  <a:lnTo>
-                    <a:pt x="3725420" y="896434"/>
-                  </a:lnTo>
-                  <a:lnTo>
-                    <a:pt x="3802053" y="908783"/>
-                  </a:lnTo>
-                  <a:lnTo>
-                    <a:pt x="3878685" y="920944"/>
-                  </a:lnTo>
-                  <a:lnTo>
-                    <a:pt x="3955318" y="932922"/>
-                  </a:lnTo>
-                  <a:lnTo>
-                    <a:pt x="4031951" y="944719"/>
-                  </a:lnTo>
-                  <a:lnTo>
-                    <a:pt x="4108583" y="956337"/>
-                  </a:lnTo>
-                  <a:lnTo>
-                    <a:pt x="4185216" y="967779"/>
-                  </a:lnTo>
-                  <a:lnTo>
-                    <a:pt x="4261848" y="979048"/>
-                  </a:lnTo>
-                  <a:lnTo>
-                    <a:pt x="4338481" y="990147"/>
-                  </a:lnTo>
-                  <a:lnTo>
-                    <a:pt x="4415113" y="1001078"/>
-                  </a:lnTo>
-                  <a:lnTo>
-                    <a:pt x="4491746" y="1011843"/>
-                  </a:lnTo>
-                  <a:lnTo>
-                    <a:pt x="4568378" y="1022446"/>
-                  </a:lnTo>
-                  <a:lnTo>
-                    <a:pt x="4645011" y="1032888"/>
-                  </a:lnTo>
-                  <a:lnTo>
-                    <a:pt x="4721644" y="1043172"/>
-                  </a:lnTo>
-                  <a:lnTo>
-                    <a:pt x="4798276" y="1053301"/>
-                  </a:lnTo>
-                  <a:lnTo>
-                    <a:pt x="4874909" y="1063276"/>
-                  </a:lnTo>
-                  <a:lnTo>
-                    <a:pt x="4951541" y="1073101"/>
-                  </a:lnTo>
-                  <a:lnTo>
-                    <a:pt x="5028174" y="1082777"/>
-                  </a:lnTo>
-                  <a:lnTo>
-                    <a:pt x="5104806" y="1092306"/>
-                  </a:lnTo>
-                  <a:lnTo>
-                    <a:pt x="5181439" y="1101691"/>
-                  </a:lnTo>
-                  <a:lnTo>
-                    <a:pt x="5258071" y="1110935"/>
-                  </a:lnTo>
-                  <a:lnTo>
-                    <a:pt x="5334704" y="1120038"/>
-                  </a:lnTo>
-                  <a:lnTo>
-                    <a:pt x="5411336" y="1129004"/>
-                  </a:lnTo>
-                  <a:lnTo>
-                    <a:pt x="5487969" y="1137834"/>
-                  </a:lnTo>
-                  <a:lnTo>
-                    <a:pt x="5564602" y="1146531"/>
-                  </a:lnTo>
-                  <a:lnTo>
-                    <a:pt x="5641234" y="1155096"/>
-                  </a:lnTo>
-                  <a:lnTo>
-                    <a:pt x="5717867" y="1163531"/>
-                  </a:lnTo>
-                  <a:lnTo>
-                    <a:pt x="5794499" y="1171839"/>
-                  </a:lnTo>
-                  <a:lnTo>
-                    <a:pt x="5871132" y="1180021"/>
-                  </a:lnTo>
-                  <a:lnTo>
-                    <a:pt x="5947764" y="1188080"/>
-                  </a:lnTo>
-                  <a:lnTo>
-                    <a:pt x="6024397" y="1196016"/>
-                  </a:lnTo>
-                  <a:lnTo>
-                    <a:pt x="6101029" y="1203832"/>
-                  </a:lnTo>
-                  <a:lnTo>
-                    <a:pt x="6177662" y="1211531"/>
-                  </a:lnTo>
-                  <a:lnTo>
-                    <a:pt x="6254294" y="1219112"/>
-                  </a:lnTo>
-                  <a:lnTo>
-                    <a:pt x="6330927" y="1226579"/>
-                  </a:lnTo>
-                  <a:lnTo>
-                    <a:pt x="6407560" y="1233933"/>
-                  </a:lnTo>
-                  <a:lnTo>
-                    <a:pt x="6484192" y="1241176"/>
-                  </a:lnTo>
-                  <a:lnTo>
-                    <a:pt x="6560825" y="1248309"/>
-                  </a:lnTo>
-                  <a:lnTo>
-                    <a:pt x="6637457" y="1255335"/>
-                  </a:lnTo>
-                  <a:lnTo>
-                    <a:pt x="6714090" y="1262254"/>
-                  </a:lnTo>
-                  <a:lnTo>
-                    <a:pt x="6790722" y="1269068"/>
-                  </a:lnTo>
-                  <a:lnTo>
-                    <a:pt x="6867355" y="1275779"/>
-                  </a:lnTo>
-                  <a:lnTo>
-                    <a:pt x="6943987" y="1282389"/>
-                  </a:lnTo>
-                  <a:lnTo>
-                    <a:pt x="7020620" y="1288899"/>
-                  </a:lnTo>
-                  <a:lnTo>
-                    <a:pt x="7097253" y="1295310"/>
-                  </a:lnTo>
-                  <a:lnTo>
-                    <a:pt x="7173885" y="1301624"/>
-                  </a:lnTo>
-                  <a:lnTo>
-                    <a:pt x="7250518" y="1307843"/>
-                  </a:lnTo>
-                  <a:lnTo>
-                    <a:pt x="7327150" y="1313967"/>
-                  </a:lnTo>
-                  <a:lnTo>
-                    <a:pt x="7403783" y="1319999"/>
+                    <a:pt x="47058" y="15264"/>
+                  </a:lnTo>
+                  <a:lnTo>
+                    <a:pt x="123691" y="39745"/>
+                  </a:lnTo>
+                  <a:lnTo>
+                    <a:pt x="200323" y="63855"/>
+                  </a:lnTo>
+                  <a:lnTo>
+                    <a:pt x="276956" y="87601"/>
+                  </a:lnTo>
+                  <a:lnTo>
+                    <a:pt x="353588" y="110988"/>
+                  </a:lnTo>
+                  <a:lnTo>
+                    <a:pt x="430221" y="134021"/>
+                  </a:lnTo>
+                  <a:lnTo>
+                    <a:pt x="506853" y="156705"/>
+                  </a:lnTo>
+                  <a:lnTo>
+                    <a:pt x="583486" y="179046"/>
+                  </a:lnTo>
+                  <a:lnTo>
+                    <a:pt x="660118" y="201050"/>
+                  </a:lnTo>
+                  <a:lnTo>
+                    <a:pt x="736751" y="222720"/>
+                  </a:lnTo>
+                  <a:lnTo>
+                    <a:pt x="813384" y="244063"/>
+                  </a:lnTo>
+                  <a:lnTo>
+                    <a:pt x="890016" y="265082"/>
+                  </a:lnTo>
+                  <a:lnTo>
+                    <a:pt x="966649" y="285784"/>
+                  </a:lnTo>
+                  <a:lnTo>
+                    <a:pt x="1043281" y="306172"/>
+                  </a:lnTo>
+                  <a:lnTo>
+                    <a:pt x="1119914" y="326253"/>
+                  </a:lnTo>
+                  <a:lnTo>
+                    <a:pt x="1196546" y="346029"/>
+                  </a:lnTo>
+                  <a:lnTo>
+                    <a:pt x="1273179" y="365506"/>
+                  </a:lnTo>
+                  <a:lnTo>
+                    <a:pt x="1349811" y="384688"/>
+                  </a:lnTo>
+                  <a:lnTo>
+                    <a:pt x="1426444" y="403581"/>
+                  </a:lnTo>
+                  <a:lnTo>
+                    <a:pt x="1503076" y="422187"/>
+                  </a:lnTo>
+                  <a:lnTo>
+                    <a:pt x="1579709" y="440512"/>
+                  </a:lnTo>
+                  <a:lnTo>
+                    <a:pt x="1656342" y="458560"/>
+                  </a:lnTo>
+                  <a:lnTo>
+                    <a:pt x="1732974" y="476335"/>
+                  </a:lnTo>
+                  <a:lnTo>
+                    <a:pt x="1809607" y="493840"/>
+                  </a:lnTo>
+                  <a:lnTo>
+                    <a:pt x="1886239" y="511081"/>
+                  </a:lnTo>
+                  <a:lnTo>
+                    <a:pt x="1962872" y="528061"/>
+                  </a:lnTo>
+                  <a:lnTo>
+                    <a:pt x="2039504" y="544785"/>
+                  </a:lnTo>
+                  <a:lnTo>
+                    <a:pt x="2116137" y="561255"/>
+                  </a:lnTo>
+                  <a:lnTo>
+                    <a:pt x="2192769" y="577476"/>
+                  </a:lnTo>
+                  <a:lnTo>
+                    <a:pt x="2269402" y="593452"/>
+                  </a:lnTo>
+                  <a:lnTo>
+                    <a:pt x="2346034" y="609186"/>
+                  </a:lnTo>
+                  <a:lnTo>
+                    <a:pt x="2422667" y="624682"/>
+                  </a:lnTo>
+                  <a:lnTo>
+                    <a:pt x="2499300" y="639944"/>
+                  </a:lnTo>
+                  <a:lnTo>
+                    <a:pt x="2575932" y="654974"/>
+                  </a:lnTo>
+                  <a:lnTo>
+                    <a:pt x="2652565" y="669778"/>
+                  </a:lnTo>
+                  <a:lnTo>
+                    <a:pt x="2729197" y="684357"/>
+                  </a:lnTo>
+                  <a:lnTo>
+                    <a:pt x="2805830" y="698716"/>
+                  </a:lnTo>
+                  <a:lnTo>
+                    <a:pt x="2882462" y="712857"/>
+                  </a:lnTo>
+                  <a:lnTo>
+                    <a:pt x="2959095" y="726785"/>
+                  </a:lnTo>
+                  <a:lnTo>
+                    <a:pt x="3035727" y="740502"/>
+                  </a:lnTo>
+                  <a:lnTo>
+                    <a:pt x="3112360" y="754011"/>
+                  </a:lnTo>
+                  <a:lnTo>
+                    <a:pt x="3188993" y="767316"/>
+                  </a:lnTo>
+                  <a:lnTo>
+                    <a:pt x="3265625" y="780420"/>
+                  </a:lnTo>
+                  <a:lnTo>
+                    <a:pt x="3342258" y="793326"/>
+                  </a:lnTo>
+                  <a:lnTo>
+                    <a:pt x="3418890" y="806036"/>
+                  </a:lnTo>
+                  <a:lnTo>
+                    <a:pt x="3495523" y="818554"/>
+                  </a:lnTo>
+                  <a:lnTo>
+                    <a:pt x="3572155" y="830883"/>
+                  </a:lnTo>
+                  <a:lnTo>
+                    <a:pt x="3648788" y="843025"/>
+                  </a:lnTo>
+                  <a:lnTo>
+                    <a:pt x="3725420" y="854983"/>
+                  </a:lnTo>
+                  <a:lnTo>
+                    <a:pt x="3802053" y="866761"/>
+                  </a:lnTo>
+                  <a:lnTo>
+                    <a:pt x="3878685" y="878360"/>
+                  </a:lnTo>
+                  <a:lnTo>
+                    <a:pt x="3955318" y="889784"/>
+                  </a:lnTo>
+                  <a:lnTo>
+                    <a:pt x="4031951" y="901035"/>
+                  </a:lnTo>
+                  <a:lnTo>
+                    <a:pt x="4108583" y="912116"/>
+                  </a:lnTo>
+                  <a:lnTo>
+                    <a:pt x="4185216" y="923029"/>
+                  </a:lnTo>
+                  <a:lnTo>
+                    <a:pt x="4261848" y="933777"/>
+                  </a:lnTo>
+                  <a:lnTo>
+                    <a:pt x="4338481" y="944363"/>
+                  </a:lnTo>
+                  <a:lnTo>
+                    <a:pt x="4415113" y="954788"/>
+                  </a:lnTo>
+                  <a:lnTo>
+                    <a:pt x="4491746" y="965056"/>
+                  </a:lnTo>
+                  <a:lnTo>
+                    <a:pt x="4568378" y="975168"/>
+                  </a:lnTo>
+                  <a:lnTo>
+                    <a:pt x="4645011" y="985128"/>
+                  </a:lnTo>
+                  <a:lnTo>
+                    <a:pt x="4721644" y="994936"/>
+                  </a:lnTo>
+                  <a:lnTo>
+                    <a:pt x="4798276" y="1004597"/>
+                  </a:lnTo>
+                  <a:lnTo>
+                    <a:pt x="4874909" y="1014111"/>
+                  </a:lnTo>
+                  <a:lnTo>
+                    <a:pt x="4951541" y="1023481"/>
+                  </a:lnTo>
+                  <a:lnTo>
+                    <a:pt x="5028174" y="1032709"/>
+                  </a:lnTo>
+                  <a:lnTo>
+                    <a:pt x="5104806" y="1041798"/>
+                  </a:lnTo>
+                  <a:lnTo>
+                    <a:pt x="5181439" y="1050750"/>
+                  </a:lnTo>
+                  <a:lnTo>
+                    <a:pt x="5258071" y="1059566"/>
+                  </a:lnTo>
+                  <a:lnTo>
+                    <a:pt x="5334704" y="1068248"/>
+                  </a:lnTo>
+                  <a:lnTo>
+                    <a:pt x="5411336" y="1076799"/>
+                  </a:lnTo>
+                  <a:lnTo>
+                    <a:pt x="5487969" y="1085221"/>
+                  </a:lnTo>
+                  <a:lnTo>
+                    <a:pt x="5564602" y="1093516"/>
+                  </a:lnTo>
+                  <a:lnTo>
+                    <a:pt x="5641234" y="1101685"/>
+                  </a:lnTo>
+                  <a:lnTo>
+                    <a:pt x="5717867" y="1109730"/>
+                  </a:lnTo>
+                  <a:lnTo>
+                    <a:pt x="5794499" y="1117654"/>
+                  </a:lnTo>
+                  <a:lnTo>
+                    <a:pt x="5871132" y="1125457"/>
+                  </a:lnTo>
+                  <a:lnTo>
+                    <a:pt x="5947764" y="1133143"/>
+                  </a:lnTo>
+                  <a:lnTo>
+                    <a:pt x="6024397" y="1140713"/>
+                  </a:lnTo>
+                  <a:lnTo>
+                    <a:pt x="6101029" y="1148168"/>
+                  </a:lnTo>
+                  <a:lnTo>
+                    <a:pt x="6177662" y="1155510"/>
+                  </a:lnTo>
+                  <a:lnTo>
+                    <a:pt x="6254294" y="1162741"/>
+                  </a:lnTo>
+                  <a:lnTo>
+                    <a:pt x="6330927" y="1169863"/>
+                  </a:lnTo>
+                  <a:lnTo>
+                    <a:pt x="6407560" y="1176877"/>
+                  </a:lnTo>
+                  <a:lnTo>
+                    <a:pt x="6484192" y="1183785"/>
+                  </a:lnTo>
+                  <a:lnTo>
+                    <a:pt x="6560825" y="1190588"/>
+                  </a:lnTo>
+                  <a:lnTo>
+                    <a:pt x="6637457" y="1197288"/>
+                  </a:lnTo>
+                  <a:lnTo>
+                    <a:pt x="6714090" y="1203887"/>
+                  </a:lnTo>
+                  <a:lnTo>
+                    <a:pt x="6790722" y="1210387"/>
+                  </a:lnTo>
+                  <a:lnTo>
+                    <a:pt x="6867355" y="1216788"/>
+                  </a:lnTo>
+                  <a:lnTo>
+                    <a:pt x="6943987" y="1223092"/>
+                  </a:lnTo>
+                  <a:lnTo>
+                    <a:pt x="7020620" y="1229300"/>
+                  </a:lnTo>
+                  <a:lnTo>
+                    <a:pt x="7097253" y="1235415"/>
+                  </a:lnTo>
+                  <a:lnTo>
+                    <a:pt x="7173885" y="1241437"/>
+                  </a:lnTo>
+                  <a:lnTo>
+                    <a:pt x="7250518" y="1247369"/>
+                  </a:lnTo>
+                  <a:lnTo>
+                    <a:pt x="7327150" y="1253210"/>
+                  </a:lnTo>
+                  <a:lnTo>
+                    <a:pt x="7403783" y="1258963"/>
                   </a:lnTo>
                 </a:path>
               </a:pathLst>
@@ -4581,7 +4581,7 @@
           </p:nvSpPr>
           <p:spPr>
             <a:xfrm>
-              <a:off x="817517" y="4679530"/>
+              <a:off x="817517" y="4727786"/>
               <a:ext cx="7799693" cy="0"/>
             </a:xfrm>
             <a:custGeom>
@@ -4624,15 +4624,15 @@
           </p:nvSpPr>
           <p:spPr>
             <a:xfrm>
-              <a:off x="4224261" y="1896563"/>
-              <a:ext cx="0" cy="3826579"/>
+              <a:off x="4224261" y="2073503"/>
+              <a:ext cx="0" cy="3649639"/>
             </a:xfrm>
             <a:custGeom>
               <a:avLst/>
               <a:pathLst>
-                <a:path w="0" h="3826579">
+                <a:path w="0" h="3649639">
                   <a:moveTo>
-                    <a:pt x="0" y="3826579"/>
+                    <a:pt x="0" y="3649639"/>
                   </a:moveTo>
                   <a:lnTo>
                     <a:pt x="0" y="0"/>
@@ -4667,7 +4667,7 @@
           </p:nvSpPr>
           <p:spPr>
             <a:xfrm>
-              <a:off x="692708" y="5509156"/>
+              <a:off x="692708" y="5517199"/>
               <a:ext cx="62179" cy="80101"/>
             </a:xfrm>
             <a:prstGeom prst="rect">
@@ -4713,7 +4713,7 @@
           </p:nvSpPr>
           <p:spPr>
             <a:xfrm>
-              <a:off x="692708" y="4639479"/>
+              <a:off x="692708" y="4687735"/>
               <a:ext cx="62179" cy="80101"/>
             </a:xfrm>
             <a:prstGeom prst="rect">
@@ -4759,7 +4759,7 @@
           </p:nvSpPr>
           <p:spPr>
             <a:xfrm>
-              <a:off x="692708" y="3769802"/>
+              <a:off x="692708" y="3858272"/>
               <a:ext cx="62179" cy="80101"/>
             </a:xfrm>
             <a:prstGeom prst="rect">
@@ -4805,7 +4805,7 @@
           </p:nvSpPr>
           <p:spPr>
             <a:xfrm>
-              <a:off x="692708" y="2900125"/>
+              <a:off x="692708" y="3028808"/>
               <a:ext cx="62179" cy="80101"/>
             </a:xfrm>
             <a:prstGeom prst="rect">
@@ -4851,7 +4851,7 @@
           </p:nvSpPr>
           <p:spPr>
             <a:xfrm>
-              <a:off x="692708" y="2030448"/>
+              <a:off x="692708" y="2199345"/>
               <a:ext cx="62179" cy="80101"/>
             </a:xfrm>
             <a:prstGeom prst="rect">
@@ -5127,7 +5127,7 @@
           </p:nvSpPr>
           <p:spPr>
             <a:xfrm rot="-5400000">
-              <a:off x="68446" y="3759743"/>
+              <a:off x="68446" y="3848213"/>
               <a:ext cx="1016904" cy="100218"/>
             </a:xfrm>
             <a:prstGeom prst="rect">
@@ -5168,6 +5168,52 @@
         <p:sp>
           <p:nvSpPr>
             <p:cNvPr id="38" name="tx38"/>
+            <p:cNvSpPr/>
+            <p:nvPr/>
+          </p:nvSpPr>
+          <p:spPr>
+            <a:xfrm>
+              <a:off x="817517" y="1896563"/>
+              <a:ext cx="5626211" cy="82021"/>
+            </a:xfrm>
+            <a:prstGeom prst="rect">
+              <a:avLst/>
+            </a:prstGeom>
+            <a:noFill/>
+          </p:spPr>
+          <p:txBody>
+            <a:bodyPr lIns="0" rIns="0" tIns="0" bIns="0" anchorCtr="1" anchor="ctr" wrap="none"/>
+            <a:lstStyle/>
+            <a:p>
+              <a:pPr algn="l" marL="0" marR="0" indent="0">
+                <a:lnSpc>
+                  <a:spcPts val="900"/>
+                </a:lnSpc>
+                <a:spcBef>
+                  <a:spcPts val="0"/>
+                </a:spcBef>
+                <a:spcAft>
+                  <a:spcPts val="0"/>
+                </a:spcAft>
+              </a:pPr>
+              <a:r>
+                <a:rPr sz="900">
+                  <a:solidFill>
+                    <a:srgbClr val="404040">
+                      <a:alpha val="100000"/>
+                    </a:srgbClr>
+                  </a:solidFill>
+                  <a:latin typeface="Helvetica"/>
+                  <a:cs typeface="Helvetica"/>
+                </a:rPr>
+                <a:t>subHR per 0.1 ratio decline: 1.19 (0.97-1.47)  |  per IQR decline (Δ = 0.30): 1.69 (0.91-3.16)  |  IQR: [0.85, 1.15]</a:t>
+              </a:r>
+            </a:p>
+          </p:txBody>
+        </p:sp>
+        <p:sp>
+          <p:nvSpPr>
+            <p:cNvPr id="39" name="tx39"/>
             <p:cNvSpPr/>
             <p:nvPr/>
           </p:nvSpPr>

--- a/docs/pptx/carbo/jx-carbo-linsubhr-ratio-hosp-immune-other.pptx
+++ b/docs/pptx/carbo/jx-carbo-linsubhr-ratio-hosp-immune-other.pptx
@@ -5174,7 +5174,7 @@
           <p:spPr>
             <a:xfrm>
               <a:off x="817517" y="1896563"/>
-              <a:ext cx="5626211" cy="82021"/>
+              <a:ext cx="6169365" cy="82021"/>
             </a:xfrm>
             <a:prstGeom prst="rect">
               <a:avLst/>
@@ -5206,7 +5206,7 @@
                   <a:latin typeface="Helvetica"/>
                   <a:cs typeface="Helvetica"/>
                 </a:rPr>
-                <a:t>subHR per 0.1 ratio decline: 1.19 (0.97-1.47)  |  per IQR decline (Δ = 0.30): 1.69 (0.91-3.16)  |  IQR: [0.85, 1.15]</a:t>
+                <a:t>subHR per 0.1 ratio decline: 1.19 (0.97-1.47), p = 0.097  |  per IQR decline (Δ = 0.30): 1.69 (0.91-3.16)  |  IQR: [0.85, 1.15]</a:t>
               </a:r>
             </a:p>
           </p:txBody>

--- a/docs/pptx/carbo/jx-carbo-linsubhr-ratio-hosp-immune-other.pptx
+++ b/docs/pptx/carbo/jx-carbo-linsubhr-ratio-hosp-immune-other.pptx
@@ -2443,7 +2443,7 @@
           </p:nvSpPr>
           <p:spPr>
             <a:xfrm>
-              <a:off x="1615213" y="2073503"/>
+              <a:off x="1467192" y="2073503"/>
               <a:ext cx="0" cy="3649639"/>
             </a:xfrm>
             <a:custGeom>
@@ -2486,7 +2486,7 @@
           </p:nvSpPr>
           <p:spPr>
             <a:xfrm>
-              <a:off x="3387871" y="2073503"/>
+              <a:off x="3538150" y="2073503"/>
               <a:ext cx="0" cy="3649639"/>
             </a:xfrm>
             <a:custGeom>
@@ -2529,7 +2529,7 @@
           </p:nvSpPr>
           <p:spPr>
             <a:xfrm>
-              <a:off x="5160528" y="2073503"/>
+              <a:off x="5609107" y="2073503"/>
               <a:ext cx="0" cy="3649639"/>
             </a:xfrm>
             <a:custGeom>
@@ -2572,7 +2572,7 @@
           </p:nvSpPr>
           <p:spPr>
             <a:xfrm>
-              <a:off x="6933186" y="2073503"/>
+              <a:off x="7680065" y="2073503"/>
               <a:ext cx="0" cy="3649639"/>
             </a:xfrm>
             <a:custGeom>
@@ -2830,7 +2830,7 @@
           </p:nvSpPr>
           <p:spPr>
             <a:xfrm>
-              <a:off x="2501542" y="2073503"/>
+              <a:off x="2502671" y="2073503"/>
               <a:ext cx="0" cy="3649639"/>
             </a:xfrm>
             <a:custGeom>
@@ -2873,7 +2873,7 @@
           </p:nvSpPr>
           <p:spPr>
             <a:xfrm>
-              <a:off x="4274200" y="2073503"/>
+              <a:off x="4573628" y="2073503"/>
               <a:ext cx="0" cy="3649639"/>
             </a:xfrm>
             <a:custGeom>
@@ -2916,7 +2916,7 @@
           </p:nvSpPr>
           <p:spPr>
             <a:xfrm>
-              <a:off x="6046857" y="2073503"/>
+              <a:off x="6644586" y="2073503"/>
               <a:ext cx="0" cy="3649639"/>
             </a:xfrm>
             <a:custGeom>
@@ -2953,646 +2953,609 @@
         </p:sp>
         <p:sp>
           <p:nvSpPr>
-            <p:cNvPr id="20" name="pl20"/>
+            <p:cNvPr id="20" name="pg20"/>
             <p:cNvSpPr/>
             <p:nvPr/>
           </p:nvSpPr>
           <p:spPr>
             <a:xfrm>
-              <a:off x="7819515" y="2073503"/>
-              <a:ext cx="0" cy="3649639"/>
+              <a:off x="1172049" y="2073503"/>
+              <a:ext cx="7090630" cy="3337449"/>
             </a:xfrm>
             <a:custGeom>
               <a:avLst/>
               <a:pathLst>
-                <a:path w="0" h="3649639">
+                <a:path w="7090630" h="3337449">
                   <a:moveTo>
-                    <a:pt x="0" y="3649639"/>
+                    <a:pt x="265439" y="0"/>
                   </a:moveTo>
                   <a:lnTo>
-                    <a:pt x="0" y="0"/>
-                  </a:lnTo>
-                  <a:lnTo>
-                    <a:pt x="0" y="0"/>
-                  </a:lnTo>
-                </a:path>
-              </a:pathLst>
-            </a:custGeom>
-            <a:ln w="13550" cap="flat">
-              <a:solidFill>
-                <a:srgbClr val="EBEBEB">
-                  <a:alpha val="100000"/>
-                </a:srgbClr>
-              </a:solidFill>
-              <a:prstDash val="solid"/>
-              <a:round/>
-            </a:ln>
-          </p:spPr>
-          <p:txBody>
-            <a:bodyPr/>
-            <a:lstStyle/>
-            <a:p/>
-          </p:txBody>
-        </p:sp>
-        <p:sp>
-          <p:nvSpPr>
-            <p:cNvPr id="21" name="pg21"/>
-            <p:cNvSpPr/>
-            <p:nvPr/>
-          </p:nvSpPr>
-          <p:spPr>
-            <a:xfrm>
-              <a:off x="817517" y="2073503"/>
-              <a:ext cx="7403783" cy="3337449"/>
-            </a:xfrm>
-            <a:custGeom>
-              <a:avLst/>
-              <a:pathLst>
-                <a:path w="7403783" h="3337449">
-                  <a:moveTo>
-                    <a:pt x="101168" y="0"/>
-                  </a:moveTo>
-                  <a:lnTo>
-                    <a:pt x="123691" y="34293"/>
-                  </a:lnTo>
-                  <a:lnTo>
-                    <a:pt x="200323" y="147157"/>
-                  </a:lnTo>
-                  <a:lnTo>
-                    <a:pt x="276956" y="256328"/>
-                  </a:lnTo>
-                  <a:lnTo>
-                    <a:pt x="353588" y="361927"/>
-                  </a:lnTo>
-                  <a:lnTo>
-                    <a:pt x="430221" y="464071"/>
-                  </a:lnTo>
-                  <a:lnTo>
-                    <a:pt x="506853" y="562873"/>
-                  </a:lnTo>
-                  <a:lnTo>
-                    <a:pt x="583486" y="658442"/>
-                  </a:lnTo>
-                  <a:lnTo>
-                    <a:pt x="660118" y="750884"/>
-                  </a:lnTo>
-                  <a:lnTo>
-                    <a:pt x="736751" y="840302"/>
-                  </a:lnTo>
-                  <a:lnTo>
-                    <a:pt x="813384" y="926794"/>
-                  </a:lnTo>
-                  <a:lnTo>
-                    <a:pt x="890016" y="1010456"/>
-                  </a:lnTo>
-                  <a:lnTo>
-                    <a:pt x="966649" y="1091380"/>
-                  </a:lnTo>
-                  <a:lnTo>
-                    <a:pt x="1043281" y="1169657"/>
-                  </a:lnTo>
-                  <a:lnTo>
-                    <a:pt x="1119914" y="1245372"/>
-                  </a:lnTo>
-                  <a:lnTo>
-                    <a:pt x="1196546" y="1318611"/>
-                  </a:lnTo>
-                  <a:lnTo>
-                    <a:pt x="1273179" y="1389453"/>
-                  </a:lnTo>
-                  <a:lnTo>
-                    <a:pt x="1349811" y="1457976"/>
-                  </a:lnTo>
-                  <a:lnTo>
-                    <a:pt x="1426444" y="1524258"/>
-                  </a:lnTo>
-                  <a:lnTo>
-                    <a:pt x="1503076" y="1588372"/>
-                  </a:lnTo>
-                  <a:lnTo>
-                    <a:pt x="1579709" y="1650387"/>
-                  </a:lnTo>
-                  <a:lnTo>
-                    <a:pt x="1656342" y="1710374"/>
-                  </a:lnTo>
-                  <a:lnTo>
-                    <a:pt x="1732974" y="1768397"/>
-                  </a:lnTo>
-                  <a:lnTo>
-                    <a:pt x="1809607" y="1824522"/>
-                  </a:lnTo>
-                  <a:lnTo>
-                    <a:pt x="1886239" y="1878811"/>
-                  </a:lnTo>
-                  <a:lnTo>
-                    <a:pt x="1962872" y="1931324"/>
-                  </a:lnTo>
-                  <a:lnTo>
-                    <a:pt x="2039504" y="1982118"/>
-                  </a:lnTo>
-                  <a:lnTo>
-                    <a:pt x="2116137" y="2031250"/>
-                  </a:lnTo>
-                  <a:lnTo>
-                    <a:pt x="2192769" y="2078775"/>
-                  </a:lnTo>
-                  <a:lnTo>
-                    <a:pt x="2269402" y="2124745"/>
-                  </a:lnTo>
-                  <a:lnTo>
-                    <a:pt x="2346034" y="2169210"/>
-                  </a:lnTo>
-                  <a:lnTo>
-                    <a:pt x="2422667" y="2212221"/>
-                  </a:lnTo>
-                  <a:lnTo>
-                    <a:pt x="2499300" y="2253825"/>
-                  </a:lnTo>
-                  <a:lnTo>
-                    <a:pt x="2575932" y="2294067"/>
-                  </a:lnTo>
-                  <a:lnTo>
-                    <a:pt x="2652565" y="2332993"/>
-                  </a:lnTo>
-                  <a:lnTo>
-                    <a:pt x="2729197" y="2370645"/>
-                  </a:lnTo>
-                  <a:lnTo>
-                    <a:pt x="2805830" y="2407065"/>
-                  </a:lnTo>
-                  <a:lnTo>
-                    <a:pt x="2882462" y="2442293"/>
-                  </a:lnTo>
-                  <a:lnTo>
-                    <a:pt x="2959095" y="2476369"/>
-                  </a:lnTo>
-                  <a:lnTo>
-                    <a:pt x="3035727" y="2509329"/>
-                  </a:lnTo>
-                  <a:lnTo>
-                    <a:pt x="3112360" y="2541212"/>
-                  </a:lnTo>
-                  <a:lnTo>
-                    <a:pt x="3188993" y="2572051"/>
-                  </a:lnTo>
-                  <a:lnTo>
-                    <a:pt x="3265625" y="2601881"/>
-                  </a:lnTo>
-                  <a:lnTo>
-                    <a:pt x="3342258" y="2630735"/>
-                  </a:lnTo>
-                  <a:lnTo>
-                    <a:pt x="3418890" y="2653917"/>
-                  </a:lnTo>
-                  <a:lnTo>
-                    <a:pt x="3495523" y="2651608"/>
-                  </a:lnTo>
-                  <a:lnTo>
-                    <a:pt x="3572155" y="2649292"/>
-                  </a:lnTo>
-                  <a:lnTo>
-                    <a:pt x="3648788" y="2646970"/>
-                  </a:lnTo>
-                  <a:lnTo>
-                    <a:pt x="3725420" y="2644642"/>
-                  </a:lnTo>
-                  <a:lnTo>
-                    <a:pt x="3802053" y="2642306"/>
-                  </a:lnTo>
-                  <a:lnTo>
-                    <a:pt x="3878685" y="2639965"/>
-                  </a:lnTo>
-                  <a:lnTo>
-                    <a:pt x="3955318" y="2637617"/>
-                  </a:lnTo>
-                  <a:lnTo>
-                    <a:pt x="4031951" y="2635262"/>
-                  </a:lnTo>
-                  <a:lnTo>
-                    <a:pt x="4108583" y="2632901"/>
-                  </a:lnTo>
-                  <a:lnTo>
-                    <a:pt x="4185216" y="2630533"/>
-                  </a:lnTo>
-                  <a:lnTo>
-                    <a:pt x="4261848" y="2628159"/>
-                  </a:lnTo>
-                  <a:lnTo>
-                    <a:pt x="4338481" y="2625778"/>
-                  </a:lnTo>
-                  <a:lnTo>
-                    <a:pt x="4415113" y="2623390"/>
-                  </a:lnTo>
-                  <a:lnTo>
-                    <a:pt x="4491746" y="2620996"/>
-                  </a:lnTo>
-                  <a:lnTo>
-                    <a:pt x="4568378" y="2618595"/>
-                  </a:lnTo>
-                  <a:lnTo>
-                    <a:pt x="4645011" y="2616187"/>
-                  </a:lnTo>
-                  <a:lnTo>
-                    <a:pt x="4721644" y="2613773"/>
-                  </a:lnTo>
-                  <a:lnTo>
-                    <a:pt x="4798276" y="2611352"/>
-                  </a:lnTo>
-                  <a:lnTo>
-                    <a:pt x="4874909" y="2608924"/>
-                  </a:lnTo>
-                  <a:lnTo>
-                    <a:pt x="4951541" y="2606490"/>
-                  </a:lnTo>
-                  <a:lnTo>
-                    <a:pt x="5028174" y="2604048"/>
-                  </a:lnTo>
-                  <a:lnTo>
-                    <a:pt x="5104806" y="2601600"/>
-                  </a:lnTo>
-                  <a:lnTo>
-                    <a:pt x="5181439" y="2599146"/>
-                  </a:lnTo>
-                  <a:lnTo>
-                    <a:pt x="5258071" y="2596684"/>
-                  </a:lnTo>
-                  <a:lnTo>
-                    <a:pt x="5334704" y="2594215"/>
-                  </a:lnTo>
-                  <a:lnTo>
-                    <a:pt x="5411336" y="2591740"/>
-                  </a:lnTo>
-                  <a:lnTo>
-                    <a:pt x="5487969" y="2589257"/>
-                  </a:lnTo>
-                  <a:lnTo>
-                    <a:pt x="5564602" y="2586768"/>
-                  </a:lnTo>
-                  <a:lnTo>
-                    <a:pt x="5641234" y="2584272"/>
-                  </a:lnTo>
-                  <a:lnTo>
-                    <a:pt x="5717867" y="2581769"/>
-                  </a:lnTo>
-                  <a:lnTo>
-                    <a:pt x="5794499" y="2579259"/>
-                  </a:lnTo>
-                  <a:lnTo>
-                    <a:pt x="5871132" y="2576742"/>
-                  </a:lnTo>
-                  <a:lnTo>
-                    <a:pt x="5947764" y="2574218"/>
-                  </a:lnTo>
-                  <a:lnTo>
-                    <a:pt x="6024397" y="2571687"/>
-                  </a:lnTo>
-                  <a:lnTo>
-                    <a:pt x="6101029" y="2569149"/>
-                  </a:lnTo>
-                  <a:lnTo>
-                    <a:pt x="6177662" y="2566603"/>
-                  </a:lnTo>
-                  <a:lnTo>
-                    <a:pt x="6254294" y="2564051"/>
-                  </a:lnTo>
-                  <a:lnTo>
-                    <a:pt x="6330927" y="2561492"/>
-                  </a:lnTo>
-                  <a:lnTo>
-                    <a:pt x="6407560" y="2558925"/>
-                  </a:lnTo>
-                  <a:lnTo>
-                    <a:pt x="6484192" y="2556351"/>
-                  </a:lnTo>
-                  <a:lnTo>
-                    <a:pt x="6560825" y="2553771"/>
-                  </a:lnTo>
-                  <a:lnTo>
-                    <a:pt x="6637457" y="2551183"/>
-                  </a:lnTo>
-                  <a:lnTo>
-                    <a:pt x="6714090" y="2548587"/>
-                  </a:lnTo>
-                  <a:lnTo>
-                    <a:pt x="6790722" y="2545985"/>
-                  </a:lnTo>
-                  <a:lnTo>
-                    <a:pt x="6867355" y="2543375"/>
-                  </a:lnTo>
-                  <a:lnTo>
-                    <a:pt x="6943987" y="2540758"/>
-                  </a:lnTo>
-                  <a:lnTo>
-                    <a:pt x="7020620" y="2538134"/>
-                  </a:lnTo>
-                  <a:lnTo>
-                    <a:pt x="7097253" y="2535503"/>
-                  </a:lnTo>
-                  <a:lnTo>
-                    <a:pt x="7173885" y="2532864"/>
-                  </a:lnTo>
-                  <a:lnTo>
-                    <a:pt x="7250518" y="2530218"/>
-                  </a:lnTo>
-                  <a:lnTo>
-                    <a:pt x="7327150" y="2527564"/>
-                  </a:lnTo>
-                  <a:lnTo>
-                    <a:pt x="7403783" y="2524903"/>
-                  </a:lnTo>
-                  <a:lnTo>
-                    <a:pt x="7403783" y="3337449"/>
-                  </a:lnTo>
-                  <a:lnTo>
-                    <a:pt x="7327150" y="3332500"/>
-                  </a:lnTo>
-                  <a:lnTo>
-                    <a:pt x="7250518" y="3327384"/>
-                  </a:lnTo>
-                  <a:lnTo>
-                    <a:pt x="7173885" y="3322095"/>
-                  </a:lnTo>
-                  <a:lnTo>
-                    <a:pt x="7097253" y="3316627"/>
-                  </a:lnTo>
-                  <a:lnTo>
-                    <a:pt x="7020620" y="3310974"/>
-                  </a:lnTo>
-                  <a:lnTo>
-                    <a:pt x="6943987" y="3305130"/>
-                  </a:lnTo>
-                  <a:lnTo>
-                    <a:pt x="6867355" y="3299088"/>
-                  </a:lnTo>
-                  <a:lnTo>
-                    <a:pt x="6790722" y="3292842"/>
-                  </a:lnTo>
-                  <a:lnTo>
-                    <a:pt x="6714090" y="3286384"/>
-                  </a:lnTo>
-                  <a:lnTo>
-                    <a:pt x="6637457" y="3279708"/>
-                  </a:lnTo>
-                  <a:lnTo>
-                    <a:pt x="6560825" y="3272806"/>
-                  </a:lnTo>
-                  <a:lnTo>
-                    <a:pt x="6484192" y="3265671"/>
-                  </a:lnTo>
-                  <a:lnTo>
-                    <a:pt x="6407560" y="3258294"/>
-                  </a:lnTo>
-                  <a:lnTo>
-                    <a:pt x="6330927" y="3250668"/>
-                  </a:lnTo>
-                  <a:lnTo>
-                    <a:pt x="6254294" y="3242784"/>
-                  </a:lnTo>
-                  <a:lnTo>
-                    <a:pt x="6177662" y="3234633"/>
-                  </a:lnTo>
-                  <a:lnTo>
-                    <a:pt x="6101029" y="3226207"/>
-                  </a:lnTo>
-                  <a:lnTo>
-                    <a:pt x="6024397" y="3217495"/>
-                  </a:lnTo>
-                  <a:lnTo>
-                    <a:pt x="5947764" y="3208489"/>
-                  </a:lnTo>
-                  <a:lnTo>
-                    <a:pt x="5871132" y="3199178"/>
-                  </a:lnTo>
-                  <a:lnTo>
-                    <a:pt x="5794499" y="3189552"/>
-                  </a:lnTo>
-                  <a:lnTo>
-                    <a:pt x="5717867" y="3179601"/>
-                  </a:lnTo>
-                  <a:lnTo>
-                    <a:pt x="5641234" y="3169312"/>
-                  </a:lnTo>
-                  <a:lnTo>
-                    <a:pt x="5564602" y="3158676"/>
-                  </a:lnTo>
-                  <a:lnTo>
-                    <a:pt x="5487969" y="3147680"/>
-                  </a:lnTo>
-                  <a:lnTo>
-                    <a:pt x="5411336" y="3136313"/>
-                  </a:lnTo>
-                  <a:lnTo>
-                    <a:pt x="5334704" y="3124560"/>
-                  </a:lnTo>
-                  <a:lnTo>
-                    <a:pt x="5258071" y="3112410"/>
-                  </a:lnTo>
-                  <a:lnTo>
-                    <a:pt x="5181439" y="3099850"/>
-                  </a:lnTo>
-                  <a:lnTo>
-                    <a:pt x="5104806" y="3086864"/>
-                  </a:lnTo>
-                  <a:lnTo>
-                    <a:pt x="5028174" y="3073439"/>
-                  </a:lnTo>
-                  <a:lnTo>
-                    <a:pt x="4951541" y="3059560"/>
-                  </a:lnTo>
-                  <a:lnTo>
-                    <a:pt x="4874909" y="3045211"/>
-                  </a:lnTo>
-                  <a:lnTo>
-                    <a:pt x="4798276" y="3030377"/>
-                  </a:lnTo>
-                  <a:lnTo>
-                    <a:pt x="4721644" y="3015041"/>
-                  </a:lnTo>
-                  <a:lnTo>
-                    <a:pt x="4645011" y="2999187"/>
-                  </a:lnTo>
-                  <a:lnTo>
-                    <a:pt x="4568378" y="2982796"/>
-                  </a:lnTo>
-                  <a:lnTo>
-                    <a:pt x="4491746" y="2965851"/>
-                  </a:lnTo>
-                  <a:lnTo>
-                    <a:pt x="4415113" y="2948333"/>
-                  </a:lnTo>
-                  <a:lnTo>
-                    <a:pt x="4338481" y="2930222"/>
-                  </a:lnTo>
-                  <a:lnTo>
-                    <a:pt x="4261848" y="2911498"/>
-                  </a:lnTo>
-                  <a:lnTo>
-                    <a:pt x="4185216" y="2892141"/>
-                  </a:lnTo>
-                  <a:lnTo>
-                    <a:pt x="4108583" y="2872129"/>
-                  </a:lnTo>
-                  <a:lnTo>
-                    <a:pt x="4031951" y="2851441"/>
-                  </a:lnTo>
-                  <a:lnTo>
-                    <a:pt x="3955318" y="2830052"/>
-                  </a:lnTo>
-                  <a:lnTo>
-                    <a:pt x="3878685" y="2807940"/>
-                  </a:lnTo>
-                  <a:lnTo>
-                    <a:pt x="3802053" y="2785080"/>
-                  </a:lnTo>
-                  <a:lnTo>
-                    <a:pt x="3725420" y="2761447"/>
-                  </a:lnTo>
-                  <a:lnTo>
-                    <a:pt x="3648788" y="2737014"/>
-                  </a:lnTo>
-                  <a:lnTo>
-                    <a:pt x="3572155" y="2711755"/>
-                  </a:lnTo>
-                  <a:lnTo>
-                    <a:pt x="3495523" y="2685642"/>
-                  </a:lnTo>
-                  <a:lnTo>
-                    <a:pt x="3418890" y="2658645"/>
-                  </a:lnTo>
-                  <a:lnTo>
-                    <a:pt x="3342258" y="2656220"/>
-                  </a:lnTo>
-                  <a:lnTo>
-                    <a:pt x="3265625" y="2658517"/>
-                  </a:lnTo>
-                  <a:lnTo>
-                    <a:pt x="3188993" y="2660807"/>
-                  </a:lnTo>
-                  <a:lnTo>
-                    <a:pt x="3112360" y="2663091"/>
-                  </a:lnTo>
-                  <a:lnTo>
-                    <a:pt x="3035727" y="2665368"/>
-                  </a:lnTo>
-                  <a:lnTo>
-                    <a:pt x="2959095" y="2667639"/>
-                  </a:lnTo>
-                  <a:lnTo>
-                    <a:pt x="2882462" y="2669904"/>
-                  </a:lnTo>
-                  <a:lnTo>
-                    <a:pt x="2805830" y="2672163"/>
-                  </a:lnTo>
-                  <a:lnTo>
-                    <a:pt x="2729197" y="2674415"/>
-                  </a:lnTo>
-                  <a:lnTo>
-                    <a:pt x="2652565" y="2676661"/>
-                  </a:lnTo>
-                  <a:lnTo>
-                    <a:pt x="2575932" y="2678901"/>
-                  </a:lnTo>
-                  <a:lnTo>
-                    <a:pt x="2499300" y="2681134"/>
-                  </a:lnTo>
-                  <a:lnTo>
-                    <a:pt x="2422667" y="2683362"/>
-                  </a:lnTo>
-                  <a:lnTo>
-                    <a:pt x="2346034" y="2685583"/>
-                  </a:lnTo>
-                  <a:lnTo>
-                    <a:pt x="2269402" y="2687798"/>
-                  </a:lnTo>
-                  <a:lnTo>
-                    <a:pt x="2192769" y="2690007"/>
-                  </a:lnTo>
-                  <a:lnTo>
-                    <a:pt x="2116137" y="2692209"/>
-                  </a:lnTo>
-                  <a:lnTo>
-                    <a:pt x="2039504" y="2694406"/>
-                  </a:lnTo>
-                  <a:lnTo>
-                    <a:pt x="1962872" y="2696596"/>
-                  </a:lnTo>
-                  <a:lnTo>
-                    <a:pt x="1886239" y="2698781"/>
-                  </a:lnTo>
-                  <a:lnTo>
-                    <a:pt x="1809607" y="2700959"/>
-                  </a:lnTo>
-                  <a:lnTo>
-                    <a:pt x="1732974" y="2703132"/>
-                  </a:lnTo>
-                  <a:lnTo>
-                    <a:pt x="1656342" y="2705298"/>
-                  </a:lnTo>
-                  <a:lnTo>
-                    <a:pt x="1579709" y="2707458"/>
-                  </a:lnTo>
-                  <a:lnTo>
-                    <a:pt x="1503076" y="2709613"/>
-                  </a:lnTo>
-                  <a:lnTo>
-                    <a:pt x="1426444" y="2711761"/>
-                  </a:lnTo>
-                  <a:lnTo>
-                    <a:pt x="1349811" y="2713903"/>
-                  </a:lnTo>
-                  <a:lnTo>
-                    <a:pt x="1273179" y="2716040"/>
-                  </a:lnTo>
-                  <a:lnTo>
-                    <a:pt x="1196546" y="2718170"/>
-                  </a:lnTo>
-                  <a:lnTo>
-                    <a:pt x="1119914" y="2720295"/>
-                  </a:lnTo>
-                  <a:lnTo>
-                    <a:pt x="1043281" y="2722413"/>
-                  </a:lnTo>
-                  <a:lnTo>
-                    <a:pt x="966649" y="2724526"/>
-                  </a:lnTo>
-                  <a:lnTo>
-                    <a:pt x="890016" y="2726633"/>
-                  </a:lnTo>
-                  <a:lnTo>
-                    <a:pt x="813384" y="2728734"/>
-                  </a:lnTo>
-                  <a:lnTo>
-                    <a:pt x="736751" y="2730830"/>
-                  </a:lnTo>
-                  <a:lnTo>
-                    <a:pt x="660118" y="2732919"/>
-                  </a:lnTo>
-                  <a:lnTo>
-                    <a:pt x="583486" y="2735003"/>
-                  </a:lnTo>
-                  <a:lnTo>
-                    <a:pt x="506853" y="2737081"/>
-                  </a:lnTo>
-                  <a:lnTo>
-                    <a:pt x="430221" y="2739153"/>
-                  </a:lnTo>
-                  <a:lnTo>
-                    <a:pt x="353588" y="2741219"/>
-                  </a:lnTo>
-                  <a:lnTo>
-                    <a:pt x="276956" y="2743280"/>
-                  </a:lnTo>
-                  <a:lnTo>
-                    <a:pt x="200323" y="2745334"/>
-                  </a:lnTo>
-                  <a:lnTo>
-                    <a:pt x="123691" y="2747384"/>
-                  </a:lnTo>
-                  <a:lnTo>
-                    <a:pt x="47058" y="2749427"/>
-                  </a:lnTo>
-                  <a:lnTo>
-                    <a:pt x="0" y="2750679"/>
+                    <a:pt x="286490" y="34293"/>
+                  </a:lnTo>
+                  <a:lnTo>
+                    <a:pt x="358112" y="147157"/>
+                  </a:lnTo>
+                  <a:lnTo>
+                    <a:pt x="429735" y="256328"/>
+                  </a:lnTo>
+                  <a:lnTo>
+                    <a:pt x="501357" y="361927"/>
+                  </a:lnTo>
+                  <a:lnTo>
+                    <a:pt x="572980" y="464071"/>
+                  </a:lnTo>
+                  <a:lnTo>
+                    <a:pt x="644602" y="562873"/>
+                  </a:lnTo>
+                  <a:lnTo>
+                    <a:pt x="716225" y="658442"/>
+                  </a:lnTo>
+                  <a:lnTo>
+                    <a:pt x="787847" y="750884"/>
+                  </a:lnTo>
+                  <a:lnTo>
+                    <a:pt x="859470" y="840302"/>
+                  </a:lnTo>
+                  <a:lnTo>
+                    <a:pt x="931092" y="926794"/>
+                  </a:lnTo>
+                  <a:lnTo>
+                    <a:pt x="1002715" y="1010456"/>
+                  </a:lnTo>
+                  <a:lnTo>
+                    <a:pt x="1074337" y="1091380"/>
+                  </a:lnTo>
+                  <a:lnTo>
+                    <a:pt x="1145960" y="1169657"/>
+                  </a:lnTo>
+                  <a:lnTo>
+                    <a:pt x="1217582" y="1245372"/>
+                  </a:lnTo>
+                  <a:lnTo>
+                    <a:pt x="1289205" y="1318611"/>
+                  </a:lnTo>
+                  <a:lnTo>
+                    <a:pt x="1360827" y="1389453"/>
+                  </a:lnTo>
+                  <a:lnTo>
+                    <a:pt x="1432450" y="1457976"/>
+                  </a:lnTo>
+                  <a:lnTo>
+                    <a:pt x="1504073" y="1524258"/>
+                  </a:lnTo>
+                  <a:lnTo>
+                    <a:pt x="1575695" y="1588372"/>
+                  </a:lnTo>
+                  <a:lnTo>
+                    <a:pt x="1647318" y="1650387"/>
+                  </a:lnTo>
+                  <a:lnTo>
+                    <a:pt x="1718940" y="1710374"/>
+                  </a:lnTo>
+                  <a:lnTo>
+                    <a:pt x="1790563" y="1768397"/>
+                  </a:lnTo>
+                  <a:lnTo>
+                    <a:pt x="1862185" y="1824522"/>
+                  </a:lnTo>
+                  <a:lnTo>
+                    <a:pt x="1933808" y="1878811"/>
+                  </a:lnTo>
+                  <a:lnTo>
+                    <a:pt x="2005430" y="1931324"/>
+                  </a:lnTo>
+                  <a:lnTo>
+                    <a:pt x="2077053" y="1982118"/>
+                  </a:lnTo>
+                  <a:lnTo>
+                    <a:pt x="2148675" y="2031250"/>
+                  </a:lnTo>
+                  <a:lnTo>
+                    <a:pt x="2220298" y="2078775"/>
+                  </a:lnTo>
+                  <a:lnTo>
+                    <a:pt x="2291920" y="2124745"/>
+                  </a:lnTo>
+                  <a:lnTo>
+                    <a:pt x="2363543" y="2169210"/>
+                  </a:lnTo>
+                  <a:lnTo>
+                    <a:pt x="2435165" y="2212221"/>
+                  </a:lnTo>
+                  <a:lnTo>
+                    <a:pt x="2506788" y="2253825"/>
+                  </a:lnTo>
+                  <a:lnTo>
+                    <a:pt x="2578410" y="2294067"/>
+                  </a:lnTo>
+                  <a:lnTo>
+                    <a:pt x="2650033" y="2332993"/>
+                  </a:lnTo>
+                  <a:lnTo>
+                    <a:pt x="2721655" y="2370645"/>
+                  </a:lnTo>
+                  <a:lnTo>
+                    <a:pt x="2793278" y="2407065"/>
+                  </a:lnTo>
+                  <a:lnTo>
+                    <a:pt x="2864901" y="2442293"/>
+                  </a:lnTo>
+                  <a:lnTo>
+                    <a:pt x="2936523" y="2476369"/>
+                  </a:lnTo>
+                  <a:lnTo>
+                    <a:pt x="3008146" y="2509329"/>
+                  </a:lnTo>
+                  <a:lnTo>
+                    <a:pt x="3079768" y="2541212"/>
+                  </a:lnTo>
+                  <a:lnTo>
+                    <a:pt x="3151391" y="2572051"/>
+                  </a:lnTo>
+                  <a:lnTo>
+                    <a:pt x="3223013" y="2601881"/>
+                  </a:lnTo>
+                  <a:lnTo>
+                    <a:pt x="3294636" y="2630735"/>
+                  </a:lnTo>
+                  <a:lnTo>
+                    <a:pt x="3366258" y="2653917"/>
+                  </a:lnTo>
+                  <a:lnTo>
+                    <a:pt x="3437881" y="2651608"/>
+                  </a:lnTo>
+                  <a:lnTo>
+                    <a:pt x="3509503" y="2649292"/>
+                  </a:lnTo>
+                  <a:lnTo>
+                    <a:pt x="3581126" y="2646970"/>
+                  </a:lnTo>
+                  <a:lnTo>
+                    <a:pt x="3652748" y="2644642"/>
+                  </a:lnTo>
+                  <a:lnTo>
+                    <a:pt x="3724371" y="2642306"/>
+                  </a:lnTo>
+                  <a:lnTo>
+                    <a:pt x="3795993" y="2639965"/>
+                  </a:lnTo>
+                  <a:lnTo>
+                    <a:pt x="3867616" y="2637617"/>
+                  </a:lnTo>
+                  <a:lnTo>
+                    <a:pt x="3939238" y="2635262"/>
+                  </a:lnTo>
+                  <a:lnTo>
+                    <a:pt x="4010861" y="2632901"/>
+                  </a:lnTo>
+                  <a:lnTo>
+                    <a:pt x="4082483" y="2630533"/>
+                  </a:lnTo>
+                  <a:lnTo>
+                    <a:pt x="4154106" y="2628159"/>
+                  </a:lnTo>
+                  <a:lnTo>
+                    <a:pt x="4225729" y="2625778"/>
+                  </a:lnTo>
+                  <a:lnTo>
+                    <a:pt x="4297351" y="2623390"/>
+                  </a:lnTo>
+                  <a:lnTo>
+                    <a:pt x="4368974" y="2620996"/>
+                  </a:lnTo>
+                  <a:lnTo>
+                    <a:pt x="4440596" y="2618595"/>
+                  </a:lnTo>
+                  <a:lnTo>
+                    <a:pt x="4512219" y="2616187"/>
+                  </a:lnTo>
+                  <a:lnTo>
+                    <a:pt x="4583841" y="2613773"/>
+                  </a:lnTo>
+                  <a:lnTo>
+                    <a:pt x="4655464" y="2611352"/>
+                  </a:lnTo>
+                  <a:lnTo>
+                    <a:pt x="4727086" y="2608924"/>
+                  </a:lnTo>
+                  <a:lnTo>
+                    <a:pt x="4798709" y="2606490"/>
+                  </a:lnTo>
+                  <a:lnTo>
+                    <a:pt x="4870331" y="2604048"/>
+                  </a:lnTo>
+                  <a:lnTo>
+                    <a:pt x="4941954" y="2601600"/>
+                  </a:lnTo>
+                  <a:lnTo>
+                    <a:pt x="5013576" y="2599146"/>
+                  </a:lnTo>
+                  <a:lnTo>
+                    <a:pt x="5085199" y="2596684"/>
+                  </a:lnTo>
+                  <a:lnTo>
+                    <a:pt x="5156821" y="2594215"/>
+                  </a:lnTo>
+                  <a:lnTo>
+                    <a:pt x="5228444" y="2591740"/>
+                  </a:lnTo>
+                  <a:lnTo>
+                    <a:pt x="5300066" y="2589257"/>
+                  </a:lnTo>
+                  <a:lnTo>
+                    <a:pt x="5371689" y="2586768"/>
+                  </a:lnTo>
+                  <a:lnTo>
+                    <a:pt x="5443311" y="2584272"/>
+                  </a:lnTo>
+                  <a:lnTo>
+                    <a:pt x="5514934" y="2581769"/>
+                  </a:lnTo>
+                  <a:lnTo>
+                    <a:pt x="5586557" y="2579259"/>
+                  </a:lnTo>
+                  <a:lnTo>
+                    <a:pt x="5658179" y="2576742"/>
+                  </a:lnTo>
+                  <a:lnTo>
+                    <a:pt x="5729802" y="2574218"/>
+                  </a:lnTo>
+                  <a:lnTo>
+                    <a:pt x="5801424" y="2571687"/>
+                  </a:lnTo>
+                  <a:lnTo>
+                    <a:pt x="5873047" y="2569149"/>
+                  </a:lnTo>
+                  <a:lnTo>
+                    <a:pt x="5944669" y="2566603"/>
+                  </a:lnTo>
+                  <a:lnTo>
+                    <a:pt x="6016292" y="2564051"/>
+                  </a:lnTo>
+                  <a:lnTo>
+                    <a:pt x="6087914" y="2561492"/>
+                  </a:lnTo>
+                  <a:lnTo>
+                    <a:pt x="6159537" y="2558925"/>
+                  </a:lnTo>
+                  <a:lnTo>
+                    <a:pt x="6231159" y="2556351"/>
+                  </a:lnTo>
+                  <a:lnTo>
+                    <a:pt x="6302782" y="2553771"/>
+                  </a:lnTo>
+                  <a:lnTo>
+                    <a:pt x="6374404" y="2551183"/>
+                  </a:lnTo>
+                  <a:lnTo>
+                    <a:pt x="6446027" y="2548587"/>
+                  </a:lnTo>
+                  <a:lnTo>
+                    <a:pt x="6517649" y="2545985"/>
+                  </a:lnTo>
+                  <a:lnTo>
+                    <a:pt x="6589272" y="2543375"/>
+                  </a:lnTo>
+                  <a:lnTo>
+                    <a:pt x="6660894" y="2540758"/>
+                  </a:lnTo>
+                  <a:lnTo>
+                    <a:pt x="6732517" y="2538134"/>
+                  </a:lnTo>
+                  <a:lnTo>
+                    <a:pt x="6804139" y="2535503"/>
+                  </a:lnTo>
+                  <a:lnTo>
+                    <a:pt x="6875762" y="2532864"/>
+                  </a:lnTo>
+                  <a:lnTo>
+                    <a:pt x="6947385" y="2530218"/>
+                  </a:lnTo>
+                  <a:lnTo>
+                    <a:pt x="7019007" y="2527564"/>
+                  </a:lnTo>
+                  <a:lnTo>
+                    <a:pt x="7090630" y="2524903"/>
+                  </a:lnTo>
+                  <a:lnTo>
+                    <a:pt x="7090630" y="3337449"/>
+                  </a:lnTo>
+                  <a:lnTo>
+                    <a:pt x="7019007" y="3332500"/>
+                  </a:lnTo>
+                  <a:lnTo>
+                    <a:pt x="6947385" y="3327384"/>
+                  </a:lnTo>
+                  <a:lnTo>
+                    <a:pt x="6875762" y="3322095"/>
+                  </a:lnTo>
+                  <a:lnTo>
+                    <a:pt x="6804139" y="3316627"/>
+                  </a:lnTo>
+                  <a:lnTo>
+                    <a:pt x="6732517" y="3310974"/>
+                  </a:lnTo>
+                  <a:lnTo>
+                    <a:pt x="6660894" y="3305130"/>
+                  </a:lnTo>
+                  <a:lnTo>
+                    <a:pt x="6589272" y="3299088"/>
+                  </a:lnTo>
+                  <a:lnTo>
+                    <a:pt x="6517649" y="3292842"/>
+                  </a:lnTo>
+                  <a:lnTo>
+                    <a:pt x="6446027" y="3286384"/>
+                  </a:lnTo>
+                  <a:lnTo>
+                    <a:pt x="6374404" y="3279708"/>
+                  </a:lnTo>
+                  <a:lnTo>
+                    <a:pt x="6302782" y="3272806"/>
+                  </a:lnTo>
+                  <a:lnTo>
+                    <a:pt x="6231159" y="3265671"/>
+                  </a:lnTo>
+                  <a:lnTo>
+                    <a:pt x="6159537" y="3258294"/>
+                  </a:lnTo>
+                  <a:lnTo>
+                    <a:pt x="6087914" y="3250668"/>
+                  </a:lnTo>
+                  <a:lnTo>
+                    <a:pt x="6016292" y="3242784"/>
+                  </a:lnTo>
+                  <a:lnTo>
+                    <a:pt x="5944669" y="3234633"/>
+                  </a:lnTo>
+                  <a:lnTo>
+                    <a:pt x="5873047" y="3226207"/>
+                  </a:lnTo>
+                  <a:lnTo>
+                    <a:pt x="5801424" y="3217495"/>
+                  </a:lnTo>
+                  <a:lnTo>
+                    <a:pt x="5729802" y="3208489"/>
+                  </a:lnTo>
+                  <a:lnTo>
+                    <a:pt x="5658179" y="3199178"/>
+                  </a:lnTo>
+                  <a:lnTo>
+                    <a:pt x="5586557" y="3189552"/>
+                  </a:lnTo>
+                  <a:lnTo>
+                    <a:pt x="5514934" y="3179601"/>
+                  </a:lnTo>
+                  <a:lnTo>
+                    <a:pt x="5443311" y="3169312"/>
+                  </a:lnTo>
+                  <a:lnTo>
+                    <a:pt x="5371689" y="3158676"/>
+                  </a:lnTo>
+                  <a:lnTo>
+                    <a:pt x="5300066" y="3147680"/>
+                  </a:lnTo>
+                  <a:lnTo>
+                    <a:pt x="5228444" y="3136313"/>
+                  </a:lnTo>
+                  <a:lnTo>
+                    <a:pt x="5156821" y="3124560"/>
+                  </a:lnTo>
+                  <a:lnTo>
+                    <a:pt x="5085199" y="3112410"/>
+                  </a:lnTo>
+                  <a:lnTo>
+                    <a:pt x="5013576" y="3099850"/>
+                  </a:lnTo>
+                  <a:lnTo>
+                    <a:pt x="4941954" y="3086864"/>
+                  </a:lnTo>
+                  <a:lnTo>
+                    <a:pt x="4870331" y="3073439"/>
+                  </a:lnTo>
+                  <a:lnTo>
+                    <a:pt x="4798709" y="3059560"/>
+                  </a:lnTo>
+                  <a:lnTo>
+                    <a:pt x="4727086" y="3045211"/>
+                  </a:lnTo>
+                  <a:lnTo>
+                    <a:pt x="4655464" y="3030377"/>
+                  </a:lnTo>
+                  <a:lnTo>
+                    <a:pt x="4583841" y="3015041"/>
+                  </a:lnTo>
+                  <a:lnTo>
+                    <a:pt x="4512219" y="2999187"/>
+                  </a:lnTo>
+                  <a:lnTo>
+                    <a:pt x="4440596" y="2982796"/>
+                  </a:lnTo>
+                  <a:lnTo>
+                    <a:pt x="4368974" y="2965851"/>
+                  </a:lnTo>
+                  <a:lnTo>
+                    <a:pt x="4297351" y="2948333"/>
+                  </a:lnTo>
+                  <a:lnTo>
+                    <a:pt x="4225729" y="2930222"/>
+                  </a:lnTo>
+                  <a:lnTo>
+                    <a:pt x="4154106" y="2911498"/>
+                  </a:lnTo>
+                  <a:lnTo>
+                    <a:pt x="4082483" y="2892141"/>
+                  </a:lnTo>
+                  <a:lnTo>
+                    <a:pt x="4010861" y="2872129"/>
+                  </a:lnTo>
+                  <a:lnTo>
+                    <a:pt x="3939238" y="2851441"/>
+                  </a:lnTo>
+                  <a:lnTo>
+                    <a:pt x="3867616" y="2830052"/>
+                  </a:lnTo>
+                  <a:lnTo>
+                    <a:pt x="3795993" y="2807940"/>
+                  </a:lnTo>
+                  <a:lnTo>
+                    <a:pt x="3724371" y="2785080"/>
+                  </a:lnTo>
+                  <a:lnTo>
+                    <a:pt x="3652748" y="2761447"/>
+                  </a:lnTo>
+                  <a:lnTo>
+                    <a:pt x="3581126" y="2737014"/>
+                  </a:lnTo>
+                  <a:lnTo>
+                    <a:pt x="3509503" y="2711755"/>
+                  </a:lnTo>
+                  <a:lnTo>
+                    <a:pt x="3437881" y="2685642"/>
+                  </a:lnTo>
+                  <a:lnTo>
+                    <a:pt x="3366258" y="2658645"/>
+                  </a:lnTo>
+                  <a:lnTo>
+                    <a:pt x="3294636" y="2656220"/>
+                  </a:lnTo>
+                  <a:lnTo>
+                    <a:pt x="3223013" y="2658517"/>
+                  </a:lnTo>
+                  <a:lnTo>
+                    <a:pt x="3151391" y="2660807"/>
+                  </a:lnTo>
+                  <a:lnTo>
+                    <a:pt x="3079768" y="2663091"/>
+                  </a:lnTo>
+                  <a:lnTo>
+                    <a:pt x="3008146" y="2665368"/>
+                  </a:lnTo>
+                  <a:lnTo>
+                    <a:pt x="2936523" y="2667639"/>
+                  </a:lnTo>
+                  <a:lnTo>
+                    <a:pt x="2864901" y="2669904"/>
+                  </a:lnTo>
+                  <a:lnTo>
+                    <a:pt x="2793278" y="2672163"/>
+                  </a:lnTo>
+                  <a:lnTo>
+                    <a:pt x="2721655" y="2674415"/>
+                  </a:lnTo>
+                  <a:lnTo>
+                    <a:pt x="2650033" y="2676661"/>
+                  </a:lnTo>
+                  <a:lnTo>
+                    <a:pt x="2578410" y="2678901"/>
+                  </a:lnTo>
+                  <a:lnTo>
+                    <a:pt x="2506788" y="2681134"/>
+                  </a:lnTo>
+                  <a:lnTo>
+                    <a:pt x="2435165" y="2683362"/>
+                  </a:lnTo>
+                  <a:lnTo>
+                    <a:pt x="2363543" y="2685583"/>
+                  </a:lnTo>
+                  <a:lnTo>
+                    <a:pt x="2291920" y="2687798"/>
+                  </a:lnTo>
+                  <a:lnTo>
+                    <a:pt x="2220298" y="2690007"/>
+                  </a:lnTo>
+                  <a:lnTo>
+                    <a:pt x="2148675" y="2692209"/>
+                  </a:lnTo>
+                  <a:lnTo>
+                    <a:pt x="2077053" y="2694406"/>
+                  </a:lnTo>
+                  <a:lnTo>
+                    <a:pt x="2005430" y="2696596"/>
+                  </a:lnTo>
+                  <a:lnTo>
+                    <a:pt x="1933808" y="2698781"/>
+                  </a:lnTo>
+                  <a:lnTo>
+                    <a:pt x="1862185" y="2700959"/>
+                  </a:lnTo>
+                  <a:lnTo>
+                    <a:pt x="1790563" y="2703132"/>
+                  </a:lnTo>
+                  <a:lnTo>
+                    <a:pt x="1718940" y="2705298"/>
+                  </a:lnTo>
+                  <a:lnTo>
+                    <a:pt x="1647318" y="2707458"/>
+                  </a:lnTo>
+                  <a:lnTo>
+                    <a:pt x="1575695" y="2709613"/>
+                  </a:lnTo>
+                  <a:lnTo>
+                    <a:pt x="1504073" y="2711761"/>
+                  </a:lnTo>
+                  <a:lnTo>
+                    <a:pt x="1432450" y="2713903"/>
+                  </a:lnTo>
+                  <a:lnTo>
+                    <a:pt x="1360827" y="2716040"/>
+                  </a:lnTo>
+                  <a:lnTo>
+                    <a:pt x="1289205" y="2718170"/>
+                  </a:lnTo>
+                  <a:lnTo>
+                    <a:pt x="1217582" y="2720295"/>
+                  </a:lnTo>
+                  <a:lnTo>
+                    <a:pt x="1145960" y="2722413"/>
+                  </a:lnTo>
+                  <a:lnTo>
+                    <a:pt x="1074337" y="2724526"/>
+                  </a:lnTo>
+                  <a:lnTo>
+                    <a:pt x="1002715" y="2726633"/>
+                  </a:lnTo>
+                  <a:lnTo>
+                    <a:pt x="931092" y="2728734"/>
+                  </a:lnTo>
+                  <a:lnTo>
+                    <a:pt x="859470" y="2730830"/>
+                  </a:lnTo>
+                  <a:lnTo>
+                    <a:pt x="787847" y="2732919"/>
+                  </a:lnTo>
+                  <a:lnTo>
+                    <a:pt x="716225" y="2735003"/>
+                  </a:lnTo>
+                  <a:lnTo>
+                    <a:pt x="644602" y="2737081"/>
+                  </a:lnTo>
+                  <a:lnTo>
+                    <a:pt x="572980" y="2739153"/>
+                  </a:lnTo>
+                  <a:lnTo>
+                    <a:pt x="501357" y="2741219"/>
+                  </a:lnTo>
+                  <a:lnTo>
+                    <a:pt x="429735" y="2743280"/>
+                  </a:lnTo>
+                  <a:lnTo>
+                    <a:pt x="358112" y="2745334"/>
+                  </a:lnTo>
+                  <a:lnTo>
+                    <a:pt x="286490" y="2747384"/>
+                  </a:lnTo>
+                  <a:lnTo>
+                    <a:pt x="214867" y="2749427"/>
+                  </a:lnTo>
+                  <a:lnTo>
+                    <a:pt x="143245" y="2751465"/>
+                  </a:lnTo>
+                  <a:lnTo>
+                    <a:pt x="71622" y="2753497"/>
+                  </a:lnTo>
+                  <a:lnTo>
+                    <a:pt x="0" y="2755524"/>
                   </a:lnTo>
                   <a:close/>
                 </a:path>
@@ -3612,309 +3575,634 @@
         </p:sp>
         <p:sp>
           <p:nvSpPr>
+            <p:cNvPr id="21" name="pl21"/>
+            <p:cNvSpPr/>
+            <p:nvPr/>
+          </p:nvSpPr>
+          <p:spPr>
+            <a:xfrm>
+              <a:off x="1437489" y="2073503"/>
+              <a:ext cx="6825190" cy="2653917"/>
+            </a:xfrm>
+            <a:custGeom>
+              <a:avLst/>
+              <a:pathLst>
+                <a:path w="6825190" h="2653917">
+                  <a:moveTo>
+                    <a:pt x="0" y="0"/>
+                  </a:moveTo>
+                  <a:lnTo>
+                    <a:pt x="21050" y="34293"/>
+                  </a:lnTo>
+                  <a:lnTo>
+                    <a:pt x="92672" y="147157"/>
+                  </a:lnTo>
+                  <a:lnTo>
+                    <a:pt x="164295" y="256328"/>
+                  </a:lnTo>
+                  <a:lnTo>
+                    <a:pt x="235917" y="361927"/>
+                  </a:lnTo>
+                  <a:lnTo>
+                    <a:pt x="307540" y="464071"/>
+                  </a:lnTo>
+                  <a:lnTo>
+                    <a:pt x="379162" y="562873"/>
+                  </a:lnTo>
+                  <a:lnTo>
+                    <a:pt x="450785" y="658442"/>
+                  </a:lnTo>
+                  <a:lnTo>
+                    <a:pt x="522407" y="750884"/>
+                  </a:lnTo>
+                  <a:lnTo>
+                    <a:pt x="594030" y="840302"/>
+                  </a:lnTo>
+                  <a:lnTo>
+                    <a:pt x="665652" y="926794"/>
+                  </a:lnTo>
+                  <a:lnTo>
+                    <a:pt x="737275" y="1010456"/>
+                  </a:lnTo>
+                  <a:lnTo>
+                    <a:pt x="808897" y="1091380"/>
+                  </a:lnTo>
+                  <a:lnTo>
+                    <a:pt x="880520" y="1169657"/>
+                  </a:lnTo>
+                  <a:lnTo>
+                    <a:pt x="952143" y="1245372"/>
+                  </a:lnTo>
+                  <a:lnTo>
+                    <a:pt x="1023765" y="1318611"/>
+                  </a:lnTo>
+                  <a:lnTo>
+                    <a:pt x="1095388" y="1389453"/>
+                  </a:lnTo>
+                  <a:lnTo>
+                    <a:pt x="1167010" y="1457976"/>
+                  </a:lnTo>
+                  <a:lnTo>
+                    <a:pt x="1238633" y="1524258"/>
+                  </a:lnTo>
+                  <a:lnTo>
+                    <a:pt x="1310255" y="1588372"/>
+                  </a:lnTo>
+                  <a:lnTo>
+                    <a:pt x="1381878" y="1650387"/>
+                  </a:lnTo>
+                  <a:lnTo>
+                    <a:pt x="1453500" y="1710374"/>
+                  </a:lnTo>
+                  <a:lnTo>
+                    <a:pt x="1525123" y="1768397"/>
+                  </a:lnTo>
+                  <a:lnTo>
+                    <a:pt x="1596745" y="1824522"/>
+                  </a:lnTo>
+                  <a:lnTo>
+                    <a:pt x="1668368" y="1878811"/>
+                  </a:lnTo>
+                  <a:lnTo>
+                    <a:pt x="1739990" y="1931324"/>
+                  </a:lnTo>
+                  <a:lnTo>
+                    <a:pt x="1811613" y="1982118"/>
+                  </a:lnTo>
+                  <a:lnTo>
+                    <a:pt x="1883235" y="2031250"/>
+                  </a:lnTo>
+                  <a:lnTo>
+                    <a:pt x="1954858" y="2078775"/>
+                  </a:lnTo>
+                  <a:lnTo>
+                    <a:pt x="2026480" y="2124745"/>
+                  </a:lnTo>
+                  <a:lnTo>
+                    <a:pt x="2098103" y="2169210"/>
+                  </a:lnTo>
+                  <a:lnTo>
+                    <a:pt x="2169725" y="2212221"/>
+                  </a:lnTo>
+                  <a:lnTo>
+                    <a:pt x="2241348" y="2253825"/>
+                  </a:lnTo>
+                  <a:lnTo>
+                    <a:pt x="2312971" y="2294067"/>
+                  </a:lnTo>
+                  <a:lnTo>
+                    <a:pt x="2384593" y="2332993"/>
+                  </a:lnTo>
+                  <a:lnTo>
+                    <a:pt x="2456216" y="2370645"/>
+                  </a:lnTo>
+                  <a:lnTo>
+                    <a:pt x="2527838" y="2407065"/>
+                  </a:lnTo>
+                  <a:lnTo>
+                    <a:pt x="2599461" y="2442293"/>
+                  </a:lnTo>
+                  <a:lnTo>
+                    <a:pt x="2671083" y="2476369"/>
+                  </a:lnTo>
+                  <a:lnTo>
+                    <a:pt x="2742706" y="2509329"/>
+                  </a:lnTo>
+                  <a:lnTo>
+                    <a:pt x="2814328" y="2541212"/>
+                  </a:lnTo>
+                  <a:lnTo>
+                    <a:pt x="2885951" y="2572051"/>
+                  </a:lnTo>
+                  <a:lnTo>
+                    <a:pt x="2957573" y="2601881"/>
+                  </a:lnTo>
+                  <a:lnTo>
+                    <a:pt x="3029196" y="2630735"/>
+                  </a:lnTo>
+                  <a:lnTo>
+                    <a:pt x="3100818" y="2653917"/>
+                  </a:lnTo>
+                  <a:lnTo>
+                    <a:pt x="3172441" y="2651608"/>
+                  </a:lnTo>
+                  <a:lnTo>
+                    <a:pt x="3244063" y="2649292"/>
+                  </a:lnTo>
+                  <a:lnTo>
+                    <a:pt x="3315686" y="2646970"/>
+                  </a:lnTo>
+                  <a:lnTo>
+                    <a:pt x="3387308" y="2644642"/>
+                  </a:lnTo>
+                  <a:lnTo>
+                    <a:pt x="3458931" y="2642306"/>
+                  </a:lnTo>
+                  <a:lnTo>
+                    <a:pt x="3530553" y="2639965"/>
+                  </a:lnTo>
+                  <a:lnTo>
+                    <a:pt x="3602176" y="2637617"/>
+                  </a:lnTo>
+                  <a:lnTo>
+                    <a:pt x="3673799" y="2635262"/>
+                  </a:lnTo>
+                  <a:lnTo>
+                    <a:pt x="3745421" y="2632901"/>
+                  </a:lnTo>
+                  <a:lnTo>
+                    <a:pt x="3817044" y="2630533"/>
+                  </a:lnTo>
+                  <a:lnTo>
+                    <a:pt x="3888666" y="2628159"/>
+                  </a:lnTo>
+                  <a:lnTo>
+                    <a:pt x="3960289" y="2625778"/>
+                  </a:lnTo>
+                  <a:lnTo>
+                    <a:pt x="4031911" y="2623390"/>
+                  </a:lnTo>
+                  <a:lnTo>
+                    <a:pt x="4103534" y="2620996"/>
+                  </a:lnTo>
+                  <a:lnTo>
+                    <a:pt x="4175156" y="2618595"/>
+                  </a:lnTo>
+                  <a:lnTo>
+                    <a:pt x="4246779" y="2616187"/>
+                  </a:lnTo>
+                  <a:lnTo>
+                    <a:pt x="4318401" y="2613773"/>
+                  </a:lnTo>
+                  <a:lnTo>
+                    <a:pt x="4390024" y="2611352"/>
+                  </a:lnTo>
+                  <a:lnTo>
+                    <a:pt x="4461646" y="2608924"/>
+                  </a:lnTo>
+                  <a:lnTo>
+                    <a:pt x="4533269" y="2606490"/>
+                  </a:lnTo>
+                  <a:lnTo>
+                    <a:pt x="4604891" y="2604048"/>
+                  </a:lnTo>
+                  <a:lnTo>
+                    <a:pt x="4676514" y="2601600"/>
+                  </a:lnTo>
+                  <a:lnTo>
+                    <a:pt x="4748136" y="2599146"/>
+                  </a:lnTo>
+                  <a:lnTo>
+                    <a:pt x="4819759" y="2596684"/>
+                  </a:lnTo>
+                  <a:lnTo>
+                    <a:pt x="4891381" y="2594215"/>
+                  </a:lnTo>
+                  <a:lnTo>
+                    <a:pt x="4963004" y="2591740"/>
+                  </a:lnTo>
+                  <a:lnTo>
+                    <a:pt x="5034627" y="2589257"/>
+                  </a:lnTo>
+                  <a:lnTo>
+                    <a:pt x="5106249" y="2586768"/>
+                  </a:lnTo>
+                  <a:lnTo>
+                    <a:pt x="5177872" y="2584272"/>
+                  </a:lnTo>
+                  <a:lnTo>
+                    <a:pt x="5249494" y="2581769"/>
+                  </a:lnTo>
+                  <a:lnTo>
+                    <a:pt x="5321117" y="2579259"/>
+                  </a:lnTo>
+                  <a:lnTo>
+                    <a:pt x="5392739" y="2576742"/>
+                  </a:lnTo>
+                  <a:lnTo>
+                    <a:pt x="5464362" y="2574218"/>
+                  </a:lnTo>
+                  <a:lnTo>
+                    <a:pt x="5535984" y="2571687"/>
+                  </a:lnTo>
+                  <a:lnTo>
+                    <a:pt x="5607607" y="2569149"/>
+                  </a:lnTo>
+                  <a:lnTo>
+                    <a:pt x="5679229" y="2566603"/>
+                  </a:lnTo>
+                  <a:lnTo>
+                    <a:pt x="5750852" y="2564051"/>
+                  </a:lnTo>
+                  <a:lnTo>
+                    <a:pt x="5822474" y="2561492"/>
+                  </a:lnTo>
+                  <a:lnTo>
+                    <a:pt x="5894097" y="2558925"/>
+                  </a:lnTo>
+                  <a:lnTo>
+                    <a:pt x="5965719" y="2556351"/>
+                  </a:lnTo>
+                  <a:lnTo>
+                    <a:pt x="6037342" y="2553771"/>
+                  </a:lnTo>
+                  <a:lnTo>
+                    <a:pt x="6108964" y="2551183"/>
+                  </a:lnTo>
+                  <a:lnTo>
+                    <a:pt x="6180587" y="2548587"/>
+                  </a:lnTo>
+                  <a:lnTo>
+                    <a:pt x="6252209" y="2545985"/>
+                  </a:lnTo>
+                  <a:lnTo>
+                    <a:pt x="6323832" y="2543375"/>
+                  </a:lnTo>
+                  <a:lnTo>
+                    <a:pt x="6395455" y="2540758"/>
+                  </a:lnTo>
+                  <a:lnTo>
+                    <a:pt x="6467077" y="2538134"/>
+                  </a:lnTo>
+                  <a:lnTo>
+                    <a:pt x="6538700" y="2535503"/>
+                  </a:lnTo>
+                  <a:lnTo>
+                    <a:pt x="6610322" y="2532864"/>
+                  </a:lnTo>
+                  <a:lnTo>
+                    <a:pt x="6681945" y="2530218"/>
+                  </a:lnTo>
+                  <a:lnTo>
+                    <a:pt x="6753567" y="2527564"/>
+                  </a:lnTo>
+                  <a:lnTo>
+                    <a:pt x="6825190" y="2524903"/>
+                  </a:lnTo>
+                </a:path>
+              </a:pathLst>
+            </a:custGeom>
+          </p:spPr>
+          <p:txBody>
+            <a:bodyPr/>
+            <a:lstStyle/>
+            <a:p/>
+          </p:txBody>
+        </p:sp>
+        <p:sp>
+          <p:nvSpPr>
             <p:cNvPr id="22" name="pl22"/>
             <p:cNvSpPr/>
             <p:nvPr/>
           </p:nvSpPr>
           <p:spPr>
             <a:xfrm>
-              <a:off x="918686" y="2073503"/>
-              <a:ext cx="7302614" cy="2653917"/>
+              <a:off x="1172049" y="4729723"/>
+              <a:ext cx="7090630" cy="681228"/>
             </a:xfrm>
             <a:custGeom>
               <a:avLst/>
               <a:pathLst>
-                <a:path w="7302614" h="2653917">
+                <a:path w="7090630" h="681228">
                   <a:moveTo>
-                    <a:pt x="0" y="0"/>
+                    <a:pt x="7090630" y="681228"/>
                   </a:moveTo>
                   <a:lnTo>
-                    <a:pt x="22522" y="34293"/>
-                  </a:lnTo>
-                  <a:lnTo>
-                    <a:pt x="99155" y="147157"/>
-                  </a:lnTo>
-                  <a:lnTo>
-                    <a:pt x="175787" y="256328"/>
-                  </a:lnTo>
-                  <a:lnTo>
-                    <a:pt x="252420" y="361927"/>
-                  </a:lnTo>
-                  <a:lnTo>
-                    <a:pt x="329052" y="464071"/>
-                  </a:lnTo>
-                  <a:lnTo>
-                    <a:pt x="405685" y="562873"/>
-                  </a:lnTo>
-                  <a:lnTo>
-                    <a:pt x="482317" y="658442"/>
-                  </a:lnTo>
-                  <a:lnTo>
-                    <a:pt x="558950" y="750884"/>
-                  </a:lnTo>
-                  <a:lnTo>
-                    <a:pt x="635583" y="840302"/>
-                  </a:lnTo>
-                  <a:lnTo>
-                    <a:pt x="712215" y="926794"/>
-                  </a:lnTo>
-                  <a:lnTo>
-                    <a:pt x="788848" y="1010456"/>
-                  </a:lnTo>
-                  <a:lnTo>
-                    <a:pt x="865480" y="1091380"/>
-                  </a:lnTo>
-                  <a:lnTo>
-                    <a:pt x="942113" y="1169657"/>
-                  </a:lnTo>
-                  <a:lnTo>
-                    <a:pt x="1018745" y="1245372"/>
-                  </a:lnTo>
-                  <a:lnTo>
-                    <a:pt x="1095378" y="1318611"/>
-                  </a:lnTo>
-                  <a:lnTo>
-                    <a:pt x="1172010" y="1389453"/>
-                  </a:lnTo>
-                  <a:lnTo>
-                    <a:pt x="1248643" y="1457976"/>
-                  </a:lnTo>
-                  <a:lnTo>
-                    <a:pt x="1325275" y="1524258"/>
-                  </a:lnTo>
-                  <a:lnTo>
-                    <a:pt x="1401908" y="1588372"/>
-                  </a:lnTo>
-                  <a:lnTo>
-                    <a:pt x="1478541" y="1650387"/>
-                  </a:lnTo>
-                  <a:lnTo>
-                    <a:pt x="1555173" y="1710374"/>
-                  </a:lnTo>
-                  <a:lnTo>
-                    <a:pt x="1631806" y="1768397"/>
-                  </a:lnTo>
-                  <a:lnTo>
-                    <a:pt x="1708438" y="1824522"/>
-                  </a:lnTo>
-                  <a:lnTo>
-                    <a:pt x="1785071" y="1878811"/>
-                  </a:lnTo>
-                  <a:lnTo>
-                    <a:pt x="1861703" y="1931324"/>
-                  </a:lnTo>
-                  <a:lnTo>
-                    <a:pt x="1938336" y="1982118"/>
-                  </a:lnTo>
-                  <a:lnTo>
-                    <a:pt x="2014968" y="2031250"/>
-                  </a:lnTo>
-                  <a:lnTo>
-                    <a:pt x="2091601" y="2078775"/>
-                  </a:lnTo>
-                  <a:lnTo>
-                    <a:pt x="2168234" y="2124745"/>
-                  </a:lnTo>
-                  <a:lnTo>
-                    <a:pt x="2244866" y="2169210"/>
-                  </a:lnTo>
-                  <a:lnTo>
-                    <a:pt x="2321499" y="2212221"/>
-                  </a:lnTo>
-                  <a:lnTo>
-                    <a:pt x="2398131" y="2253825"/>
-                  </a:lnTo>
-                  <a:lnTo>
-                    <a:pt x="2474764" y="2294067"/>
-                  </a:lnTo>
-                  <a:lnTo>
-                    <a:pt x="2551396" y="2332993"/>
-                  </a:lnTo>
-                  <a:lnTo>
-                    <a:pt x="2628029" y="2370645"/>
-                  </a:lnTo>
-                  <a:lnTo>
-                    <a:pt x="2704661" y="2407065"/>
-                  </a:lnTo>
-                  <a:lnTo>
-                    <a:pt x="2781294" y="2442293"/>
-                  </a:lnTo>
-                  <a:lnTo>
-                    <a:pt x="2857926" y="2476369"/>
-                  </a:lnTo>
-                  <a:lnTo>
-                    <a:pt x="2934559" y="2509329"/>
-                  </a:lnTo>
-                  <a:lnTo>
-                    <a:pt x="3011192" y="2541212"/>
-                  </a:lnTo>
-                  <a:lnTo>
-                    <a:pt x="3087824" y="2572051"/>
-                  </a:lnTo>
-                  <a:lnTo>
-                    <a:pt x="3164457" y="2601881"/>
-                  </a:lnTo>
-                  <a:lnTo>
-                    <a:pt x="3241089" y="2630735"/>
-                  </a:lnTo>
-                  <a:lnTo>
-                    <a:pt x="3317722" y="2653917"/>
-                  </a:lnTo>
-                  <a:lnTo>
-                    <a:pt x="3394354" y="2651608"/>
-                  </a:lnTo>
-                  <a:lnTo>
-                    <a:pt x="3470987" y="2649292"/>
-                  </a:lnTo>
-                  <a:lnTo>
-                    <a:pt x="3547619" y="2646970"/>
-                  </a:lnTo>
-                  <a:lnTo>
-                    <a:pt x="3624252" y="2644642"/>
-                  </a:lnTo>
-                  <a:lnTo>
-                    <a:pt x="3700885" y="2642306"/>
-                  </a:lnTo>
-                  <a:lnTo>
-                    <a:pt x="3777517" y="2639965"/>
-                  </a:lnTo>
-                  <a:lnTo>
-                    <a:pt x="3854150" y="2637617"/>
-                  </a:lnTo>
-                  <a:lnTo>
-                    <a:pt x="3930782" y="2635262"/>
-                  </a:lnTo>
-                  <a:lnTo>
-                    <a:pt x="4007415" y="2632901"/>
-                  </a:lnTo>
-                  <a:lnTo>
-                    <a:pt x="4084047" y="2630533"/>
-                  </a:lnTo>
-                  <a:lnTo>
-                    <a:pt x="4160680" y="2628159"/>
-                  </a:lnTo>
-                  <a:lnTo>
-                    <a:pt x="4237312" y="2625778"/>
-                  </a:lnTo>
-                  <a:lnTo>
-                    <a:pt x="4313945" y="2623390"/>
-                  </a:lnTo>
-                  <a:lnTo>
-                    <a:pt x="4390577" y="2620996"/>
-                  </a:lnTo>
-                  <a:lnTo>
-                    <a:pt x="4467210" y="2618595"/>
-                  </a:lnTo>
-                  <a:lnTo>
-                    <a:pt x="4543843" y="2616187"/>
-                  </a:lnTo>
-                  <a:lnTo>
-                    <a:pt x="4620475" y="2613773"/>
-                  </a:lnTo>
-                  <a:lnTo>
-                    <a:pt x="4697108" y="2611352"/>
-                  </a:lnTo>
-                  <a:lnTo>
-                    <a:pt x="4773740" y="2608924"/>
-                  </a:lnTo>
-                  <a:lnTo>
-                    <a:pt x="4850373" y="2606490"/>
-                  </a:lnTo>
-                  <a:lnTo>
-                    <a:pt x="4927005" y="2604048"/>
-                  </a:lnTo>
-                  <a:lnTo>
-                    <a:pt x="5003638" y="2601600"/>
-                  </a:lnTo>
-                  <a:lnTo>
-                    <a:pt x="5080270" y="2599146"/>
-                  </a:lnTo>
-                  <a:lnTo>
-                    <a:pt x="5156903" y="2596684"/>
-                  </a:lnTo>
-                  <a:lnTo>
-                    <a:pt x="5233535" y="2594215"/>
-                  </a:lnTo>
-                  <a:lnTo>
-                    <a:pt x="5310168" y="2591740"/>
-                  </a:lnTo>
-                  <a:lnTo>
-                    <a:pt x="5386801" y="2589257"/>
-                  </a:lnTo>
-                  <a:lnTo>
-                    <a:pt x="5463433" y="2586768"/>
-                  </a:lnTo>
-                  <a:lnTo>
-                    <a:pt x="5540066" y="2584272"/>
-                  </a:lnTo>
-                  <a:lnTo>
-                    <a:pt x="5616698" y="2581769"/>
-                  </a:lnTo>
-                  <a:lnTo>
-                    <a:pt x="5693331" y="2579259"/>
-                  </a:lnTo>
-                  <a:lnTo>
-                    <a:pt x="5769963" y="2576742"/>
-                  </a:lnTo>
-                  <a:lnTo>
-                    <a:pt x="5846596" y="2574218"/>
-                  </a:lnTo>
-                  <a:lnTo>
-                    <a:pt x="5923228" y="2571687"/>
-                  </a:lnTo>
-                  <a:lnTo>
-                    <a:pt x="5999861" y="2569149"/>
-                  </a:lnTo>
-                  <a:lnTo>
-                    <a:pt x="6076494" y="2566603"/>
-                  </a:lnTo>
-                  <a:lnTo>
-                    <a:pt x="6153126" y="2564051"/>
-                  </a:lnTo>
-                  <a:lnTo>
-                    <a:pt x="6229759" y="2561492"/>
-                  </a:lnTo>
-                  <a:lnTo>
-                    <a:pt x="6306391" y="2558925"/>
-                  </a:lnTo>
-                  <a:lnTo>
-                    <a:pt x="6383024" y="2556351"/>
-                  </a:lnTo>
-                  <a:lnTo>
-                    <a:pt x="6459656" y="2553771"/>
-                  </a:lnTo>
-                  <a:lnTo>
-                    <a:pt x="6536289" y="2551183"/>
-                  </a:lnTo>
-                  <a:lnTo>
-                    <a:pt x="6612921" y="2548587"/>
-                  </a:lnTo>
-                  <a:lnTo>
-                    <a:pt x="6689554" y="2545985"/>
-                  </a:lnTo>
-                  <a:lnTo>
-                    <a:pt x="6766186" y="2543375"/>
-                  </a:lnTo>
-                  <a:lnTo>
-                    <a:pt x="6842819" y="2540758"/>
-                  </a:lnTo>
-                  <a:lnTo>
-                    <a:pt x="6919452" y="2538134"/>
-                  </a:lnTo>
-                  <a:lnTo>
-                    <a:pt x="6996084" y="2535503"/>
-                  </a:lnTo>
-                  <a:lnTo>
-                    <a:pt x="7072717" y="2532864"/>
-                  </a:lnTo>
-                  <a:lnTo>
-                    <a:pt x="7149349" y="2530218"/>
-                  </a:lnTo>
-                  <a:lnTo>
-                    <a:pt x="7225982" y="2527564"/>
-                  </a:lnTo>
-                  <a:lnTo>
-                    <a:pt x="7302614" y="2524903"/>
+                    <a:pt x="7019007" y="676280"/>
+                  </a:lnTo>
+                  <a:lnTo>
+                    <a:pt x="6947385" y="671163"/>
+                  </a:lnTo>
+                  <a:lnTo>
+                    <a:pt x="6875762" y="665874"/>
+                  </a:lnTo>
+                  <a:lnTo>
+                    <a:pt x="6804139" y="660406"/>
+                  </a:lnTo>
+                  <a:lnTo>
+                    <a:pt x="6732517" y="654753"/>
+                  </a:lnTo>
+                  <a:lnTo>
+                    <a:pt x="6660894" y="648909"/>
+                  </a:lnTo>
+                  <a:lnTo>
+                    <a:pt x="6589272" y="642867"/>
+                  </a:lnTo>
+                  <a:lnTo>
+                    <a:pt x="6517649" y="636621"/>
+                  </a:lnTo>
+                  <a:lnTo>
+                    <a:pt x="6446027" y="630163"/>
+                  </a:lnTo>
+                  <a:lnTo>
+                    <a:pt x="6374404" y="623487"/>
+                  </a:lnTo>
+                  <a:lnTo>
+                    <a:pt x="6302782" y="616585"/>
+                  </a:lnTo>
+                  <a:lnTo>
+                    <a:pt x="6231159" y="609450"/>
+                  </a:lnTo>
+                  <a:lnTo>
+                    <a:pt x="6159537" y="602073"/>
+                  </a:lnTo>
+                  <a:lnTo>
+                    <a:pt x="6087914" y="594447"/>
+                  </a:lnTo>
+                  <a:lnTo>
+                    <a:pt x="6016292" y="586563"/>
+                  </a:lnTo>
+                  <a:lnTo>
+                    <a:pt x="5944669" y="578412"/>
+                  </a:lnTo>
+                  <a:lnTo>
+                    <a:pt x="5873047" y="569986"/>
+                  </a:lnTo>
+                  <a:lnTo>
+                    <a:pt x="5801424" y="561274"/>
+                  </a:lnTo>
+                  <a:lnTo>
+                    <a:pt x="5729802" y="552268"/>
+                  </a:lnTo>
+                  <a:lnTo>
+                    <a:pt x="5658179" y="542957"/>
+                  </a:lnTo>
+                  <a:lnTo>
+                    <a:pt x="5586557" y="533331"/>
+                  </a:lnTo>
+                  <a:lnTo>
+                    <a:pt x="5514934" y="523380"/>
+                  </a:lnTo>
+                  <a:lnTo>
+                    <a:pt x="5443311" y="513092"/>
+                  </a:lnTo>
+                  <a:lnTo>
+                    <a:pt x="5371689" y="502456"/>
+                  </a:lnTo>
+                  <a:lnTo>
+                    <a:pt x="5300066" y="491460"/>
+                  </a:lnTo>
+                  <a:lnTo>
+                    <a:pt x="5228444" y="480092"/>
+                  </a:lnTo>
+                  <a:lnTo>
+                    <a:pt x="5156821" y="468340"/>
+                  </a:lnTo>
+                  <a:lnTo>
+                    <a:pt x="5085199" y="456190"/>
+                  </a:lnTo>
+                  <a:lnTo>
+                    <a:pt x="5013576" y="443629"/>
+                  </a:lnTo>
+                  <a:lnTo>
+                    <a:pt x="4941954" y="430643"/>
+                  </a:lnTo>
+                  <a:lnTo>
+                    <a:pt x="4870331" y="417218"/>
+                  </a:lnTo>
+                  <a:lnTo>
+                    <a:pt x="4798709" y="403339"/>
+                  </a:lnTo>
+                  <a:lnTo>
+                    <a:pt x="4727086" y="388990"/>
+                  </a:lnTo>
+                  <a:lnTo>
+                    <a:pt x="4655464" y="374156"/>
+                  </a:lnTo>
+                  <a:lnTo>
+                    <a:pt x="4583841" y="358821"/>
+                  </a:lnTo>
+                  <a:lnTo>
+                    <a:pt x="4512219" y="342966"/>
+                  </a:lnTo>
+                  <a:lnTo>
+                    <a:pt x="4440596" y="326575"/>
+                  </a:lnTo>
+                  <a:lnTo>
+                    <a:pt x="4368974" y="309630"/>
+                  </a:lnTo>
+                  <a:lnTo>
+                    <a:pt x="4297351" y="292112"/>
+                  </a:lnTo>
+                  <a:lnTo>
+                    <a:pt x="4225729" y="274001"/>
+                  </a:lnTo>
+                  <a:lnTo>
+                    <a:pt x="4154106" y="255277"/>
+                  </a:lnTo>
+                  <a:lnTo>
+                    <a:pt x="4082483" y="235920"/>
+                  </a:lnTo>
+                  <a:lnTo>
+                    <a:pt x="4010861" y="215908"/>
+                  </a:lnTo>
+                  <a:lnTo>
+                    <a:pt x="3939238" y="195220"/>
+                  </a:lnTo>
+                  <a:lnTo>
+                    <a:pt x="3867616" y="173831"/>
+                  </a:lnTo>
+                  <a:lnTo>
+                    <a:pt x="3795993" y="151719"/>
+                  </a:lnTo>
+                  <a:lnTo>
+                    <a:pt x="3724371" y="128859"/>
+                  </a:lnTo>
+                  <a:lnTo>
+                    <a:pt x="3652748" y="105226"/>
+                  </a:lnTo>
+                  <a:lnTo>
+                    <a:pt x="3581126" y="80794"/>
+                  </a:lnTo>
+                  <a:lnTo>
+                    <a:pt x="3509503" y="55535"/>
+                  </a:lnTo>
+                  <a:lnTo>
+                    <a:pt x="3437881" y="29421"/>
+                  </a:lnTo>
+                  <a:lnTo>
+                    <a:pt x="3366258" y="2424"/>
+                  </a:lnTo>
+                  <a:lnTo>
+                    <a:pt x="3294636" y="0"/>
+                  </a:lnTo>
+                  <a:lnTo>
+                    <a:pt x="3223013" y="2296"/>
+                  </a:lnTo>
+                  <a:lnTo>
+                    <a:pt x="3151391" y="4586"/>
+                  </a:lnTo>
+                  <a:lnTo>
+                    <a:pt x="3079768" y="6870"/>
+                  </a:lnTo>
+                  <a:lnTo>
+                    <a:pt x="3008146" y="9147"/>
+                  </a:lnTo>
+                  <a:lnTo>
+                    <a:pt x="2936523" y="11418"/>
+                  </a:lnTo>
+                  <a:lnTo>
+                    <a:pt x="2864901" y="13683"/>
+                  </a:lnTo>
+                  <a:lnTo>
+                    <a:pt x="2793278" y="15942"/>
+                  </a:lnTo>
+                  <a:lnTo>
+                    <a:pt x="2721655" y="18194"/>
+                  </a:lnTo>
+                  <a:lnTo>
+                    <a:pt x="2650033" y="20440"/>
+                  </a:lnTo>
+                  <a:lnTo>
+                    <a:pt x="2578410" y="22680"/>
+                  </a:lnTo>
+                  <a:lnTo>
+                    <a:pt x="2506788" y="24913"/>
+                  </a:lnTo>
+                  <a:lnTo>
+                    <a:pt x="2435165" y="27141"/>
+                  </a:lnTo>
+                  <a:lnTo>
+                    <a:pt x="2363543" y="29362"/>
+                  </a:lnTo>
+                  <a:lnTo>
+                    <a:pt x="2291920" y="31577"/>
+                  </a:lnTo>
+                  <a:lnTo>
+                    <a:pt x="2220298" y="33786"/>
+                  </a:lnTo>
+                  <a:lnTo>
+                    <a:pt x="2148675" y="35989"/>
+                  </a:lnTo>
+                  <a:lnTo>
+                    <a:pt x="2077053" y="38185"/>
+                  </a:lnTo>
+                  <a:lnTo>
+                    <a:pt x="2005430" y="40376"/>
+                  </a:lnTo>
+                  <a:lnTo>
+                    <a:pt x="1933808" y="42560"/>
+                  </a:lnTo>
+                  <a:lnTo>
+                    <a:pt x="1862185" y="44739"/>
+                  </a:lnTo>
+                  <a:lnTo>
+                    <a:pt x="1790563" y="46911"/>
+                  </a:lnTo>
+                  <a:lnTo>
+                    <a:pt x="1718940" y="49077"/>
+                  </a:lnTo>
+                  <a:lnTo>
+                    <a:pt x="1647318" y="51237"/>
+                  </a:lnTo>
+                  <a:lnTo>
+                    <a:pt x="1575695" y="53392"/>
+                  </a:lnTo>
+                  <a:lnTo>
+                    <a:pt x="1504073" y="55540"/>
+                  </a:lnTo>
+                  <a:lnTo>
+                    <a:pt x="1432450" y="57682"/>
+                  </a:lnTo>
+                  <a:lnTo>
+                    <a:pt x="1360827" y="59819"/>
+                  </a:lnTo>
+                  <a:lnTo>
+                    <a:pt x="1289205" y="61949"/>
+                  </a:lnTo>
+                  <a:lnTo>
+                    <a:pt x="1217582" y="64074"/>
+                  </a:lnTo>
+                  <a:lnTo>
+                    <a:pt x="1145960" y="66193"/>
+                  </a:lnTo>
+                  <a:lnTo>
+                    <a:pt x="1074337" y="68305"/>
+                  </a:lnTo>
+                  <a:lnTo>
+                    <a:pt x="1002715" y="70412"/>
+                  </a:lnTo>
+                  <a:lnTo>
+                    <a:pt x="931092" y="72513"/>
+                  </a:lnTo>
+                  <a:lnTo>
+                    <a:pt x="859470" y="74609"/>
+                  </a:lnTo>
+                  <a:lnTo>
+                    <a:pt x="787847" y="76698"/>
+                  </a:lnTo>
+                  <a:lnTo>
+                    <a:pt x="716225" y="78782"/>
+                  </a:lnTo>
+                  <a:lnTo>
+                    <a:pt x="644602" y="80860"/>
+                  </a:lnTo>
+                  <a:lnTo>
+                    <a:pt x="572980" y="82932"/>
+                  </a:lnTo>
+                  <a:lnTo>
+                    <a:pt x="501357" y="84998"/>
+                  </a:lnTo>
+                  <a:lnTo>
+                    <a:pt x="429735" y="87059"/>
+                  </a:lnTo>
+                  <a:lnTo>
+                    <a:pt x="358112" y="89114"/>
+                  </a:lnTo>
+                  <a:lnTo>
+                    <a:pt x="286490" y="91163"/>
+                  </a:lnTo>
+                  <a:lnTo>
+                    <a:pt x="214867" y="93206"/>
+                  </a:lnTo>
+                  <a:lnTo>
+                    <a:pt x="143245" y="95244"/>
+                  </a:lnTo>
+                  <a:lnTo>
+                    <a:pt x="71622" y="97276"/>
+                  </a:lnTo>
+                  <a:lnTo>
+                    <a:pt x="0" y="99303"/>
                   </a:lnTo>
                 </a:path>
               </a:pathLst>
@@ -3934,625 +4222,312 @@
           </p:nvSpPr>
           <p:spPr>
             <a:xfrm>
-              <a:off x="817517" y="4729723"/>
-              <a:ext cx="7403783" cy="681228"/>
+              <a:off x="1172049" y="3863293"/>
+              <a:ext cx="7090630" cy="1319421"/>
             </a:xfrm>
             <a:custGeom>
               <a:avLst/>
               <a:pathLst>
-                <a:path w="7403783" h="681228">
-                  <a:moveTo>
-                    <a:pt x="7403783" y="681228"/>
-                  </a:moveTo>
-                  <a:lnTo>
-                    <a:pt x="7327150" y="676280"/>
-                  </a:lnTo>
-                  <a:lnTo>
-                    <a:pt x="7250518" y="671163"/>
-                  </a:lnTo>
-                  <a:lnTo>
-                    <a:pt x="7173885" y="665874"/>
-                  </a:lnTo>
-                  <a:lnTo>
-                    <a:pt x="7097253" y="660406"/>
-                  </a:lnTo>
-                  <a:lnTo>
-                    <a:pt x="7020620" y="654753"/>
-                  </a:lnTo>
-                  <a:lnTo>
-                    <a:pt x="6943987" y="648909"/>
-                  </a:lnTo>
-                  <a:lnTo>
-                    <a:pt x="6867355" y="642867"/>
-                  </a:lnTo>
-                  <a:lnTo>
-                    <a:pt x="6790722" y="636621"/>
-                  </a:lnTo>
-                  <a:lnTo>
-                    <a:pt x="6714090" y="630163"/>
-                  </a:lnTo>
-                  <a:lnTo>
-                    <a:pt x="6637457" y="623487"/>
-                  </a:lnTo>
-                  <a:lnTo>
-                    <a:pt x="6560825" y="616585"/>
-                  </a:lnTo>
-                  <a:lnTo>
-                    <a:pt x="6484192" y="609450"/>
-                  </a:lnTo>
-                  <a:lnTo>
-                    <a:pt x="6407560" y="602073"/>
-                  </a:lnTo>
-                  <a:lnTo>
-                    <a:pt x="6330927" y="594447"/>
-                  </a:lnTo>
-                  <a:lnTo>
-                    <a:pt x="6254294" y="586563"/>
-                  </a:lnTo>
-                  <a:lnTo>
-                    <a:pt x="6177662" y="578412"/>
-                  </a:lnTo>
-                  <a:lnTo>
-                    <a:pt x="6101029" y="569986"/>
-                  </a:lnTo>
-                  <a:lnTo>
-                    <a:pt x="6024397" y="561274"/>
-                  </a:lnTo>
-                  <a:lnTo>
-                    <a:pt x="5947764" y="552268"/>
-                  </a:lnTo>
-                  <a:lnTo>
-                    <a:pt x="5871132" y="542957"/>
-                  </a:lnTo>
-                  <a:lnTo>
-                    <a:pt x="5794499" y="533331"/>
-                  </a:lnTo>
-                  <a:lnTo>
-                    <a:pt x="5717867" y="523380"/>
-                  </a:lnTo>
-                  <a:lnTo>
-                    <a:pt x="5641234" y="513092"/>
-                  </a:lnTo>
-                  <a:lnTo>
-                    <a:pt x="5564602" y="502456"/>
-                  </a:lnTo>
-                  <a:lnTo>
-                    <a:pt x="5487969" y="491460"/>
-                  </a:lnTo>
-                  <a:lnTo>
-                    <a:pt x="5411336" y="480092"/>
-                  </a:lnTo>
-                  <a:lnTo>
-                    <a:pt x="5334704" y="468340"/>
-                  </a:lnTo>
-                  <a:lnTo>
-                    <a:pt x="5258071" y="456190"/>
-                  </a:lnTo>
-                  <a:lnTo>
-                    <a:pt x="5181439" y="443629"/>
-                  </a:lnTo>
-                  <a:lnTo>
-                    <a:pt x="5104806" y="430643"/>
-                  </a:lnTo>
-                  <a:lnTo>
-                    <a:pt x="5028174" y="417218"/>
-                  </a:lnTo>
-                  <a:lnTo>
-                    <a:pt x="4951541" y="403339"/>
-                  </a:lnTo>
-                  <a:lnTo>
-                    <a:pt x="4874909" y="388990"/>
-                  </a:lnTo>
-                  <a:lnTo>
-                    <a:pt x="4798276" y="374156"/>
-                  </a:lnTo>
-                  <a:lnTo>
-                    <a:pt x="4721644" y="358821"/>
-                  </a:lnTo>
-                  <a:lnTo>
-                    <a:pt x="4645011" y="342966"/>
-                  </a:lnTo>
-                  <a:lnTo>
-                    <a:pt x="4568378" y="326575"/>
-                  </a:lnTo>
-                  <a:lnTo>
-                    <a:pt x="4491746" y="309630"/>
-                  </a:lnTo>
-                  <a:lnTo>
-                    <a:pt x="4415113" y="292112"/>
-                  </a:lnTo>
-                  <a:lnTo>
-                    <a:pt x="4338481" y="274001"/>
-                  </a:lnTo>
-                  <a:lnTo>
-                    <a:pt x="4261848" y="255277"/>
-                  </a:lnTo>
-                  <a:lnTo>
-                    <a:pt x="4185216" y="235920"/>
-                  </a:lnTo>
-                  <a:lnTo>
-                    <a:pt x="4108583" y="215908"/>
-                  </a:lnTo>
-                  <a:lnTo>
-                    <a:pt x="4031951" y="195220"/>
-                  </a:lnTo>
-                  <a:lnTo>
-                    <a:pt x="3955318" y="173831"/>
-                  </a:lnTo>
-                  <a:lnTo>
-                    <a:pt x="3878685" y="151719"/>
-                  </a:lnTo>
-                  <a:lnTo>
-                    <a:pt x="3802053" y="128859"/>
-                  </a:lnTo>
-                  <a:lnTo>
-                    <a:pt x="3725420" y="105226"/>
-                  </a:lnTo>
-                  <a:lnTo>
-                    <a:pt x="3648788" y="80794"/>
-                  </a:lnTo>
-                  <a:lnTo>
-                    <a:pt x="3572155" y="55535"/>
-                  </a:lnTo>
-                  <a:lnTo>
-                    <a:pt x="3495523" y="29421"/>
-                  </a:lnTo>
-                  <a:lnTo>
-                    <a:pt x="3418890" y="2424"/>
-                  </a:lnTo>
-                  <a:lnTo>
-                    <a:pt x="3342258" y="0"/>
-                  </a:lnTo>
-                  <a:lnTo>
-                    <a:pt x="3265625" y="2296"/>
-                  </a:lnTo>
-                  <a:lnTo>
-                    <a:pt x="3188993" y="4586"/>
-                  </a:lnTo>
-                  <a:lnTo>
-                    <a:pt x="3112360" y="6870"/>
-                  </a:lnTo>
-                  <a:lnTo>
-                    <a:pt x="3035727" y="9147"/>
-                  </a:lnTo>
-                  <a:lnTo>
-                    <a:pt x="2959095" y="11418"/>
-                  </a:lnTo>
-                  <a:lnTo>
-                    <a:pt x="2882462" y="13683"/>
-                  </a:lnTo>
-                  <a:lnTo>
-                    <a:pt x="2805830" y="15942"/>
-                  </a:lnTo>
-                  <a:lnTo>
-                    <a:pt x="2729197" y="18194"/>
-                  </a:lnTo>
-                  <a:lnTo>
-                    <a:pt x="2652565" y="20440"/>
-                  </a:lnTo>
-                  <a:lnTo>
-                    <a:pt x="2575932" y="22680"/>
-                  </a:lnTo>
-                  <a:lnTo>
-                    <a:pt x="2499300" y="24913"/>
-                  </a:lnTo>
-                  <a:lnTo>
-                    <a:pt x="2422667" y="27141"/>
-                  </a:lnTo>
-                  <a:lnTo>
-                    <a:pt x="2346034" y="29362"/>
-                  </a:lnTo>
-                  <a:lnTo>
-                    <a:pt x="2269402" y="31577"/>
-                  </a:lnTo>
-                  <a:lnTo>
-                    <a:pt x="2192769" y="33786"/>
-                  </a:lnTo>
-                  <a:lnTo>
-                    <a:pt x="2116137" y="35989"/>
-                  </a:lnTo>
-                  <a:lnTo>
-                    <a:pt x="2039504" y="38185"/>
-                  </a:lnTo>
-                  <a:lnTo>
-                    <a:pt x="1962872" y="40376"/>
-                  </a:lnTo>
-                  <a:lnTo>
-                    <a:pt x="1886239" y="42560"/>
-                  </a:lnTo>
-                  <a:lnTo>
-                    <a:pt x="1809607" y="44739"/>
-                  </a:lnTo>
-                  <a:lnTo>
-                    <a:pt x="1732974" y="46911"/>
-                  </a:lnTo>
-                  <a:lnTo>
-                    <a:pt x="1656342" y="49077"/>
-                  </a:lnTo>
-                  <a:lnTo>
-                    <a:pt x="1579709" y="51237"/>
-                  </a:lnTo>
-                  <a:lnTo>
-                    <a:pt x="1503076" y="53392"/>
-                  </a:lnTo>
-                  <a:lnTo>
-                    <a:pt x="1426444" y="55540"/>
-                  </a:lnTo>
-                  <a:lnTo>
-                    <a:pt x="1349811" y="57682"/>
-                  </a:lnTo>
-                  <a:lnTo>
-                    <a:pt x="1273179" y="59819"/>
-                  </a:lnTo>
-                  <a:lnTo>
-                    <a:pt x="1196546" y="61949"/>
-                  </a:lnTo>
-                  <a:lnTo>
-                    <a:pt x="1119914" y="64074"/>
-                  </a:lnTo>
-                  <a:lnTo>
-                    <a:pt x="1043281" y="66193"/>
-                  </a:lnTo>
-                  <a:lnTo>
-                    <a:pt x="966649" y="68305"/>
-                  </a:lnTo>
-                  <a:lnTo>
-                    <a:pt x="890016" y="70412"/>
-                  </a:lnTo>
-                  <a:lnTo>
-                    <a:pt x="813384" y="72513"/>
-                  </a:lnTo>
-                  <a:lnTo>
-                    <a:pt x="736751" y="74609"/>
-                  </a:lnTo>
-                  <a:lnTo>
-                    <a:pt x="660118" y="76698"/>
-                  </a:lnTo>
-                  <a:lnTo>
-                    <a:pt x="583486" y="78782"/>
-                  </a:lnTo>
-                  <a:lnTo>
-                    <a:pt x="506853" y="80860"/>
-                  </a:lnTo>
-                  <a:lnTo>
-                    <a:pt x="430221" y="82932"/>
-                  </a:lnTo>
-                  <a:lnTo>
-                    <a:pt x="353588" y="84998"/>
-                  </a:lnTo>
-                  <a:lnTo>
-                    <a:pt x="276956" y="87059"/>
-                  </a:lnTo>
-                  <a:lnTo>
-                    <a:pt x="200323" y="89114"/>
-                  </a:lnTo>
-                  <a:lnTo>
-                    <a:pt x="123691" y="91163"/>
-                  </a:lnTo>
-                  <a:lnTo>
-                    <a:pt x="47058" y="93206"/>
-                  </a:lnTo>
-                  <a:lnTo>
-                    <a:pt x="0" y="94458"/>
-                  </a:lnTo>
-                </a:path>
-              </a:pathLst>
-            </a:custGeom>
-          </p:spPr>
-          <p:txBody>
-            <a:bodyPr/>
-            <a:lstStyle/>
-            <a:p/>
-          </p:txBody>
-        </p:sp>
-        <p:sp>
-          <p:nvSpPr>
-            <p:cNvPr id="24" name="pl24"/>
-            <p:cNvSpPr/>
-            <p:nvPr/>
-          </p:nvSpPr>
-          <p:spPr>
-            <a:xfrm>
-              <a:off x="817517" y="3923751"/>
-              <a:ext cx="7403783" cy="1258963"/>
-            </a:xfrm>
-            <a:custGeom>
-              <a:avLst/>
-              <a:pathLst>
-                <a:path w="7403783" h="1258963">
+                <a:path w="7090630" h="1319421">
                   <a:moveTo>
                     <a:pt x="0" y="0"/>
                   </a:moveTo>
                   <a:lnTo>
-                    <a:pt x="47058" y="15264"/>
-                  </a:lnTo>
-                  <a:lnTo>
-                    <a:pt x="123691" y="39745"/>
-                  </a:lnTo>
-                  <a:lnTo>
-                    <a:pt x="200323" y="63855"/>
-                  </a:lnTo>
-                  <a:lnTo>
-                    <a:pt x="276956" y="87601"/>
-                  </a:lnTo>
-                  <a:lnTo>
-                    <a:pt x="353588" y="110988"/>
-                  </a:lnTo>
-                  <a:lnTo>
-                    <a:pt x="430221" y="134021"/>
-                  </a:lnTo>
-                  <a:lnTo>
-                    <a:pt x="506853" y="156705"/>
-                  </a:lnTo>
-                  <a:lnTo>
-                    <a:pt x="583486" y="179046"/>
-                  </a:lnTo>
-                  <a:lnTo>
-                    <a:pt x="660118" y="201050"/>
-                  </a:lnTo>
-                  <a:lnTo>
-                    <a:pt x="736751" y="222720"/>
-                  </a:lnTo>
-                  <a:lnTo>
-                    <a:pt x="813384" y="244063"/>
-                  </a:lnTo>
-                  <a:lnTo>
-                    <a:pt x="890016" y="265082"/>
-                  </a:lnTo>
-                  <a:lnTo>
-                    <a:pt x="966649" y="285784"/>
-                  </a:lnTo>
-                  <a:lnTo>
-                    <a:pt x="1043281" y="306172"/>
-                  </a:lnTo>
-                  <a:lnTo>
-                    <a:pt x="1119914" y="326253"/>
-                  </a:lnTo>
-                  <a:lnTo>
-                    <a:pt x="1196546" y="346029"/>
-                  </a:lnTo>
-                  <a:lnTo>
-                    <a:pt x="1273179" y="365506"/>
-                  </a:lnTo>
-                  <a:lnTo>
-                    <a:pt x="1349811" y="384688"/>
-                  </a:lnTo>
-                  <a:lnTo>
-                    <a:pt x="1426444" y="403581"/>
-                  </a:lnTo>
-                  <a:lnTo>
-                    <a:pt x="1503076" y="422187"/>
-                  </a:lnTo>
-                  <a:lnTo>
-                    <a:pt x="1579709" y="440512"/>
-                  </a:lnTo>
-                  <a:lnTo>
-                    <a:pt x="1656342" y="458560"/>
-                  </a:lnTo>
-                  <a:lnTo>
-                    <a:pt x="1732974" y="476335"/>
-                  </a:lnTo>
-                  <a:lnTo>
-                    <a:pt x="1809607" y="493840"/>
-                  </a:lnTo>
-                  <a:lnTo>
-                    <a:pt x="1886239" y="511081"/>
-                  </a:lnTo>
-                  <a:lnTo>
-                    <a:pt x="1962872" y="528061"/>
-                  </a:lnTo>
-                  <a:lnTo>
-                    <a:pt x="2039504" y="544785"/>
-                  </a:lnTo>
-                  <a:lnTo>
-                    <a:pt x="2116137" y="561255"/>
-                  </a:lnTo>
-                  <a:lnTo>
-                    <a:pt x="2192769" y="577476"/>
-                  </a:lnTo>
-                  <a:lnTo>
-                    <a:pt x="2269402" y="593452"/>
-                  </a:lnTo>
-                  <a:lnTo>
-                    <a:pt x="2346034" y="609186"/>
-                  </a:lnTo>
-                  <a:lnTo>
-                    <a:pt x="2422667" y="624682"/>
-                  </a:lnTo>
-                  <a:lnTo>
-                    <a:pt x="2499300" y="639944"/>
-                  </a:lnTo>
-                  <a:lnTo>
-                    <a:pt x="2575932" y="654974"/>
-                  </a:lnTo>
-                  <a:lnTo>
-                    <a:pt x="2652565" y="669778"/>
-                  </a:lnTo>
-                  <a:lnTo>
-                    <a:pt x="2729197" y="684357"/>
-                  </a:lnTo>
-                  <a:lnTo>
-                    <a:pt x="2805830" y="698716"/>
-                  </a:lnTo>
-                  <a:lnTo>
-                    <a:pt x="2882462" y="712857"/>
-                  </a:lnTo>
-                  <a:lnTo>
-                    <a:pt x="2959095" y="726785"/>
-                  </a:lnTo>
-                  <a:lnTo>
-                    <a:pt x="3035727" y="740502"/>
-                  </a:lnTo>
-                  <a:lnTo>
-                    <a:pt x="3112360" y="754011"/>
-                  </a:lnTo>
-                  <a:lnTo>
-                    <a:pt x="3188993" y="767316"/>
-                  </a:lnTo>
-                  <a:lnTo>
-                    <a:pt x="3265625" y="780420"/>
-                  </a:lnTo>
-                  <a:lnTo>
-                    <a:pt x="3342258" y="793326"/>
-                  </a:lnTo>
-                  <a:lnTo>
-                    <a:pt x="3418890" y="806036"/>
-                  </a:lnTo>
-                  <a:lnTo>
-                    <a:pt x="3495523" y="818554"/>
-                  </a:lnTo>
-                  <a:lnTo>
-                    <a:pt x="3572155" y="830883"/>
-                  </a:lnTo>
-                  <a:lnTo>
-                    <a:pt x="3648788" y="843025"/>
-                  </a:lnTo>
-                  <a:lnTo>
-                    <a:pt x="3725420" y="854983"/>
-                  </a:lnTo>
-                  <a:lnTo>
-                    <a:pt x="3802053" y="866761"/>
-                  </a:lnTo>
-                  <a:lnTo>
-                    <a:pt x="3878685" y="878360"/>
-                  </a:lnTo>
-                  <a:lnTo>
-                    <a:pt x="3955318" y="889784"/>
-                  </a:lnTo>
-                  <a:lnTo>
-                    <a:pt x="4031951" y="901035"/>
-                  </a:lnTo>
-                  <a:lnTo>
-                    <a:pt x="4108583" y="912116"/>
-                  </a:lnTo>
-                  <a:lnTo>
-                    <a:pt x="4185216" y="923029"/>
-                  </a:lnTo>
-                  <a:lnTo>
-                    <a:pt x="4261848" y="933777"/>
-                  </a:lnTo>
-                  <a:lnTo>
-                    <a:pt x="4338481" y="944363"/>
-                  </a:lnTo>
-                  <a:lnTo>
-                    <a:pt x="4415113" y="954788"/>
-                  </a:lnTo>
-                  <a:lnTo>
-                    <a:pt x="4491746" y="965056"/>
-                  </a:lnTo>
-                  <a:lnTo>
-                    <a:pt x="4568378" y="975168"/>
-                  </a:lnTo>
-                  <a:lnTo>
-                    <a:pt x="4645011" y="985128"/>
-                  </a:lnTo>
-                  <a:lnTo>
-                    <a:pt x="4721644" y="994936"/>
-                  </a:lnTo>
-                  <a:lnTo>
-                    <a:pt x="4798276" y="1004597"/>
-                  </a:lnTo>
-                  <a:lnTo>
-                    <a:pt x="4874909" y="1014111"/>
-                  </a:lnTo>
-                  <a:lnTo>
-                    <a:pt x="4951541" y="1023481"/>
-                  </a:lnTo>
-                  <a:lnTo>
-                    <a:pt x="5028174" y="1032709"/>
-                  </a:lnTo>
-                  <a:lnTo>
-                    <a:pt x="5104806" y="1041798"/>
-                  </a:lnTo>
-                  <a:lnTo>
-                    <a:pt x="5181439" y="1050750"/>
-                  </a:lnTo>
-                  <a:lnTo>
-                    <a:pt x="5258071" y="1059566"/>
-                  </a:lnTo>
-                  <a:lnTo>
-                    <a:pt x="5334704" y="1068248"/>
-                  </a:lnTo>
-                  <a:lnTo>
-                    <a:pt x="5411336" y="1076799"/>
-                  </a:lnTo>
-                  <a:lnTo>
-                    <a:pt x="5487969" y="1085221"/>
-                  </a:lnTo>
-                  <a:lnTo>
-                    <a:pt x="5564602" y="1093516"/>
-                  </a:lnTo>
-                  <a:lnTo>
-                    <a:pt x="5641234" y="1101685"/>
-                  </a:lnTo>
-                  <a:lnTo>
-                    <a:pt x="5717867" y="1109730"/>
-                  </a:lnTo>
-                  <a:lnTo>
-                    <a:pt x="5794499" y="1117654"/>
-                  </a:lnTo>
-                  <a:lnTo>
-                    <a:pt x="5871132" y="1125457"/>
-                  </a:lnTo>
-                  <a:lnTo>
-                    <a:pt x="5947764" y="1133143"/>
-                  </a:lnTo>
-                  <a:lnTo>
-                    <a:pt x="6024397" y="1140713"/>
-                  </a:lnTo>
-                  <a:lnTo>
-                    <a:pt x="6101029" y="1148168"/>
-                  </a:lnTo>
-                  <a:lnTo>
-                    <a:pt x="6177662" y="1155510"/>
-                  </a:lnTo>
-                  <a:lnTo>
-                    <a:pt x="6254294" y="1162741"/>
-                  </a:lnTo>
-                  <a:lnTo>
-                    <a:pt x="6330927" y="1169863"/>
-                  </a:lnTo>
-                  <a:lnTo>
-                    <a:pt x="6407560" y="1176877"/>
-                  </a:lnTo>
-                  <a:lnTo>
-                    <a:pt x="6484192" y="1183785"/>
-                  </a:lnTo>
-                  <a:lnTo>
-                    <a:pt x="6560825" y="1190588"/>
-                  </a:lnTo>
-                  <a:lnTo>
-                    <a:pt x="6637457" y="1197288"/>
-                  </a:lnTo>
-                  <a:lnTo>
-                    <a:pt x="6714090" y="1203887"/>
-                  </a:lnTo>
-                  <a:lnTo>
-                    <a:pt x="6790722" y="1210387"/>
-                  </a:lnTo>
-                  <a:lnTo>
-                    <a:pt x="6867355" y="1216788"/>
-                  </a:lnTo>
-                  <a:lnTo>
-                    <a:pt x="6943987" y="1223092"/>
-                  </a:lnTo>
-                  <a:lnTo>
-                    <a:pt x="7020620" y="1229300"/>
-                  </a:lnTo>
-                  <a:lnTo>
-                    <a:pt x="7097253" y="1235415"/>
-                  </a:lnTo>
-                  <a:lnTo>
-                    <a:pt x="7173885" y="1241437"/>
-                  </a:lnTo>
-                  <a:lnTo>
-                    <a:pt x="7250518" y="1247369"/>
-                  </a:lnTo>
-                  <a:lnTo>
-                    <a:pt x="7327150" y="1253210"/>
-                  </a:lnTo>
-                  <a:lnTo>
-                    <a:pt x="7403783" y="1258963"/>
+                    <a:pt x="71622" y="25626"/>
+                  </a:lnTo>
+                  <a:lnTo>
+                    <a:pt x="143245" y="50865"/>
+                  </a:lnTo>
+                  <a:lnTo>
+                    <a:pt x="214867" y="75722"/>
+                  </a:lnTo>
+                  <a:lnTo>
+                    <a:pt x="286490" y="100203"/>
+                  </a:lnTo>
+                  <a:lnTo>
+                    <a:pt x="358112" y="124314"/>
+                  </a:lnTo>
+                  <a:lnTo>
+                    <a:pt x="429735" y="148059"/>
+                  </a:lnTo>
+                  <a:lnTo>
+                    <a:pt x="501357" y="171446"/>
+                  </a:lnTo>
+                  <a:lnTo>
+                    <a:pt x="572980" y="194479"/>
+                  </a:lnTo>
+                  <a:lnTo>
+                    <a:pt x="644602" y="217163"/>
+                  </a:lnTo>
+                  <a:lnTo>
+                    <a:pt x="716225" y="239505"/>
+                  </a:lnTo>
+                  <a:lnTo>
+                    <a:pt x="787847" y="261508"/>
+                  </a:lnTo>
+                  <a:lnTo>
+                    <a:pt x="859470" y="283178"/>
+                  </a:lnTo>
+                  <a:lnTo>
+                    <a:pt x="931092" y="304521"/>
+                  </a:lnTo>
+                  <a:lnTo>
+                    <a:pt x="1002715" y="325541"/>
+                  </a:lnTo>
+                  <a:lnTo>
+                    <a:pt x="1074337" y="346242"/>
+                  </a:lnTo>
+                  <a:lnTo>
+                    <a:pt x="1145960" y="366631"/>
+                  </a:lnTo>
+                  <a:lnTo>
+                    <a:pt x="1217582" y="386711"/>
+                  </a:lnTo>
+                  <a:lnTo>
+                    <a:pt x="1289205" y="406487"/>
+                  </a:lnTo>
+                  <a:lnTo>
+                    <a:pt x="1360827" y="425964"/>
+                  </a:lnTo>
+                  <a:lnTo>
+                    <a:pt x="1432450" y="445147"/>
+                  </a:lnTo>
+                  <a:lnTo>
+                    <a:pt x="1504073" y="464039"/>
+                  </a:lnTo>
+                  <a:lnTo>
+                    <a:pt x="1575695" y="482645"/>
+                  </a:lnTo>
+                  <a:lnTo>
+                    <a:pt x="1647318" y="500970"/>
+                  </a:lnTo>
+                  <a:lnTo>
+                    <a:pt x="1718940" y="519018"/>
+                  </a:lnTo>
+                  <a:lnTo>
+                    <a:pt x="1790563" y="536793"/>
+                  </a:lnTo>
+                  <a:lnTo>
+                    <a:pt x="1862185" y="554299"/>
+                  </a:lnTo>
+                  <a:lnTo>
+                    <a:pt x="1933808" y="571540"/>
+                  </a:lnTo>
+                  <a:lnTo>
+                    <a:pt x="2005430" y="588520"/>
+                  </a:lnTo>
+                  <a:lnTo>
+                    <a:pt x="2077053" y="605243"/>
+                  </a:lnTo>
+                  <a:lnTo>
+                    <a:pt x="2148675" y="621713"/>
+                  </a:lnTo>
+                  <a:lnTo>
+                    <a:pt x="2220298" y="637934"/>
+                  </a:lnTo>
+                  <a:lnTo>
+                    <a:pt x="2291920" y="653910"/>
+                  </a:lnTo>
+                  <a:lnTo>
+                    <a:pt x="2363543" y="669644"/>
+                  </a:lnTo>
+                  <a:lnTo>
+                    <a:pt x="2435165" y="685140"/>
+                  </a:lnTo>
+                  <a:lnTo>
+                    <a:pt x="2506788" y="700402"/>
+                  </a:lnTo>
+                  <a:lnTo>
+                    <a:pt x="2578410" y="715432"/>
+                  </a:lnTo>
+                  <a:lnTo>
+                    <a:pt x="2650033" y="730236"/>
+                  </a:lnTo>
+                  <a:lnTo>
+                    <a:pt x="2721655" y="744815"/>
+                  </a:lnTo>
+                  <a:lnTo>
+                    <a:pt x="2793278" y="759174"/>
+                  </a:lnTo>
+                  <a:lnTo>
+                    <a:pt x="2864901" y="773316"/>
+                  </a:lnTo>
+                  <a:lnTo>
+                    <a:pt x="2936523" y="787243"/>
+                  </a:lnTo>
+                  <a:lnTo>
+                    <a:pt x="3008146" y="800960"/>
+                  </a:lnTo>
+                  <a:lnTo>
+                    <a:pt x="3079768" y="814470"/>
+                  </a:lnTo>
+                  <a:lnTo>
+                    <a:pt x="3151391" y="827775"/>
+                  </a:lnTo>
+                  <a:lnTo>
+                    <a:pt x="3223013" y="840878"/>
+                  </a:lnTo>
+                  <a:lnTo>
+                    <a:pt x="3294636" y="853784"/>
+                  </a:lnTo>
+                  <a:lnTo>
+                    <a:pt x="3366258" y="866494"/>
+                  </a:lnTo>
+                  <a:lnTo>
+                    <a:pt x="3437881" y="879012"/>
+                  </a:lnTo>
+                  <a:lnTo>
+                    <a:pt x="3509503" y="891341"/>
+                  </a:lnTo>
+                  <a:lnTo>
+                    <a:pt x="3581126" y="903483"/>
+                  </a:lnTo>
+                  <a:lnTo>
+                    <a:pt x="3652748" y="915442"/>
+                  </a:lnTo>
+                  <a:lnTo>
+                    <a:pt x="3724371" y="927219"/>
+                  </a:lnTo>
+                  <a:lnTo>
+                    <a:pt x="3795993" y="938818"/>
+                  </a:lnTo>
+                  <a:lnTo>
+                    <a:pt x="3867616" y="950242"/>
+                  </a:lnTo>
+                  <a:lnTo>
+                    <a:pt x="3939238" y="961493"/>
+                  </a:lnTo>
+                  <a:lnTo>
+                    <a:pt x="4010861" y="972574"/>
+                  </a:lnTo>
+                  <a:lnTo>
+                    <a:pt x="4082483" y="983487"/>
+                  </a:lnTo>
+                  <a:lnTo>
+                    <a:pt x="4154106" y="994236"/>
+                  </a:lnTo>
+                  <a:lnTo>
+                    <a:pt x="4225729" y="1004821"/>
+                  </a:lnTo>
+                  <a:lnTo>
+                    <a:pt x="4297351" y="1015246"/>
+                  </a:lnTo>
+                  <a:lnTo>
+                    <a:pt x="4368974" y="1025514"/>
+                  </a:lnTo>
+                  <a:lnTo>
+                    <a:pt x="4440596" y="1035626"/>
+                  </a:lnTo>
+                  <a:lnTo>
+                    <a:pt x="4512219" y="1045586"/>
+                  </a:lnTo>
+                  <a:lnTo>
+                    <a:pt x="4583841" y="1055395"/>
+                  </a:lnTo>
+                  <a:lnTo>
+                    <a:pt x="4655464" y="1065055"/>
+                  </a:lnTo>
+                  <a:lnTo>
+                    <a:pt x="4727086" y="1074569"/>
+                  </a:lnTo>
+                  <a:lnTo>
+                    <a:pt x="4798709" y="1083939"/>
+                  </a:lnTo>
+                  <a:lnTo>
+                    <a:pt x="4870331" y="1093168"/>
+                  </a:lnTo>
+                  <a:lnTo>
+                    <a:pt x="4941954" y="1102257"/>
+                  </a:lnTo>
+                  <a:lnTo>
+                    <a:pt x="5013576" y="1111208"/>
+                  </a:lnTo>
+                  <a:lnTo>
+                    <a:pt x="5085199" y="1120024"/>
+                  </a:lnTo>
+                  <a:lnTo>
+                    <a:pt x="5156821" y="1128706"/>
+                  </a:lnTo>
+                  <a:lnTo>
+                    <a:pt x="5228444" y="1137258"/>
+                  </a:lnTo>
+                  <a:lnTo>
+                    <a:pt x="5300066" y="1145679"/>
+                  </a:lnTo>
+                  <a:lnTo>
+                    <a:pt x="5371689" y="1153974"/>
+                  </a:lnTo>
+                  <a:lnTo>
+                    <a:pt x="5443311" y="1162143"/>
+                  </a:lnTo>
+                  <a:lnTo>
+                    <a:pt x="5514934" y="1170188"/>
+                  </a:lnTo>
+                  <a:lnTo>
+                    <a:pt x="5586557" y="1178112"/>
+                  </a:lnTo>
+                  <a:lnTo>
+                    <a:pt x="5658179" y="1185916"/>
+                  </a:lnTo>
+                  <a:lnTo>
+                    <a:pt x="5729802" y="1193601"/>
+                  </a:lnTo>
+                  <a:lnTo>
+                    <a:pt x="5801424" y="1201171"/>
+                  </a:lnTo>
+                  <a:lnTo>
+                    <a:pt x="5873047" y="1208626"/>
+                  </a:lnTo>
+                  <a:lnTo>
+                    <a:pt x="5944669" y="1215968"/>
+                  </a:lnTo>
+                  <a:lnTo>
+                    <a:pt x="6016292" y="1223199"/>
+                  </a:lnTo>
+                  <a:lnTo>
+                    <a:pt x="6087914" y="1230321"/>
+                  </a:lnTo>
+                  <a:lnTo>
+                    <a:pt x="6159537" y="1237335"/>
+                  </a:lnTo>
+                  <a:lnTo>
+                    <a:pt x="6231159" y="1244243"/>
+                  </a:lnTo>
+                  <a:lnTo>
+                    <a:pt x="6302782" y="1251046"/>
+                  </a:lnTo>
+                  <a:lnTo>
+                    <a:pt x="6374404" y="1257747"/>
+                  </a:lnTo>
+                  <a:lnTo>
+                    <a:pt x="6446027" y="1264346"/>
+                  </a:lnTo>
+                  <a:lnTo>
+                    <a:pt x="6517649" y="1270845"/>
+                  </a:lnTo>
+                  <a:lnTo>
+                    <a:pt x="6589272" y="1277246"/>
+                  </a:lnTo>
+                  <a:lnTo>
+                    <a:pt x="6660894" y="1283550"/>
+                  </a:lnTo>
+                  <a:lnTo>
+                    <a:pt x="6732517" y="1289759"/>
+                  </a:lnTo>
+                  <a:lnTo>
+                    <a:pt x="6804139" y="1295873"/>
+                  </a:lnTo>
+                  <a:lnTo>
+                    <a:pt x="6875762" y="1301896"/>
+                  </a:lnTo>
+                  <a:lnTo>
+                    <a:pt x="6947385" y="1307827"/>
+                  </a:lnTo>
+                  <a:lnTo>
+                    <a:pt x="7019007" y="1313668"/>
+                  </a:lnTo>
+                  <a:lnTo>
+                    <a:pt x="7090630" y="1319421"/>
                   </a:lnTo>
                 </a:path>
               </a:pathLst>
@@ -4575,7 +4550,7 @@
         </p:sp>
         <p:sp>
           <p:nvSpPr>
-            <p:cNvPr id="25" name="pl25"/>
+            <p:cNvPr id="24" name="pl24"/>
             <p:cNvSpPr/>
             <p:nvPr/>
           </p:nvSpPr>
@@ -4618,13 +4593,13 @@
         </p:sp>
         <p:sp>
           <p:nvSpPr>
-            <p:cNvPr id="26" name="pl26"/>
+            <p:cNvPr id="25" name="pl25"/>
             <p:cNvSpPr/>
             <p:nvPr/>
           </p:nvSpPr>
           <p:spPr>
             <a:xfrm>
-              <a:off x="4224261" y="2073503"/>
+              <a:off x="4526955" y="2073503"/>
               <a:ext cx="0" cy="3649639"/>
             </a:xfrm>
             <a:custGeom>
@@ -4661,7 +4636,7 @@
         </p:sp>
         <p:sp>
           <p:nvSpPr>
-            <p:cNvPr id="27" name="tx27"/>
+            <p:cNvPr id="26" name="tx26"/>
             <p:cNvSpPr/>
             <p:nvPr/>
           </p:nvSpPr>
@@ -4707,7 +4682,7 @@
         </p:sp>
         <p:sp>
           <p:nvSpPr>
-            <p:cNvPr id="28" name="tx28"/>
+            <p:cNvPr id="27" name="tx27"/>
             <p:cNvSpPr/>
             <p:nvPr/>
           </p:nvSpPr>
@@ -4753,7 +4728,7 @@
         </p:sp>
         <p:sp>
           <p:nvSpPr>
-            <p:cNvPr id="29" name="tx29"/>
+            <p:cNvPr id="28" name="tx28"/>
             <p:cNvSpPr/>
             <p:nvPr/>
           </p:nvSpPr>
@@ -4799,7 +4774,7 @@
         </p:sp>
         <p:sp>
           <p:nvSpPr>
-            <p:cNvPr id="30" name="tx30"/>
+            <p:cNvPr id="29" name="tx29"/>
             <p:cNvSpPr/>
             <p:nvPr/>
           </p:nvSpPr>
@@ -4845,7 +4820,7 @@
         </p:sp>
         <p:sp>
           <p:nvSpPr>
-            <p:cNvPr id="31" name="tx31"/>
+            <p:cNvPr id="30" name="tx30"/>
             <p:cNvSpPr/>
             <p:nvPr/>
           </p:nvSpPr>
@@ -4891,14 +4866,14 @@
         </p:sp>
         <p:sp>
           <p:nvSpPr>
-            <p:cNvPr id="32" name="tx32"/>
+            <p:cNvPr id="31" name="tx31"/>
             <p:cNvSpPr/>
             <p:nvPr/>
           </p:nvSpPr>
           <p:spPr>
             <a:xfrm>
-              <a:off x="2423864" y="5785772"/>
-              <a:ext cx="155356" cy="80101"/>
+              <a:off x="2421884" y="5785772"/>
+              <a:ext cx="161574" cy="80101"/>
             </a:xfrm>
             <a:prstGeom prst="rect">
               <a:avLst/>
@@ -4930,21 +4905,21 @@
                   <a:latin typeface="Helvetica"/>
                   <a:cs typeface="Helvetica"/>
                 </a:rPr>
-                <a:t>0.8</a:t>
+                <a:t>-25</a:t>
               </a:r>
             </a:p>
           </p:txBody>
         </p:sp>
         <p:sp>
           <p:nvSpPr>
-            <p:cNvPr id="33" name="tx33"/>
+            <p:cNvPr id="32" name="tx32"/>
             <p:cNvSpPr/>
             <p:nvPr/>
           </p:nvSpPr>
           <p:spPr>
             <a:xfrm>
-              <a:off x="4196521" y="5785772"/>
-              <a:ext cx="155356" cy="80101"/>
+              <a:off x="4542539" y="5785772"/>
+              <a:ext cx="62179" cy="80101"/>
             </a:xfrm>
             <a:prstGeom prst="rect">
               <a:avLst/>
@@ -4976,21 +4951,21 @@
                   <a:latin typeface="Helvetica"/>
                   <a:cs typeface="Helvetica"/>
                 </a:rPr>
-                <a:t>1.0</a:t>
+                <a:t>0</a:t>
               </a:r>
             </a:p>
           </p:txBody>
         </p:sp>
         <p:sp>
           <p:nvSpPr>
-            <p:cNvPr id="34" name="tx34"/>
+            <p:cNvPr id="33" name="tx33"/>
             <p:cNvSpPr/>
             <p:nvPr/>
           </p:nvSpPr>
           <p:spPr>
             <a:xfrm>
-              <a:off x="5969179" y="5785772"/>
-              <a:ext cx="155356" cy="80101"/>
+              <a:off x="6582407" y="5785772"/>
+              <a:ext cx="124358" cy="80101"/>
             </a:xfrm>
             <a:prstGeom prst="rect">
               <a:avLst/>
@@ -5022,67 +4997,21 @@
                   <a:latin typeface="Helvetica"/>
                   <a:cs typeface="Helvetica"/>
                 </a:rPr>
-                <a:t>1.2</a:t>
+                <a:t>25</a:t>
               </a:r>
             </a:p>
           </p:txBody>
         </p:sp>
         <p:sp>
           <p:nvSpPr>
-            <p:cNvPr id="35" name="tx35"/>
+            <p:cNvPr id="34" name="tx34"/>
             <p:cNvSpPr/>
             <p:nvPr/>
           </p:nvSpPr>
           <p:spPr>
             <a:xfrm>
-              <a:off x="7741836" y="5785772"/>
-              <a:ext cx="155356" cy="80101"/>
-            </a:xfrm>
-            <a:prstGeom prst="rect">
-              <a:avLst/>
-            </a:prstGeom>
-            <a:noFill/>
-          </p:spPr>
-          <p:txBody>
-            <a:bodyPr lIns="0" rIns="0" tIns="0" bIns="0" anchorCtr="1" anchor="ctr" wrap="none"/>
-            <a:lstStyle/>
-            <a:p>
-              <a:pPr algn="l" marL="0" marR="0" indent="0">
-                <a:lnSpc>
-                  <a:spcPts val="880"/>
-                </a:lnSpc>
-                <a:spcBef>
-                  <a:spcPts val="0"/>
-                </a:spcBef>
-                <a:spcAft>
-                  <a:spcPts val="0"/>
-                </a:spcAft>
-              </a:pPr>
-              <a:r>
-                <a:rPr sz="880">
-                  <a:solidFill>
-                    <a:srgbClr val="4D4D4D">
-                      <a:alpha val="100000"/>
-                    </a:srgbClr>
-                  </a:solidFill>
-                  <a:latin typeface="Helvetica"/>
-                  <a:cs typeface="Helvetica"/>
-                </a:rPr>
-                <a:t>1.4</a:t>
-              </a:r>
-            </a:p>
-          </p:txBody>
-        </p:sp>
-        <p:sp>
-          <p:nvSpPr>
-            <p:cNvPr id="36" name="tx36"/>
-            <p:cNvSpPr/>
-            <p:nvPr/>
-          </p:nvSpPr>
-          <p:spPr>
-            <a:xfrm>
-              <a:off x="3879271" y="5925448"/>
-              <a:ext cx="1676186" cy="100218"/>
+              <a:off x="2928340" y="5925448"/>
+              <a:ext cx="3578047" cy="100218"/>
             </a:xfrm>
             <a:prstGeom prst="rect">
               <a:avLst/>
@@ -5114,14 +5043,14 @@
                   <a:latin typeface="Helvetica"/>
                   <a:cs typeface="Helvetica"/>
                 </a:rPr>
-                <a:t>CKD-EPI Cr-Cys / CG ratio</a:t>
+                <a:t>eGFR difference (%): 100 × (CKD-EPI Cr-Cys − CG) / CG</a:t>
               </a:r>
             </a:p>
           </p:txBody>
         </p:sp>
         <p:sp>
           <p:nvSpPr>
-            <p:cNvPr id="37" name="tx37"/>
+            <p:cNvPr id="35" name="tx35"/>
             <p:cNvSpPr/>
             <p:nvPr/>
           </p:nvSpPr>
@@ -5167,14 +5096,14 @@
         </p:sp>
         <p:sp>
           <p:nvSpPr>
-            <p:cNvPr id="38" name="tx38"/>
+            <p:cNvPr id="36" name="tx36"/>
             <p:cNvSpPr/>
             <p:nvPr/>
           </p:nvSpPr>
           <p:spPr>
             <a:xfrm>
               <a:off x="817517" y="1896563"/>
-              <a:ext cx="6169365" cy="82021"/>
+              <a:ext cx="6321612" cy="82021"/>
             </a:xfrm>
             <a:prstGeom prst="rect">
               <a:avLst/>
@@ -5206,14 +5135,14 @@
                   <a:latin typeface="Helvetica"/>
                   <a:cs typeface="Helvetica"/>
                 </a:rPr>
-                <a:t>subHR per 0.1 ratio decline: 1.19 (0.97-1.47), p = 0.097  |  per IQR decline (Δ = 0.30): 1.69 (0.91-3.16)  |  IQR: [0.85, 1.15]</a:t>
+                <a:t>subHR per 10 % decline: 1.19 (0.97-1.47), p = 0.097  |  per IQR decline (Δ = 29.9 %): 1.69 (0.91-3.16)  |  IQR: [-15.0, 14.9] %</a:t>
               </a:r>
             </a:p>
           </p:txBody>
         </p:sp>
         <p:sp>
           <p:nvSpPr>
-            <p:cNvPr id="39" name="tx39"/>
+            <p:cNvPr id="37" name="tx37"/>
             <p:cNvSpPr/>
             <p:nvPr/>
           </p:nvSpPr>

--- a/docs/pptx/carbo/jx-carbo-linsubhr-ratio-hosp-immune-other.pptx
+++ b/docs/pptx/carbo/jx-carbo-linsubhr-ratio-hosp-immune-other.pptx
@@ -2265,34 +2265,26 @@
         </p:sp>
         <p:sp>
           <p:nvSpPr>
-            <p:cNvPr id="4" name="pl4"/>
+            <p:cNvPr id="4" name="rc4"/>
             <p:cNvSpPr/>
             <p:nvPr/>
           </p:nvSpPr>
           <p:spPr>
             <a:xfrm>
-              <a:off x="817517" y="5142518"/>
-              <a:ext cx="7799693" cy="0"/>
+              <a:off x="457200" y="1600200"/>
+              <a:ext cx="8229600" cy="4525962"/>
             </a:xfrm>
-            <a:custGeom>
+            <a:prstGeom prst="rect">
               <a:avLst/>
-              <a:pathLst>
-                <a:path w="7799693" h="0">
-                  <a:moveTo>
-                    <a:pt x="0" y="0"/>
-                  </a:moveTo>
-                  <a:lnTo>
-                    <a:pt x="7799693" y="0"/>
-                  </a:lnTo>
-                  <a:lnTo>
-                    <a:pt x="7799693" y="0"/>
-                  </a:lnTo>
-                </a:path>
-              </a:pathLst>
-            </a:custGeom>
-            <a:ln w="6775" cap="flat">
+            </a:prstGeom>
+            <a:solidFill>
+              <a:srgbClr val="FFFFFF">
+                <a:alpha val="100000"/>
+              </a:srgbClr>
+            </a:solidFill>
+            <a:ln w="13550" cap="rnd">
               <a:solidFill>
-                <a:srgbClr val="EBEBEB">
+                <a:srgbClr val="FFFFFF">
                   <a:alpha val="100000"/>
                 </a:srgbClr>
               </a:solidFill>
@@ -2314,21 +2306,21 @@
           </p:nvSpPr>
           <p:spPr>
             <a:xfrm>
-              <a:off x="817517" y="4313054"/>
-              <a:ext cx="7799693" cy="0"/>
+              <a:off x="887106" y="3250627"/>
+              <a:ext cx="7660515" cy="0"/>
             </a:xfrm>
             <a:custGeom>
               <a:avLst/>
               <a:pathLst>
-                <a:path w="7799693" h="0">
+                <a:path w="7660515" h="0">
                   <a:moveTo>
                     <a:pt x="0" y="0"/>
                   </a:moveTo>
                   <a:lnTo>
-                    <a:pt x="7799693" y="0"/>
-                  </a:lnTo>
-                  <a:lnTo>
-                    <a:pt x="7799693" y="0"/>
+                    <a:pt x="7660515" y="0"/>
+                  </a:lnTo>
+                  <a:lnTo>
+                    <a:pt x="7660515" y="0"/>
                   </a:lnTo>
                 </a:path>
               </a:pathLst>
@@ -2357,21 +2349,21 @@
           </p:nvSpPr>
           <p:spPr>
             <a:xfrm>
-              <a:off x="817517" y="3483591"/>
-              <a:ext cx="7799693" cy="0"/>
+              <a:off x="887106" y="2951293"/>
+              <a:ext cx="7660515" cy="0"/>
             </a:xfrm>
             <a:custGeom>
               <a:avLst/>
               <a:pathLst>
-                <a:path w="7799693" h="0">
+                <a:path w="7660515" h="0">
                   <a:moveTo>
                     <a:pt x="0" y="0"/>
                   </a:moveTo>
                   <a:lnTo>
-                    <a:pt x="7799693" y="0"/>
-                  </a:lnTo>
-                  <a:lnTo>
-                    <a:pt x="7799693" y="0"/>
+                    <a:pt x="7660515" y="0"/>
+                  </a:lnTo>
+                  <a:lnTo>
+                    <a:pt x="7660515" y="0"/>
                   </a:lnTo>
                 </a:path>
               </a:pathLst>
@@ -2400,21 +2392,21 @@
           </p:nvSpPr>
           <p:spPr>
             <a:xfrm>
-              <a:off x="817517" y="2654127"/>
-              <a:ext cx="7799693" cy="0"/>
+              <a:off x="887106" y="2651959"/>
+              <a:ext cx="7660515" cy="0"/>
             </a:xfrm>
             <a:custGeom>
               <a:avLst/>
               <a:pathLst>
-                <a:path w="7799693" h="0">
+                <a:path w="7660515" h="0">
                   <a:moveTo>
                     <a:pt x="0" y="0"/>
                   </a:moveTo>
                   <a:lnTo>
-                    <a:pt x="7799693" y="0"/>
-                  </a:lnTo>
-                  <a:lnTo>
-                    <a:pt x="7799693" y="0"/>
+                    <a:pt x="7660515" y="0"/>
+                  </a:lnTo>
+                  <a:lnTo>
+                    <a:pt x="7660515" y="0"/>
                   </a:lnTo>
                 </a:path>
               </a:pathLst>
@@ -2443,21 +2435,21 @@
           </p:nvSpPr>
           <p:spPr>
             <a:xfrm>
-              <a:off x="1467192" y="2073503"/>
-              <a:ext cx="0" cy="3649639"/>
+              <a:off x="887106" y="2352625"/>
+              <a:ext cx="7660515" cy="0"/>
             </a:xfrm>
             <a:custGeom>
               <a:avLst/>
               <a:pathLst>
-                <a:path w="0" h="3649639">
+                <a:path w="7660515" h="0">
                   <a:moveTo>
-                    <a:pt x="0" y="3649639"/>
+                    <a:pt x="0" y="0"/>
                   </a:moveTo>
                   <a:lnTo>
-                    <a:pt x="0" y="0"/>
-                  </a:lnTo>
-                  <a:lnTo>
-                    <a:pt x="0" y="0"/>
+                    <a:pt x="7660515" y="0"/>
+                  </a:lnTo>
+                  <a:lnTo>
+                    <a:pt x="7660515" y="0"/>
                   </a:lnTo>
                 </a:path>
               </a:pathLst>
@@ -2486,15 +2478,15 @@
           </p:nvSpPr>
           <p:spPr>
             <a:xfrm>
-              <a:off x="3538150" y="2073503"/>
-              <a:ext cx="0" cy="3649639"/>
+              <a:off x="1525188" y="2143092"/>
+              <a:ext cx="0" cy="1317069"/>
             </a:xfrm>
             <a:custGeom>
               <a:avLst/>
               <a:pathLst>
-                <a:path w="0" h="3649639">
+                <a:path w="0" h="1317069">
                   <a:moveTo>
-                    <a:pt x="0" y="3649639"/>
+                    <a:pt x="0" y="1317069"/>
                   </a:moveTo>
                   <a:lnTo>
                     <a:pt x="0" y="0"/>
@@ -2529,15 +2521,15 @@
           </p:nvSpPr>
           <p:spPr>
             <a:xfrm>
-              <a:off x="5609107" y="2073503"/>
-              <a:ext cx="0" cy="3649639"/>
+              <a:off x="3559192" y="2143092"/>
+              <a:ext cx="0" cy="1317069"/>
             </a:xfrm>
             <a:custGeom>
               <a:avLst/>
               <a:pathLst>
-                <a:path w="0" h="3649639">
+                <a:path w="0" h="1317069">
                   <a:moveTo>
-                    <a:pt x="0" y="3649639"/>
+                    <a:pt x="0" y="1317069"/>
                   </a:moveTo>
                   <a:lnTo>
                     <a:pt x="0" y="0"/>
@@ -2572,15 +2564,15 @@
           </p:nvSpPr>
           <p:spPr>
             <a:xfrm>
-              <a:off x="7680065" y="2073503"/>
-              <a:ext cx="0" cy="3649639"/>
+              <a:off x="5593195" y="2143092"/>
+              <a:ext cx="0" cy="1317069"/>
             </a:xfrm>
             <a:custGeom>
               <a:avLst/>
               <a:pathLst>
-                <a:path w="0" h="3649639">
+                <a:path w="0" h="1317069">
                   <a:moveTo>
-                    <a:pt x="0" y="3649639"/>
+                    <a:pt x="0" y="1317069"/>
                   </a:moveTo>
                   <a:lnTo>
                     <a:pt x="0" y="0"/>
@@ -2615,26 +2607,26 @@
           </p:nvSpPr>
           <p:spPr>
             <a:xfrm>
-              <a:off x="817517" y="5557249"/>
-              <a:ext cx="7799693" cy="0"/>
+              <a:off x="7627198" y="2143092"/>
+              <a:ext cx="0" cy="1317069"/>
             </a:xfrm>
             <a:custGeom>
               <a:avLst/>
               <a:pathLst>
-                <a:path w="7799693" h="0">
+                <a:path w="0" h="1317069">
                   <a:moveTo>
+                    <a:pt x="0" y="1317069"/>
+                  </a:moveTo>
+                  <a:lnTo>
                     <a:pt x="0" y="0"/>
-                  </a:moveTo>
-                  <a:lnTo>
-                    <a:pt x="7799693" y="0"/>
-                  </a:lnTo>
-                  <a:lnTo>
-                    <a:pt x="7799693" y="0"/>
+                  </a:lnTo>
+                  <a:lnTo>
+                    <a:pt x="0" y="0"/>
                   </a:lnTo>
                 </a:path>
               </a:pathLst>
             </a:custGeom>
-            <a:ln w="13550" cap="flat">
+            <a:ln w="6775" cap="flat">
               <a:solidFill>
                 <a:srgbClr val="EBEBEB">
                   <a:alpha val="100000"/>
@@ -2658,21 +2650,21 @@
           </p:nvSpPr>
           <p:spPr>
             <a:xfrm>
-              <a:off x="817517" y="4727786"/>
-              <a:ext cx="7799693" cy="0"/>
+              <a:off x="887106" y="3400294"/>
+              <a:ext cx="7660515" cy="0"/>
             </a:xfrm>
             <a:custGeom>
               <a:avLst/>
               <a:pathLst>
-                <a:path w="7799693" h="0">
+                <a:path w="7660515" h="0">
                   <a:moveTo>
                     <a:pt x="0" y="0"/>
                   </a:moveTo>
                   <a:lnTo>
-                    <a:pt x="7799693" y="0"/>
-                  </a:lnTo>
-                  <a:lnTo>
-                    <a:pt x="7799693" y="0"/>
+                    <a:pt x="7660515" y="0"/>
+                  </a:lnTo>
+                  <a:lnTo>
+                    <a:pt x="7660515" y="0"/>
                   </a:lnTo>
                 </a:path>
               </a:pathLst>
@@ -2701,21 +2693,21 @@
           </p:nvSpPr>
           <p:spPr>
             <a:xfrm>
-              <a:off x="817517" y="3898322"/>
-              <a:ext cx="7799693" cy="0"/>
+              <a:off x="887106" y="3100960"/>
+              <a:ext cx="7660515" cy="0"/>
             </a:xfrm>
             <a:custGeom>
               <a:avLst/>
               <a:pathLst>
-                <a:path w="7799693" h="0">
+                <a:path w="7660515" h="0">
                   <a:moveTo>
                     <a:pt x="0" y="0"/>
                   </a:moveTo>
                   <a:lnTo>
-                    <a:pt x="7799693" y="0"/>
-                  </a:lnTo>
-                  <a:lnTo>
-                    <a:pt x="7799693" y="0"/>
+                    <a:pt x="7660515" y="0"/>
+                  </a:lnTo>
+                  <a:lnTo>
+                    <a:pt x="7660515" y="0"/>
                   </a:lnTo>
                 </a:path>
               </a:pathLst>
@@ -2744,21 +2736,21 @@
           </p:nvSpPr>
           <p:spPr>
             <a:xfrm>
-              <a:off x="817517" y="3068859"/>
-              <a:ext cx="7799693" cy="0"/>
+              <a:off x="887106" y="2801626"/>
+              <a:ext cx="7660515" cy="0"/>
             </a:xfrm>
             <a:custGeom>
               <a:avLst/>
               <a:pathLst>
-                <a:path w="7799693" h="0">
+                <a:path w="7660515" h="0">
                   <a:moveTo>
                     <a:pt x="0" y="0"/>
                   </a:moveTo>
                   <a:lnTo>
-                    <a:pt x="7799693" y="0"/>
-                  </a:lnTo>
-                  <a:lnTo>
-                    <a:pt x="7799693" y="0"/>
+                    <a:pt x="7660515" y="0"/>
+                  </a:lnTo>
+                  <a:lnTo>
+                    <a:pt x="7660515" y="0"/>
                   </a:lnTo>
                 </a:path>
               </a:pathLst>
@@ -2787,21 +2779,21 @@
           </p:nvSpPr>
           <p:spPr>
             <a:xfrm>
-              <a:off x="817517" y="2239395"/>
-              <a:ext cx="7799693" cy="0"/>
+              <a:off x="887106" y="2502292"/>
+              <a:ext cx="7660515" cy="0"/>
             </a:xfrm>
             <a:custGeom>
               <a:avLst/>
               <a:pathLst>
-                <a:path w="7799693" h="0">
+                <a:path w="7660515" h="0">
                   <a:moveTo>
                     <a:pt x="0" y="0"/>
                   </a:moveTo>
                   <a:lnTo>
-                    <a:pt x="7799693" y="0"/>
-                  </a:lnTo>
-                  <a:lnTo>
-                    <a:pt x="7799693" y="0"/>
+                    <a:pt x="7660515" y="0"/>
+                  </a:lnTo>
+                  <a:lnTo>
+                    <a:pt x="7660515" y="0"/>
                   </a:lnTo>
                 </a:path>
               </a:pathLst>
@@ -2830,21 +2822,21 @@
           </p:nvSpPr>
           <p:spPr>
             <a:xfrm>
-              <a:off x="2502671" y="2073503"/>
-              <a:ext cx="0" cy="3649639"/>
+              <a:off x="887106" y="2202958"/>
+              <a:ext cx="7660515" cy="0"/>
             </a:xfrm>
             <a:custGeom>
               <a:avLst/>
               <a:pathLst>
-                <a:path w="0" h="3649639">
+                <a:path w="7660515" h="0">
                   <a:moveTo>
-                    <a:pt x="0" y="3649639"/>
+                    <a:pt x="0" y="0"/>
                   </a:moveTo>
                   <a:lnTo>
-                    <a:pt x="0" y="0"/>
-                  </a:lnTo>
-                  <a:lnTo>
-                    <a:pt x="0" y="0"/>
+                    <a:pt x="7660515" y="0"/>
+                  </a:lnTo>
+                  <a:lnTo>
+                    <a:pt x="7660515" y="0"/>
                   </a:lnTo>
                 </a:path>
               </a:pathLst>
@@ -2873,15 +2865,15 @@
           </p:nvSpPr>
           <p:spPr>
             <a:xfrm>
-              <a:off x="4573628" y="2073503"/>
-              <a:ext cx="0" cy="3649639"/>
+              <a:off x="2542190" y="2143092"/>
+              <a:ext cx="0" cy="1317069"/>
             </a:xfrm>
             <a:custGeom>
               <a:avLst/>
               <a:pathLst>
-                <a:path w="0" h="3649639">
+                <a:path w="0" h="1317069">
                   <a:moveTo>
-                    <a:pt x="0" y="3649639"/>
+                    <a:pt x="0" y="1317069"/>
                   </a:moveTo>
                   <a:lnTo>
                     <a:pt x="0" y="0"/>
@@ -2916,15 +2908,15 @@
           </p:nvSpPr>
           <p:spPr>
             <a:xfrm>
-              <a:off x="6644586" y="2073503"/>
-              <a:ext cx="0" cy="3649639"/>
+              <a:off x="4576193" y="2143092"/>
+              <a:ext cx="0" cy="1317069"/>
             </a:xfrm>
             <a:custGeom>
               <a:avLst/>
               <a:pathLst>
-                <a:path w="0" h="3649639">
+                <a:path w="0" h="1317069">
                   <a:moveTo>
-                    <a:pt x="0" y="3649639"/>
+                    <a:pt x="0" y="1317069"/>
                   </a:moveTo>
                   <a:lnTo>
                     <a:pt x="0" y="0"/>
@@ -2953,609 +2945,652 @@
         </p:sp>
         <p:sp>
           <p:nvSpPr>
-            <p:cNvPr id="20" name="pg20"/>
+            <p:cNvPr id="20" name="pl20"/>
             <p:cNvSpPr/>
             <p:nvPr/>
           </p:nvSpPr>
           <p:spPr>
             <a:xfrm>
-              <a:off x="1172049" y="2073503"/>
-              <a:ext cx="7090630" cy="3337449"/>
+              <a:off x="6610197" y="2143092"/>
+              <a:ext cx="0" cy="1317069"/>
             </a:xfrm>
             <a:custGeom>
               <a:avLst/>
               <a:pathLst>
-                <a:path w="7090630" h="3337449">
+                <a:path w="0" h="1317069">
                   <a:moveTo>
-                    <a:pt x="265439" y="0"/>
+                    <a:pt x="0" y="1317069"/>
                   </a:moveTo>
                   <a:lnTo>
-                    <a:pt x="286490" y="34293"/>
-                  </a:lnTo>
-                  <a:lnTo>
-                    <a:pt x="358112" y="147157"/>
-                  </a:lnTo>
-                  <a:lnTo>
-                    <a:pt x="429735" y="256328"/>
-                  </a:lnTo>
-                  <a:lnTo>
-                    <a:pt x="501357" y="361927"/>
-                  </a:lnTo>
-                  <a:lnTo>
-                    <a:pt x="572980" y="464071"/>
-                  </a:lnTo>
-                  <a:lnTo>
-                    <a:pt x="644602" y="562873"/>
-                  </a:lnTo>
-                  <a:lnTo>
-                    <a:pt x="716225" y="658442"/>
-                  </a:lnTo>
-                  <a:lnTo>
-                    <a:pt x="787847" y="750884"/>
-                  </a:lnTo>
-                  <a:lnTo>
-                    <a:pt x="859470" y="840302"/>
-                  </a:lnTo>
-                  <a:lnTo>
-                    <a:pt x="931092" y="926794"/>
-                  </a:lnTo>
-                  <a:lnTo>
-                    <a:pt x="1002715" y="1010456"/>
-                  </a:lnTo>
-                  <a:lnTo>
-                    <a:pt x="1074337" y="1091380"/>
-                  </a:lnTo>
-                  <a:lnTo>
-                    <a:pt x="1145960" y="1169657"/>
-                  </a:lnTo>
-                  <a:lnTo>
-                    <a:pt x="1217582" y="1245372"/>
-                  </a:lnTo>
-                  <a:lnTo>
-                    <a:pt x="1289205" y="1318611"/>
-                  </a:lnTo>
-                  <a:lnTo>
-                    <a:pt x="1360827" y="1389453"/>
-                  </a:lnTo>
-                  <a:lnTo>
-                    <a:pt x="1432450" y="1457976"/>
-                  </a:lnTo>
-                  <a:lnTo>
-                    <a:pt x="1504073" y="1524258"/>
-                  </a:lnTo>
-                  <a:lnTo>
-                    <a:pt x="1575695" y="1588372"/>
-                  </a:lnTo>
-                  <a:lnTo>
-                    <a:pt x="1647318" y="1650387"/>
-                  </a:lnTo>
-                  <a:lnTo>
-                    <a:pt x="1718940" y="1710374"/>
-                  </a:lnTo>
-                  <a:lnTo>
-                    <a:pt x="1790563" y="1768397"/>
-                  </a:lnTo>
-                  <a:lnTo>
-                    <a:pt x="1862185" y="1824522"/>
-                  </a:lnTo>
-                  <a:lnTo>
-                    <a:pt x="1933808" y="1878811"/>
-                  </a:lnTo>
-                  <a:lnTo>
-                    <a:pt x="2005430" y="1931324"/>
-                  </a:lnTo>
-                  <a:lnTo>
-                    <a:pt x="2077053" y="1982118"/>
-                  </a:lnTo>
-                  <a:lnTo>
-                    <a:pt x="2148675" y="2031250"/>
-                  </a:lnTo>
-                  <a:lnTo>
-                    <a:pt x="2220298" y="2078775"/>
-                  </a:lnTo>
-                  <a:lnTo>
-                    <a:pt x="2291920" y="2124745"/>
-                  </a:lnTo>
-                  <a:lnTo>
-                    <a:pt x="2363543" y="2169210"/>
-                  </a:lnTo>
-                  <a:lnTo>
-                    <a:pt x="2435165" y="2212221"/>
-                  </a:lnTo>
-                  <a:lnTo>
-                    <a:pt x="2506788" y="2253825"/>
-                  </a:lnTo>
-                  <a:lnTo>
-                    <a:pt x="2578410" y="2294067"/>
-                  </a:lnTo>
-                  <a:lnTo>
-                    <a:pt x="2650033" y="2332993"/>
-                  </a:lnTo>
-                  <a:lnTo>
-                    <a:pt x="2721655" y="2370645"/>
-                  </a:lnTo>
-                  <a:lnTo>
-                    <a:pt x="2793278" y="2407065"/>
-                  </a:lnTo>
-                  <a:lnTo>
-                    <a:pt x="2864901" y="2442293"/>
-                  </a:lnTo>
-                  <a:lnTo>
-                    <a:pt x="2936523" y="2476369"/>
-                  </a:lnTo>
-                  <a:lnTo>
-                    <a:pt x="3008146" y="2509329"/>
-                  </a:lnTo>
-                  <a:lnTo>
-                    <a:pt x="3079768" y="2541212"/>
-                  </a:lnTo>
-                  <a:lnTo>
-                    <a:pt x="3151391" y="2572051"/>
-                  </a:lnTo>
-                  <a:lnTo>
-                    <a:pt x="3223013" y="2601881"/>
-                  </a:lnTo>
-                  <a:lnTo>
-                    <a:pt x="3294636" y="2630735"/>
-                  </a:lnTo>
-                  <a:lnTo>
-                    <a:pt x="3366258" y="2653917"/>
-                  </a:lnTo>
-                  <a:lnTo>
-                    <a:pt x="3437881" y="2651608"/>
-                  </a:lnTo>
-                  <a:lnTo>
-                    <a:pt x="3509503" y="2649292"/>
-                  </a:lnTo>
-                  <a:lnTo>
-                    <a:pt x="3581126" y="2646970"/>
-                  </a:lnTo>
-                  <a:lnTo>
-                    <a:pt x="3652748" y="2644642"/>
-                  </a:lnTo>
-                  <a:lnTo>
-                    <a:pt x="3724371" y="2642306"/>
-                  </a:lnTo>
-                  <a:lnTo>
-                    <a:pt x="3795993" y="2639965"/>
-                  </a:lnTo>
-                  <a:lnTo>
-                    <a:pt x="3867616" y="2637617"/>
-                  </a:lnTo>
-                  <a:lnTo>
-                    <a:pt x="3939238" y="2635262"/>
-                  </a:lnTo>
-                  <a:lnTo>
-                    <a:pt x="4010861" y="2632901"/>
-                  </a:lnTo>
-                  <a:lnTo>
-                    <a:pt x="4082483" y="2630533"/>
-                  </a:lnTo>
-                  <a:lnTo>
-                    <a:pt x="4154106" y="2628159"/>
-                  </a:lnTo>
-                  <a:lnTo>
-                    <a:pt x="4225729" y="2625778"/>
-                  </a:lnTo>
-                  <a:lnTo>
-                    <a:pt x="4297351" y="2623390"/>
-                  </a:lnTo>
-                  <a:lnTo>
-                    <a:pt x="4368974" y="2620996"/>
-                  </a:lnTo>
-                  <a:lnTo>
-                    <a:pt x="4440596" y="2618595"/>
-                  </a:lnTo>
-                  <a:lnTo>
-                    <a:pt x="4512219" y="2616187"/>
-                  </a:lnTo>
-                  <a:lnTo>
-                    <a:pt x="4583841" y="2613773"/>
-                  </a:lnTo>
-                  <a:lnTo>
-                    <a:pt x="4655464" y="2611352"/>
-                  </a:lnTo>
-                  <a:lnTo>
-                    <a:pt x="4727086" y="2608924"/>
-                  </a:lnTo>
-                  <a:lnTo>
-                    <a:pt x="4798709" y="2606490"/>
-                  </a:lnTo>
-                  <a:lnTo>
-                    <a:pt x="4870331" y="2604048"/>
-                  </a:lnTo>
-                  <a:lnTo>
-                    <a:pt x="4941954" y="2601600"/>
-                  </a:lnTo>
-                  <a:lnTo>
-                    <a:pt x="5013576" y="2599146"/>
-                  </a:lnTo>
-                  <a:lnTo>
-                    <a:pt x="5085199" y="2596684"/>
-                  </a:lnTo>
-                  <a:lnTo>
-                    <a:pt x="5156821" y="2594215"/>
-                  </a:lnTo>
-                  <a:lnTo>
-                    <a:pt x="5228444" y="2591740"/>
-                  </a:lnTo>
-                  <a:lnTo>
-                    <a:pt x="5300066" y="2589257"/>
-                  </a:lnTo>
-                  <a:lnTo>
-                    <a:pt x="5371689" y="2586768"/>
-                  </a:lnTo>
-                  <a:lnTo>
-                    <a:pt x="5443311" y="2584272"/>
-                  </a:lnTo>
-                  <a:lnTo>
-                    <a:pt x="5514934" y="2581769"/>
-                  </a:lnTo>
-                  <a:lnTo>
-                    <a:pt x="5586557" y="2579259"/>
-                  </a:lnTo>
-                  <a:lnTo>
-                    <a:pt x="5658179" y="2576742"/>
-                  </a:lnTo>
-                  <a:lnTo>
-                    <a:pt x="5729802" y="2574218"/>
-                  </a:lnTo>
-                  <a:lnTo>
-                    <a:pt x="5801424" y="2571687"/>
-                  </a:lnTo>
-                  <a:lnTo>
-                    <a:pt x="5873047" y="2569149"/>
-                  </a:lnTo>
-                  <a:lnTo>
-                    <a:pt x="5944669" y="2566603"/>
-                  </a:lnTo>
-                  <a:lnTo>
-                    <a:pt x="6016292" y="2564051"/>
-                  </a:lnTo>
-                  <a:lnTo>
-                    <a:pt x="6087914" y="2561492"/>
-                  </a:lnTo>
-                  <a:lnTo>
-                    <a:pt x="6159537" y="2558925"/>
-                  </a:lnTo>
-                  <a:lnTo>
-                    <a:pt x="6231159" y="2556351"/>
-                  </a:lnTo>
-                  <a:lnTo>
-                    <a:pt x="6302782" y="2553771"/>
-                  </a:lnTo>
-                  <a:lnTo>
-                    <a:pt x="6374404" y="2551183"/>
-                  </a:lnTo>
-                  <a:lnTo>
-                    <a:pt x="6446027" y="2548587"/>
-                  </a:lnTo>
-                  <a:lnTo>
-                    <a:pt x="6517649" y="2545985"/>
-                  </a:lnTo>
-                  <a:lnTo>
-                    <a:pt x="6589272" y="2543375"/>
-                  </a:lnTo>
-                  <a:lnTo>
-                    <a:pt x="6660894" y="2540758"/>
-                  </a:lnTo>
-                  <a:lnTo>
-                    <a:pt x="6732517" y="2538134"/>
-                  </a:lnTo>
-                  <a:lnTo>
-                    <a:pt x="6804139" y="2535503"/>
-                  </a:lnTo>
-                  <a:lnTo>
-                    <a:pt x="6875762" y="2532864"/>
-                  </a:lnTo>
-                  <a:lnTo>
-                    <a:pt x="6947385" y="2530218"/>
-                  </a:lnTo>
-                  <a:lnTo>
-                    <a:pt x="7019007" y="2527564"/>
-                  </a:lnTo>
-                  <a:lnTo>
-                    <a:pt x="7090630" y="2524903"/>
-                  </a:lnTo>
-                  <a:lnTo>
-                    <a:pt x="7090630" y="3337449"/>
-                  </a:lnTo>
-                  <a:lnTo>
-                    <a:pt x="7019007" y="3332500"/>
-                  </a:lnTo>
-                  <a:lnTo>
-                    <a:pt x="6947385" y="3327384"/>
-                  </a:lnTo>
-                  <a:lnTo>
-                    <a:pt x="6875762" y="3322095"/>
-                  </a:lnTo>
-                  <a:lnTo>
-                    <a:pt x="6804139" y="3316627"/>
-                  </a:lnTo>
-                  <a:lnTo>
-                    <a:pt x="6732517" y="3310974"/>
-                  </a:lnTo>
-                  <a:lnTo>
-                    <a:pt x="6660894" y="3305130"/>
-                  </a:lnTo>
-                  <a:lnTo>
-                    <a:pt x="6589272" y="3299088"/>
-                  </a:lnTo>
-                  <a:lnTo>
-                    <a:pt x="6517649" y="3292842"/>
-                  </a:lnTo>
-                  <a:lnTo>
-                    <a:pt x="6446027" y="3286384"/>
-                  </a:lnTo>
-                  <a:lnTo>
-                    <a:pt x="6374404" y="3279708"/>
-                  </a:lnTo>
-                  <a:lnTo>
-                    <a:pt x="6302782" y="3272806"/>
-                  </a:lnTo>
-                  <a:lnTo>
-                    <a:pt x="6231159" y="3265671"/>
-                  </a:lnTo>
-                  <a:lnTo>
-                    <a:pt x="6159537" y="3258294"/>
-                  </a:lnTo>
-                  <a:lnTo>
-                    <a:pt x="6087914" y="3250668"/>
-                  </a:lnTo>
-                  <a:lnTo>
-                    <a:pt x="6016292" y="3242784"/>
-                  </a:lnTo>
-                  <a:lnTo>
-                    <a:pt x="5944669" y="3234633"/>
-                  </a:lnTo>
-                  <a:lnTo>
-                    <a:pt x="5873047" y="3226207"/>
-                  </a:lnTo>
-                  <a:lnTo>
-                    <a:pt x="5801424" y="3217495"/>
-                  </a:lnTo>
-                  <a:lnTo>
-                    <a:pt x="5729802" y="3208489"/>
-                  </a:lnTo>
-                  <a:lnTo>
-                    <a:pt x="5658179" y="3199178"/>
-                  </a:lnTo>
-                  <a:lnTo>
-                    <a:pt x="5586557" y="3189552"/>
-                  </a:lnTo>
-                  <a:lnTo>
-                    <a:pt x="5514934" y="3179601"/>
-                  </a:lnTo>
-                  <a:lnTo>
-                    <a:pt x="5443311" y="3169312"/>
-                  </a:lnTo>
-                  <a:lnTo>
-                    <a:pt x="5371689" y="3158676"/>
-                  </a:lnTo>
-                  <a:lnTo>
-                    <a:pt x="5300066" y="3147680"/>
-                  </a:lnTo>
-                  <a:lnTo>
-                    <a:pt x="5228444" y="3136313"/>
-                  </a:lnTo>
-                  <a:lnTo>
-                    <a:pt x="5156821" y="3124560"/>
-                  </a:lnTo>
-                  <a:lnTo>
-                    <a:pt x="5085199" y="3112410"/>
-                  </a:lnTo>
-                  <a:lnTo>
-                    <a:pt x="5013576" y="3099850"/>
-                  </a:lnTo>
-                  <a:lnTo>
-                    <a:pt x="4941954" y="3086864"/>
-                  </a:lnTo>
-                  <a:lnTo>
-                    <a:pt x="4870331" y="3073439"/>
-                  </a:lnTo>
-                  <a:lnTo>
-                    <a:pt x="4798709" y="3059560"/>
-                  </a:lnTo>
-                  <a:lnTo>
-                    <a:pt x="4727086" y="3045211"/>
-                  </a:lnTo>
-                  <a:lnTo>
-                    <a:pt x="4655464" y="3030377"/>
-                  </a:lnTo>
-                  <a:lnTo>
-                    <a:pt x="4583841" y="3015041"/>
-                  </a:lnTo>
-                  <a:lnTo>
-                    <a:pt x="4512219" y="2999187"/>
-                  </a:lnTo>
-                  <a:lnTo>
-                    <a:pt x="4440596" y="2982796"/>
-                  </a:lnTo>
-                  <a:lnTo>
-                    <a:pt x="4368974" y="2965851"/>
-                  </a:lnTo>
-                  <a:lnTo>
-                    <a:pt x="4297351" y="2948333"/>
-                  </a:lnTo>
-                  <a:lnTo>
-                    <a:pt x="4225729" y="2930222"/>
-                  </a:lnTo>
-                  <a:lnTo>
-                    <a:pt x="4154106" y="2911498"/>
-                  </a:lnTo>
-                  <a:lnTo>
-                    <a:pt x="4082483" y="2892141"/>
-                  </a:lnTo>
-                  <a:lnTo>
-                    <a:pt x="4010861" y="2872129"/>
-                  </a:lnTo>
-                  <a:lnTo>
-                    <a:pt x="3939238" y="2851441"/>
-                  </a:lnTo>
-                  <a:lnTo>
-                    <a:pt x="3867616" y="2830052"/>
-                  </a:lnTo>
-                  <a:lnTo>
-                    <a:pt x="3795993" y="2807940"/>
-                  </a:lnTo>
-                  <a:lnTo>
-                    <a:pt x="3724371" y="2785080"/>
-                  </a:lnTo>
-                  <a:lnTo>
-                    <a:pt x="3652748" y="2761447"/>
-                  </a:lnTo>
-                  <a:lnTo>
-                    <a:pt x="3581126" y="2737014"/>
-                  </a:lnTo>
-                  <a:lnTo>
-                    <a:pt x="3509503" y="2711755"/>
-                  </a:lnTo>
-                  <a:lnTo>
-                    <a:pt x="3437881" y="2685642"/>
-                  </a:lnTo>
-                  <a:lnTo>
-                    <a:pt x="3366258" y="2658645"/>
-                  </a:lnTo>
-                  <a:lnTo>
-                    <a:pt x="3294636" y="2656220"/>
-                  </a:lnTo>
-                  <a:lnTo>
-                    <a:pt x="3223013" y="2658517"/>
-                  </a:lnTo>
-                  <a:lnTo>
-                    <a:pt x="3151391" y="2660807"/>
-                  </a:lnTo>
-                  <a:lnTo>
-                    <a:pt x="3079768" y="2663091"/>
-                  </a:lnTo>
-                  <a:lnTo>
-                    <a:pt x="3008146" y="2665368"/>
-                  </a:lnTo>
-                  <a:lnTo>
-                    <a:pt x="2936523" y="2667639"/>
-                  </a:lnTo>
-                  <a:lnTo>
-                    <a:pt x="2864901" y="2669904"/>
-                  </a:lnTo>
-                  <a:lnTo>
-                    <a:pt x="2793278" y="2672163"/>
-                  </a:lnTo>
-                  <a:lnTo>
-                    <a:pt x="2721655" y="2674415"/>
-                  </a:lnTo>
-                  <a:lnTo>
-                    <a:pt x="2650033" y="2676661"/>
-                  </a:lnTo>
-                  <a:lnTo>
-                    <a:pt x="2578410" y="2678901"/>
-                  </a:lnTo>
-                  <a:lnTo>
-                    <a:pt x="2506788" y="2681134"/>
-                  </a:lnTo>
-                  <a:lnTo>
-                    <a:pt x="2435165" y="2683362"/>
-                  </a:lnTo>
-                  <a:lnTo>
-                    <a:pt x="2363543" y="2685583"/>
-                  </a:lnTo>
-                  <a:lnTo>
-                    <a:pt x="2291920" y="2687798"/>
-                  </a:lnTo>
-                  <a:lnTo>
-                    <a:pt x="2220298" y="2690007"/>
-                  </a:lnTo>
-                  <a:lnTo>
-                    <a:pt x="2148675" y="2692209"/>
-                  </a:lnTo>
-                  <a:lnTo>
-                    <a:pt x="2077053" y="2694406"/>
-                  </a:lnTo>
-                  <a:lnTo>
-                    <a:pt x="2005430" y="2696596"/>
-                  </a:lnTo>
-                  <a:lnTo>
-                    <a:pt x="1933808" y="2698781"/>
-                  </a:lnTo>
-                  <a:lnTo>
-                    <a:pt x="1862185" y="2700959"/>
-                  </a:lnTo>
-                  <a:lnTo>
-                    <a:pt x="1790563" y="2703132"/>
-                  </a:lnTo>
-                  <a:lnTo>
-                    <a:pt x="1718940" y="2705298"/>
-                  </a:lnTo>
-                  <a:lnTo>
-                    <a:pt x="1647318" y="2707458"/>
-                  </a:lnTo>
-                  <a:lnTo>
-                    <a:pt x="1575695" y="2709613"/>
-                  </a:lnTo>
-                  <a:lnTo>
-                    <a:pt x="1504073" y="2711761"/>
-                  </a:lnTo>
-                  <a:lnTo>
-                    <a:pt x="1432450" y="2713903"/>
-                  </a:lnTo>
-                  <a:lnTo>
-                    <a:pt x="1360827" y="2716040"/>
-                  </a:lnTo>
-                  <a:lnTo>
-                    <a:pt x="1289205" y="2718170"/>
-                  </a:lnTo>
-                  <a:lnTo>
-                    <a:pt x="1217582" y="2720295"/>
-                  </a:lnTo>
-                  <a:lnTo>
-                    <a:pt x="1145960" y="2722413"/>
-                  </a:lnTo>
-                  <a:lnTo>
-                    <a:pt x="1074337" y="2724526"/>
-                  </a:lnTo>
-                  <a:lnTo>
-                    <a:pt x="1002715" y="2726633"/>
-                  </a:lnTo>
-                  <a:lnTo>
-                    <a:pt x="931092" y="2728734"/>
-                  </a:lnTo>
-                  <a:lnTo>
-                    <a:pt x="859470" y="2730830"/>
-                  </a:lnTo>
-                  <a:lnTo>
-                    <a:pt x="787847" y="2732919"/>
-                  </a:lnTo>
-                  <a:lnTo>
-                    <a:pt x="716225" y="2735003"/>
-                  </a:lnTo>
-                  <a:lnTo>
-                    <a:pt x="644602" y="2737081"/>
-                  </a:lnTo>
-                  <a:lnTo>
-                    <a:pt x="572980" y="2739153"/>
-                  </a:lnTo>
-                  <a:lnTo>
-                    <a:pt x="501357" y="2741219"/>
-                  </a:lnTo>
-                  <a:lnTo>
-                    <a:pt x="429735" y="2743280"/>
-                  </a:lnTo>
-                  <a:lnTo>
-                    <a:pt x="358112" y="2745334"/>
-                  </a:lnTo>
-                  <a:lnTo>
-                    <a:pt x="286490" y="2747384"/>
-                  </a:lnTo>
-                  <a:lnTo>
-                    <a:pt x="214867" y="2749427"/>
-                  </a:lnTo>
-                  <a:lnTo>
-                    <a:pt x="143245" y="2751465"/>
-                  </a:lnTo>
-                  <a:lnTo>
-                    <a:pt x="71622" y="2753497"/>
-                  </a:lnTo>
-                  <a:lnTo>
-                    <a:pt x="0" y="2755524"/>
+                    <a:pt x="0" y="0"/>
+                  </a:lnTo>
+                  <a:lnTo>
+                    <a:pt x="0" y="0"/>
+                  </a:lnTo>
+                </a:path>
+              </a:pathLst>
+            </a:custGeom>
+            <a:ln w="13550" cap="flat">
+              <a:solidFill>
+                <a:srgbClr val="EBEBEB">
+                  <a:alpha val="100000"/>
+                </a:srgbClr>
+              </a:solidFill>
+              <a:prstDash val="solid"/>
+              <a:round/>
+            </a:ln>
+          </p:spPr>
+          <p:txBody>
+            <a:bodyPr/>
+            <a:lstStyle/>
+            <a:p/>
+          </p:txBody>
+        </p:sp>
+        <p:sp>
+          <p:nvSpPr>
+            <p:cNvPr id="21" name="pg21"/>
+            <p:cNvSpPr/>
+            <p:nvPr/>
+          </p:nvSpPr>
+          <p:spPr>
+            <a:xfrm>
+              <a:off x="1235312" y="2143092"/>
+              <a:ext cx="6964104" cy="1204407"/>
+            </a:xfrm>
+            <a:custGeom>
+              <a:avLst/>
+              <a:pathLst>
+                <a:path w="6964104" h="1204407">
+                  <a:moveTo>
+                    <a:pt x="260703" y="0"/>
+                  </a:moveTo>
+                  <a:lnTo>
+                    <a:pt x="281377" y="12375"/>
+                  </a:lnTo>
+                  <a:lnTo>
+                    <a:pt x="351722" y="53105"/>
+                  </a:lnTo>
+                  <a:lnTo>
+                    <a:pt x="422066" y="92502"/>
+                  </a:lnTo>
+                  <a:lnTo>
+                    <a:pt x="492411" y="130611"/>
+                  </a:lnTo>
+                  <a:lnTo>
+                    <a:pt x="562755" y="167472"/>
+                  </a:lnTo>
+                  <a:lnTo>
+                    <a:pt x="633100" y="203127"/>
+                  </a:lnTo>
+                  <a:lnTo>
+                    <a:pt x="703444" y="237616"/>
+                  </a:lnTo>
+                  <a:lnTo>
+                    <a:pt x="773789" y="270976"/>
+                  </a:lnTo>
+                  <a:lnTo>
+                    <a:pt x="844133" y="303245"/>
+                  </a:lnTo>
+                  <a:lnTo>
+                    <a:pt x="914478" y="334458"/>
+                  </a:lnTo>
+                  <a:lnTo>
+                    <a:pt x="984822" y="364649"/>
+                  </a:lnTo>
+                  <a:lnTo>
+                    <a:pt x="1055167" y="393853"/>
+                  </a:lnTo>
+                  <a:lnTo>
+                    <a:pt x="1125511" y="422101"/>
+                  </a:lnTo>
+                  <a:lnTo>
+                    <a:pt x="1195856" y="449425"/>
+                  </a:lnTo>
+                  <a:lnTo>
+                    <a:pt x="1266200" y="475855"/>
+                  </a:lnTo>
+                  <a:lnTo>
+                    <a:pt x="1336545" y="501420"/>
+                  </a:lnTo>
+                  <a:lnTo>
+                    <a:pt x="1406889" y="526149"/>
+                  </a:lnTo>
+                  <a:lnTo>
+                    <a:pt x="1477234" y="550069"/>
+                  </a:lnTo>
+                  <a:lnTo>
+                    <a:pt x="1547578" y="573206"/>
+                  </a:lnTo>
+                  <a:lnTo>
+                    <a:pt x="1617923" y="595586"/>
+                  </a:lnTo>
+                  <a:lnTo>
+                    <a:pt x="1688267" y="617233"/>
+                  </a:lnTo>
+                  <a:lnTo>
+                    <a:pt x="1758612" y="638173"/>
+                  </a:lnTo>
+                  <a:lnTo>
+                    <a:pt x="1828956" y="658427"/>
+                  </a:lnTo>
+                  <a:lnTo>
+                    <a:pt x="1899301" y="678018"/>
+                  </a:lnTo>
+                  <a:lnTo>
+                    <a:pt x="1969645" y="696969"/>
+                  </a:lnTo>
+                  <a:lnTo>
+                    <a:pt x="2039990" y="715299"/>
+                  </a:lnTo>
+                  <a:lnTo>
+                    <a:pt x="2110334" y="733030"/>
+                  </a:lnTo>
+                  <a:lnTo>
+                    <a:pt x="2180679" y="750181"/>
+                  </a:lnTo>
+                  <a:lnTo>
+                    <a:pt x="2251023" y="766770"/>
+                  </a:lnTo>
+                  <a:lnTo>
+                    <a:pt x="2321368" y="782817"/>
+                  </a:lnTo>
+                  <a:lnTo>
+                    <a:pt x="2391712" y="798338"/>
+                  </a:lnTo>
+                  <a:lnTo>
+                    <a:pt x="2462057" y="813352"/>
+                  </a:lnTo>
+                  <a:lnTo>
+                    <a:pt x="2532401" y="827875"/>
+                  </a:lnTo>
+                  <a:lnTo>
+                    <a:pt x="2602746" y="841922"/>
+                  </a:lnTo>
+                  <a:lnTo>
+                    <a:pt x="2673090" y="855510"/>
+                  </a:lnTo>
+                  <a:lnTo>
+                    <a:pt x="2743435" y="868653"/>
+                  </a:lnTo>
+                  <a:lnTo>
+                    <a:pt x="2813779" y="881366"/>
+                  </a:lnTo>
+                  <a:lnTo>
+                    <a:pt x="2884124" y="893663"/>
+                  </a:lnTo>
+                  <a:lnTo>
+                    <a:pt x="2954468" y="905558"/>
+                  </a:lnTo>
+                  <a:lnTo>
+                    <a:pt x="3024813" y="917063"/>
+                  </a:lnTo>
+                  <a:lnTo>
+                    <a:pt x="3095157" y="928192"/>
+                  </a:lnTo>
+                  <a:lnTo>
+                    <a:pt x="3165502" y="938957"/>
+                  </a:lnTo>
+                  <a:lnTo>
+                    <a:pt x="3235846" y="949370"/>
+                  </a:lnTo>
+                  <a:lnTo>
+                    <a:pt x="3306191" y="957736"/>
+                  </a:lnTo>
+                  <a:lnTo>
+                    <a:pt x="3376535" y="956903"/>
+                  </a:lnTo>
+                  <a:lnTo>
+                    <a:pt x="3446880" y="956067"/>
+                  </a:lnTo>
+                  <a:lnTo>
+                    <a:pt x="3517224" y="955229"/>
+                  </a:lnTo>
+                  <a:lnTo>
+                    <a:pt x="3587569" y="954389"/>
+                  </a:lnTo>
+                  <a:lnTo>
+                    <a:pt x="3657913" y="953546"/>
+                  </a:lnTo>
+                  <a:lnTo>
+                    <a:pt x="3728257" y="952701"/>
+                  </a:lnTo>
+                  <a:lnTo>
+                    <a:pt x="3798602" y="951854"/>
+                  </a:lnTo>
+                  <a:lnTo>
+                    <a:pt x="3868946" y="951004"/>
+                  </a:lnTo>
+                  <a:lnTo>
+                    <a:pt x="3939291" y="950152"/>
+                  </a:lnTo>
+                  <a:lnTo>
+                    <a:pt x="4009635" y="949297"/>
+                  </a:lnTo>
+                  <a:lnTo>
+                    <a:pt x="4079980" y="948440"/>
+                  </a:lnTo>
+                  <a:lnTo>
+                    <a:pt x="4150324" y="947581"/>
+                  </a:lnTo>
+                  <a:lnTo>
+                    <a:pt x="4220669" y="946719"/>
+                  </a:lnTo>
+                  <a:lnTo>
+                    <a:pt x="4291013" y="945855"/>
+                  </a:lnTo>
+                  <a:lnTo>
+                    <a:pt x="4361358" y="944989"/>
+                  </a:lnTo>
+                  <a:lnTo>
+                    <a:pt x="4431702" y="944120"/>
+                  </a:lnTo>
+                  <a:lnTo>
+                    <a:pt x="4502047" y="943249"/>
+                  </a:lnTo>
+                  <a:lnTo>
+                    <a:pt x="4572391" y="942375"/>
+                  </a:lnTo>
+                  <a:lnTo>
+                    <a:pt x="4642736" y="941499"/>
+                  </a:lnTo>
+                  <a:lnTo>
+                    <a:pt x="4713080" y="940621"/>
+                  </a:lnTo>
+                  <a:lnTo>
+                    <a:pt x="4783425" y="939740"/>
+                  </a:lnTo>
+                  <a:lnTo>
+                    <a:pt x="4853769" y="938856"/>
+                  </a:lnTo>
+                  <a:lnTo>
+                    <a:pt x="4924114" y="937970"/>
+                  </a:lnTo>
+                  <a:lnTo>
+                    <a:pt x="4994458" y="937082"/>
+                  </a:lnTo>
+                  <a:lnTo>
+                    <a:pt x="5064803" y="936191"/>
+                  </a:lnTo>
+                  <a:lnTo>
+                    <a:pt x="5135147" y="935298"/>
+                  </a:lnTo>
+                  <a:lnTo>
+                    <a:pt x="5205492" y="934402"/>
+                  </a:lnTo>
+                  <a:lnTo>
+                    <a:pt x="5275836" y="933503"/>
+                  </a:lnTo>
+                  <a:lnTo>
+                    <a:pt x="5346181" y="932603"/>
+                  </a:lnTo>
+                  <a:lnTo>
+                    <a:pt x="5416525" y="931699"/>
+                  </a:lnTo>
+                  <a:lnTo>
+                    <a:pt x="5486870" y="930794"/>
+                  </a:lnTo>
+                  <a:lnTo>
+                    <a:pt x="5557214" y="929885"/>
+                  </a:lnTo>
+                  <a:lnTo>
+                    <a:pt x="5627559" y="928974"/>
+                  </a:lnTo>
+                  <a:lnTo>
+                    <a:pt x="5697903" y="928061"/>
+                  </a:lnTo>
+                  <a:lnTo>
+                    <a:pt x="5768248" y="927145"/>
+                  </a:lnTo>
+                  <a:lnTo>
+                    <a:pt x="5838592" y="926226"/>
+                  </a:lnTo>
+                  <a:lnTo>
+                    <a:pt x="5908937" y="925305"/>
+                  </a:lnTo>
+                  <a:lnTo>
+                    <a:pt x="5979281" y="924382"/>
+                  </a:lnTo>
+                  <a:lnTo>
+                    <a:pt x="6049626" y="923456"/>
+                  </a:lnTo>
+                  <a:lnTo>
+                    <a:pt x="6119970" y="922527"/>
+                  </a:lnTo>
+                  <a:lnTo>
+                    <a:pt x="6190315" y="921595"/>
+                  </a:lnTo>
+                  <a:lnTo>
+                    <a:pt x="6260659" y="920661"/>
+                  </a:lnTo>
+                  <a:lnTo>
+                    <a:pt x="6331004" y="919725"/>
+                  </a:lnTo>
+                  <a:lnTo>
+                    <a:pt x="6401348" y="918786"/>
+                  </a:lnTo>
+                  <a:lnTo>
+                    <a:pt x="6471693" y="917844"/>
+                  </a:lnTo>
+                  <a:lnTo>
+                    <a:pt x="6542037" y="916900"/>
+                  </a:lnTo>
+                  <a:lnTo>
+                    <a:pt x="6612382" y="915953"/>
+                  </a:lnTo>
+                  <a:lnTo>
+                    <a:pt x="6682726" y="915003"/>
+                  </a:lnTo>
+                  <a:lnTo>
+                    <a:pt x="6753071" y="914051"/>
+                  </a:lnTo>
+                  <a:lnTo>
+                    <a:pt x="6823415" y="913096"/>
+                  </a:lnTo>
+                  <a:lnTo>
+                    <a:pt x="6893760" y="912138"/>
+                  </a:lnTo>
+                  <a:lnTo>
+                    <a:pt x="6964104" y="911178"/>
+                  </a:lnTo>
+                  <a:lnTo>
+                    <a:pt x="6964104" y="1204407"/>
+                  </a:lnTo>
+                  <a:lnTo>
+                    <a:pt x="6893760" y="1202621"/>
+                  </a:lnTo>
+                  <a:lnTo>
+                    <a:pt x="6823415" y="1200774"/>
+                  </a:lnTo>
+                  <a:lnTo>
+                    <a:pt x="6753071" y="1198866"/>
+                  </a:lnTo>
+                  <a:lnTo>
+                    <a:pt x="6682726" y="1196892"/>
+                  </a:lnTo>
+                  <a:lnTo>
+                    <a:pt x="6612382" y="1194852"/>
+                  </a:lnTo>
+                  <a:lnTo>
+                    <a:pt x="6542037" y="1192743"/>
+                  </a:lnTo>
+                  <a:lnTo>
+                    <a:pt x="6471693" y="1190563"/>
+                  </a:lnTo>
+                  <a:lnTo>
+                    <a:pt x="6401348" y="1188309"/>
+                  </a:lnTo>
+                  <a:lnTo>
+                    <a:pt x="6331004" y="1185978"/>
+                  </a:lnTo>
+                  <a:lnTo>
+                    <a:pt x="6260659" y="1183569"/>
+                  </a:lnTo>
+                  <a:lnTo>
+                    <a:pt x="6190315" y="1181078"/>
+                  </a:lnTo>
+                  <a:lnTo>
+                    <a:pt x="6119970" y="1178503"/>
+                  </a:lnTo>
+                  <a:lnTo>
+                    <a:pt x="6049626" y="1175841"/>
+                  </a:lnTo>
+                  <a:lnTo>
+                    <a:pt x="5979281" y="1173089"/>
+                  </a:lnTo>
+                  <a:lnTo>
+                    <a:pt x="5908937" y="1170244"/>
+                  </a:lnTo>
+                  <a:lnTo>
+                    <a:pt x="5838592" y="1167303"/>
+                  </a:lnTo>
+                  <a:lnTo>
+                    <a:pt x="5768248" y="1164262"/>
+                  </a:lnTo>
+                  <a:lnTo>
+                    <a:pt x="5697903" y="1161118"/>
+                  </a:lnTo>
+                  <a:lnTo>
+                    <a:pt x="5627559" y="1157868"/>
+                  </a:lnTo>
+                  <a:lnTo>
+                    <a:pt x="5557214" y="1154508"/>
+                  </a:lnTo>
+                  <a:lnTo>
+                    <a:pt x="5486870" y="1151034"/>
+                  </a:lnTo>
+                  <a:lnTo>
+                    <a:pt x="5416525" y="1147443"/>
+                  </a:lnTo>
+                  <a:lnTo>
+                    <a:pt x="5346181" y="1143730"/>
+                  </a:lnTo>
+                  <a:lnTo>
+                    <a:pt x="5275836" y="1139892"/>
+                  </a:lnTo>
+                  <a:lnTo>
+                    <a:pt x="5205492" y="1135924"/>
+                  </a:lnTo>
+                  <a:lnTo>
+                    <a:pt x="5135147" y="1131821"/>
+                  </a:lnTo>
+                  <a:lnTo>
+                    <a:pt x="5064803" y="1127580"/>
+                  </a:lnTo>
+                  <a:lnTo>
+                    <a:pt x="4994458" y="1123195"/>
+                  </a:lnTo>
+                  <a:lnTo>
+                    <a:pt x="4924114" y="1118662"/>
+                  </a:lnTo>
+                  <a:lnTo>
+                    <a:pt x="4853769" y="1113976"/>
+                  </a:lnTo>
+                  <a:lnTo>
+                    <a:pt x="4783425" y="1109131"/>
+                  </a:lnTo>
+                  <a:lnTo>
+                    <a:pt x="4713080" y="1104123"/>
+                  </a:lnTo>
+                  <a:lnTo>
+                    <a:pt x="4642736" y="1098945"/>
+                  </a:lnTo>
+                  <a:lnTo>
+                    <a:pt x="4572391" y="1093591"/>
+                  </a:lnTo>
+                  <a:lnTo>
+                    <a:pt x="4502047" y="1088057"/>
+                  </a:lnTo>
+                  <a:lnTo>
+                    <a:pt x="4431702" y="1082336"/>
+                  </a:lnTo>
+                  <a:lnTo>
+                    <a:pt x="4361358" y="1076421"/>
+                  </a:lnTo>
+                  <a:lnTo>
+                    <a:pt x="4291013" y="1070306"/>
+                  </a:lnTo>
+                  <a:lnTo>
+                    <a:pt x="4220669" y="1063984"/>
+                  </a:lnTo>
+                  <a:lnTo>
+                    <a:pt x="4150324" y="1057448"/>
+                  </a:lnTo>
+                  <a:lnTo>
+                    <a:pt x="4079980" y="1050691"/>
+                  </a:lnTo>
+                  <a:lnTo>
+                    <a:pt x="4009635" y="1043705"/>
+                  </a:lnTo>
+                  <a:lnTo>
+                    <a:pt x="3939291" y="1036484"/>
+                  </a:lnTo>
+                  <a:lnTo>
+                    <a:pt x="3868946" y="1029017"/>
+                  </a:lnTo>
+                  <a:lnTo>
+                    <a:pt x="3798602" y="1021299"/>
+                  </a:lnTo>
+                  <a:lnTo>
+                    <a:pt x="3728257" y="1013319"/>
+                  </a:lnTo>
+                  <a:lnTo>
+                    <a:pt x="3657913" y="1005070"/>
+                  </a:lnTo>
+                  <a:lnTo>
+                    <a:pt x="3587569" y="996541"/>
+                  </a:lnTo>
+                  <a:lnTo>
+                    <a:pt x="3517224" y="987724"/>
+                  </a:lnTo>
+                  <a:lnTo>
+                    <a:pt x="3446880" y="978608"/>
+                  </a:lnTo>
+                  <a:lnTo>
+                    <a:pt x="3376535" y="969185"/>
+                  </a:lnTo>
+                  <a:lnTo>
+                    <a:pt x="3306191" y="959442"/>
+                  </a:lnTo>
+                  <a:lnTo>
+                    <a:pt x="3235846" y="958567"/>
+                  </a:lnTo>
+                  <a:lnTo>
+                    <a:pt x="3165502" y="959396"/>
+                  </a:lnTo>
+                  <a:lnTo>
+                    <a:pt x="3095157" y="960222"/>
+                  </a:lnTo>
+                  <a:lnTo>
+                    <a:pt x="3024813" y="961046"/>
+                  </a:lnTo>
+                  <a:lnTo>
+                    <a:pt x="2954468" y="961868"/>
+                  </a:lnTo>
+                  <a:lnTo>
+                    <a:pt x="2884124" y="962688"/>
+                  </a:lnTo>
+                  <a:lnTo>
+                    <a:pt x="2813779" y="963505"/>
+                  </a:lnTo>
+                  <a:lnTo>
+                    <a:pt x="2743435" y="964320"/>
+                  </a:lnTo>
+                  <a:lnTo>
+                    <a:pt x="2673090" y="965133"/>
+                  </a:lnTo>
+                  <a:lnTo>
+                    <a:pt x="2602746" y="965944"/>
+                  </a:lnTo>
+                  <a:lnTo>
+                    <a:pt x="2532401" y="966752"/>
+                  </a:lnTo>
+                  <a:lnTo>
+                    <a:pt x="2462057" y="967558"/>
+                  </a:lnTo>
+                  <a:lnTo>
+                    <a:pt x="2391712" y="968362"/>
+                  </a:lnTo>
+                  <a:lnTo>
+                    <a:pt x="2321368" y="969163"/>
+                  </a:lnTo>
+                  <a:lnTo>
+                    <a:pt x="2251023" y="969963"/>
+                  </a:lnTo>
+                  <a:lnTo>
+                    <a:pt x="2180679" y="970760"/>
+                  </a:lnTo>
+                  <a:lnTo>
+                    <a:pt x="2110334" y="971555"/>
+                  </a:lnTo>
+                  <a:lnTo>
+                    <a:pt x="2039990" y="972347"/>
+                  </a:lnTo>
+                  <a:lnTo>
+                    <a:pt x="1969645" y="973138"/>
+                  </a:lnTo>
+                  <a:lnTo>
+                    <a:pt x="1899301" y="973926"/>
+                  </a:lnTo>
+                  <a:lnTo>
+                    <a:pt x="1828956" y="974712"/>
+                  </a:lnTo>
+                  <a:lnTo>
+                    <a:pt x="1758612" y="975496"/>
+                  </a:lnTo>
+                  <a:lnTo>
+                    <a:pt x="1688267" y="976278"/>
+                  </a:lnTo>
+                  <a:lnTo>
+                    <a:pt x="1617923" y="977058"/>
+                  </a:lnTo>
+                  <a:lnTo>
+                    <a:pt x="1547578" y="977835"/>
+                  </a:lnTo>
+                  <a:lnTo>
+                    <a:pt x="1477234" y="978610"/>
+                  </a:lnTo>
+                  <a:lnTo>
+                    <a:pt x="1406889" y="979384"/>
+                  </a:lnTo>
+                  <a:lnTo>
+                    <a:pt x="1336545" y="980155"/>
+                  </a:lnTo>
+                  <a:lnTo>
+                    <a:pt x="1266200" y="980923"/>
+                  </a:lnTo>
+                  <a:lnTo>
+                    <a:pt x="1195856" y="981690"/>
+                  </a:lnTo>
+                  <a:lnTo>
+                    <a:pt x="1125511" y="982455"/>
+                  </a:lnTo>
+                  <a:lnTo>
+                    <a:pt x="1055167" y="983217"/>
+                  </a:lnTo>
+                  <a:lnTo>
+                    <a:pt x="984822" y="983977"/>
+                  </a:lnTo>
+                  <a:lnTo>
+                    <a:pt x="914478" y="984736"/>
+                  </a:lnTo>
+                  <a:lnTo>
+                    <a:pt x="844133" y="985492"/>
+                  </a:lnTo>
+                  <a:lnTo>
+                    <a:pt x="773789" y="986246"/>
+                  </a:lnTo>
+                  <a:lnTo>
+                    <a:pt x="703444" y="986998"/>
+                  </a:lnTo>
+                  <a:lnTo>
+                    <a:pt x="633100" y="987748"/>
+                  </a:lnTo>
+                  <a:lnTo>
+                    <a:pt x="562755" y="988495"/>
+                  </a:lnTo>
+                  <a:lnTo>
+                    <a:pt x="492411" y="989241"/>
+                  </a:lnTo>
+                  <a:lnTo>
+                    <a:pt x="422066" y="989985"/>
+                  </a:lnTo>
+                  <a:lnTo>
+                    <a:pt x="351722" y="990726"/>
+                  </a:lnTo>
+                  <a:lnTo>
+                    <a:pt x="281377" y="991466"/>
+                  </a:lnTo>
+                  <a:lnTo>
+                    <a:pt x="211033" y="992203"/>
+                  </a:lnTo>
+                  <a:lnTo>
+                    <a:pt x="140688" y="992939"/>
+                  </a:lnTo>
+                  <a:lnTo>
+                    <a:pt x="70344" y="993672"/>
+                  </a:lnTo>
+                  <a:lnTo>
+                    <a:pt x="0" y="994403"/>
                   </a:lnTo>
                   <a:close/>
                 </a:path>
@@ -3575,634 +3610,309 @@
         </p:sp>
         <p:sp>
           <p:nvSpPr>
-            <p:cNvPr id="21" name="pl21"/>
-            <p:cNvSpPr/>
-            <p:nvPr/>
-          </p:nvSpPr>
-          <p:spPr>
-            <a:xfrm>
-              <a:off x="1437489" y="2073503"/>
-              <a:ext cx="6825190" cy="2653917"/>
-            </a:xfrm>
-            <a:custGeom>
-              <a:avLst/>
-              <a:pathLst>
-                <a:path w="6825190" h="2653917">
-                  <a:moveTo>
-                    <a:pt x="0" y="0"/>
-                  </a:moveTo>
-                  <a:lnTo>
-                    <a:pt x="21050" y="34293"/>
-                  </a:lnTo>
-                  <a:lnTo>
-                    <a:pt x="92672" y="147157"/>
-                  </a:lnTo>
-                  <a:lnTo>
-                    <a:pt x="164295" y="256328"/>
-                  </a:lnTo>
-                  <a:lnTo>
-                    <a:pt x="235917" y="361927"/>
-                  </a:lnTo>
-                  <a:lnTo>
-                    <a:pt x="307540" y="464071"/>
-                  </a:lnTo>
-                  <a:lnTo>
-                    <a:pt x="379162" y="562873"/>
-                  </a:lnTo>
-                  <a:lnTo>
-                    <a:pt x="450785" y="658442"/>
-                  </a:lnTo>
-                  <a:lnTo>
-                    <a:pt x="522407" y="750884"/>
-                  </a:lnTo>
-                  <a:lnTo>
-                    <a:pt x="594030" y="840302"/>
-                  </a:lnTo>
-                  <a:lnTo>
-                    <a:pt x="665652" y="926794"/>
-                  </a:lnTo>
-                  <a:lnTo>
-                    <a:pt x="737275" y="1010456"/>
-                  </a:lnTo>
-                  <a:lnTo>
-                    <a:pt x="808897" y="1091380"/>
-                  </a:lnTo>
-                  <a:lnTo>
-                    <a:pt x="880520" y="1169657"/>
-                  </a:lnTo>
-                  <a:lnTo>
-                    <a:pt x="952143" y="1245372"/>
-                  </a:lnTo>
-                  <a:lnTo>
-                    <a:pt x="1023765" y="1318611"/>
-                  </a:lnTo>
-                  <a:lnTo>
-                    <a:pt x="1095388" y="1389453"/>
-                  </a:lnTo>
-                  <a:lnTo>
-                    <a:pt x="1167010" y="1457976"/>
-                  </a:lnTo>
-                  <a:lnTo>
-                    <a:pt x="1238633" y="1524258"/>
-                  </a:lnTo>
-                  <a:lnTo>
-                    <a:pt x="1310255" y="1588372"/>
-                  </a:lnTo>
-                  <a:lnTo>
-                    <a:pt x="1381878" y="1650387"/>
-                  </a:lnTo>
-                  <a:lnTo>
-                    <a:pt x="1453500" y="1710374"/>
-                  </a:lnTo>
-                  <a:lnTo>
-                    <a:pt x="1525123" y="1768397"/>
-                  </a:lnTo>
-                  <a:lnTo>
-                    <a:pt x="1596745" y="1824522"/>
-                  </a:lnTo>
-                  <a:lnTo>
-                    <a:pt x="1668368" y="1878811"/>
-                  </a:lnTo>
-                  <a:lnTo>
-                    <a:pt x="1739990" y="1931324"/>
-                  </a:lnTo>
-                  <a:lnTo>
-                    <a:pt x="1811613" y="1982118"/>
-                  </a:lnTo>
-                  <a:lnTo>
-                    <a:pt x="1883235" y="2031250"/>
-                  </a:lnTo>
-                  <a:lnTo>
-                    <a:pt x="1954858" y="2078775"/>
-                  </a:lnTo>
-                  <a:lnTo>
-                    <a:pt x="2026480" y="2124745"/>
-                  </a:lnTo>
-                  <a:lnTo>
-                    <a:pt x="2098103" y="2169210"/>
-                  </a:lnTo>
-                  <a:lnTo>
-                    <a:pt x="2169725" y="2212221"/>
-                  </a:lnTo>
-                  <a:lnTo>
-                    <a:pt x="2241348" y="2253825"/>
-                  </a:lnTo>
-                  <a:lnTo>
-                    <a:pt x="2312971" y="2294067"/>
-                  </a:lnTo>
-                  <a:lnTo>
-                    <a:pt x="2384593" y="2332993"/>
-                  </a:lnTo>
-                  <a:lnTo>
-                    <a:pt x="2456216" y="2370645"/>
-                  </a:lnTo>
-                  <a:lnTo>
-                    <a:pt x="2527838" y="2407065"/>
-                  </a:lnTo>
-                  <a:lnTo>
-                    <a:pt x="2599461" y="2442293"/>
-                  </a:lnTo>
-                  <a:lnTo>
-                    <a:pt x="2671083" y="2476369"/>
-                  </a:lnTo>
-                  <a:lnTo>
-                    <a:pt x="2742706" y="2509329"/>
-                  </a:lnTo>
-                  <a:lnTo>
-                    <a:pt x="2814328" y="2541212"/>
-                  </a:lnTo>
-                  <a:lnTo>
-                    <a:pt x="2885951" y="2572051"/>
-                  </a:lnTo>
-                  <a:lnTo>
-                    <a:pt x="2957573" y="2601881"/>
-                  </a:lnTo>
-                  <a:lnTo>
-                    <a:pt x="3029196" y="2630735"/>
-                  </a:lnTo>
-                  <a:lnTo>
-                    <a:pt x="3100818" y="2653917"/>
-                  </a:lnTo>
-                  <a:lnTo>
-                    <a:pt x="3172441" y="2651608"/>
-                  </a:lnTo>
-                  <a:lnTo>
-                    <a:pt x="3244063" y="2649292"/>
-                  </a:lnTo>
-                  <a:lnTo>
-                    <a:pt x="3315686" y="2646970"/>
-                  </a:lnTo>
-                  <a:lnTo>
-                    <a:pt x="3387308" y="2644642"/>
-                  </a:lnTo>
-                  <a:lnTo>
-                    <a:pt x="3458931" y="2642306"/>
-                  </a:lnTo>
-                  <a:lnTo>
-                    <a:pt x="3530553" y="2639965"/>
-                  </a:lnTo>
-                  <a:lnTo>
-                    <a:pt x="3602176" y="2637617"/>
-                  </a:lnTo>
-                  <a:lnTo>
-                    <a:pt x="3673799" y="2635262"/>
-                  </a:lnTo>
-                  <a:lnTo>
-                    <a:pt x="3745421" y="2632901"/>
-                  </a:lnTo>
-                  <a:lnTo>
-                    <a:pt x="3817044" y="2630533"/>
-                  </a:lnTo>
-                  <a:lnTo>
-                    <a:pt x="3888666" y="2628159"/>
-                  </a:lnTo>
-                  <a:lnTo>
-                    <a:pt x="3960289" y="2625778"/>
-                  </a:lnTo>
-                  <a:lnTo>
-                    <a:pt x="4031911" y="2623390"/>
-                  </a:lnTo>
-                  <a:lnTo>
-                    <a:pt x="4103534" y="2620996"/>
-                  </a:lnTo>
-                  <a:lnTo>
-                    <a:pt x="4175156" y="2618595"/>
-                  </a:lnTo>
-                  <a:lnTo>
-                    <a:pt x="4246779" y="2616187"/>
-                  </a:lnTo>
-                  <a:lnTo>
-                    <a:pt x="4318401" y="2613773"/>
-                  </a:lnTo>
-                  <a:lnTo>
-                    <a:pt x="4390024" y="2611352"/>
-                  </a:lnTo>
-                  <a:lnTo>
-                    <a:pt x="4461646" y="2608924"/>
-                  </a:lnTo>
-                  <a:lnTo>
-                    <a:pt x="4533269" y="2606490"/>
-                  </a:lnTo>
-                  <a:lnTo>
-                    <a:pt x="4604891" y="2604048"/>
-                  </a:lnTo>
-                  <a:lnTo>
-                    <a:pt x="4676514" y="2601600"/>
-                  </a:lnTo>
-                  <a:lnTo>
-                    <a:pt x="4748136" y="2599146"/>
-                  </a:lnTo>
-                  <a:lnTo>
-                    <a:pt x="4819759" y="2596684"/>
-                  </a:lnTo>
-                  <a:lnTo>
-                    <a:pt x="4891381" y="2594215"/>
-                  </a:lnTo>
-                  <a:lnTo>
-                    <a:pt x="4963004" y="2591740"/>
-                  </a:lnTo>
-                  <a:lnTo>
-                    <a:pt x="5034627" y="2589257"/>
-                  </a:lnTo>
-                  <a:lnTo>
-                    <a:pt x="5106249" y="2586768"/>
-                  </a:lnTo>
-                  <a:lnTo>
-                    <a:pt x="5177872" y="2584272"/>
-                  </a:lnTo>
-                  <a:lnTo>
-                    <a:pt x="5249494" y="2581769"/>
-                  </a:lnTo>
-                  <a:lnTo>
-                    <a:pt x="5321117" y="2579259"/>
-                  </a:lnTo>
-                  <a:lnTo>
-                    <a:pt x="5392739" y="2576742"/>
-                  </a:lnTo>
-                  <a:lnTo>
-                    <a:pt x="5464362" y="2574218"/>
-                  </a:lnTo>
-                  <a:lnTo>
-                    <a:pt x="5535984" y="2571687"/>
-                  </a:lnTo>
-                  <a:lnTo>
-                    <a:pt x="5607607" y="2569149"/>
-                  </a:lnTo>
-                  <a:lnTo>
-                    <a:pt x="5679229" y="2566603"/>
-                  </a:lnTo>
-                  <a:lnTo>
-                    <a:pt x="5750852" y="2564051"/>
-                  </a:lnTo>
-                  <a:lnTo>
-                    <a:pt x="5822474" y="2561492"/>
-                  </a:lnTo>
-                  <a:lnTo>
-                    <a:pt x="5894097" y="2558925"/>
-                  </a:lnTo>
-                  <a:lnTo>
-                    <a:pt x="5965719" y="2556351"/>
-                  </a:lnTo>
-                  <a:lnTo>
-                    <a:pt x="6037342" y="2553771"/>
-                  </a:lnTo>
-                  <a:lnTo>
-                    <a:pt x="6108964" y="2551183"/>
-                  </a:lnTo>
-                  <a:lnTo>
-                    <a:pt x="6180587" y="2548587"/>
-                  </a:lnTo>
-                  <a:lnTo>
-                    <a:pt x="6252209" y="2545985"/>
-                  </a:lnTo>
-                  <a:lnTo>
-                    <a:pt x="6323832" y="2543375"/>
-                  </a:lnTo>
-                  <a:lnTo>
-                    <a:pt x="6395455" y="2540758"/>
-                  </a:lnTo>
-                  <a:lnTo>
-                    <a:pt x="6467077" y="2538134"/>
-                  </a:lnTo>
-                  <a:lnTo>
-                    <a:pt x="6538700" y="2535503"/>
-                  </a:lnTo>
-                  <a:lnTo>
-                    <a:pt x="6610322" y="2532864"/>
-                  </a:lnTo>
-                  <a:lnTo>
-                    <a:pt x="6681945" y="2530218"/>
-                  </a:lnTo>
-                  <a:lnTo>
-                    <a:pt x="6753567" y="2527564"/>
-                  </a:lnTo>
-                  <a:lnTo>
-                    <a:pt x="6825190" y="2524903"/>
-                  </a:lnTo>
-                </a:path>
-              </a:pathLst>
-            </a:custGeom>
-          </p:spPr>
-          <p:txBody>
-            <a:bodyPr/>
-            <a:lstStyle/>
-            <a:p/>
-          </p:txBody>
-        </p:sp>
-        <p:sp>
-          <p:nvSpPr>
             <p:cNvPr id="22" name="pl22"/>
             <p:cNvSpPr/>
             <p:nvPr/>
           </p:nvSpPr>
           <p:spPr>
             <a:xfrm>
-              <a:off x="1172049" y="4729723"/>
-              <a:ext cx="7090630" cy="681228"/>
+              <a:off x="1496015" y="2143092"/>
+              <a:ext cx="6703401" cy="957736"/>
             </a:xfrm>
             <a:custGeom>
               <a:avLst/>
               <a:pathLst>
-                <a:path w="7090630" h="681228">
+                <a:path w="6703401" h="957736">
                   <a:moveTo>
-                    <a:pt x="7090630" y="681228"/>
+                    <a:pt x="0" y="0"/>
                   </a:moveTo>
                   <a:lnTo>
-                    <a:pt x="7019007" y="676280"/>
-                  </a:lnTo>
-                  <a:lnTo>
-                    <a:pt x="6947385" y="671163"/>
-                  </a:lnTo>
-                  <a:lnTo>
-                    <a:pt x="6875762" y="665874"/>
-                  </a:lnTo>
-                  <a:lnTo>
-                    <a:pt x="6804139" y="660406"/>
-                  </a:lnTo>
-                  <a:lnTo>
-                    <a:pt x="6732517" y="654753"/>
-                  </a:lnTo>
-                  <a:lnTo>
-                    <a:pt x="6660894" y="648909"/>
-                  </a:lnTo>
-                  <a:lnTo>
-                    <a:pt x="6589272" y="642867"/>
-                  </a:lnTo>
-                  <a:lnTo>
-                    <a:pt x="6517649" y="636621"/>
-                  </a:lnTo>
-                  <a:lnTo>
-                    <a:pt x="6446027" y="630163"/>
-                  </a:lnTo>
-                  <a:lnTo>
-                    <a:pt x="6374404" y="623487"/>
-                  </a:lnTo>
-                  <a:lnTo>
-                    <a:pt x="6302782" y="616585"/>
-                  </a:lnTo>
-                  <a:lnTo>
-                    <a:pt x="6231159" y="609450"/>
-                  </a:lnTo>
-                  <a:lnTo>
-                    <a:pt x="6159537" y="602073"/>
-                  </a:lnTo>
-                  <a:lnTo>
-                    <a:pt x="6087914" y="594447"/>
-                  </a:lnTo>
-                  <a:lnTo>
-                    <a:pt x="6016292" y="586563"/>
-                  </a:lnTo>
-                  <a:lnTo>
-                    <a:pt x="5944669" y="578412"/>
-                  </a:lnTo>
-                  <a:lnTo>
-                    <a:pt x="5873047" y="569986"/>
-                  </a:lnTo>
-                  <a:lnTo>
-                    <a:pt x="5801424" y="561274"/>
-                  </a:lnTo>
-                  <a:lnTo>
-                    <a:pt x="5729802" y="552268"/>
-                  </a:lnTo>
-                  <a:lnTo>
-                    <a:pt x="5658179" y="542957"/>
-                  </a:lnTo>
-                  <a:lnTo>
-                    <a:pt x="5586557" y="533331"/>
-                  </a:lnTo>
-                  <a:lnTo>
-                    <a:pt x="5514934" y="523380"/>
-                  </a:lnTo>
-                  <a:lnTo>
-                    <a:pt x="5443311" y="513092"/>
-                  </a:lnTo>
-                  <a:lnTo>
-                    <a:pt x="5371689" y="502456"/>
-                  </a:lnTo>
-                  <a:lnTo>
-                    <a:pt x="5300066" y="491460"/>
-                  </a:lnTo>
-                  <a:lnTo>
-                    <a:pt x="5228444" y="480092"/>
-                  </a:lnTo>
-                  <a:lnTo>
-                    <a:pt x="5156821" y="468340"/>
-                  </a:lnTo>
-                  <a:lnTo>
-                    <a:pt x="5085199" y="456190"/>
-                  </a:lnTo>
-                  <a:lnTo>
-                    <a:pt x="5013576" y="443629"/>
-                  </a:lnTo>
-                  <a:lnTo>
-                    <a:pt x="4941954" y="430643"/>
-                  </a:lnTo>
-                  <a:lnTo>
-                    <a:pt x="4870331" y="417218"/>
-                  </a:lnTo>
-                  <a:lnTo>
-                    <a:pt x="4798709" y="403339"/>
-                  </a:lnTo>
-                  <a:lnTo>
-                    <a:pt x="4727086" y="388990"/>
-                  </a:lnTo>
-                  <a:lnTo>
-                    <a:pt x="4655464" y="374156"/>
-                  </a:lnTo>
-                  <a:lnTo>
-                    <a:pt x="4583841" y="358821"/>
-                  </a:lnTo>
-                  <a:lnTo>
-                    <a:pt x="4512219" y="342966"/>
-                  </a:lnTo>
-                  <a:lnTo>
-                    <a:pt x="4440596" y="326575"/>
-                  </a:lnTo>
-                  <a:lnTo>
-                    <a:pt x="4368974" y="309630"/>
-                  </a:lnTo>
-                  <a:lnTo>
-                    <a:pt x="4297351" y="292112"/>
-                  </a:lnTo>
-                  <a:lnTo>
-                    <a:pt x="4225729" y="274001"/>
-                  </a:lnTo>
-                  <a:lnTo>
-                    <a:pt x="4154106" y="255277"/>
-                  </a:lnTo>
-                  <a:lnTo>
-                    <a:pt x="4082483" y="235920"/>
-                  </a:lnTo>
-                  <a:lnTo>
-                    <a:pt x="4010861" y="215908"/>
-                  </a:lnTo>
-                  <a:lnTo>
-                    <a:pt x="3939238" y="195220"/>
-                  </a:lnTo>
-                  <a:lnTo>
-                    <a:pt x="3867616" y="173831"/>
-                  </a:lnTo>
-                  <a:lnTo>
-                    <a:pt x="3795993" y="151719"/>
-                  </a:lnTo>
-                  <a:lnTo>
-                    <a:pt x="3724371" y="128859"/>
-                  </a:lnTo>
-                  <a:lnTo>
-                    <a:pt x="3652748" y="105226"/>
-                  </a:lnTo>
-                  <a:lnTo>
-                    <a:pt x="3581126" y="80794"/>
-                  </a:lnTo>
-                  <a:lnTo>
-                    <a:pt x="3509503" y="55535"/>
-                  </a:lnTo>
-                  <a:lnTo>
-                    <a:pt x="3437881" y="29421"/>
-                  </a:lnTo>
-                  <a:lnTo>
-                    <a:pt x="3366258" y="2424"/>
-                  </a:lnTo>
-                  <a:lnTo>
-                    <a:pt x="3294636" y="0"/>
-                  </a:lnTo>
-                  <a:lnTo>
-                    <a:pt x="3223013" y="2296"/>
-                  </a:lnTo>
-                  <a:lnTo>
-                    <a:pt x="3151391" y="4586"/>
-                  </a:lnTo>
-                  <a:lnTo>
-                    <a:pt x="3079768" y="6870"/>
-                  </a:lnTo>
-                  <a:lnTo>
-                    <a:pt x="3008146" y="9147"/>
-                  </a:lnTo>
-                  <a:lnTo>
-                    <a:pt x="2936523" y="11418"/>
-                  </a:lnTo>
-                  <a:lnTo>
-                    <a:pt x="2864901" y="13683"/>
-                  </a:lnTo>
-                  <a:lnTo>
-                    <a:pt x="2793278" y="15942"/>
-                  </a:lnTo>
-                  <a:lnTo>
-                    <a:pt x="2721655" y="18194"/>
-                  </a:lnTo>
-                  <a:lnTo>
-                    <a:pt x="2650033" y="20440"/>
-                  </a:lnTo>
-                  <a:lnTo>
-                    <a:pt x="2578410" y="22680"/>
-                  </a:lnTo>
-                  <a:lnTo>
-                    <a:pt x="2506788" y="24913"/>
-                  </a:lnTo>
-                  <a:lnTo>
-                    <a:pt x="2435165" y="27141"/>
-                  </a:lnTo>
-                  <a:lnTo>
-                    <a:pt x="2363543" y="29362"/>
-                  </a:lnTo>
-                  <a:lnTo>
-                    <a:pt x="2291920" y="31577"/>
-                  </a:lnTo>
-                  <a:lnTo>
-                    <a:pt x="2220298" y="33786"/>
-                  </a:lnTo>
-                  <a:lnTo>
-                    <a:pt x="2148675" y="35989"/>
-                  </a:lnTo>
-                  <a:lnTo>
-                    <a:pt x="2077053" y="38185"/>
-                  </a:lnTo>
-                  <a:lnTo>
-                    <a:pt x="2005430" y="40376"/>
-                  </a:lnTo>
-                  <a:lnTo>
-                    <a:pt x="1933808" y="42560"/>
-                  </a:lnTo>
-                  <a:lnTo>
-                    <a:pt x="1862185" y="44739"/>
-                  </a:lnTo>
-                  <a:lnTo>
-                    <a:pt x="1790563" y="46911"/>
-                  </a:lnTo>
-                  <a:lnTo>
-                    <a:pt x="1718940" y="49077"/>
-                  </a:lnTo>
-                  <a:lnTo>
-                    <a:pt x="1647318" y="51237"/>
-                  </a:lnTo>
-                  <a:lnTo>
-                    <a:pt x="1575695" y="53392"/>
-                  </a:lnTo>
-                  <a:lnTo>
-                    <a:pt x="1504073" y="55540"/>
-                  </a:lnTo>
-                  <a:lnTo>
-                    <a:pt x="1432450" y="57682"/>
-                  </a:lnTo>
-                  <a:lnTo>
-                    <a:pt x="1360827" y="59819"/>
-                  </a:lnTo>
-                  <a:lnTo>
-                    <a:pt x="1289205" y="61949"/>
-                  </a:lnTo>
-                  <a:lnTo>
-                    <a:pt x="1217582" y="64074"/>
-                  </a:lnTo>
-                  <a:lnTo>
-                    <a:pt x="1145960" y="66193"/>
-                  </a:lnTo>
-                  <a:lnTo>
-                    <a:pt x="1074337" y="68305"/>
-                  </a:lnTo>
-                  <a:lnTo>
-                    <a:pt x="1002715" y="70412"/>
-                  </a:lnTo>
-                  <a:lnTo>
-                    <a:pt x="931092" y="72513"/>
-                  </a:lnTo>
-                  <a:lnTo>
-                    <a:pt x="859470" y="74609"/>
-                  </a:lnTo>
-                  <a:lnTo>
-                    <a:pt x="787847" y="76698"/>
-                  </a:lnTo>
-                  <a:lnTo>
-                    <a:pt x="716225" y="78782"/>
-                  </a:lnTo>
-                  <a:lnTo>
-                    <a:pt x="644602" y="80860"/>
-                  </a:lnTo>
-                  <a:lnTo>
-                    <a:pt x="572980" y="82932"/>
-                  </a:lnTo>
-                  <a:lnTo>
-                    <a:pt x="501357" y="84998"/>
-                  </a:lnTo>
-                  <a:lnTo>
-                    <a:pt x="429735" y="87059"/>
-                  </a:lnTo>
-                  <a:lnTo>
-                    <a:pt x="358112" y="89114"/>
-                  </a:lnTo>
-                  <a:lnTo>
-                    <a:pt x="286490" y="91163"/>
-                  </a:lnTo>
-                  <a:lnTo>
-                    <a:pt x="214867" y="93206"/>
-                  </a:lnTo>
-                  <a:lnTo>
-                    <a:pt x="143245" y="95244"/>
-                  </a:lnTo>
-                  <a:lnTo>
-                    <a:pt x="71622" y="97276"/>
-                  </a:lnTo>
-                  <a:lnTo>
-                    <a:pt x="0" y="99303"/>
+                    <a:pt x="20674" y="12375"/>
+                  </a:lnTo>
+                  <a:lnTo>
+                    <a:pt x="91019" y="53105"/>
+                  </a:lnTo>
+                  <a:lnTo>
+                    <a:pt x="161363" y="92502"/>
+                  </a:lnTo>
+                  <a:lnTo>
+                    <a:pt x="231708" y="130611"/>
+                  </a:lnTo>
+                  <a:lnTo>
+                    <a:pt x="302052" y="167472"/>
+                  </a:lnTo>
+                  <a:lnTo>
+                    <a:pt x="372397" y="203127"/>
+                  </a:lnTo>
+                  <a:lnTo>
+                    <a:pt x="442741" y="237616"/>
+                  </a:lnTo>
+                  <a:lnTo>
+                    <a:pt x="513086" y="270976"/>
+                  </a:lnTo>
+                  <a:lnTo>
+                    <a:pt x="583430" y="303245"/>
+                  </a:lnTo>
+                  <a:lnTo>
+                    <a:pt x="653774" y="334458"/>
+                  </a:lnTo>
+                  <a:lnTo>
+                    <a:pt x="724119" y="364649"/>
+                  </a:lnTo>
+                  <a:lnTo>
+                    <a:pt x="794463" y="393853"/>
+                  </a:lnTo>
+                  <a:lnTo>
+                    <a:pt x="864808" y="422101"/>
+                  </a:lnTo>
+                  <a:lnTo>
+                    <a:pt x="935152" y="449425"/>
+                  </a:lnTo>
+                  <a:lnTo>
+                    <a:pt x="1005497" y="475855"/>
+                  </a:lnTo>
+                  <a:lnTo>
+                    <a:pt x="1075841" y="501420"/>
+                  </a:lnTo>
+                  <a:lnTo>
+                    <a:pt x="1146186" y="526149"/>
+                  </a:lnTo>
+                  <a:lnTo>
+                    <a:pt x="1216530" y="550069"/>
+                  </a:lnTo>
+                  <a:lnTo>
+                    <a:pt x="1286875" y="573206"/>
+                  </a:lnTo>
+                  <a:lnTo>
+                    <a:pt x="1357219" y="595586"/>
+                  </a:lnTo>
+                  <a:lnTo>
+                    <a:pt x="1427564" y="617233"/>
+                  </a:lnTo>
+                  <a:lnTo>
+                    <a:pt x="1497908" y="638173"/>
+                  </a:lnTo>
+                  <a:lnTo>
+                    <a:pt x="1568253" y="658427"/>
+                  </a:lnTo>
+                  <a:lnTo>
+                    <a:pt x="1638597" y="678018"/>
+                  </a:lnTo>
+                  <a:lnTo>
+                    <a:pt x="1708942" y="696969"/>
+                  </a:lnTo>
+                  <a:lnTo>
+                    <a:pt x="1779286" y="715299"/>
+                  </a:lnTo>
+                  <a:lnTo>
+                    <a:pt x="1849631" y="733030"/>
+                  </a:lnTo>
+                  <a:lnTo>
+                    <a:pt x="1919975" y="750181"/>
+                  </a:lnTo>
+                  <a:lnTo>
+                    <a:pt x="1990320" y="766770"/>
+                  </a:lnTo>
+                  <a:lnTo>
+                    <a:pt x="2060664" y="782817"/>
+                  </a:lnTo>
+                  <a:lnTo>
+                    <a:pt x="2131009" y="798338"/>
+                  </a:lnTo>
+                  <a:lnTo>
+                    <a:pt x="2201353" y="813352"/>
+                  </a:lnTo>
+                  <a:lnTo>
+                    <a:pt x="2271698" y="827875"/>
+                  </a:lnTo>
+                  <a:lnTo>
+                    <a:pt x="2342042" y="841922"/>
+                  </a:lnTo>
+                  <a:lnTo>
+                    <a:pt x="2412387" y="855510"/>
+                  </a:lnTo>
+                  <a:lnTo>
+                    <a:pt x="2482731" y="868653"/>
+                  </a:lnTo>
+                  <a:lnTo>
+                    <a:pt x="2553076" y="881366"/>
+                  </a:lnTo>
+                  <a:lnTo>
+                    <a:pt x="2623420" y="893663"/>
+                  </a:lnTo>
+                  <a:lnTo>
+                    <a:pt x="2693765" y="905558"/>
+                  </a:lnTo>
+                  <a:lnTo>
+                    <a:pt x="2764109" y="917063"/>
+                  </a:lnTo>
+                  <a:lnTo>
+                    <a:pt x="2834454" y="928192"/>
+                  </a:lnTo>
+                  <a:lnTo>
+                    <a:pt x="2904798" y="938957"/>
+                  </a:lnTo>
+                  <a:lnTo>
+                    <a:pt x="2975143" y="949370"/>
+                  </a:lnTo>
+                  <a:lnTo>
+                    <a:pt x="3045487" y="957736"/>
+                  </a:lnTo>
+                  <a:lnTo>
+                    <a:pt x="3115832" y="956903"/>
+                  </a:lnTo>
+                  <a:lnTo>
+                    <a:pt x="3186176" y="956067"/>
+                  </a:lnTo>
+                  <a:lnTo>
+                    <a:pt x="3256521" y="955229"/>
+                  </a:lnTo>
+                  <a:lnTo>
+                    <a:pt x="3326865" y="954389"/>
+                  </a:lnTo>
+                  <a:lnTo>
+                    <a:pt x="3397210" y="953546"/>
+                  </a:lnTo>
+                  <a:lnTo>
+                    <a:pt x="3467554" y="952701"/>
+                  </a:lnTo>
+                  <a:lnTo>
+                    <a:pt x="3537899" y="951854"/>
+                  </a:lnTo>
+                  <a:lnTo>
+                    <a:pt x="3608243" y="951004"/>
+                  </a:lnTo>
+                  <a:lnTo>
+                    <a:pt x="3678588" y="950152"/>
+                  </a:lnTo>
+                  <a:lnTo>
+                    <a:pt x="3748932" y="949297"/>
+                  </a:lnTo>
+                  <a:lnTo>
+                    <a:pt x="3819277" y="948440"/>
+                  </a:lnTo>
+                  <a:lnTo>
+                    <a:pt x="3889621" y="947581"/>
+                  </a:lnTo>
+                  <a:lnTo>
+                    <a:pt x="3959966" y="946719"/>
+                  </a:lnTo>
+                  <a:lnTo>
+                    <a:pt x="4030310" y="945855"/>
+                  </a:lnTo>
+                  <a:lnTo>
+                    <a:pt x="4100655" y="944989"/>
+                  </a:lnTo>
+                  <a:lnTo>
+                    <a:pt x="4170999" y="944120"/>
+                  </a:lnTo>
+                  <a:lnTo>
+                    <a:pt x="4241344" y="943249"/>
+                  </a:lnTo>
+                  <a:lnTo>
+                    <a:pt x="4311688" y="942375"/>
+                  </a:lnTo>
+                  <a:lnTo>
+                    <a:pt x="4382032" y="941499"/>
+                  </a:lnTo>
+                  <a:lnTo>
+                    <a:pt x="4452377" y="940621"/>
+                  </a:lnTo>
+                  <a:lnTo>
+                    <a:pt x="4522721" y="939740"/>
+                  </a:lnTo>
+                  <a:lnTo>
+                    <a:pt x="4593066" y="938856"/>
+                  </a:lnTo>
+                  <a:lnTo>
+                    <a:pt x="4663410" y="937970"/>
+                  </a:lnTo>
+                  <a:lnTo>
+                    <a:pt x="4733755" y="937082"/>
+                  </a:lnTo>
+                  <a:lnTo>
+                    <a:pt x="4804099" y="936191"/>
+                  </a:lnTo>
+                  <a:lnTo>
+                    <a:pt x="4874444" y="935298"/>
+                  </a:lnTo>
+                  <a:lnTo>
+                    <a:pt x="4944788" y="934402"/>
+                  </a:lnTo>
+                  <a:lnTo>
+                    <a:pt x="5015133" y="933503"/>
+                  </a:lnTo>
+                  <a:lnTo>
+                    <a:pt x="5085477" y="932603"/>
+                  </a:lnTo>
+                  <a:lnTo>
+                    <a:pt x="5155822" y="931699"/>
+                  </a:lnTo>
+                  <a:lnTo>
+                    <a:pt x="5226166" y="930794"/>
+                  </a:lnTo>
+                  <a:lnTo>
+                    <a:pt x="5296511" y="929885"/>
+                  </a:lnTo>
+                  <a:lnTo>
+                    <a:pt x="5366855" y="928974"/>
+                  </a:lnTo>
+                  <a:lnTo>
+                    <a:pt x="5437200" y="928061"/>
+                  </a:lnTo>
+                  <a:lnTo>
+                    <a:pt x="5507544" y="927145"/>
+                  </a:lnTo>
+                  <a:lnTo>
+                    <a:pt x="5577889" y="926226"/>
+                  </a:lnTo>
+                  <a:lnTo>
+                    <a:pt x="5648233" y="925305"/>
+                  </a:lnTo>
+                  <a:lnTo>
+                    <a:pt x="5718578" y="924382"/>
+                  </a:lnTo>
+                  <a:lnTo>
+                    <a:pt x="5788922" y="923456"/>
+                  </a:lnTo>
+                  <a:lnTo>
+                    <a:pt x="5859267" y="922527"/>
+                  </a:lnTo>
+                  <a:lnTo>
+                    <a:pt x="5929611" y="921595"/>
+                  </a:lnTo>
+                  <a:lnTo>
+                    <a:pt x="5999956" y="920661"/>
+                  </a:lnTo>
+                  <a:lnTo>
+                    <a:pt x="6070300" y="919725"/>
+                  </a:lnTo>
+                  <a:lnTo>
+                    <a:pt x="6140645" y="918786"/>
+                  </a:lnTo>
+                  <a:lnTo>
+                    <a:pt x="6210989" y="917844"/>
+                  </a:lnTo>
+                  <a:lnTo>
+                    <a:pt x="6281334" y="916900"/>
+                  </a:lnTo>
+                  <a:lnTo>
+                    <a:pt x="6351678" y="915953"/>
+                  </a:lnTo>
+                  <a:lnTo>
+                    <a:pt x="6422023" y="915003"/>
+                  </a:lnTo>
+                  <a:lnTo>
+                    <a:pt x="6492367" y="914051"/>
+                  </a:lnTo>
+                  <a:lnTo>
+                    <a:pt x="6562712" y="913096"/>
+                  </a:lnTo>
+                  <a:lnTo>
+                    <a:pt x="6633056" y="912138"/>
+                  </a:lnTo>
+                  <a:lnTo>
+                    <a:pt x="6703401" y="911178"/>
                   </a:lnTo>
                 </a:path>
               </a:pathLst>
@@ -4222,312 +3932,637 @@
           </p:nvSpPr>
           <p:spPr>
             <a:xfrm>
-              <a:off x="1172049" y="3863293"/>
-              <a:ext cx="7090630" cy="1319421"/>
+              <a:off x="1235312" y="3101659"/>
+              <a:ext cx="6964104" cy="245839"/>
             </a:xfrm>
             <a:custGeom>
               <a:avLst/>
               <a:pathLst>
-                <a:path w="7090630" h="1319421">
+                <a:path w="6964104" h="245839">
+                  <a:moveTo>
+                    <a:pt x="6964104" y="245839"/>
+                  </a:moveTo>
+                  <a:lnTo>
+                    <a:pt x="6893760" y="244053"/>
+                  </a:lnTo>
+                  <a:lnTo>
+                    <a:pt x="6823415" y="242207"/>
+                  </a:lnTo>
+                  <a:lnTo>
+                    <a:pt x="6753071" y="240298"/>
+                  </a:lnTo>
+                  <a:lnTo>
+                    <a:pt x="6682726" y="238325"/>
+                  </a:lnTo>
+                  <a:lnTo>
+                    <a:pt x="6612382" y="236285"/>
+                  </a:lnTo>
+                  <a:lnTo>
+                    <a:pt x="6542037" y="234176"/>
+                  </a:lnTo>
+                  <a:lnTo>
+                    <a:pt x="6471693" y="231995"/>
+                  </a:lnTo>
+                  <a:lnTo>
+                    <a:pt x="6401348" y="229741"/>
+                  </a:lnTo>
+                  <a:lnTo>
+                    <a:pt x="6331004" y="227411"/>
+                  </a:lnTo>
+                  <a:lnTo>
+                    <a:pt x="6260659" y="225002"/>
+                  </a:lnTo>
+                  <a:lnTo>
+                    <a:pt x="6190315" y="222511"/>
+                  </a:lnTo>
+                  <a:lnTo>
+                    <a:pt x="6119970" y="219936"/>
+                  </a:lnTo>
+                  <a:lnTo>
+                    <a:pt x="6049626" y="217274"/>
+                  </a:lnTo>
+                  <a:lnTo>
+                    <a:pt x="5979281" y="214522"/>
+                  </a:lnTo>
+                  <a:lnTo>
+                    <a:pt x="5908937" y="211677"/>
+                  </a:lnTo>
+                  <a:lnTo>
+                    <a:pt x="5838592" y="208735"/>
+                  </a:lnTo>
+                  <a:lnTo>
+                    <a:pt x="5768248" y="205694"/>
+                  </a:lnTo>
+                  <a:lnTo>
+                    <a:pt x="5697903" y="202550"/>
+                  </a:lnTo>
+                  <a:lnTo>
+                    <a:pt x="5627559" y="199300"/>
+                  </a:lnTo>
+                  <a:lnTo>
+                    <a:pt x="5557214" y="195940"/>
+                  </a:lnTo>
+                  <a:lnTo>
+                    <a:pt x="5486870" y="192466"/>
+                  </a:lnTo>
+                  <a:lnTo>
+                    <a:pt x="5416525" y="188875"/>
+                  </a:lnTo>
+                  <a:lnTo>
+                    <a:pt x="5346181" y="185162"/>
+                  </a:lnTo>
+                  <a:lnTo>
+                    <a:pt x="5275836" y="181324"/>
+                  </a:lnTo>
+                  <a:lnTo>
+                    <a:pt x="5205492" y="177356"/>
+                  </a:lnTo>
+                  <a:lnTo>
+                    <a:pt x="5135147" y="173254"/>
+                  </a:lnTo>
+                  <a:lnTo>
+                    <a:pt x="5064803" y="169012"/>
+                  </a:lnTo>
+                  <a:lnTo>
+                    <a:pt x="4994458" y="164628"/>
+                  </a:lnTo>
+                  <a:lnTo>
+                    <a:pt x="4924114" y="160095"/>
+                  </a:lnTo>
+                  <a:lnTo>
+                    <a:pt x="4853769" y="155409"/>
+                  </a:lnTo>
+                  <a:lnTo>
+                    <a:pt x="4783425" y="150564"/>
+                  </a:lnTo>
+                  <a:lnTo>
+                    <a:pt x="4713080" y="145555"/>
+                  </a:lnTo>
+                  <a:lnTo>
+                    <a:pt x="4642736" y="140377"/>
+                  </a:lnTo>
+                  <a:lnTo>
+                    <a:pt x="4572391" y="135024"/>
+                  </a:lnTo>
+                  <a:lnTo>
+                    <a:pt x="4502047" y="129490"/>
+                  </a:lnTo>
+                  <a:lnTo>
+                    <a:pt x="4431702" y="123768"/>
+                  </a:lnTo>
+                  <a:lnTo>
+                    <a:pt x="4361358" y="117853"/>
+                  </a:lnTo>
+                  <a:lnTo>
+                    <a:pt x="4291013" y="111738"/>
+                  </a:lnTo>
+                  <a:lnTo>
+                    <a:pt x="4220669" y="105416"/>
+                  </a:lnTo>
+                  <a:lnTo>
+                    <a:pt x="4150324" y="98880"/>
+                  </a:lnTo>
+                  <a:lnTo>
+                    <a:pt x="4079980" y="92123"/>
+                  </a:lnTo>
+                  <a:lnTo>
+                    <a:pt x="4009635" y="85138"/>
+                  </a:lnTo>
+                  <a:lnTo>
+                    <a:pt x="3939291" y="77916"/>
+                  </a:lnTo>
+                  <a:lnTo>
+                    <a:pt x="3868946" y="70450"/>
+                  </a:lnTo>
+                  <a:lnTo>
+                    <a:pt x="3798602" y="62731"/>
+                  </a:lnTo>
+                  <a:lnTo>
+                    <a:pt x="3728257" y="54752"/>
+                  </a:lnTo>
+                  <a:lnTo>
+                    <a:pt x="3657913" y="46502"/>
+                  </a:lnTo>
+                  <a:lnTo>
+                    <a:pt x="3587569" y="37973"/>
+                  </a:lnTo>
+                  <a:lnTo>
+                    <a:pt x="3517224" y="29156"/>
+                  </a:lnTo>
+                  <a:lnTo>
+                    <a:pt x="3446880" y="20041"/>
+                  </a:lnTo>
+                  <a:lnTo>
+                    <a:pt x="3376535" y="10617"/>
+                  </a:lnTo>
+                  <a:lnTo>
+                    <a:pt x="3306191" y="875"/>
+                  </a:lnTo>
+                  <a:lnTo>
+                    <a:pt x="3235846" y="0"/>
+                  </a:lnTo>
+                  <a:lnTo>
+                    <a:pt x="3165502" y="828"/>
+                  </a:lnTo>
+                  <a:lnTo>
+                    <a:pt x="3095157" y="1655"/>
+                  </a:lnTo>
+                  <a:lnTo>
+                    <a:pt x="3024813" y="2479"/>
+                  </a:lnTo>
+                  <a:lnTo>
+                    <a:pt x="2954468" y="3301"/>
+                  </a:lnTo>
+                  <a:lnTo>
+                    <a:pt x="2884124" y="4120"/>
+                  </a:lnTo>
+                  <a:lnTo>
+                    <a:pt x="2813779" y="4938"/>
+                  </a:lnTo>
+                  <a:lnTo>
+                    <a:pt x="2743435" y="5753"/>
+                  </a:lnTo>
+                  <a:lnTo>
+                    <a:pt x="2673090" y="6565"/>
+                  </a:lnTo>
+                  <a:lnTo>
+                    <a:pt x="2602746" y="7376"/>
+                  </a:lnTo>
+                  <a:lnTo>
+                    <a:pt x="2532401" y="8184"/>
+                  </a:lnTo>
+                  <a:lnTo>
+                    <a:pt x="2462057" y="8990"/>
+                  </a:lnTo>
+                  <a:lnTo>
+                    <a:pt x="2391712" y="9794"/>
+                  </a:lnTo>
+                  <a:lnTo>
+                    <a:pt x="2321368" y="10596"/>
+                  </a:lnTo>
+                  <a:lnTo>
+                    <a:pt x="2251023" y="11395"/>
+                  </a:lnTo>
+                  <a:lnTo>
+                    <a:pt x="2180679" y="12192"/>
+                  </a:lnTo>
+                  <a:lnTo>
+                    <a:pt x="2110334" y="12987"/>
+                  </a:lnTo>
+                  <a:lnTo>
+                    <a:pt x="2039990" y="13780"/>
+                  </a:lnTo>
+                  <a:lnTo>
+                    <a:pt x="1969645" y="14570"/>
+                  </a:lnTo>
+                  <a:lnTo>
+                    <a:pt x="1899301" y="15359"/>
+                  </a:lnTo>
+                  <a:lnTo>
+                    <a:pt x="1828956" y="16145"/>
+                  </a:lnTo>
+                  <a:lnTo>
+                    <a:pt x="1758612" y="16929"/>
+                  </a:lnTo>
+                  <a:lnTo>
+                    <a:pt x="1688267" y="17710"/>
+                  </a:lnTo>
+                  <a:lnTo>
+                    <a:pt x="1617923" y="18490"/>
+                  </a:lnTo>
+                  <a:lnTo>
+                    <a:pt x="1547578" y="19268"/>
+                  </a:lnTo>
+                  <a:lnTo>
+                    <a:pt x="1477234" y="20043"/>
+                  </a:lnTo>
+                  <a:lnTo>
+                    <a:pt x="1406889" y="20816"/>
+                  </a:lnTo>
+                  <a:lnTo>
+                    <a:pt x="1336545" y="21587"/>
+                  </a:lnTo>
+                  <a:lnTo>
+                    <a:pt x="1266200" y="22356"/>
+                  </a:lnTo>
+                  <a:lnTo>
+                    <a:pt x="1195856" y="23122"/>
+                  </a:lnTo>
+                  <a:lnTo>
+                    <a:pt x="1125511" y="23887"/>
+                  </a:lnTo>
+                  <a:lnTo>
+                    <a:pt x="1055167" y="24650"/>
+                  </a:lnTo>
+                  <a:lnTo>
+                    <a:pt x="984822" y="25410"/>
+                  </a:lnTo>
+                  <a:lnTo>
+                    <a:pt x="914478" y="26168"/>
+                  </a:lnTo>
+                  <a:lnTo>
+                    <a:pt x="844133" y="26924"/>
+                  </a:lnTo>
+                  <a:lnTo>
+                    <a:pt x="773789" y="27678"/>
+                  </a:lnTo>
+                  <a:lnTo>
+                    <a:pt x="703444" y="28430"/>
+                  </a:lnTo>
+                  <a:lnTo>
+                    <a:pt x="633100" y="29180"/>
+                  </a:lnTo>
+                  <a:lnTo>
+                    <a:pt x="562755" y="29928"/>
+                  </a:lnTo>
+                  <a:lnTo>
+                    <a:pt x="492411" y="30674"/>
+                  </a:lnTo>
+                  <a:lnTo>
+                    <a:pt x="422066" y="31417"/>
+                  </a:lnTo>
+                  <a:lnTo>
+                    <a:pt x="351722" y="32159"/>
+                  </a:lnTo>
+                  <a:lnTo>
+                    <a:pt x="281377" y="32898"/>
+                  </a:lnTo>
+                  <a:lnTo>
+                    <a:pt x="211033" y="33636"/>
+                  </a:lnTo>
+                  <a:lnTo>
+                    <a:pt x="140688" y="34371"/>
+                  </a:lnTo>
+                  <a:lnTo>
+                    <a:pt x="70344" y="35104"/>
+                  </a:lnTo>
+                  <a:lnTo>
+                    <a:pt x="0" y="35836"/>
+                  </a:lnTo>
+                </a:path>
+              </a:pathLst>
+            </a:custGeom>
+          </p:spPr>
+          <p:txBody>
+            <a:bodyPr/>
+            <a:lstStyle/>
+            <a:p/>
+          </p:txBody>
+        </p:sp>
+        <p:sp>
+          <p:nvSpPr>
+            <p:cNvPr id="24" name="pl24"/>
+            <p:cNvSpPr/>
+            <p:nvPr/>
+          </p:nvSpPr>
+          <p:spPr>
+            <a:xfrm>
+              <a:off x="1235312" y="2788985"/>
+              <a:ext cx="6964104" cy="476148"/>
+            </a:xfrm>
+            <a:custGeom>
+              <a:avLst/>
+              <a:pathLst>
+                <a:path w="6964104" h="476148">
                   <a:moveTo>
                     <a:pt x="0" y="0"/>
                   </a:moveTo>
                   <a:lnTo>
-                    <a:pt x="71622" y="25626"/>
-                  </a:lnTo>
-                  <a:lnTo>
-                    <a:pt x="143245" y="50865"/>
-                  </a:lnTo>
-                  <a:lnTo>
-                    <a:pt x="214867" y="75722"/>
-                  </a:lnTo>
-                  <a:lnTo>
-                    <a:pt x="286490" y="100203"/>
-                  </a:lnTo>
-                  <a:lnTo>
-                    <a:pt x="358112" y="124314"/>
-                  </a:lnTo>
-                  <a:lnTo>
-                    <a:pt x="429735" y="148059"/>
-                  </a:lnTo>
-                  <a:lnTo>
-                    <a:pt x="501357" y="171446"/>
-                  </a:lnTo>
-                  <a:lnTo>
-                    <a:pt x="572980" y="194479"/>
-                  </a:lnTo>
-                  <a:lnTo>
-                    <a:pt x="644602" y="217163"/>
-                  </a:lnTo>
-                  <a:lnTo>
-                    <a:pt x="716225" y="239505"/>
-                  </a:lnTo>
-                  <a:lnTo>
-                    <a:pt x="787847" y="261508"/>
-                  </a:lnTo>
-                  <a:lnTo>
-                    <a:pt x="859470" y="283178"/>
-                  </a:lnTo>
-                  <a:lnTo>
-                    <a:pt x="931092" y="304521"/>
-                  </a:lnTo>
-                  <a:lnTo>
-                    <a:pt x="1002715" y="325541"/>
-                  </a:lnTo>
-                  <a:lnTo>
-                    <a:pt x="1074337" y="346242"/>
-                  </a:lnTo>
-                  <a:lnTo>
-                    <a:pt x="1145960" y="366631"/>
-                  </a:lnTo>
-                  <a:lnTo>
-                    <a:pt x="1217582" y="386711"/>
-                  </a:lnTo>
-                  <a:lnTo>
-                    <a:pt x="1289205" y="406487"/>
-                  </a:lnTo>
-                  <a:lnTo>
-                    <a:pt x="1360827" y="425964"/>
-                  </a:lnTo>
-                  <a:lnTo>
-                    <a:pt x="1432450" y="445147"/>
-                  </a:lnTo>
-                  <a:lnTo>
-                    <a:pt x="1504073" y="464039"/>
-                  </a:lnTo>
-                  <a:lnTo>
-                    <a:pt x="1575695" y="482645"/>
-                  </a:lnTo>
-                  <a:lnTo>
-                    <a:pt x="1647318" y="500970"/>
-                  </a:lnTo>
-                  <a:lnTo>
-                    <a:pt x="1718940" y="519018"/>
-                  </a:lnTo>
-                  <a:lnTo>
-                    <a:pt x="1790563" y="536793"/>
-                  </a:lnTo>
-                  <a:lnTo>
-                    <a:pt x="1862185" y="554299"/>
-                  </a:lnTo>
-                  <a:lnTo>
-                    <a:pt x="1933808" y="571540"/>
-                  </a:lnTo>
-                  <a:lnTo>
-                    <a:pt x="2005430" y="588520"/>
-                  </a:lnTo>
-                  <a:lnTo>
-                    <a:pt x="2077053" y="605243"/>
-                  </a:lnTo>
-                  <a:lnTo>
-                    <a:pt x="2148675" y="621713"/>
-                  </a:lnTo>
-                  <a:lnTo>
-                    <a:pt x="2220298" y="637934"/>
-                  </a:lnTo>
-                  <a:lnTo>
-                    <a:pt x="2291920" y="653910"/>
-                  </a:lnTo>
-                  <a:lnTo>
-                    <a:pt x="2363543" y="669644"/>
-                  </a:lnTo>
-                  <a:lnTo>
-                    <a:pt x="2435165" y="685140"/>
-                  </a:lnTo>
-                  <a:lnTo>
-                    <a:pt x="2506788" y="700402"/>
-                  </a:lnTo>
-                  <a:lnTo>
-                    <a:pt x="2578410" y="715432"/>
-                  </a:lnTo>
-                  <a:lnTo>
-                    <a:pt x="2650033" y="730236"/>
-                  </a:lnTo>
-                  <a:lnTo>
-                    <a:pt x="2721655" y="744815"/>
-                  </a:lnTo>
-                  <a:lnTo>
-                    <a:pt x="2793278" y="759174"/>
-                  </a:lnTo>
-                  <a:lnTo>
-                    <a:pt x="2864901" y="773316"/>
-                  </a:lnTo>
-                  <a:lnTo>
-                    <a:pt x="2936523" y="787243"/>
-                  </a:lnTo>
-                  <a:lnTo>
-                    <a:pt x="3008146" y="800960"/>
-                  </a:lnTo>
-                  <a:lnTo>
-                    <a:pt x="3079768" y="814470"/>
-                  </a:lnTo>
-                  <a:lnTo>
-                    <a:pt x="3151391" y="827775"/>
-                  </a:lnTo>
-                  <a:lnTo>
-                    <a:pt x="3223013" y="840878"/>
-                  </a:lnTo>
-                  <a:lnTo>
-                    <a:pt x="3294636" y="853784"/>
-                  </a:lnTo>
-                  <a:lnTo>
-                    <a:pt x="3366258" y="866494"/>
-                  </a:lnTo>
-                  <a:lnTo>
-                    <a:pt x="3437881" y="879012"/>
-                  </a:lnTo>
-                  <a:lnTo>
-                    <a:pt x="3509503" y="891341"/>
-                  </a:lnTo>
-                  <a:lnTo>
-                    <a:pt x="3581126" y="903483"/>
-                  </a:lnTo>
-                  <a:lnTo>
-                    <a:pt x="3652748" y="915442"/>
-                  </a:lnTo>
-                  <a:lnTo>
-                    <a:pt x="3724371" y="927219"/>
-                  </a:lnTo>
-                  <a:lnTo>
-                    <a:pt x="3795993" y="938818"/>
-                  </a:lnTo>
-                  <a:lnTo>
-                    <a:pt x="3867616" y="950242"/>
-                  </a:lnTo>
-                  <a:lnTo>
-                    <a:pt x="3939238" y="961493"/>
-                  </a:lnTo>
-                  <a:lnTo>
-                    <a:pt x="4010861" y="972574"/>
-                  </a:lnTo>
-                  <a:lnTo>
-                    <a:pt x="4082483" y="983487"/>
-                  </a:lnTo>
-                  <a:lnTo>
-                    <a:pt x="4154106" y="994236"/>
-                  </a:lnTo>
-                  <a:lnTo>
-                    <a:pt x="4225729" y="1004821"/>
-                  </a:lnTo>
-                  <a:lnTo>
-                    <a:pt x="4297351" y="1015246"/>
-                  </a:lnTo>
-                  <a:lnTo>
-                    <a:pt x="4368974" y="1025514"/>
-                  </a:lnTo>
-                  <a:lnTo>
-                    <a:pt x="4440596" y="1035626"/>
-                  </a:lnTo>
-                  <a:lnTo>
-                    <a:pt x="4512219" y="1045586"/>
-                  </a:lnTo>
-                  <a:lnTo>
-                    <a:pt x="4583841" y="1055395"/>
-                  </a:lnTo>
-                  <a:lnTo>
-                    <a:pt x="4655464" y="1065055"/>
-                  </a:lnTo>
-                  <a:lnTo>
-                    <a:pt x="4727086" y="1074569"/>
-                  </a:lnTo>
-                  <a:lnTo>
-                    <a:pt x="4798709" y="1083939"/>
-                  </a:lnTo>
-                  <a:lnTo>
-                    <a:pt x="4870331" y="1093168"/>
-                  </a:lnTo>
-                  <a:lnTo>
-                    <a:pt x="4941954" y="1102257"/>
-                  </a:lnTo>
-                  <a:lnTo>
-                    <a:pt x="5013576" y="1111208"/>
-                  </a:lnTo>
-                  <a:lnTo>
-                    <a:pt x="5085199" y="1120024"/>
-                  </a:lnTo>
-                  <a:lnTo>
-                    <a:pt x="5156821" y="1128706"/>
-                  </a:lnTo>
-                  <a:lnTo>
-                    <a:pt x="5228444" y="1137258"/>
-                  </a:lnTo>
-                  <a:lnTo>
-                    <a:pt x="5300066" y="1145679"/>
-                  </a:lnTo>
-                  <a:lnTo>
-                    <a:pt x="5371689" y="1153974"/>
-                  </a:lnTo>
-                  <a:lnTo>
-                    <a:pt x="5443311" y="1162143"/>
-                  </a:lnTo>
-                  <a:lnTo>
-                    <a:pt x="5514934" y="1170188"/>
-                  </a:lnTo>
-                  <a:lnTo>
-                    <a:pt x="5586557" y="1178112"/>
-                  </a:lnTo>
-                  <a:lnTo>
-                    <a:pt x="5658179" y="1185916"/>
-                  </a:lnTo>
-                  <a:lnTo>
-                    <a:pt x="5729802" y="1193601"/>
-                  </a:lnTo>
-                  <a:lnTo>
-                    <a:pt x="5801424" y="1201171"/>
-                  </a:lnTo>
-                  <a:lnTo>
-                    <a:pt x="5873047" y="1208626"/>
-                  </a:lnTo>
-                  <a:lnTo>
-                    <a:pt x="5944669" y="1215968"/>
-                  </a:lnTo>
-                  <a:lnTo>
-                    <a:pt x="6016292" y="1223199"/>
-                  </a:lnTo>
-                  <a:lnTo>
-                    <a:pt x="6087914" y="1230321"/>
-                  </a:lnTo>
-                  <a:lnTo>
-                    <a:pt x="6159537" y="1237335"/>
-                  </a:lnTo>
-                  <a:lnTo>
-                    <a:pt x="6231159" y="1244243"/>
-                  </a:lnTo>
-                  <a:lnTo>
-                    <a:pt x="6302782" y="1251046"/>
-                  </a:lnTo>
-                  <a:lnTo>
-                    <a:pt x="6374404" y="1257747"/>
-                  </a:lnTo>
-                  <a:lnTo>
-                    <a:pt x="6446027" y="1264346"/>
-                  </a:lnTo>
-                  <a:lnTo>
-                    <a:pt x="6517649" y="1270845"/>
-                  </a:lnTo>
-                  <a:lnTo>
-                    <a:pt x="6589272" y="1277246"/>
-                  </a:lnTo>
-                  <a:lnTo>
-                    <a:pt x="6660894" y="1283550"/>
-                  </a:lnTo>
-                  <a:lnTo>
-                    <a:pt x="6732517" y="1289759"/>
-                  </a:lnTo>
-                  <a:lnTo>
-                    <a:pt x="6804139" y="1295873"/>
-                  </a:lnTo>
-                  <a:lnTo>
-                    <a:pt x="6875762" y="1301896"/>
-                  </a:lnTo>
-                  <a:lnTo>
-                    <a:pt x="6947385" y="1307827"/>
-                  </a:lnTo>
-                  <a:lnTo>
-                    <a:pt x="7019007" y="1313668"/>
-                  </a:lnTo>
-                  <a:lnTo>
-                    <a:pt x="7090630" y="1319421"/>
+                    <a:pt x="70344" y="9248"/>
+                  </a:lnTo>
+                  <a:lnTo>
+                    <a:pt x="140688" y="18356"/>
+                  </a:lnTo>
+                  <a:lnTo>
+                    <a:pt x="211033" y="27326"/>
+                  </a:lnTo>
+                  <a:lnTo>
+                    <a:pt x="281377" y="36161"/>
+                  </a:lnTo>
+                  <a:lnTo>
+                    <a:pt x="351722" y="44862"/>
+                  </a:lnTo>
+                  <a:lnTo>
+                    <a:pt x="422066" y="53431"/>
+                  </a:lnTo>
+                  <a:lnTo>
+                    <a:pt x="492411" y="61871"/>
+                  </a:lnTo>
+                  <a:lnTo>
+                    <a:pt x="562755" y="70183"/>
+                  </a:lnTo>
+                  <a:lnTo>
+                    <a:pt x="633100" y="78369"/>
+                  </a:lnTo>
+                  <a:lnTo>
+                    <a:pt x="703444" y="86431"/>
+                  </a:lnTo>
+                  <a:lnTo>
+                    <a:pt x="773789" y="94372"/>
+                  </a:lnTo>
+                  <a:lnTo>
+                    <a:pt x="844133" y="102192"/>
+                  </a:lnTo>
+                  <a:lnTo>
+                    <a:pt x="914478" y="109894"/>
+                  </a:lnTo>
+                  <a:lnTo>
+                    <a:pt x="984822" y="117480"/>
+                  </a:lnTo>
+                  <a:lnTo>
+                    <a:pt x="1055167" y="124950"/>
+                  </a:lnTo>
+                  <a:lnTo>
+                    <a:pt x="1125511" y="132308"/>
+                  </a:lnTo>
+                  <a:lnTo>
+                    <a:pt x="1195856" y="139554"/>
+                  </a:lnTo>
+                  <a:lnTo>
+                    <a:pt x="1266200" y="146691"/>
+                  </a:lnTo>
+                  <a:lnTo>
+                    <a:pt x="1336545" y="153720"/>
+                  </a:lnTo>
+                  <a:lnTo>
+                    <a:pt x="1406889" y="160643"/>
+                  </a:lnTo>
+                  <a:lnTo>
+                    <a:pt x="1477234" y="167460"/>
+                  </a:lnTo>
+                  <a:lnTo>
+                    <a:pt x="1547578" y="174175"/>
+                  </a:lnTo>
+                  <a:lnTo>
+                    <a:pt x="1617923" y="180788"/>
+                  </a:lnTo>
+                  <a:lnTo>
+                    <a:pt x="1688267" y="187301"/>
+                  </a:lnTo>
+                  <a:lnTo>
+                    <a:pt x="1758612" y="193716"/>
+                  </a:lnTo>
+                  <a:lnTo>
+                    <a:pt x="1828956" y="200033"/>
+                  </a:lnTo>
+                  <a:lnTo>
+                    <a:pt x="1899301" y="206255"/>
+                  </a:lnTo>
+                  <a:lnTo>
+                    <a:pt x="1969645" y="212383"/>
+                  </a:lnTo>
+                  <a:lnTo>
+                    <a:pt x="2039990" y="218418"/>
+                  </a:lnTo>
+                  <a:lnTo>
+                    <a:pt x="2110334" y="224361"/>
+                  </a:lnTo>
+                  <a:lnTo>
+                    <a:pt x="2180679" y="230215"/>
+                  </a:lnTo>
+                  <a:lnTo>
+                    <a:pt x="2251023" y="235980"/>
+                  </a:lnTo>
+                  <a:lnTo>
+                    <a:pt x="2321368" y="241659"/>
+                  </a:lnTo>
+                  <a:lnTo>
+                    <a:pt x="2391712" y="247251"/>
+                  </a:lnTo>
+                  <a:lnTo>
+                    <a:pt x="2462057" y="252758"/>
+                  </a:lnTo>
+                  <a:lnTo>
+                    <a:pt x="2532401" y="258182"/>
+                  </a:lnTo>
+                  <a:lnTo>
+                    <a:pt x="2602746" y="263525"/>
+                  </a:lnTo>
+                  <a:lnTo>
+                    <a:pt x="2673090" y="268786"/>
+                  </a:lnTo>
+                  <a:lnTo>
+                    <a:pt x="2743435" y="273968"/>
+                  </a:lnTo>
+                  <a:lnTo>
+                    <a:pt x="2813779" y="279071"/>
+                  </a:lnTo>
+                  <a:lnTo>
+                    <a:pt x="2884124" y="284097"/>
+                  </a:lnTo>
+                  <a:lnTo>
+                    <a:pt x="2954468" y="289047"/>
+                  </a:lnTo>
+                  <a:lnTo>
+                    <a:pt x="3024813" y="293923"/>
+                  </a:lnTo>
+                  <a:lnTo>
+                    <a:pt x="3095157" y="298724"/>
+                  </a:lnTo>
+                  <a:lnTo>
+                    <a:pt x="3165502" y="303453"/>
+                  </a:lnTo>
+                  <a:lnTo>
+                    <a:pt x="3235846" y="308110"/>
+                  </a:lnTo>
+                  <a:lnTo>
+                    <a:pt x="3306191" y="312697"/>
+                  </a:lnTo>
+                  <a:lnTo>
+                    <a:pt x="3376535" y="317215"/>
+                  </a:lnTo>
+                  <a:lnTo>
+                    <a:pt x="3446880" y="321664"/>
+                  </a:lnTo>
+                  <a:lnTo>
+                    <a:pt x="3517224" y="326045"/>
+                  </a:lnTo>
+                  <a:lnTo>
+                    <a:pt x="3587569" y="330361"/>
+                  </a:lnTo>
+                  <a:lnTo>
+                    <a:pt x="3657913" y="334611"/>
+                  </a:lnTo>
+                  <a:lnTo>
+                    <a:pt x="3728257" y="338797"/>
+                  </a:lnTo>
+                  <a:lnTo>
+                    <a:pt x="3798602" y="342920"/>
+                  </a:lnTo>
+                  <a:lnTo>
+                    <a:pt x="3868946" y="346980"/>
+                  </a:lnTo>
+                  <a:lnTo>
+                    <a:pt x="3939291" y="350979"/>
+                  </a:lnTo>
+                  <a:lnTo>
+                    <a:pt x="4009635" y="354917"/>
+                  </a:lnTo>
+                  <a:lnTo>
+                    <a:pt x="4079980" y="358796"/>
+                  </a:lnTo>
+                  <a:lnTo>
+                    <a:pt x="4150324" y="362616"/>
+                  </a:lnTo>
+                  <a:lnTo>
+                    <a:pt x="4220669" y="366378"/>
+                  </a:lnTo>
+                  <a:lnTo>
+                    <a:pt x="4291013" y="370084"/>
+                  </a:lnTo>
+                  <a:lnTo>
+                    <a:pt x="4361358" y="373733"/>
+                  </a:lnTo>
+                  <a:lnTo>
+                    <a:pt x="4431702" y="377327"/>
+                  </a:lnTo>
+                  <a:lnTo>
+                    <a:pt x="4502047" y="380867"/>
+                  </a:lnTo>
+                  <a:lnTo>
+                    <a:pt x="4572391" y="384353"/>
+                  </a:lnTo>
+                  <a:lnTo>
+                    <a:pt x="4642736" y="387786"/>
+                  </a:lnTo>
+                  <a:lnTo>
+                    <a:pt x="4713080" y="391168"/>
+                  </a:lnTo>
+                  <a:lnTo>
+                    <a:pt x="4783425" y="394498"/>
+                  </a:lnTo>
+                  <a:lnTo>
+                    <a:pt x="4853769" y="397778"/>
+                  </a:lnTo>
+                  <a:lnTo>
+                    <a:pt x="4924114" y="401008"/>
+                  </a:lnTo>
+                  <a:lnTo>
+                    <a:pt x="4994458" y="404190"/>
+                  </a:lnTo>
+                  <a:lnTo>
+                    <a:pt x="5064803" y="407323"/>
+                  </a:lnTo>
+                  <a:lnTo>
+                    <a:pt x="5135147" y="410409"/>
+                  </a:lnTo>
+                  <a:lnTo>
+                    <a:pt x="5205492" y="413448"/>
+                  </a:lnTo>
+                  <a:lnTo>
+                    <a:pt x="5275836" y="416442"/>
+                  </a:lnTo>
+                  <a:lnTo>
+                    <a:pt x="5346181" y="419390"/>
+                  </a:lnTo>
+                  <a:lnTo>
+                    <a:pt x="5416525" y="422293"/>
+                  </a:lnTo>
+                  <a:lnTo>
+                    <a:pt x="5486870" y="425153"/>
+                  </a:lnTo>
+                  <a:lnTo>
+                    <a:pt x="5557214" y="427969"/>
+                  </a:lnTo>
+                  <a:lnTo>
+                    <a:pt x="5627559" y="430742"/>
+                  </a:lnTo>
+                  <a:lnTo>
+                    <a:pt x="5697903" y="433474"/>
+                  </a:lnTo>
+                  <a:lnTo>
+                    <a:pt x="5768248" y="436164"/>
+                  </a:lnTo>
+                  <a:lnTo>
+                    <a:pt x="5838592" y="438814"/>
+                  </a:lnTo>
+                  <a:lnTo>
+                    <a:pt x="5908937" y="441423"/>
+                  </a:lnTo>
+                  <a:lnTo>
+                    <a:pt x="5979281" y="443994"/>
+                  </a:lnTo>
+                  <a:lnTo>
+                    <a:pt x="6049626" y="446525"/>
+                  </a:lnTo>
+                  <a:lnTo>
+                    <a:pt x="6119970" y="449018"/>
+                  </a:lnTo>
+                  <a:lnTo>
+                    <a:pt x="6190315" y="451473"/>
+                  </a:lnTo>
+                  <a:lnTo>
+                    <a:pt x="6260659" y="453891"/>
+                  </a:lnTo>
+                  <a:lnTo>
+                    <a:pt x="6331004" y="456272"/>
+                  </a:lnTo>
+                  <a:lnTo>
+                    <a:pt x="6401348" y="458618"/>
+                  </a:lnTo>
+                  <a:lnTo>
+                    <a:pt x="6471693" y="460928"/>
+                  </a:lnTo>
+                  <a:lnTo>
+                    <a:pt x="6542037" y="463203"/>
+                  </a:lnTo>
+                  <a:lnTo>
+                    <a:pt x="6612382" y="465443"/>
+                  </a:lnTo>
+                  <a:lnTo>
+                    <a:pt x="6682726" y="467650"/>
+                  </a:lnTo>
+                  <a:lnTo>
+                    <a:pt x="6753071" y="469823"/>
+                  </a:lnTo>
+                  <a:lnTo>
+                    <a:pt x="6823415" y="471964"/>
+                  </a:lnTo>
+                  <a:lnTo>
+                    <a:pt x="6893760" y="474072"/>
+                  </a:lnTo>
+                  <a:lnTo>
+                    <a:pt x="6964104" y="476148"/>
                   </a:lnTo>
                 </a:path>
               </a:pathLst>
@@ -4550,27 +4585,27 @@
         </p:sp>
         <p:sp>
           <p:nvSpPr>
-            <p:cNvPr id="24" name="pl24"/>
+            <p:cNvPr id="25" name="pl25"/>
             <p:cNvSpPr/>
             <p:nvPr/>
           </p:nvSpPr>
           <p:spPr>
             <a:xfrm>
-              <a:off x="817517" y="4727786"/>
-              <a:ext cx="7799693" cy="0"/>
+              <a:off x="887106" y="3100960"/>
+              <a:ext cx="7660515" cy="0"/>
             </a:xfrm>
             <a:custGeom>
               <a:avLst/>
               <a:pathLst>
-                <a:path w="7799693" h="0">
+                <a:path w="7660515" h="0">
                   <a:moveTo>
                     <a:pt x="0" y="0"/>
                   </a:moveTo>
                   <a:lnTo>
-                    <a:pt x="7799693" y="0"/>
-                  </a:lnTo>
-                  <a:lnTo>
-                    <a:pt x="7799693" y="0"/>
+                    <a:pt x="7660515" y="0"/>
+                  </a:lnTo>
+                  <a:lnTo>
+                    <a:pt x="7660515" y="0"/>
                   </a:lnTo>
                 </a:path>
               </a:pathLst>
@@ -4593,21 +4628,21 @@
         </p:sp>
         <p:sp>
           <p:nvSpPr>
-            <p:cNvPr id="25" name="pl25"/>
+            <p:cNvPr id="26" name="pl26"/>
             <p:cNvSpPr/>
             <p:nvPr/>
           </p:nvSpPr>
           <p:spPr>
             <a:xfrm>
-              <a:off x="4526955" y="2073503"/>
-              <a:ext cx="0" cy="3649639"/>
+              <a:off x="4530353" y="2143092"/>
+              <a:ext cx="0" cy="1317069"/>
             </a:xfrm>
             <a:custGeom>
               <a:avLst/>
               <a:pathLst>
-                <a:path w="0" h="3649639">
+                <a:path w="0" h="1317069">
                   <a:moveTo>
-                    <a:pt x="0" y="3649639"/>
+                    <a:pt x="0" y="1317069"/>
                   </a:moveTo>
                   <a:lnTo>
                     <a:pt x="0" y="0"/>
@@ -4636,13 +4671,13 @@
         </p:sp>
         <p:sp>
           <p:nvSpPr>
-            <p:cNvPr id="26" name="tx26"/>
+            <p:cNvPr id="27" name="tx27"/>
             <p:cNvSpPr/>
             <p:nvPr/>
           </p:nvSpPr>
           <p:spPr>
             <a:xfrm>
-              <a:off x="692708" y="5517199"/>
+              <a:off x="762297" y="3360243"/>
               <a:ext cx="62179" cy="80101"/>
             </a:xfrm>
             <a:prstGeom prst="rect">
@@ -4682,13 +4717,13 @@
         </p:sp>
         <p:sp>
           <p:nvSpPr>
-            <p:cNvPr id="27" name="tx27"/>
+            <p:cNvPr id="28" name="tx28"/>
             <p:cNvSpPr/>
             <p:nvPr/>
           </p:nvSpPr>
           <p:spPr>
             <a:xfrm>
-              <a:off x="692708" y="4687735"/>
+              <a:off x="762297" y="3060909"/>
               <a:ext cx="62179" cy="80101"/>
             </a:xfrm>
             <a:prstGeom prst="rect">
@@ -4728,13 +4763,13 @@
         </p:sp>
         <p:sp>
           <p:nvSpPr>
-            <p:cNvPr id="28" name="tx28"/>
+            <p:cNvPr id="29" name="tx29"/>
             <p:cNvSpPr/>
             <p:nvPr/>
           </p:nvSpPr>
           <p:spPr>
             <a:xfrm>
-              <a:off x="692708" y="3858272"/>
+              <a:off x="762297" y="2761575"/>
               <a:ext cx="62179" cy="80101"/>
             </a:xfrm>
             <a:prstGeom prst="rect">
@@ -4774,13 +4809,13 @@
         </p:sp>
         <p:sp>
           <p:nvSpPr>
-            <p:cNvPr id="29" name="tx29"/>
+            <p:cNvPr id="30" name="tx30"/>
             <p:cNvSpPr/>
             <p:nvPr/>
           </p:nvSpPr>
           <p:spPr>
             <a:xfrm>
-              <a:off x="692708" y="3028808"/>
+              <a:off x="762297" y="2462242"/>
               <a:ext cx="62179" cy="80101"/>
             </a:xfrm>
             <a:prstGeom prst="rect">
@@ -4820,13 +4855,13 @@
         </p:sp>
         <p:sp>
           <p:nvSpPr>
-            <p:cNvPr id="30" name="tx30"/>
+            <p:cNvPr id="31" name="tx31"/>
             <p:cNvSpPr/>
             <p:nvPr/>
           </p:nvSpPr>
           <p:spPr>
             <a:xfrm>
-              <a:off x="692708" y="2199345"/>
+              <a:off x="762297" y="2162908"/>
               <a:ext cx="62179" cy="80101"/>
             </a:xfrm>
             <a:prstGeom prst="rect">
@@ -4866,13 +4901,13 @@
         </p:sp>
         <p:sp>
           <p:nvSpPr>
-            <p:cNvPr id="31" name="tx31"/>
+            <p:cNvPr id="32" name="tx32"/>
             <p:cNvSpPr/>
             <p:nvPr/>
           </p:nvSpPr>
           <p:spPr>
             <a:xfrm>
-              <a:off x="2421884" y="5785772"/>
+              <a:off x="2461403" y="3522791"/>
               <a:ext cx="161574" cy="80101"/>
             </a:xfrm>
             <a:prstGeom prst="rect">
@@ -4912,13 +4947,13 @@
         </p:sp>
         <p:sp>
           <p:nvSpPr>
-            <p:cNvPr id="32" name="tx32"/>
+            <p:cNvPr id="33" name="tx33"/>
             <p:cNvSpPr/>
             <p:nvPr/>
           </p:nvSpPr>
           <p:spPr>
             <a:xfrm>
-              <a:off x="4542539" y="5785772"/>
+              <a:off x="4545104" y="3522791"/>
               <a:ext cx="62179" cy="80101"/>
             </a:xfrm>
             <a:prstGeom prst="rect">
@@ -4958,13 +4993,13 @@
         </p:sp>
         <p:sp>
           <p:nvSpPr>
-            <p:cNvPr id="33" name="tx33"/>
+            <p:cNvPr id="34" name="tx34"/>
             <p:cNvSpPr/>
             <p:nvPr/>
           </p:nvSpPr>
           <p:spPr>
             <a:xfrm>
-              <a:off x="6582407" y="5785772"/>
+              <a:off x="6548017" y="3522791"/>
               <a:ext cx="124358" cy="80101"/>
             </a:xfrm>
             <a:prstGeom prst="rect">
@@ -5004,13 +5039,13 @@
         </p:sp>
         <p:sp>
           <p:nvSpPr>
-            <p:cNvPr id="34" name="tx34"/>
+            <p:cNvPr id="35" name="tx35"/>
             <p:cNvSpPr/>
             <p:nvPr/>
           </p:nvSpPr>
           <p:spPr>
             <a:xfrm>
-              <a:off x="2928340" y="5925448"/>
+              <a:off x="2928340" y="3662467"/>
               <a:ext cx="3578047" cy="100218"/>
             </a:xfrm>
             <a:prstGeom prst="rect">
@@ -5050,13 +5085,13 @@
         </p:sp>
         <p:sp>
           <p:nvSpPr>
-            <p:cNvPr id="35" name="tx35"/>
+            <p:cNvPr id="36" name="tx36"/>
             <p:cNvSpPr/>
             <p:nvPr/>
           </p:nvSpPr>
           <p:spPr>
             <a:xfrm rot="-5400000">
-              <a:off x="68446" y="3848213"/>
+              <a:off x="138035" y="2751517"/>
               <a:ext cx="1016904" cy="100218"/>
             </a:xfrm>
             <a:prstGeom prst="rect">
@@ -5096,13 +5131,13 @@
         </p:sp>
         <p:sp>
           <p:nvSpPr>
-            <p:cNvPr id="36" name="tx36"/>
+            <p:cNvPr id="37" name="tx37"/>
             <p:cNvSpPr/>
             <p:nvPr/>
           </p:nvSpPr>
           <p:spPr>
             <a:xfrm>
-              <a:off x="817517" y="1896563"/>
+              <a:off x="887106" y="1966152"/>
               <a:ext cx="6321612" cy="82021"/>
             </a:xfrm>
             <a:prstGeom prst="rect">
@@ -5142,13 +5177,3728 @@
         </p:sp>
         <p:sp>
           <p:nvSpPr>
-            <p:cNvPr id="37" name="tx37"/>
+            <p:cNvPr id="38" name="tx38"/>
             <p:cNvSpPr/>
             <p:nvPr/>
           </p:nvSpPr>
           <p:spPr>
             <a:xfrm>
-              <a:off x="817517" y="1669789"/>
+              <a:off x="887106" y="1739378"/>
+              <a:ext cx="3081893" cy="120152"/>
+            </a:xfrm>
+            <a:prstGeom prst="rect">
+              <a:avLst/>
+            </a:prstGeom>
+            <a:noFill/>
+          </p:spPr>
+          <p:txBody>
+            <a:bodyPr lIns="0" rIns="0" tIns="0" bIns="0" anchorCtr="1" anchor="ctr" wrap="none"/>
+            <a:lstStyle/>
+            <a:p>
+              <a:pPr algn="l" marL="0" marR="0" indent="0">
+                <a:lnSpc>
+                  <a:spcPts val="1320"/>
+                </a:lnSpc>
+                <a:spcBef>
+                  <a:spcPts val="0"/>
+                </a:spcBef>
+                <a:spcAft>
+                  <a:spcPts val="0"/>
+                </a:spcAft>
+              </a:pPr>
+              <a:r>
+                <a:rPr sz="1320">
+                  <a:solidFill>
+                    <a:srgbClr val="000000">
+                      <a:alpha val="100000"/>
+                    </a:srgbClr>
+                  </a:solidFill>
+                  <a:latin typeface="Helvetica"/>
+                  <a:cs typeface="Helvetica"/>
+                </a:rPr>
+                <a:t>Immune-related AE &amp; Other (Carboplatin)</a:t>
+              </a:r>
+            </a:p>
+          </p:txBody>
+        </p:sp>
+        <p:sp>
+          <p:nvSpPr>
+            <p:cNvPr id="39" name="pl39"/>
+            <p:cNvSpPr/>
+            <p:nvPr/>
+          </p:nvSpPr>
+          <p:spPr>
+            <a:xfrm>
+              <a:off x="887106" y="5444019"/>
+              <a:ext cx="7660515" cy="0"/>
+            </a:xfrm>
+            <a:custGeom>
+              <a:avLst/>
+              <a:pathLst>
+                <a:path w="7660515" h="0">
+                  <a:moveTo>
+                    <a:pt x="0" y="0"/>
+                  </a:moveTo>
+                  <a:lnTo>
+                    <a:pt x="7660515" y="0"/>
+                  </a:lnTo>
+                  <a:lnTo>
+                    <a:pt x="7660515" y="0"/>
+                  </a:lnTo>
+                </a:path>
+              </a:pathLst>
+            </a:custGeom>
+            <a:ln w="6775" cap="flat">
+              <a:solidFill>
+                <a:srgbClr val="EBEBEB">
+                  <a:alpha val="100000"/>
+                </a:srgbClr>
+              </a:solidFill>
+              <a:prstDash val="solid"/>
+              <a:round/>
+            </a:ln>
+          </p:spPr>
+          <p:txBody>
+            <a:bodyPr/>
+            <a:lstStyle/>
+            <a:p/>
+          </p:txBody>
+        </p:sp>
+        <p:sp>
+          <p:nvSpPr>
+            <p:cNvPr id="40" name="pl40"/>
+            <p:cNvSpPr/>
+            <p:nvPr/>
+          </p:nvSpPr>
+          <p:spPr>
+            <a:xfrm>
+              <a:off x="887106" y="5144686"/>
+              <a:ext cx="7660515" cy="0"/>
+            </a:xfrm>
+            <a:custGeom>
+              <a:avLst/>
+              <a:pathLst>
+                <a:path w="7660515" h="0">
+                  <a:moveTo>
+                    <a:pt x="0" y="0"/>
+                  </a:moveTo>
+                  <a:lnTo>
+                    <a:pt x="7660515" y="0"/>
+                  </a:lnTo>
+                  <a:lnTo>
+                    <a:pt x="7660515" y="0"/>
+                  </a:lnTo>
+                </a:path>
+              </a:pathLst>
+            </a:custGeom>
+            <a:ln w="6775" cap="flat">
+              <a:solidFill>
+                <a:srgbClr val="EBEBEB">
+                  <a:alpha val="100000"/>
+                </a:srgbClr>
+              </a:solidFill>
+              <a:prstDash val="solid"/>
+              <a:round/>
+            </a:ln>
+          </p:spPr>
+          <p:txBody>
+            <a:bodyPr/>
+            <a:lstStyle/>
+            <a:p/>
+          </p:txBody>
+        </p:sp>
+        <p:sp>
+          <p:nvSpPr>
+            <p:cNvPr id="41" name="pl41"/>
+            <p:cNvSpPr/>
+            <p:nvPr/>
+          </p:nvSpPr>
+          <p:spPr>
+            <a:xfrm>
+              <a:off x="887106" y="4845352"/>
+              <a:ext cx="7660515" cy="0"/>
+            </a:xfrm>
+            <a:custGeom>
+              <a:avLst/>
+              <a:pathLst>
+                <a:path w="7660515" h="0">
+                  <a:moveTo>
+                    <a:pt x="0" y="0"/>
+                  </a:moveTo>
+                  <a:lnTo>
+                    <a:pt x="7660515" y="0"/>
+                  </a:lnTo>
+                  <a:lnTo>
+                    <a:pt x="7660515" y="0"/>
+                  </a:lnTo>
+                </a:path>
+              </a:pathLst>
+            </a:custGeom>
+            <a:ln w="6775" cap="flat">
+              <a:solidFill>
+                <a:srgbClr val="EBEBEB">
+                  <a:alpha val="100000"/>
+                </a:srgbClr>
+              </a:solidFill>
+              <a:prstDash val="solid"/>
+              <a:round/>
+            </a:ln>
+          </p:spPr>
+          <p:txBody>
+            <a:bodyPr/>
+            <a:lstStyle/>
+            <a:p/>
+          </p:txBody>
+        </p:sp>
+        <p:sp>
+          <p:nvSpPr>
+            <p:cNvPr id="42" name="pl42"/>
+            <p:cNvSpPr/>
+            <p:nvPr/>
+          </p:nvSpPr>
+          <p:spPr>
+            <a:xfrm>
+              <a:off x="887106" y="4546018"/>
+              <a:ext cx="7660515" cy="0"/>
+            </a:xfrm>
+            <a:custGeom>
+              <a:avLst/>
+              <a:pathLst>
+                <a:path w="7660515" h="0">
+                  <a:moveTo>
+                    <a:pt x="0" y="0"/>
+                  </a:moveTo>
+                  <a:lnTo>
+                    <a:pt x="7660515" y="0"/>
+                  </a:lnTo>
+                  <a:lnTo>
+                    <a:pt x="7660515" y="0"/>
+                  </a:lnTo>
+                </a:path>
+              </a:pathLst>
+            </a:custGeom>
+            <a:ln w="6775" cap="flat">
+              <a:solidFill>
+                <a:srgbClr val="EBEBEB">
+                  <a:alpha val="100000"/>
+                </a:srgbClr>
+              </a:solidFill>
+              <a:prstDash val="solid"/>
+              <a:round/>
+            </a:ln>
+          </p:spPr>
+          <p:txBody>
+            <a:bodyPr/>
+            <a:lstStyle/>
+            <a:p/>
+          </p:txBody>
+        </p:sp>
+        <p:sp>
+          <p:nvSpPr>
+            <p:cNvPr id="43" name="pl43"/>
+            <p:cNvSpPr/>
+            <p:nvPr/>
+          </p:nvSpPr>
+          <p:spPr>
+            <a:xfrm>
+              <a:off x="914987" y="4336484"/>
+              <a:ext cx="0" cy="1317069"/>
+            </a:xfrm>
+            <a:custGeom>
+              <a:avLst/>
+              <a:pathLst>
+                <a:path w="0" h="1317069">
+                  <a:moveTo>
+                    <a:pt x="0" y="1317069"/>
+                  </a:moveTo>
+                  <a:lnTo>
+                    <a:pt x="0" y="0"/>
+                  </a:lnTo>
+                  <a:lnTo>
+                    <a:pt x="0" y="0"/>
+                  </a:lnTo>
+                </a:path>
+              </a:pathLst>
+            </a:custGeom>
+            <a:ln w="6775" cap="flat">
+              <a:solidFill>
+                <a:srgbClr val="EBEBEB">
+                  <a:alpha val="100000"/>
+                </a:srgbClr>
+              </a:solidFill>
+              <a:prstDash val="solid"/>
+              <a:round/>
+            </a:ln>
+          </p:spPr>
+          <p:txBody>
+            <a:bodyPr/>
+            <a:lstStyle/>
+            <a:p/>
+          </p:txBody>
+        </p:sp>
+        <p:sp>
+          <p:nvSpPr>
+            <p:cNvPr id="44" name="pl44"/>
+            <p:cNvSpPr/>
+            <p:nvPr/>
+          </p:nvSpPr>
+          <p:spPr>
+            <a:xfrm>
+              <a:off x="1728588" y="4336484"/>
+              <a:ext cx="0" cy="1317069"/>
+            </a:xfrm>
+            <a:custGeom>
+              <a:avLst/>
+              <a:pathLst>
+                <a:path w="0" h="1317069">
+                  <a:moveTo>
+                    <a:pt x="0" y="1317069"/>
+                  </a:moveTo>
+                  <a:lnTo>
+                    <a:pt x="0" y="0"/>
+                  </a:lnTo>
+                  <a:lnTo>
+                    <a:pt x="0" y="0"/>
+                  </a:lnTo>
+                </a:path>
+              </a:pathLst>
+            </a:custGeom>
+            <a:ln w="6775" cap="flat">
+              <a:solidFill>
+                <a:srgbClr val="EBEBEB">
+                  <a:alpha val="100000"/>
+                </a:srgbClr>
+              </a:solidFill>
+              <a:prstDash val="solid"/>
+              <a:round/>
+            </a:ln>
+          </p:spPr>
+          <p:txBody>
+            <a:bodyPr/>
+            <a:lstStyle/>
+            <a:p/>
+          </p:txBody>
+        </p:sp>
+        <p:sp>
+          <p:nvSpPr>
+            <p:cNvPr id="45" name="pl45"/>
+            <p:cNvSpPr/>
+            <p:nvPr/>
+          </p:nvSpPr>
+          <p:spPr>
+            <a:xfrm>
+              <a:off x="2542190" y="4336484"/>
+              <a:ext cx="0" cy="1317069"/>
+            </a:xfrm>
+            <a:custGeom>
+              <a:avLst/>
+              <a:pathLst>
+                <a:path w="0" h="1317069">
+                  <a:moveTo>
+                    <a:pt x="0" y="1317069"/>
+                  </a:moveTo>
+                  <a:lnTo>
+                    <a:pt x="0" y="0"/>
+                  </a:lnTo>
+                  <a:lnTo>
+                    <a:pt x="0" y="0"/>
+                  </a:lnTo>
+                </a:path>
+              </a:pathLst>
+            </a:custGeom>
+            <a:ln w="6775" cap="flat">
+              <a:solidFill>
+                <a:srgbClr val="EBEBEB">
+                  <a:alpha val="100000"/>
+                </a:srgbClr>
+              </a:solidFill>
+              <a:prstDash val="solid"/>
+              <a:round/>
+            </a:ln>
+          </p:spPr>
+          <p:txBody>
+            <a:bodyPr/>
+            <a:lstStyle/>
+            <a:p/>
+          </p:txBody>
+        </p:sp>
+        <p:sp>
+          <p:nvSpPr>
+            <p:cNvPr id="46" name="pl46"/>
+            <p:cNvSpPr/>
+            <p:nvPr/>
+          </p:nvSpPr>
+          <p:spPr>
+            <a:xfrm>
+              <a:off x="3355791" y="4336484"/>
+              <a:ext cx="0" cy="1317069"/>
+            </a:xfrm>
+            <a:custGeom>
+              <a:avLst/>
+              <a:pathLst>
+                <a:path w="0" h="1317069">
+                  <a:moveTo>
+                    <a:pt x="0" y="1317069"/>
+                  </a:moveTo>
+                  <a:lnTo>
+                    <a:pt x="0" y="0"/>
+                  </a:lnTo>
+                  <a:lnTo>
+                    <a:pt x="0" y="0"/>
+                  </a:lnTo>
+                </a:path>
+              </a:pathLst>
+            </a:custGeom>
+            <a:ln w="6775" cap="flat">
+              <a:solidFill>
+                <a:srgbClr val="EBEBEB">
+                  <a:alpha val="100000"/>
+                </a:srgbClr>
+              </a:solidFill>
+              <a:prstDash val="solid"/>
+              <a:round/>
+            </a:ln>
+          </p:spPr>
+          <p:txBody>
+            <a:bodyPr/>
+            <a:lstStyle/>
+            <a:p/>
+          </p:txBody>
+        </p:sp>
+        <p:sp>
+          <p:nvSpPr>
+            <p:cNvPr id="47" name="pl47"/>
+            <p:cNvSpPr/>
+            <p:nvPr/>
+          </p:nvSpPr>
+          <p:spPr>
+            <a:xfrm>
+              <a:off x="4169393" y="4336484"/>
+              <a:ext cx="0" cy="1317069"/>
+            </a:xfrm>
+            <a:custGeom>
+              <a:avLst/>
+              <a:pathLst>
+                <a:path w="0" h="1317069">
+                  <a:moveTo>
+                    <a:pt x="0" y="1317069"/>
+                  </a:moveTo>
+                  <a:lnTo>
+                    <a:pt x="0" y="0"/>
+                  </a:lnTo>
+                  <a:lnTo>
+                    <a:pt x="0" y="0"/>
+                  </a:lnTo>
+                </a:path>
+              </a:pathLst>
+            </a:custGeom>
+            <a:ln w="6775" cap="flat">
+              <a:solidFill>
+                <a:srgbClr val="EBEBEB">
+                  <a:alpha val="100000"/>
+                </a:srgbClr>
+              </a:solidFill>
+              <a:prstDash val="solid"/>
+              <a:round/>
+            </a:ln>
+          </p:spPr>
+          <p:txBody>
+            <a:bodyPr/>
+            <a:lstStyle/>
+            <a:p/>
+          </p:txBody>
+        </p:sp>
+        <p:sp>
+          <p:nvSpPr>
+            <p:cNvPr id="48" name="pl48"/>
+            <p:cNvSpPr/>
+            <p:nvPr/>
+          </p:nvSpPr>
+          <p:spPr>
+            <a:xfrm>
+              <a:off x="4982994" y="4336484"/>
+              <a:ext cx="0" cy="1317069"/>
+            </a:xfrm>
+            <a:custGeom>
+              <a:avLst/>
+              <a:pathLst>
+                <a:path w="0" h="1317069">
+                  <a:moveTo>
+                    <a:pt x="0" y="1317069"/>
+                  </a:moveTo>
+                  <a:lnTo>
+                    <a:pt x="0" y="0"/>
+                  </a:lnTo>
+                  <a:lnTo>
+                    <a:pt x="0" y="0"/>
+                  </a:lnTo>
+                </a:path>
+              </a:pathLst>
+            </a:custGeom>
+            <a:ln w="6775" cap="flat">
+              <a:solidFill>
+                <a:srgbClr val="EBEBEB">
+                  <a:alpha val="100000"/>
+                </a:srgbClr>
+              </a:solidFill>
+              <a:prstDash val="solid"/>
+              <a:round/>
+            </a:ln>
+          </p:spPr>
+          <p:txBody>
+            <a:bodyPr/>
+            <a:lstStyle/>
+            <a:p/>
+          </p:txBody>
+        </p:sp>
+        <p:sp>
+          <p:nvSpPr>
+            <p:cNvPr id="49" name="pl49"/>
+            <p:cNvSpPr/>
+            <p:nvPr/>
+          </p:nvSpPr>
+          <p:spPr>
+            <a:xfrm>
+              <a:off x="5796595" y="4336484"/>
+              <a:ext cx="0" cy="1317069"/>
+            </a:xfrm>
+            <a:custGeom>
+              <a:avLst/>
+              <a:pathLst>
+                <a:path w="0" h="1317069">
+                  <a:moveTo>
+                    <a:pt x="0" y="1317069"/>
+                  </a:moveTo>
+                  <a:lnTo>
+                    <a:pt x="0" y="0"/>
+                  </a:lnTo>
+                  <a:lnTo>
+                    <a:pt x="0" y="0"/>
+                  </a:lnTo>
+                </a:path>
+              </a:pathLst>
+            </a:custGeom>
+            <a:ln w="6775" cap="flat">
+              <a:solidFill>
+                <a:srgbClr val="EBEBEB">
+                  <a:alpha val="100000"/>
+                </a:srgbClr>
+              </a:solidFill>
+              <a:prstDash val="solid"/>
+              <a:round/>
+            </a:ln>
+          </p:spPr>
+          <p:txBody>
+            <a:bodyPr/>
+            <a:lstStyle/>
+            <a:p/>
+          </p:txBody>
+        </p:sp>
+        <p:sp>
+          <p:nvSpPr>
+            <p:cNvPr id="50" name="pl50"/>
+            <p:cNvSpPr/>
+            <p:nvPr/>
+          </p:nvSpPr>
+          <p:spPr>
+            <a:xfrm>
+              <a:off x="6610197" y="4336484"/>
+              <a:ext cx="0" cy="1317069"/>
+            </a:xfrm>
+            <a:custGeom>
+              <a:avLst/>
+              <a:pathLst>
+                <a:path w="0" h="1317069">
+                  <a:moveTo>
+                    <a:pt x="0" y="1317069"/>
+                  </a:moveTo>
+                  <a:lnTo>
+                    <a:pt x="0" y="0"/>
+                  </a:lnTo>
+                  <a:lnTo>
+                    <a:pt x="0" y="0"/>
+                  </a:lnTo>
+                </a:path>
+              </a:pathLst>
+            </a:custGeom>
+            <a:ln w="6775" cap="flat">
+              <a:solidFill>
+                <a:srgbClr val="EBEBEB">
+                  <a:alpha val="100000"/>
+                </a:srgbClr>
+              </a:solidFill>
+              <a:prstDash val="solid"/>
+              <a:round/>
+            </a:ln>
+          </p:spPr>
+          <p:txBody>
+            <a:bodyPr/>
+            <a:lstStyle/>
+            <a:p/>
+          </p:txBody>
+        </p:sp>
+        <p:sp>
+          <p:nvSpPr>
+            <p:cNvPr id="51" name="pl51"/>
+            <p:cNvSpPr/>
+            <p:nvPr/>
+          </p:nvSpPr>
+          <p:spPr>
+            <a:xfrm>
+              <a:off x="7423798" y="4336484"/>
+              <a:ext cx="0" cy="1317069"/>
+            </a:xfrm>
+            <a:custGeom>
+              <a:avLst/>
+              <a:pathLst>
+                <a:path w="0" h="1317069">
+                  <a:moveTo>
+                    <a:pt x="0" y="1317069"/>
+                  </a:moveTo>
+                  <a:lnTo>
+                    <a:pt x="0" y="0"/>
+                  </a:lnTo>
+                  <a:lnTo>
+                    <a:pt x="0" y="0"/>
+                  </a:lnTo>
+                </a:path>
+              </a:pathLst>
+            </a:custGeom>
+            <a:ln w="6775" cap="flat">
+              <a:solidFill>
+                <a:srgbClr val="EBEBEB">
+                  <a:alpha val="100000"/>
+                </a:srgbClr>
+              </a:solidFill>
+              <a:prstDash val="solid"/>
+              <a:round/>
+            </a:ln>
+          </p:spPr>
+          <p:txBody>
+            <a:bodyPr/>
+            <a:lstStyle/>
+            <a:p/>
+          </p:txBody>
+        </p:sp>
+        <p:sp>
+          <p:nvSpPr>
+            <p:cNvPr id="52" name="pl52"/>
+            <p:cNvSpPr/>
+            <p:nvPr/>
+          </p:nvSpPr>
+          <p:spPr>
+            <a:xfrm>
+              <a:off x="8237399" y="4336484"/>
+              <a:ext cx="0" cy="1317069"/>
+            </a:xfrm>
+            <a:custGeom>
+              <a:avLst/>
+              <a:pathLst>
+                <a:path w="0" h="1317069">
+                  <a:moveTo>
+                    <a:pt x="0" y="1317069"/>
+                  </a:moveTo>
+                  <a:lnTo>
+                    <a:pt x="0" y="0"/>
+                  </a:lnTo>
+                  <a:lnTo>
+                    <a:pt x="0" y="0"/>
+                  </a:lnTo>
+                </a:path>
+              </a:pathLst>
+            </a:custGeom>
+            <a:ln w="6775" cap="flat">
+              <a:solidFill>
+                <a:srgbClr val="EBEBEB">
+                  <a:alpha val="100000"/>
+                </a:srgbClr>
+              </a:solidFill>
+              <a:prstDash val="solid"/>
+              <a:round/>
+            </a:ln>
+          </p:spPr>
+          <p:txBody>
+            <a:bodyPr/>
+            <a:lstStyle/>
+            <a:p/>
+          </p:txBody>
+        </p:sp>
+        <p:sp>
+          <p:nvSpPr>
+            <p:cNvPr id="53" name="pl53"/>
+            <p:cNvSpPr/>
+            <p:nvPr/>
+          </p:nvSpPr>
+          <p:spPr>
+            <a:xfrm>
+              <a:off x="887106" y="5593686"/>
+              <a:ext cx="7660515" cy="0"/>
+            </a:xfrm>
+            <a:custGeom>
+              <a:avLst/>
+              <a:pathLst>
+                <a:path w="7660515" h="0">
+                  <a:moveTo>
+                    <a:pt x="0" y="0"/>
+                  </a:moveTo>
+                  <a:lnTo>
+                    <a:pt x="7660515" y="0"/>
+                  </a:lnTo>
+                  <a:lnTo>
+                    <a:pt x="7660515" y="0"/>
+                  </a:lnTo>
+                </a:path>
+              </a:pathLst>
+            </a:custGeom>
+            <a:ln w="13550" cap="flat">
+              <a:solidFill>
+                <a:srgbClr val="EBEBEB">
+                  <a:alpha val="100000"/>
+                </a:srgbClr>
+              </a:solidFill>
+              <a:prstDash val="solid"/>
+              <a:round/>
+            </a:ln>
+          </p:spPr>
+          <p:txBody>
+            <a:bodyPr/>
+            <a:lstStyle/>
+            <a:p/>
+          </p:txBody>
+        </p:sp>
+        <p:sp>
+          <p:nvSpPr>
+            <p:cNvPr id="54" name="pl54"/>
+            <p:cNvSpPr/>
+            <p:nvPr/>
+          </p:nvSpPr>
+          <p:spPr>
+            <a:xfrm>
+              <a:off x="887106" y="5294352"/>
+              <a:ext cx="7660515" cy="0"/>
+            </a:xfrm>
+            <a:custGeom>
+              <a:avLst/>
+              <a:pathLst>
+                <a:path w="7660515" h="0">
+                  <a:moveTo>
+                    <a:pt x="0" y="0"/>
+                  </a:moveTo>
+                  <a:lnTo>
+                    <a:pt x="7660515" y="0"/>
+                  </a:lnTo>
+                  <a:lnTo>
+                    <a:pt x="7660515" y="0"/>
+                  </a:lnTo>
+                </a:path>
+              </a:pathLst>
+            </a:custGeom>
+            <a:ln w="13550" cap="flat">
+              <a:solidFill>
+                <a:srgbClr val="EBEBEB">
+                  <a:alpha val="100000"/>
+                </a:srgbClr>
+              </a:solidFill>
+              <a:prstDash val="solid"/>
+              <a:round/>
+            </a:ln>
+          </p:spPr>
+          <p:txBody>
+            <a:bodyPr/>
+            <a:lstStyle/>
+            <a:p/>
+          </p:txBody>
+        </p:sp>
+        <p:sp>
+          <p:nvSpPr>
+            <p:cNvPr id="55" name="pl55"/>
+            <p:cNvSpPr/>
+            <p:nvPr/>
+          </p:nvSpPr>
+          <p:spPr>
+            <a:xfrm>
+              <a:off x="887106" y="4995019"/>
+              <a:ext cx="7660515" cy="0"/>
+            </a:xfrm>
+            <a:custGeom>
+              <a:avLst/>
+              <a:pathLst>
+                <a:path w="7660515" h="0">
+                  <a:moveTo>
+                    <a:pt x="0" y="0"/>
+                  </a:moveTo>
+                  <a:lnTo>
+                    <a:pt x="7660515" y="0"/>
+                  </a:lnTo>
+                  <a:lnTo>
+                    <a:pt x="7660515" y="0"/>
+                  </a:lnTo>
+                </a:path>
+              </a:pathLst>
+            </a:custGeom>
+            <a:ln w="13550" cap="flat">
+              <a:solidFill>
+                <a:srgbClr val="EBEBEB">
+                  <a:alpha val="100000"/>
+                </a:srgbClr>
+              </a:solidFill>
+              <a:prstDash val="solid"/>
+              <a:round/>
+            </a:ln>
+          </p:spPr>
+          <p:txBody>
+            <a:bodyPr/>
+            <a:lstStyle/>
+            <a:p/>
+          </p:txBody>
+        </p:sp>
+        <p:sp>
+          <p:nvSpPr>
+            <p:cNvPr id="56" name="pl56"/>
+            <p:cNvSpPr/>
+            <p:nvPr/>
+          </p:nvSpPr>
+          <p:spPr>
+            <a:xfrm>
+              <a:off x="887106" y="4695685"/>
+              <a:ext cx="7660515" cy="0"/>
+            </a:xfrm>
+            <a:custGeom>
+              <a:avLst/>
+              <a:pathLst>
+                <a:path w="7660515" h="0">
+                  <a:moveTo>
+                    <a:pt x="0" y="0"/>
+                  </a:moveTo>
+                  <a:lnTo>
+                    <a:pt x="7660515" y="0"/>
+                  </a:lnTo>
+                  <a:lnTo>
+                    <a:pt x="7660515" y="0"/>
+                  </a:lnTo>
+                </a:path>
+              </a:pathLst>
+            </a:custGeom>
+            <a:ln w="13550" cap="flat">
+              <a:solidFill>
+                <a:srgbClr val="EBEBEB">
+                  <a:alpha val="100000"/>
+                </a:srgbClr>
+              </a:solidFill>
+              <a:prstDash val="solid"/>
+              <a:round/>
+            </a:ln>
+          </p:spPr>
+          <p:txBody>
+            <a:bodyPr/>
+            <a:lstStyle/>
+            <a:p/>
+          </p:txBody>
+        </p:sp>
+        <p:sp>
+          <p:nvSpPr>
+            <p:cNvPr id="57" name="pl57"/>
+            <p:cNvSpPr/>
+            <p:nvPr/>
+          </p:nvSpPr>
+          <p:spPr>
+            <a:xfrm>
+              <a:off x="887106" y="4396351"/>
+              <a:ext cx="7660515" cy="0"/>
+            </a:xfrm>
+            <a:custGeom>
+              <a:avLst/>
+              <a:pathLst>
+                <a:path w="7660515" h="0">
+                  <a:moveTo>
+                    <a:pt x="0" y="0"/>
+                  </a:moveTo>
+                  <a:lnTo>
+                    <a:pt x="7660515" y="0"/>
+                  </a:lnTo>
+                  <a:lnTo>
+                    <a:pt x="7660515" y="0"/>
+                  </a:lnTo>
+                </a:path>
+              </a:pathLst>
+            </a:custGeom>
+            <a:ln w="13550" cap="flat">
+              <a:solidFill>
+                <a:srgbClr val="EBEBEB">
+                  <a:alpha val="100000"/>
+                </a:srgbClr>
+              </a:solidFill>
+              <a:prstDash val="solid"/>
+              <a:round/>
+            </a:ln>
+          </p:spPr>
+          <p:txBody>
+            <a:bodyPr/>
+            <a:lstStyle/>
+            <a:p/>
+          </p:txBody>
+        </p:sp>
+        <p:sp>
+          <p:nvSpPr>
+            <p:cNvPr id="58" name="pl58"/>
+            <p:cNvSpPr/>
+            <p:nvPr/>
+          </p:nvSpPr>
+          <p:spPr>
+            <a:xfrm>
+              <a:off x="1321788" y="4336484"/>
+              <a:ext cx="0" cy="1317069"/>
+            </a:xfrm>
+            <a:custGeom>
+              <a:avLst/>
+              <a:pathLst>
+                <a:path w="0" h="1317069">
+                  <a:moveTo>
+                    <a:pt x="0" y="1317069"/>
+                  </a:moveTo>
+                  <a:lnTo>
+                    <a:pt x="0" y="0"/>
+                  </a:lnTo>
+                  <a:lnTo>
+                    <a:pt x="0" y="0"/>
+                  </a:lnTo>
+                </a:path>
+              </a:pathLst>
+            </a:custGeom>
+            <a:ln w="13550" cap="flat">
+              <a:solidFill>
+                <a:srgbClr val="EBEBEB">
+                  <a:alpha val="100000"/>
+                </a:srgbClr>
+              </a:solidFill>
+              <a:prstDash val="solid"/>
+              <a:round/>
+            </a:ln>
+          </p:spPr>
+          <p:txBody>
+            <a:bodyPr/>
+            <a:lstStyle/>
+            <a:p/>
+          </p:txBody>
+        </p:sp>
+        <p:sp>
+          <p:nvSpPr>
+            <p:cNvPr id="59" name="pl59"/>
+            <p:cNvSpPr/>
+            <p:nvPr/>
+          </p:nvSpPr>
+          <p:spPr>
+            <a:xfrm>
+              <a:off x="2135389" y="4336484"/>
+              <a:ext cx="0" cy="1317069"/>
+            </a:xfrm>
+            <a:custGeom>
+              <a:avLst/>
+              <a:pathLst>
+                <a:path w="0" h="1317069">
+                  <a:moveTo>
+                    <a:pt x="0" y="1317069"/>
+                  </a:moveTo>
+                  <a:lnTo>
+                    <a:pt x="0" y="0"/>
+                  </a:lnTo>
+                  <a:lnTo>
+                    <a:pt x="0" y="0"/>
+                  </a:lnTo>
+                </a:path>
+              </a:pathLst>
+            </a:custGeom>
+            <a:ln w="13550" cap="flat">
+              <a:solidFill>
+                <a:srgbClr val="EBEBEB">
+                  <a:alpha val="100000"/>
+                </a:srgbClr>
+              </a:solidFill>
+              <a:prstDash val="solid"/>
+              <a:round/>
+            </a:ln>
+          </p:spPr>
+          <p:txBody>
+            <a:bodyPr/>
+            <a:lstStyle/>
+            <a:p/>
+          </p:txBody>
+        </p:sp>
+        <p:sp>
+          <p:nvSpPr>
+            <p:cNvPr id="60" name="pl60"/>
+            <p:cNvSpPr/>
+            <p:nvPr/>
+          </p:nvSpPr>
+          <p:spPr>
+            <a:xfrm>
+              <a:off x="2948991" y="4336484"/>
+              <a:ext cx="0" cy="1317069"/>
+            </a:xfrm>
+            <a:custGeom>
+              <a:avLst/>
+              <a:pathLst>
+                <a:path w="0" h="1317069">
+                  <a:moveTo>
+                    <a:pt x="0" y="1317069"/>
+                  </a:moveTo>
+                  <a:lnTo>
+                    <a:pt x="0" y="0"/>
+                  </a:lnTo>
+                  <a:lnTo>
+                    <a:pt x="0" y="0"/>
+                  </a:lnTo>
+                </a:path>
+              </a:pathLst>
+            </a:custGeom>
+            <a:ln w="13550" cap="flat">
+              <a:solidFill>
+                <a:srgbClr val="EBEBEB">
+                  <a:alpha val="100000"/>
+                </a:srgbClr>
+              </a:solidFill>
+              <a:prstDash val="solid"/>
+              <a:round/>
+            </a:ln>
+          </p:spPr>
+          <p:txBody>
+            <a:bodyPr/>
+            <a:lstStyle/>
+            <a:p/>
+          </p:txBody>
+        </p:sp>
+        <p:sp>
+          <p:nvSpPr>
+            <p:cNvPr id="61" name="pl61"/>
+            <p:cNvSpPr/>
+            <p:nvPr/>
+          </p:nvSpPr>
+          <p:spPr>
+            <a:xfrm>
+              <a:off x="3762592" y="4336484"/>
+              <a:ext cx="0" cy="1317069"/>
+            </a:xfrm>
+            <a:custGeom>
+              <a:avLst/>
+              <a:pathLst>
+                <a:path w="0" h="1317069">
+                  <a:moveTo>
+                    <a:pt x="0" y="1317069"/>
+                  </a:moveTo>
+                  <a:lnTo>
+                    <a:pt x="0" y="0"/>
+                  </a:lnTo>
+                  <a:lnTo>
+                    <a:pt x="0" y="0"/>
+                  </a:lnTo>
+                </a:path>
+              </a:pathLst>
+            </a:custGeom>
+            <a:ln w="13550" cap="flat">
+              <a:solidFill>
+                <a:srgbClr val="EBEBEB">
+                  <a:alpha val="100000"/>
+                </a:srgbClr>
+              </a:solidFill>
+              <a:prstDash val="solid"/>
+              <a:round/>
+            </a:ln>
+          </p:spPr>
+          <p:txBody>
+            <a:bodyPr/>
+            <a:lstStyle/>
+            <a:p/>
+          </p:txBody>
+        </p:sp>
+        <p:sp>
+          <p:nvSpPr>
+            <p:cNvPr id="62" name="pl62"/>
+            <p:cNvSpPr/>
+            <p:nvPr/>
+          </p:nvSpPr>
+          <p:spPr>
+            <a:xfrm>
+              <a:off x="4576193" y="4336484"/>
+              <a:ext cx="0" cy="1317069"/>
+            </a:xfrm>
+            <a:custGeom>
+              <a:avLst/>
+              <a:pathLst>
+                <a:path w="0" h="1317069">
+                  <a:moveTo>
+                    <a:pt x="0" y="1317069"/>
+                  </a:moveTo>
+                  <a:lnTo>
+                    <a:pt x="0" y="0"/>
+                  </a:lnTo>
+                  <a:lnTo>
+                    <a:pt x="0" y="0"/>
+                  </a:lnTo>
+                </a:path>
+              </a:pathLst>
+            </a:custGeom>
+            <a:ln w="13550" cap="flat">
+              <a:solidFill>
+                <a:srgbClr val="EBEBEB">
+                  <a:alpha val="100000"/>
+                </a:srgbClr>
+              </a:solidFill>
+              <a:prstDash val="solid"/>
+              <a:round/>
+            </a:ln>
+          </p:spPr>
+          <p:txBody>
+            <a:bodyPr/>
+            <a:lstStyle/>
+            <a:p/>
+          </p:txBody>
+        </p:sp>
+        <p:sp>
+          <p:nvSpPr>
+            <p:cNvPr id="63" name="pl63"/>
+            <p:cNvSpPr/>
+            <p:nvPr/>
+          </p:nvSpPr>
+          <p:spPr>
+            <a:xfrm>
+              <a:off x="5389795" y="4336484"/>
+              <a:ext cx="0" cy="1317069"/>
+            </a:xfrm>
+            <a:custGeom>
+              <a:avLst/>
+              <a:pathLst>
+                <a:path w="0" h="1317069">
+                  <a:moveTo>
+                    <a:pt x="0" y="1317069"/>
+                  </a:moveTo>
+                  <a:lnTo>
+                    <a:pt x="0" y="0"/>
+                  </a:lnTo>
+                  <a:lnTo>
+                    <a:pt x="0" y="0"/>
+                  </a:lnTo>
+                </a:path>
+              </a:pathLst>
+            </a:custGeom>
+            <a:ln w="13550" cap="flat">
+              <a:solidFill>
+                <a:srgbClr val="EBEBEB">
+                  <a:alpha val="100000"/>
+                </a:srgbClr>
+              </a:solidFill>
+              <a:prstDash val="solid"/>
+              <a:round/>
+            </a:ln>
+          </p:spPr>
+          <p:txBody>
+            <a:bodyPr/>
+            <a:lstStyle/>
+            <a:p/>
+          </p:txBody>
+        </p:sp>
+        <p:sp>
+          <p:nvSpPr>
+            <p:cNvPr id="64" name="pl64"/>
+            <p:cNvSpPr/>
+            <p:nvPr/>
+          </p:nvSpPr>
+          <p:spPr>
+            <a:xfrm>
+              <a:off x="6203396" y="4336484"/>
+              <a:ext cx="0" cy="1317069"/>
+            </a:xfrm>
+            <a:custGeom>
+              <a:avLst/>
+              <a:pathLst>
+                <a:path w="0" h="1317069">
+                  <a:moveTo>
+                    <a:pt x="0" y="1317069"/>
+                  </a:moveTo>
+                  <a:lnTo>
+                    <a:pt x="0" y="0"/>
+                  </a:lnTo>
+                  <a:lnTo>
+                    <a:pt x="0" y="0"/>
+                  </a:lnTo>
+                </a:path>
+              </a:pathLst>
+            </a:custGeom>
+            <a:ln w="13550" cap="flat">
+              <a:solidFill>
+                <a:srgbClr val="EBEBEB">
+                  <a:alpha val="100000"/>
+                </a:srgbClr>
+              </a:solidFill>
+              <a:prstDash val="solid"/>
+              <a:round/>
+            </a:ln>
+          </p:spPr>
+          <p:txBody>
+            <a:bodyPr/>
+            <a:lstStyle/>
+            <a:p/>
+          </p:txBody>
+        </p:sp>
+        <p:sp>
+          <p:nvSpPr>
+            <p:cNvPr id="65" name="pl65"/>
+            <p:cNvSpPr/>
+            <p:nvPr/>
+          </p:nvSpPr>
+          <p:spPr>
+            <a:xfrm>
+              <a:off x="7016997" y="4336484"/>
+              <a:ext cx="0" cy="1317069"/>
+            </a:xfrm>
+            <a:custGeom>
+              <a:avLst/>
+              <a:pathLst>
+                <a:path w="0" h="1317069">
+                  <a:moveTo>
+                    <a:pt x="0" y="1317069"/>
+                  </a:moveTo>
+                  <a:lnTo>
+                    <a:pt x="0" y="0"/>
+                  </a:lnTo>
+                  <a:lnTo>
+                    <a:pt x="0" y="0"/>
+                  </a:lnTo>
+                </a:path>
+              </a:pathLst>
+            </a:custGeom>
+            <a:ln w="13550" cap="flat">
+              <a:solidFill>
+                <a:srgbClr val="EBEBEB">
+                  <a:alpha val="100000"/>
+                </a:srgbClr>
+              </a:solidFill>
+              <a:prstDash val="solid"/>
+              <a:round/>
+            </a:ln>
+          </p:spPr>
+          <p:txBody>
+            <a:bodyPr/>
+            <a:lstStyle/>
+            <a:p/>
+          </p:txBody>
+        </p:sp>
+        <p:sp>
+          <p:nvSpPr>
+            <p:cNvPr id="66" name="pl66"/>
+            <p:cNvSpPr/>
+            <p:nvPr/>
+          </p:nvSpPr>
+          <p:spPr>
+            <a:xfrm>
+              <a:off x="7830599" y="4336484"/>
+              <a:ext cx="0" cy="1317069"/>
+            </a:xfrm>
+            <a:custGeom>
+              <a:avLst/>
+              <a:pathLst>
+                <a:path w="0" h="1317069">
+                  <a:moveTo>
+                    <a:pt x="0" y="1317069"/>
+                  </a:moveTo>
+                  <a:lnTo>
+                    <a:pt x="0" y="0"/>
+                  </a:lnTo>
+                  <a:lnTo>
+                    <a:pt x="0" y="0"/>
+                  </a:lnTo>
+                </a:path>
+              </a:pathLst>
+            </a:custGeom>
+            <a:ln w="13550" cap="flat">
+              <a:solidFill>
+                <a:srgbClr val="EBEBEB">
+                  <a:alpha val="100000"/>
+                </a:srgbClr>
+              </a:solidFill>
+              <a:prstDash val="solid"/>
+              <a:round/>
+            </a:ln>
+          </p:spPr>
+          <p:txBody>
+            <a:bodyPr/>
+            <a:lstStyle/>
+            <a:p/>
+          </p:txBody>
+        </p:sp>
+        <p:sp>
+          <p:nvSpPr>
+            <p:cNvPr id="67" name="pg67"/>
+            <p:cNvSpPr/>
+            <p:nvPr/>
+          </p:nvSpPr>
+          <p:spPr>
+            <a:xfrm>
+              <a:off x="1235312" y="4336484"/>
+              <a:ext cx="6964104" cy="1204407"/>
+            </a:xfrm>
+            <a:custGeom>
+              <a:avLst/>
+              <a:pathLst>
+                <a:path w="6964104" h="1204407">
+                  <a:moveTo>
+                    <a:pt x="260703" y="0"/>
+                  </a:moveTo>
+                  <a:lnTo>
+                    <a:pt x="281377" y="12375"/>
+                  </a:lnTo>
+                  <a:lnTo>
+                    <a:pt x="351722" y="53105"/>
+                  </a:lnTo>
+                  <a:lnTo>
+                    <a:pt x="422066" y="92502"/>
+                  </a:lnTo>
+                  <a:lnTo>
+                    <a:pt x="492411" y="130611"/>
+                  </a:lnTo>
+                  <a:lnTo>
+                    <a:pt x="562755" y="167472"/>
+                  </a:lnTo>
+                  <a:lnTo>
+                    <a:pt x="633100" y="203127"/>
+                  </a:lnTo>
+                  <a:lnTo>
+                    <a:pt x="703444" y="237616"/>
+                  </a:lnTo>
+                  <a:lnTo>
+                    <a:pt x="773789" y="270976"/>
+                  </a:lnTo>
+                  <a:lnTo>
+                    <a:pt x="844133" y="303245"/>
+                  </a:lnTo>
+                  <a:lnTo>
+                    <a:pt x="914478" y="334458"/>
+                  </a:lnTo>
+                  <a:lnTo>
+                    <a:pt x="984822" y="364649"/>
+                  </a:lnTo>
+                  <a:lnTo>
+                    <a:pt x="1055167" y="393853"/>
+                  </a:lnTo>
+                  <a:lnTo>
+                    <a:pt x="1125511" y="422101"/>
+                  </a:lnTo>
+                  <a:lnTo>
+                    <a:pt x="1195856" y="449425"/>
+                  </a:lnTo>
+                  <a:lnTo>
+                    <a:pt x="1266200" y="475855"/>
+                  </a:lnTo>
+                  <a:lnTo>
+                    <a:pt x="1336545" y="501420"/>
+                  </a:lnTo>
+                  <a:lnTo>
+                    <a:pt x="1406889" y="526149"/>
+                  </a:lnTo>
+                  <a:lnTo>
+                    <a:pt x="1477234" y="550069"/>
+                  </a:lnTo>
+                  <a:lnTo>
+                    <a:pt x="1547578" y="573206"/>
+                  </a:lnTo>
+                  <a:lnTo>
+                    <a:pt x="1617923" y="595586"/>
+                  </a:lnTo>
+                  <a:lnTo>
+                    <a:pt x="1688267" y="617233"/>
+                  </a:lnTo>
+                  <a:lnTo>
+                    <a:pt x="1758612" y="638173"/>
+                  </a:lnTo>
+                  <a:lnTo>
+                    <a:pt x="1828956" y="658427"/>
+                  </a:lnTo>
+                  <a:lnTo>
+                    <a:pt x="1899301" y="678018"/>
+                  </a:lnTo>
+                  <a:lnTo>
+                    <a:pt x="1969645" y="696969"/>
+                  </a:lnTo>
+                  <a:lnTo>
+                    <a:pt x="2039990" y="715299"/>
+                  </a:lnTo>
+                  <a:lnTo>
+                    <a:pt x="2110334" y="733030"/>
+                  </a:lnTo>
+                  <a:lnTo>
+                    <a:pt x="2180679" y="750181"/>
+                  </a:lnTo>
+                  <a:lnTo>
+                    <a:pt x="2251023" y="766770"/>
+                  </a:lnTo>
+                  <a:lnTo>
+                    <a:pt x="2321368" y="782817"/>
+                  </a:lnTo>
+                  <a:lnTo>
+                    <a:pt x="2391712" y="798338"/>
+                  </a:lnTo>
+                  <a:lnTo>
+                    <a:pt x="2462057" y="813352"/>
+                  </a:lnTo>
+                  <a:lnTo>
+                    <a:pt x="2532401" y="827875"/>
+                  </a:lnTo>
+                  <a:lnTo>
+                    <a:pt x="2602746" y="841922"/>
+                  </a:lnTo>
+                  <a:lnTo>
+                    <a:pt x="2673090" y="855510"/>
+                  </a:lnTo>
+                  <a:lnTo>
+                    <a:pt x="2743435" y="868653"/>
+                  </a:lnTo>
+                  <a:lnTo>
+                    <a:pt x="2813779" y="881366"/>
+                  </a:lnTo>
+                  <a:lnTo>
+                    <a:pt x="2884124" y="893663"/>
+                  </a:lnTo>
+                  <a:lnTo>
+                    <a:pt x="2954468" y="905558"/>
+                  </a:lnTo>
+                  <a:lnTo>
+                    <a:pt x="3024813" y="917063"/>
+                  </a:lnTo>
+                  <a:lnTo>
+                    <a:pt x="3095157" y="928192"/>
+                  </a:lnTo>
+                  <a:lnTo>
+                    <a:pt x="3165502" y="938957"/>
+                  </a:lnTo>
+                  <a:lnTo>
+                    <a:pt x="3235846" y="949370"/>
+                  </a:lnTo>
+                  <a:lnTo>
+                    <a:pt x="3306191" y="957736"/>
+                  </a:lnTo>
+                  <a:lnTo>
+                    <a:pt x="3376535" y="956903"/>
+                  </a:lnTo>
+                  <a:lnTo>
+                    <a:pt x="3446880" y="956067"/>
+                  </a:lnTo>
+                  <a:lnTo>
+                    <a:pt x="3517224" y="955229"/>
+                  </a:lnTo>
+                  <a:lnTo>
+                    <a:pt x="3587569" y="954389"/>
+                  </a:lnTo>
+                  <a:lnTo>
+                    <a:pt x="3657913" y="953546"/>
+                  </a:lnTo>
+                  <a:lnTo>
+                    <a:pt x="3728257" y="952701"/>
+                  </a:lnTo>
+                  <a:lnTo>
+                    <a:pt x="3798602" y="951854"/>
+                  </a:lnTo>
+                  <a:lnTo>
+                    <a:pt x="3868946" y="951004"/>
+                  </a:lnTo>
+                  <a:lnTo>
+                    <a:pt x="3939291" y="950152"/>
+                  </a:lnTo>
+                  <a:lnTo>
+                    <a:pt x="4009635" y="949297"/>
+                  </a:lnTo>
+                  <a:lnTo>
+                    <a:pt x="4079980" y="948440"/>
+                  </a:lnTo>
+                  <a:lnTo>
+                    <a:pt x="4150324" y="947581"/>
+                  </a:lnTo>
+                  <a:lnTo>
+                    <a:pt x="4220669" y="946719"/>
+                  </a:lnTo>
+                  <a:lnTo>
+                    <a:pt x="4291013" y="945855"/>
+                  </a:lnTo>
+                  <a:lnTo>
+                    <a:pt x="4361358" y="944989"/>
+                  </a:lnTo>
+                  <a:lnTo>
+                    <a:pt x="4431702" y="944120"/>
+                  </a:lnTo>
+                  <a:lnTo>
+                    <a:pt x="4502047" y="943249"/>
+                  </a:lnTo>
+                  <a:lnTo>
+                    <a:pt x="4572391" y="942375"/>
+                  </a:lnTo>
+                  <a:lnTo>
+                    <a:pt x="4642736" y="941499"/>
+                  </a:lnTo>
+                  <a:lnTo>
+                    <a:pt x="4713080" y="940621"/>
+                  </a:lnTo>
+                  <a:lnTo>
+                    <a:pt x="4783425" y="939740"/>
+                  </a:lnTo>
+                  <a:lnTo>
+                    <a:pt x="4853769" y="938856"/>
+                  </a:lnTo>
+                  <a:lnTo>
+                    <a:pt x="4924114" y="937970"/>
+                  </a:lnTo>
+                  <a:lnTo>
+                    <a:pt x="4994458" y="937082"/>
+                  </a:lnTo>
+                  <a:lnTo>
+                    <a:pt x="5064803" y="936191"/>
+                  </a:lnTo>
+                  <a:lnTo>
+                    <a:pt x="5135147" y="935298"/>
+                  </a:lnTo>
+                  <a:lnTo>
+                    <a:pt x="5205492" y="934402"/>
+                  </a:lnTo>
+                  <a:lnTo>
+                    <a:pt x="5275836" y="933503"/>
+                  </a:lnTo>
+                  <a:lnTo>
+                    <a:pt x="5346181" y="932603"/>
+                  </a:lnTo>
+                  <a:lnTo>
+                    <a:pt x="5416525" y="931699"/>
+                  </a:lnTo>
+                  <a:lnTo>
+                    <a:pt x="5486870" y="930794"/>
+                  </a:lnTo>
+                  <a:lnTo>
+                    <a:pt x="5557214" y="929885"/>
+                  </a:lnTo>
+                  <a:lnTo>
+                    <a:pt x="5627559" y="928974"/>
+                  </a:lnTo>
+                  <a:lnTo>
+                    <a:pt x="5697903" y="928061"/>
+                  </a:lnTo>
+                  <a:lnTo>
+                    <a:pt x="5768248" y="927145"/>
+                  </a:lnTo>
+                  <a:lnTo>
+                    <a:pt x="5838592" y="926226"/>
+                  </a:lnTo>
+                  <a:lnTo>
+                    <a:pt x="5908937" y="925305"/>
+                  </a:lnTo>
+                  <a:lnTo>
+                    <a:pt x="5979281" y="924382"/>
+                  </a:lnTo>
+                  <a:lnTo>
+                    <a:pt x="6049626" y="923456"/>
+                  </a:lnTo>
+                  <a:lnTo>
+                    <a:pt x="6119970" y="922527"/>
+                  </a:lnTo>
+                  <a:lnTo>
+                    <a:pt x="6190315" y="921595"/>
+                  </a:lnTo>
+                  <a:lnTo>
+                    <a:pt x="6260659" y="920661"/>
+                  </a:lnTo>
+                  <a:lnTo>
+                    <a:pt x="6331004" y="919725"/>
+                  </a:lnTo>
+                  <a:lnTo>
+                    <a:pt x="6401348" y="918786"/>
+                  </a:lnTo>
+                  <a:lnTo>
+                    <a:pt x="6471693" y="917844"/>
+                  </a:lnTo>
+                  <a:lnTo>
+                    <a:pt x="6542037" y="916900"/>
+                  </a:lnTo>
+                  <a:lnTo>
+                    <a:pt x="6612382" y="915953"/>
+                  </a:lnTo>
+                  <a:lnTo>
+                    <a:pt x="6682726" y="915003"/>
+                  </a:lnTo>
+                  <a:lnTo>
+                    <a:pt x="6753071" y="914051"/>
+                  </a:lnTo>
+                  <a:lnTo>
+                    <a:pt x="6823415" y="913096"/>
+                  </a:lnTo>
+                  <a:lnTo>
+                    <a:pt x="6893760" y="912138"/>
+                  </a:lnTo>
+                  <a:lnTo>
+                    <a:pt x="6964104" y="911178"/>
+                  </a:lnTo>
+                  <a:lnTo>
+                    <a:pt x="6964104" y="1204407"/>
+                  </a:lnTo>
+                  <a:lnTo>
+                    <a:pt x="6893760" y="1202621"/>
+                  </a:lnTo>
+                  <a:lnTo>
+                    <a:pt x="6823415" y="1200774"/>
+                  </a:lnTo>
+                  <a:lnTo>
+                    <a:pt x="6753071" y="1198866"/>
+                  </a:lnTo>
+                  <a:lnTo>
+                    <a:pt x="6682726" y="1196892"/>
+                  </a:lnTo>
+                  <a:lnTo>
+                    <a:pt x="6612382" y="1194852"/>
+                  </a:lnTo>
+                  <a:lnTo>
+                    <a:pt x="6542037" y="1192743"/>
+                  </a:lnTo>
+                  <a:lnTo>
+                    <a:pt x="6471693" y="1190563"/>
+                  </a:lnTo>
+                  <a:lnTo>
+                    <a:pt x="6401348" y="1188309"/>
+                  </a:lnTo>
+                  <a:lnTo>
+                    <a:pt x="6331004" y="1185978"/>
+                  </a:lnTo>
+                  <a:lnTo>
+                    <a:pt x="6260659" y="1183569"/>
+                  </a:lnTo>
+                  <a:lnTo>
+                    <a:pt x="6190315" y="1181078"/>
+                  </a:lnTo>
+                  <a:lnTo>
+                    <a:pt x="6119970" y="1178503"/>
+                  </a:lnTo>
+                  <a:lnTo>
+                    <a:pt x="6049626" y="1175841"/>
+                  </a:lnTo>
+                  <a:lnTo>
+                    <a:pt x="5979281" y="1173089"/>
+                  </a:lnTo>
+                  <a:lnTo>
+                    <a:pt x="5908937" y="1170244"/>
+                  </a:lnTo>
+                  <a:lnTo>
+                    <a:pt x="5838592" y="1167303"/>
+                  </a:lnTo>
+                  <a:lnTo>
+                    <a:pt x="5768248" y="1164262"/>
+                  </a:lnTo>
+                  <a:lnTo>
+                    <a:pt x="5697903" y="1161118"/>
+                  </a:lnTo>
+                  <a:lnTo>
+                    <a:pt x="5627559" y="1157868"/>
+                  </a:lnTo>
+                  <a:lnTo>
+                    <a:pt x="5557214" y="1154508"/>
+                  </a:lnTo>
+                  <a:lnTo>
+                    <a:pt x="5486870" y="1151034"/>
+                  </a:lnTo>
+                  <a:lnTo>
+                    <a:pt x="5416525" y="1147443"/>
+                  </a:lnTo>
+                  <a:lnTo>
+                    <a:pt x="5346181" y="1143730"/>
+                  </a:lnTo>
+                  <a:lnTo>
+                    <a:pt x="5275836" y="1139892"/>
+                  </a:lnTo>
+                  <a:lnTo>
+                    <a:pt x="5205492" y="1135924"/>
+                  </a:lnTo>
+                  <a:lnTo>
+                    <a:pt x="5135147" y="1131821"/>
+                  </a:lnTo>
+                  <a:lnTo>
+                    <a:pt x="5064803" y="1127580"/>
+                  </a:lnTo>
+                  <a:lnTo>
+                    <a:pt x="4994458" y="1123195"/>
+                  </a:lnTo>
+                  <a:lnTo>
+                    <a:pt x="4924114" y="1118662"/>
+                  </a:lnTo>
+                  <a:lnTo>
+                    <a:pt x="4853769" y="1113976"/>
+                  </a:lnTo>
+                  <a:lnTo>
+                    <a:pt x="4783425" y="1109131"/>
+                  </a:lnTo>
+                  <a:lnTo>
+                    <a:pt x="4713080" y="1104123"/>
+                  </a:lnTo>
+                  <a:lnTo>
+                    <a:pt x="4642736" y="1098945"/>
+                  </a:lnTo>
+                  <a:lnTo>
+                    <a:pt x="4572391" y="1093591"/>
+                  </a:lnTo>
+                  <a:lnTo>
+                    <a:pt x="4502047" y="1088057"/>
+                  </a:lnTo>
+                  <a:lnTo>
+                    <a:pt x="4431702" y="1082336"/>
+                  </a:lnTo>
+                  <a:lnTo>
+                    <a:pt x="4361358" y="1076421"/>
+                  </a:lnTo>
+                  <a:lnTo>
+                    <a:pt x="4291013" y="1070306"/>
+                  </a:lnTo>
+                  <a:lnTo>
+                    <a:pt x="4220669" y="1063984"/>
+                  </a:lnTo>
+                  <a:lnTo>
+                    <a:pt x="4150324" y="1057448"/>
+                  </a:lnTo>
+                  <a:lnTo>
+                    <a:pt x="4079980" y="1050691"/>
+                  </a:lnTo>
+                  <a:lnTo>
+                    <a:pt x="4009635" y="1043705"/>
+                  </a:lnTo>
+                  <a:lnTo>
+                    <a:pt x="3939291" y="1036484"/>
+                  </a:lnTo>
+                  <a:lnTo>
+                    <a:pt x="3868946" y="1029017"/>
+                  </a:lnTo>
+                  <a:lnTo>
+                    <a:pt x="3798602" y="1021299"/>
+                  </a:lnTo>
+                  <a:lnTo>
+                    <a:pt x="3728257" y="1013319"/>
+                  </a:lnTo>
+                  <a:lnTo>
+                    <a:pt x="3657913" y="1005070"/>
+                  </a:lnTo>
+                  <a:lnTo>
+                    <a:pt x="3587569" y="996541"/>
+                  </a:lnTo>
+                  <a:lnTo>
+                    <a:pt x="3517224" y="987724"/>
+                  </a:lnTo>
+                  <a:lnTo>
+                    <a:pt x="3446880" y="978608"/>
+                  </a:lnTo>
+                  <a:lnTo>
+                    <a:pt x="3376535" y="969185"/>
+                  </a:lnTo>
+                  <a:lnTo>
+                    <a:pt x="3306191" y="959442"/>
+                  </a:lnTo>
+                  <a:lnTo>
+                    <a:pt x="3235846" y="958567"/>
+                  </a:lnTo>
+                  <a:lnTo>
+                    <a:pt x="3165502" y="959396"/>
+                  </a:lnTo>
+                  <a:lnTo>
+                    <a:pt x="3095157" y="960222"/>
+                  </a:lnTo>
+                  <a:lnTo>
+                    <a:pt x="3024813" y="961046"/>
+                  </a:lnTo>
+                  <a:lnTo>
+                    <a:pt x="2954468" y="961868"/>
+                  </a:lnTo>
+                  <a:lnTo>
+                    <a:pt x="2884124" y="962688"/>
+                  </a:lnTo>
+                  <a:lnTo>
+                    <a:pt x="2813779" y="963505"/>
+                  </a:lnTo>
+                  <a:lnTo>
+                    <a:pt x="2743435" y="964320"/>
+                  </a:lnTo>
+                  <a:lnTo>
+                    <a:pt x="2673090" y="965133"/>
+                  </a:lnTo>
+                  <a:lnTo>
+                    <a:pt x="2602746" y="965944"/>
+                  </a:lnTo>
+                  <a:lnTo>
+                    <a:pt x="2532401" y="966752"/>
+                  </a:lnTo>
+                  <a:lnTo>
+                    <a:pt x="2462057" y="967558"/>
+                  </a:lnTo>
+                  <a:lnTo>
+                    <a:pt x="2391712" y="968362"/>
+                  </a:lnTo>
+                  <a:lnTo>
+                    <a:pt x="2321368" y="969163"/>
+                  </a:lnTo>
+                  <a:lnTo>
+                    <a:pt x="2251023" y="969963"/>
+                  </a:lnTo>
+                  <a:lnTo>
+                    <a:pt x="2180679" y="970760"/>
+                  </a:lnTo>
+                  <a:lnTo>
+                    <a:pt x="2110334" y="971555"/>
+                  </a:lnTo>
+                  <a:lnTo>
+                    <a:pt x="2039990" y="972347"/>
+                  </a:lnTo>
+                  <a:lnTo>
+                    <a:pt x="1969645" y="973138"/>
+                  </a:lnTo>
+                  <a:lnTo>
+                    <a:pt x="1899301" y="973926"/>
+                  </a:lnTo>
+                  <a:lnTo>
+                    <a:pt x="1828956" y="974712"/>
+                  </a:lnTo>
+                  <a:lnTo>
+                    <a:pt x="1758612" y="975496"/>
+                  </a:lnTo>
+                  <a:lnTo>
+                    <a:pt x="1688267" y="976278"/>
+                  </a:lnTo>
+                  <a:lnTo>
+                    <a:pt x="1617923" y="977058"/>
+                  </a:lnTo>
+                  <a:lnTo>
+                    <a:pt x="1547578" y="977835"/>
+                  </a:lnTo>
+                  <a:lnTo>
+                    <a:pt x="1477234" y="978610"/>
+                  </a:lnTo>
+                  <a:lnTo>
+                    <a:pt x="1406889" y="979384"/>
+                  </a:lnTo>
+                  <a:lnTo>
+                    <a:pt x="1336545" y="980155"/>
+                  </a:lnTo>
+                  <a:lnTo>
+                    <a:pt x="1266200" y="980923"/>
+                  </a:lnTo>
+                  <a:lnTo>
+                    <a:pt x="1195856" y="981690"/>
+                  </a:lnTo>
+                  <a:lnTo>
+                    <a:pt x="1125511" y="982455"/>
+                  </a:lnTo>
+                  <a:lnTo>
+                    <a:pt x="1055167" y="983217"/>
+                  </a:lnTo>
+                  <a:lnTo>
+                    <a:pt x="984822" y="983977"/>
+                  </a:lnTo>
+                  <a:lnTo>
+                    <a:pt x="914478" y="984736"/>
+                  </a:lnTo>
+                  <a:lnTo>
+                    <a:pt x="844133" y="985492"/>
+                  </a:lnTo>
+                  <a:lnTo>
+                    <a:pt x="773789" y="986246"/>
+                  </a:lnTo>
+                  <a:lnTo>
+                    <a:pt x="703444" y="986998"/>
+                  </a:lnTo>
+                  <a:lnTo>
+                    <a:pt x="633100" y="987748"/>
+                  </a:lnTo>
+                  <a:lnTo>
+                    <a:pt x="562755" y="988495"/>
+                  </a:lnTo>
+                  <a:lnTo>
+                    <a:pt x="492411" y="989241"/>
+                  </a:lnTo>
+                  <a:lnTo>
+                    <a:pt x="422066" y="989985"/>
+                  </a:lnTo>
+                  <a:lnTo>
+                    <a:pt x="351722" y="990726"/>
+                  </a:lnTo>
+                  <a:lnTo>
+                    <a:pt x="281377" y="991466"/>
+                  </a:lnTo>
+                  <a:lnTo>
+                    <a:pt x="211033" y="992203"/>
+                  </a:lnTo>
+                  <a:lnTo>
+                    <a:pt x="140688" y="992939"/>
+                  </a:lnTo>
+                  <a:lnTo>
+                    <a:pt x="70344" y="993672"/>
+                  </a:lnTo>
+                  <a:lnTo>
+                    <a:pt x="0" y="994403"/>
+                  </a:lnTo>
+                  <a:close/>
+                </a:path>
+              </a:pathLst>
+            </a:custGeom>
+            <a:solidFill>
+              <a:srgbClr val="FF8C00">
+                <a:alpha val="20000"/>
+              </a:srgbClr>
+            </a:solidFill>
+          </p:spPr>
+          <p:txBody>
+            <a:bodyPr/>
+            <a:lstStyle/>
+            <a:p/>
+          </p:txBody>
+        </p:sp>
+        <p:sp>
+          <p:nvSpPr>
+            <p:cNvPr id="68" name="pl68"/>
+            <p:cNvSpPr/>
+            <p:nvPr/>
+          </p:nvSpPr>
+          <p:spPr>
+            <a:xfrm>
+              <a:off x="1496015" y="4336484"/>
+              <a:ext cx="6703401" cy="957736"/>
+            </a:xfrm>
+            <a:custGeom>
+              <a:avLst/>
+              <a:pathLst>
+                <a:path w="6703401" h="957736">
+                  <a:moveTo>
+                    <a:pt x="0" y="0"/>
+                  </a:moveTo>
+                  <a:lnTo>
+                    <a:pt x="20674" y="12375"/>
+                  </a:lnTo>
+                  <a:lnTo>
+                    <a:pt x="91019" y="53105"/>
+                  </a:lnTo>
+                  <a:lnTo>
+                    <a:pt x="161363" y="92502"/>
+                  </a:lnTo>
+                  <a:lnTo>
+                    <a:pt x="231708" y="130611"/>
+                  </a:lnTo>
+                  <a:lnTo>
+                    <a:pt x="302052" y="167472"/>
+                  </a:lnTo>
+                  <a:lnTo>
+                    <a:pt x="372397" y="203127"/>
+                  </a:lnTo>
+                  <a:lnTo>
+                    <a:pt x="442741" y="237616"/>
+                  </a:lnTo>
+                  <a:lnTo>
+                    <a:pt x="513086" y="270976"/>
+                  </a:lnTo>
+                  <a:lnTo>
+                    <a:pt x="583430" y="303245"/>
+                  </a:lnTo>
+                  <a:lnTo>
+                    <a:pt x="653774" y="334458"/>
+                  </a:lnTo>
+                  <a:lnTo>
+                    <a:pt x="724119" y="364649"/>
+                  </a:lnTo>
+                  <a:lnTo>
+                    <a:pt x="794463" y="393853"/>
+                  </a:lnTo>
+                  <a:lnTo>
+                    <a:pt x="864808" y="422101"/>
+                  </a:lnTo>
+                  <a:lnTo>
+                    <a:pt x="935152" y="449425"/>
+                  </a:lnTo>
+                  <a:lnTo>
+                    <a:pt x="1005497" y="475855"/>
+                  </a:lnTo>
+                  <a:lnTo>
+                    <a:pt x="1075841" y="501420"/>
+                  </a:lnTo>
+                  <a:lnTo>
+                    <a:pt x="1146186" y="526149"/>
+                  </a:lnTo>
+                  <a:lnTo>
+                    <a:pt x="1216530" y="550069"/>
+                  </a:lnTo>
+                  <a:lnTo>
+                    <a:pt x="1286875" y="573206"/>
+                  </a:lnTo>
+                  <a:lnTo>
+                    <a:pt x="1357219" y="595586"/>
+                  </a:lnTo>
+                  <a:lnTo>
+                    <a:pt x="1427564" y="617233"/>
+                  </a:lnTo>
+                  <a:lnTo>
+                    <a:pt x="1497908" y="638173"/>
+                  </a:lnTo>
+                  <a:lnTo>
+                    <a:pt x="1568253" y="658427"/>
+                  </a:lnTo>
+                  <a:lnTo>
+                    <a:pt x="1638597" y="678018"/>
+                  </a:lnTo>
+                  <a:lnTo>
+                    <a:pt x="1708942" y="696969"/>
+                  </a:lnTo>
+                  <a:lnTo>
+                    <a:pt x="1779286" y="715299"/>
+                  </a:lnTo>
+                  <a:lnTo>
+                    <a:pt x="1849631" y="733030"/>
+                  </a:lnTo>
+                  <a:lnTo>
+                    <a:pt x="1919975" y="750181"/>
+                  </a:lnTo>
+                  <a:lnTo>
+                    <a:pt x="1990320" y="766770"/>
+                  </a:lnTo>
+                  <a:lnTo>
+                    <a:pt x="2060664" y="782817"/>
+                  </a:lnTo>
+                  <a:lnTo>
+                    <a:pt x="2131009" y="798338"/>
+                  </a:lnTo>
+                  <a:lnTo>
+                    <a:pt x="2201353" y="813352"/>
+                  </a:lnTo>
+                  <a:lnTo>
+                    <a:pt x="2271698" y="827875"/>
+                  </a:lnTo>
+                  <a:lnTo>
+                    <a:pt x="2342042" y="841922"/>
+                  </a:lnTo>
+                  <a:lnTo>
+                    <a:pt x="2412387" y="855510"/>
+                  </a:lnTo>
+                  <a:lnTo>
+                    <a:pt x="2482731" y="868653"/>
+                  </a:lnTo>
+                  <a:lnTo>
+                    <a:pt x="2553076" y="881366"/>
+                  </a:lnTo>
+                  <a:lnTo>
+                    <a:pt x="2623420" y="893663"/>
+                  </a:lnTo>
+                  <a:lnTo>
+                    <a:pt x="2693765" y="905558"/>
+                  </a:lnTo>
+                  <a:lnTo>
+                    <a:pt x="2764109" y="917063"/>
+                  </a:lnTo>
+                  <a:lnTo>
+                    <a:pt x="2834454" y="928192"/>
+                  </a:lnTo>
+                  <a:lnTo>
+                    <a:pt x="2904798" y="938957"/>
+                  </a:lnTo>
+                  <a:lnTo>
+                    <a:pt x="2975143" y="949370"/>
+                  </a:lnTo>
+                  <a:lnTo>
+                    <a:pt x="3045487" y="957736"/>
+                  </a:lnTo>
+                  <a:lnTo>
+                    <a:pt x="3115832" y="956903"/>
+                  </a:lnTo>
+                  <a:lnTo>
+                    <a:pt x="3186176" y="956067"/>
+                  </a:lnTo>
+                  <a:lnTo>
+                    <a:pt x="3256521" y="955229"/>
+                  </a:lnTo>
+                  <a:lnTo>
+                    <a:pt x="3326865" y="954389"/>
+                  </a:lnTo>
+                  <a:lnTo>
+                    <a:pt x="3397210" y="953546"/>
+                  </a:lnTo>
+                  <a:lnTo>
+                    <a:pt x="3467554" y="952701"/>
+                  </a:lnTo>
+                  <a:lnTo>
+                    <a:pt x="3537899" y="951854"/>
+                  </a:lnTo>
+                  <a:lnTo>
+                    <a:pt x="3608243" y="951004"/>
+                  </a:lnTo>
+                  <a:lnTo>
+                    <a:pt x="3678588" y="950152"/>
+                  </a:lnTo>
+                  <a:lnTo>
+                    <a:pt x="3748932" y="949297"/>
+                  </a:lnTo>
+                  <a:lnTo>
+                    <a:pt x="3819277" y="948440"/>
+                  </a:lnTo>
+                  <a:lnTo>
+                    <a:pt x="3889621" y="947581"/>
+                  </a:lnTo>
+                  <a:lnTo>
+                    <a:pt x="3959966" y="946719"/>
+                  </a:lnTo>
+                  <a:lnTo>
+                    <a:pt x="4030310" y="945855"/>
+                  </a:lnTo>
+                  <a:lnTo>
+                    <a:pt x="4100655" y="944989"/>
+                  </a:lnTo>
+                  <a:lnTo>
+                    <a:pt x="4170999" y="944120"/>
+                  </a:lnTo>
+                  <a:lnTo>
+                    <a:pt x="4241344" y="943249"/>
+                  </a:lnTo>
+                  <a:lnTo>
+                    <a:pt x="4311688" y="942375"/>
+                  </a:lnTo>
+                  <a:lnTo>
+                    <a:pt x="4382032" y="941499"/>
+                  </a:lnTo>
+                  <a:lnTo>
+                    <a:pt x="4452377" y="940621"/>
+                  </a:lnTo>
+                  <a:lnTo>
+                    <a:pt x="4522721" y="939740"/>
+                  </a:lnTo>
+                  <a:lnTo>
+                    <a:pt x="4593066" y="938856"/>
+                  </a:lnTo>
+                  <a:lnTo>
+                    <a:pt x="4663410" y="937970"/>
+                  </a:lnTo>
+                  <a:lnTo>
+                    <a:pt x="4733755" y="937082"/>
+                  </a:lnTo>
+                  <a:lnTo>
+                    <a:pt x="4804099" y="936191"/>
+                  </a:lnTo>
+                  <a:lnTo>
+                    <a:pt x="4874444" y="935298"/>
+                  </a:lnTo>
+                  <a:lnTo>
+                    <a:pt x="4944788" y="934402"/>
+                  </a:lnTo>
+                  <a:lnTo>
+                    <a:pt x="5015133" y="933503"/>
+                  </a:lnTo>
+                  <a:lnTo>
+                    <a:pt x="5085477" y="932603"/>
+                  </a:lnTo>
+                  <a:lnTo>
+                    <a:pt x="5155822" y="931699"/>
+                  </a:lnTo>
+                  <a:lnTo>
+                    <a:pt x="5226166" y="930794"/>
+                  </a:lnTo>
+                  <a:lnTo>
+                    <a:pt x="5296511" y="929885"/>
+                  </a:lnTo>
+                  <a:lnTo>
+                    <a:pt x="5366855" y="928974"/>
+                  </a:lnTo>
+                  <a:lnTo>
+                    <a:pt x="5437200" y="928061"/>
+                  </a:lnTo>
+                  <a:lnTo>
+                    <a:pt x="5507544" y="927145"/>
+                  </a:lnTo>
+                  <a:lnTo>
+                    <a:pt x="5577889" y="926226"/>
+                  </a:lnTo>
+                  <a:lnTo>
+                    <a:pt x="5648233" y="925305"/>
+                  </a:lnTo>
+                  <a:lnTo>
+                    <a:pt x="5718578" y="924382"/>
+                  </a:lnTo>
+                  <a:lnTo>
+                    <a:pt x="5788922" y="923456"/>
+                  </a:lnTo>
+                  <a:lnTo>
+                    <a:pt x="5859267" y="922527"/>
+                  </a:lnTo>
+                  <a:lnTo>
+                    <a:pt x="5929611" y="921595"/>
+                  </a:lnTo>
+                  <a:lnTo>
+                    <a:pt x="5999956" y="920661"/>
+                  </a:lnTo>
+                  <a:lnTo>
+                    <a:pt x="6070300" y="919725"/>
+                  </a:lnTo>
+                  <a:lnTo>
+                    <a:pt x="6140645" y="918786"/>
+                  </a:lnTo>
+                  <a:lnTo>
+                    <a:pt x="6210989" y="917844"/>
+                  </a:lnTo>
+                  <a:lnTo>
+                    <a:pt x="6281334" y="916900"/>
+                  </a:lnTo>
+                  <a:lnTo>
+                    <a:pt x="6351678" y="915953"/>
+                  </a:lnTo>
+                  <a:lnTo>
+                    <a:pt x="6422023" y="915003"/>
+                  </a:lnTo>
+                  <a:lnTo>
+                    <a:pt x="6492367" y="914051"/>
+                  </a:lnTo>
+                  <a:lnTo>
+                    <a:pt x="6562712" y="913096"/>
+                  </a:lnTo>
+                  <a:lnTo>
+                    <a:pt x="6633056" y="912138"/>
+                  </a:lnTo>
+                  <a:lnTo>
+                    <a:pt x="6703401" y="911178"/>
+                  </a:lnTo>
+                </a:path>
+              </a:pathLst>
+            </a:custGeom>
+          </p:spPr>
+          <p:txBody>
+            <a:bodyPr/>
+            <a:lstStyle/>
+            <a:p/>
+          </p:txBody>
+        </p:sp>
+        <p:sp>
+          <p:nvSpPr>
+            <p:cNvPr id="69" name="pl69"/>
+            <p:cNvSpPr/>
+            <p:nvPr/>
+          </p:nvSpPr>
+          <p:spPr>
+            <a:xfrm>
+              <a:off x="1235312" y="5295052"/>
+              <a:ext cx="6964104" cy="245839"/>
+            </a:xfrm>
+            <a:custGeom>
+              <a:avLst/>
+              <a:pathLst>
+                <a:path w="6964104" h="245839">
+                  <a:moveTo>
+                    <a:pt x="6964104" y="245839"/>
+                  </a:moveTo>
+                  <a:lnTo>
+                    <a:pt x="6893760" y="244053"/>
+                  </a:lnTo>
+                  <a:lnTo>
+                    <a:pt x="6823415" y="242207"/>
+                  </a:lnTo>
+                  <a:lnTo>
+                    <a:pt x="6753071" y="240298"/>
+                  </a:lnTo>
+                  <a:lnTo>
+                    <a:pt x="6682726" y="238325"/>
+                  </a:lnTo>
+                  <a:lnTo>
+                    <a:pt x="6612382" y="236285"/>
+                  </a:lnTo>
+                  <a:lnTo>
+                    <a:pt x="6542037" y="234176"/>
+                  </a:lnTo>
+                  <a:lnTo>
+                    <a:pt x="6471693" y="231995"/>
+                  </a:lnTo>
+                  <a:lnTo>
+                    <a:pt x="6401348" y="229741"/>
+                  </a:lnTo>
+                  <a:lnTo>
+                    <a:pt x="6331004" y="227411"/>
+                  </a:lnTo>
+                  <a:lnTo>
+                    <a:pt x="6260659" y="225002"/>
+                  </a:lnTo>
+                  <a:lnTo>
+                    <a:pt x="6190315" y="222511"/>
+                  </a:lnTo>
+                  <a:lnTo>
+                    <a:pt x="6119970" y="219936"/>
+                  </a:lnTo>
+                  <a:lnTo>
+                    <a:pt x="6049626" y="217274"/>
+                  </a:lnTo>
+                  <a:lnTo>
+                    <a:pt x="5979281" y="214522"/>
+                  </a:lnTo>
+                  <a:lnTo>
+                    <a:pt x="5908937" y="211677"/>
+                  </a:lnTo>
+                  <a:lnTo>
+                    <a:pt x="5838592" y="208735"/>
+                  </a:lnTo>
+                  <a:lnTo>
+                    <a:pt x="5768248" y="205694"/>
+                  </a:lnTo>
+                  <a:lnTo>
+                    <a:pt x="5697903" y="202550"/>
+                  </a:lnTo>
+                  <a:lnTo>
+                    <a:pt x="5627559" y="199300"/>
+                  </a:lnTo>
+                  <a:lnTo>
+                    <a:pt x="5557214" y="195940"/>
+                  </a:lnTo>
+                  <a:lnTo>
+                    <a:pt x="5486870" y="192466"/>
+                  </a:lnTo>
+                  <a:lnTo>
+                    <a:pt x="5416525" y="188875"/>
+                  </a:lnTo>
+                  <a:lnTo>
+                    <a:pt x="5346181" y="185162"/>
+                  </a:lnTo>
+                  <a:lnTo>
+                    <a:pt x="5275836" y="181324"/>
+                  </a:lnTo>
+                  <a:lnTo>
+                    <a:pt x="5205492" y="177356"/>
+                  </a:lnTo>
+                  <a:lnTo>
+                    <a:pt x="5135147" y="173254"/>
+                  </a:lnTo>
+                  <a:lnTo>
+                    <a:pt x="5064803" y="169012"/>
+                  </a:lnTo>
+                  <a:lnTo>
+                    <a:pt x="4994458" y="164628"/>
+                  </a:lnTo>
+                  <a:lnTo>
+                    <a:pt x="4924114" y="160095"/>
+                  </a:lnTo>
+                  <a:lnTo>
+                    <a:pt x="4853769" y="155409"/>
+                  </a:lnTo>
+                  <a:lnTo>
+                    <a:pt x="4783425" y="150564"/>
+                  </a:lnTo>
+                  <a:lnTo>
+                    <a:pt x="4713080" y="145555"/>
+                  </a:lnTo>
+                  <a:lnTo>
+                    <a:pt x="4642736" y="140377"/>
+                  </a:lnTo>
+                  <a:lnTo>
+                    <a:pt x="4572391" y="135024"/>
+                  </a:lnTo>
+                  <a:lnTo>
+                    <a:pt x="4502047" y="129490"/>
+                  </a:lnTo>
+                  <a:lnTo>
+                    <a:pt x="4431702" y="123768"/>
+                  </a:lnTo>
+                  <a:lnTo>
+                    <a:pt x="4361358" y="117853"/>
+                  </a:lnTo>
+                  <a:lnTo>
+                    <a:pt x="4291013" y="111738"/>
+                  </a:lnTo>
+                  <a:lnTo>
+                    <a:pt x="4220669" y="105416"/>
+                  </a:lnTo>
+                  <a:lnTo>
+                    <a:pt x="4150324" y="98880"/>
+                  </a:lnTo>
+                  <a:lnTo>
+                    <a:pt x="4079980" y="92123"/>
+                  </a:lnTo>
+                  <a:lnTo>
+                    <a:pt x="4009635" y="85138"/>
+                  </a:lnTo>
+                  <a:lnTo>
+                    <a:pt x="3939291" y="77916"/>
+                  </a:lnTo>
+                  <a:lnTo>
+                    <a:pt x="3868946" y="70450"/>
+                  </a:lnTo>
+                  <a:lnTo>
+                    <a:pt x="3798602" y="62731"/>
+                  </a:lnTo>
+                  <a:lnTo>
+                    <a:pt x="3728257" y="54752"/>
+                  </a:lnTo>
+                  <a:lnTo>
+                    <a:pt x="3657913" y="46502"/>
+                  </a:lnTo>
+                  <a:lnTo>
+                    <a:pt x="3587569" y="37973"/>
+                  </a:lnTo>
+                  <a:lnTo>
+                    <a:pt x="3517224" y="29156"/>
+                  </a:lnTo>
+                  <a:lnTo>
+                    <a:pt x="3446880" y="20041"/>
+                  </a:lnTo>
+                  <a:lnTo>
+                    <a:pt x="3376535" y="10617"/>
+                  </a:lnTo>
+                  <a:lnTo>
+                    <a:pt x="3306191" y="875"/>
+                  </a:lnTo>
+                  <a:lnTo>
+                    <a:pt x="3235846" y="0"/>
+                  </a:lnTo>
+                  <a:lnTo>
+                    <a:pt x="3165502" y="828"/>
+                  </a:lnTo>
+                  <a:lnTo>
+                    <a:pt x="3095157" y="1655"/>
+                  </a:lnTo>
+                  <a:lnTo>
+                    <a:pt x="3024813" y="2479"/>
+                  </a:lnTo>
+                  <a:lnTo>
+                    <a:pt x="2954468" y="3301"/>
+                  </a:lnTo>
+                  <a:lnTo>
+                    <a:pt x="2884124" y="4120"/>
+                  </a:lnTo>
+                  <a:lnTo>
+                    <a:pt x="2813779" y="4938"/>
+                  </a:lnTo>
+                  <a:lnTo>
+                    <a:pt x="2743435" y="5753"/>
+                  </a:lnTo>
+                  <a:lnTo>
+                    <a:pt x="2673090" y="6565"/>
+                  </a:lnTo>
+                  <a:lnTo>
+                    <a:pt x="2602746" y="7376"/>
+                  </a:lnTo>
+                  <a:lnTo>
+                    <a:pt x="2532401" y="8184"/>
+                  </a:lnTo>
+                  <a:lnTo>
+                    <a:pt x="2462057" y="8990"/>
+                  </a:lnTo>
+                  <a:lnTo>
+                    <a:pt x="2391712" y="9794"/>
+                  </a:lnTo>
+                  <a:lnTo>
+                    <a:pt x="2321368" y="10596"/>
+                  </a:lnTo>
+                  <a:lnTo>
+                    <a:pt x="2251023" y="11395"/>
+                  </a:lnTo>
+                  <a:lnTo>
+                    <a:pt x="2180679" y="12192"/>
+                  </a:lnTo>
+                  <a:lnTo>
+                    <a:pt x="2110334" y="12987"/>
+                  </a:lnTo>
+                  <a:lnTo>
+                    <a:pt x="2039990" y="13780"/>
+                  </a:lnTo>
+                  <a:lnTo>
+                    <a:pt x="1969645" y="14570"/>
+                  </a:lnTo>
+                  <a:lnTo>
+                    <a:pt x="1899301" y="15359"/>
+                  </a:lnTo>
+                  <a:lnTo>
+                    <a:pt x="1828956" y="16145"/>
+                  </a:lnTo>
+                  <a:lnTo>
+                    <a:pt x="1758612" y="16929"/>
+                  </a:lnTo>
+                  <a:lnTo>
+                    <a:pt x="1688267" y="17710"/>
+                  </a:lnTo>
+                  <a:lnTo>
+                    <a:pt x="1617923" y="18490"/>
+                  </a:lnTo>
+                  <a:lnTo>
+                    <a:pt x="1547578" y="19268"/>
+                  </a:lnTo>
+                  <a:lnTo>
+                    <a:pt x="1477234" y="20043"/>
+                  </a:lnTo>
+                  <a:lnTo>
+                    <a:pt x="1406889" y="20816"/>
+                  </a:lnTo>
+                  <a:lnTo>
+                    <a:pt x="1336545" y="21587"/>
+                  </a:lnTo>
+                  <a:lnTo>
+                    <a:pt x="1266200" y="22356"/>
+                  </a:lnTo>
+                  <a:lnTo>
+                    <a:pt x="1195856" y="23122"/>
+                  </a:lnTo>
+                  <a:lnTo>
+                    <a:pt x="1125511" y="23887"/>
+                  </a:lnTo>
+                  <a:lnTo>
+                    <a:pt x="1055167" y="24650"/>
+                  </a:lnTo>
+                  <a:lnTo>
+                    <a:pt x="984822" y="25410"/>
+                  </a:lnTo>
+                  <a:lnTo>
+                    <a:pt x="914478" y="26168"/>
+                  </a:lnTo>
+                  <a:lnTo>
+                    <a:pt x="844133" y="26924"/>
+                  </a:lnTo>
+                  <a:lnTo>
+                    <a:pt x="773789" y="27678"/>
+                  </a:lnTo>
+                  <a:lnTo>
+                    <a:pt x="703444" y="28430"/>
+                  </a:lnTo>
+                  <a:lnTo>
+                    <a:pt x="633100" y="29180"/>
+                  </a:lnTo>
+                  <a:lnTo>
+                    <a:pt x="562755" y="29928"/>
+                  </a:lnTo>
+                  <a:lnTo>
+                    <a:pt x="492411" y="30674"/>
+                  </a:lnTo>
+                  <a:lnTo>
+                    <a:pt x="422066" y="31417"/>
+                  </a:lnTo>
+                  <a:lnTo>
+                    <a:pt x="351722" y="32159"/>
+                  </a:lnTo>
+                  <a:lnTo>
+                    <a:pt x="281377" y="32898"/>
+                  </a:lnTo>
+                  <a:lnTo>
+                    <a:pt x="211033" y="33636"/>
+                  </a:lnTo>
+                  <a:lnTo>
+                    <a:pt x="140688" y="34371"/>
+                  </a:lnTo>
+                  <a:lnTo>
+                    <a:pt x="70344" y="35104"/>
+                  </a:lnTo>
+                  <a:lnTo>
+                    <a:pt x="0" y="35836"/>
+                  </a:lnTo>
+                </a:path>
+              </a:pathLst>
+            </a:custGeom>
+          </p:spPr>
+          <p:txBody>
+            <a:bodyPr/>
+            <a:lstStyle/>
+            <a:p/>
+          </p:txBody>
+        </p:sp>
+        <p:sp>
+          <p:nvSpPr>
+            <p:cNvPr id="70" name="pl70"/>
+            <p:cNvSpPr/>
+            <p:nvPr/>
+          </p:nvSpPr>
+          <p:spPr>
+            <a:xfrm>
+              <a:off x="1235312" y="4982377"/>
+              <a:ext cx="6964104" cy="476148"/>
+            </a:xfrm>
+            <a:custGeom>
+              <a:avLst/>
+              <a:pathLst>
+                <a:path w="6964104" h="476148">
+                  <a:moveTo>
+                    <a:pt x="0" y="0"/>
+                  </a:moveTo>
+                  <a:lnTo>
+                    <a:pt x="70344" y="9248"/>
+                  </a:lnTo>
+                  <a:lnTo>
+                    <a:pt x="140688" y="18356"/>
+                  </a:lnTo>
+                  <a:lnTo>
+                    <a:pt x="211033" y="27326"/>
+                  </a:lnTo>
+                  <a:lnTo>
+                    <a:pt x="281377" y="36161"/>
+                  </a:lnTo>
+                  <a:lnTo>
+                    <a:pt x="351722" y="44862"/>
+                  </a:lnTo>
+                  <a:lnTo>
+                    <a:pt x="422066" y="53431"/>
+                  </a:lnTo>
+                  <a:lnTo>
+                    <a:pt x="492411" y="61871"/>
+                  </a:lnTo>
+                  <a:lnTo>
+                    <a:pt x="562755" y="70183"/>
+                  </a:lnTo>
+                  <a:lnTo>
+                    <a:pt x="633100" y="78369"/>
+                  </a:lnTo>
+                  <a:lnTo>
+                    <a:pt x="703444" y="86431"/>
+                  </a:lnTo>
+                  <a:lnTo>
+                    <a:pt x="773789" y="94372"/>
+                  </a:lnTo>
+                  <a:lnTo>
+                    <a:pt x="844133" y="102192"/>
+                  </a:lnTo>
+                  <a:lnTo>
+                    <a:pt x="914478" y="109894"/>
+                  </a:lnTo>
+                  <a:lnTo>
+                    <a:pt x="984822" y="117480"/>
+                  </a:lnTo>
+                  <a:lnTo>
+                    <a:pt x="1055167" y="124950"/>
+                  </a:lnTo>
+                  <a:lnTo>
+                    <a:pt x="1125511" y="132308"/>
+                  </a:lnTo>
+                  <a:lnTo>
+                    <a:pt x="1195856" y="139554"/>
+                  </a:lnTo>
+                  <a:lnTo>
+                    <a:pt x="1266200" y="146691"/>
+                  </a:lnTo>
+                  <a:lnTo>
+                    <a:pt x="1336545" y="153720"/>
+                  </a:lnTo>
+                  <a:lnTo>
+                    <a:pt x="1406889" y="160643"/>
+                  </a:lnTo>
+                  <a:lnTo>
+                    <a:pt x="1477234" y="167460"/>
+                  </a:lnTo>
+                  <a:lnTo>
+                    <a:pt x="1547578" y="174175"/>
+                  </a:lnTo>
+                  <a:lnTo>
+                    <a:pt x="1617923" y="180788"/>
+                  </a:lnTo>
+                  <a:lnTo>
+                    <a:pt x="1688267" y="187301"/>
+                  </a:lnTo>
+                  <a:lnTo>
+                    <a:pt x="1758612" y="193716"/>
+                  </a:lnTo>
+                  <a:lnTo>
+                    <a:pt x="1828956" y="200033"/>
+                  </a:lnTo>
+                  <a:lnTo>
+                    <a:pt x="1899301" y="206255"/>
+                  </a:lnTo>
+                  <a:lnTo>
+                    <a:pt x="1969645" y="212383"/>
+                  </a:lnTo>
+                  <a:lnTo>
+                    <a:pt x="2039990" y="218418"/>
+                  </a:lnTo>
+                  <a:lnTo>
+                    <a:pt x="2110334" y="224361"/>
+                  </a:lnTo>
+                  <a:lnTo>
+                    <a:pt x="2180679" y="230215"/>
+                  </a:lnTo>
+                  <a:lnTo>
+                    <a:pt x="2251023" y="235980"/>
+                  </a:lnTo>
+                  <a:lnTo>
+                    <a:pt x="2321368" y="241659"/>
+                  </a:lnTo>
+                  <a:lnTo>
+                    <a:pt x="2391712" y="247251"/>
+                  </a:lnTo>
+                  <a:lnTo>
+                    <a:pt x="2462057" y="252758"/>
+                  </a:lnTo>
+                  <a:lnTo>
+                    <a:pt x="2532401" y="258182"/>
+                  </a:lnTo>
+                  <a:lnTo>
+                    <a:pt x="2602746" y="263525"/>
+                  </a:lnTo>
+                  <a:lnTo>
+                    <a:pt x="2673090" y="268786"/>
+                  </a:lnTo>
+                  <a:lnTo>
+                    <a:pt x="2743435" y="273968"/>
+                  </a:lnTo>
+                  <a:lnTo>
+                    <a:pt x="2813779" y="279071"/>
+                  </a:lnTo>
+                  <a:lnTo>
+                    <a:pt x="2884124" y="284097"/>
+                  </a:lnTo>
+                  <a:lnTo>
+                    <a:pt x="2954468" y="289047"/>
+                  </a:lnTo>
+                  <a:lnTo>
+                    <a:pt x="3024813" y="293923"/>
+                  </a:lnTo>
+                  <a:lnTo>
+                    <a:pt x="3095157" y="298724"/>
+                  </a:lnTo>
+                  <a:lnTo>
+                    <a:pt x="3165502" y="303453"/>
+                  </a:lnTo>
+                  <a:lnTo>
+                    <a:pt x="3235846" y="308110"/>
+                  </a:lnTo>
+                  <a:lnTo>
+                    <a:pt x="3306191" y="312697"/>
+                  </a:lnTo>
+                  <a:lnTo>
+                    <a:pt x="3376535" y="317215"/>
+                  </a:lnTo>
+                  <a:lnTo>
+                    <a:pt x="3446880" y="321664"/>
+                  </a:lnTo>
+                  <a:lnTo>
+                    <a:pt x="3517224" y="326045"/>
+                  </a:lnTo>
+                  <a:lnTo>
+                    <a:pt x="3587569" y="330361"/>
+                  </a:lnTo>
+                  <a:lnTo>
+                    <a:pt x="3657913" y="334611"/>
+                  </a:lnTo>
+                  <a:lnTo>
+                    <a:pt x="3728257" y="338797"/>
+                  </a:lnTo>
+                  <a:lnTo>
+                    <a:pt x="3798602" y="342920"/>
+                  </a:lnTo>
+                  <a:lnTo>
+                    <a:pt x="3868946" y="346980"/>
+                  </a:lnTo>
+                  <a:lnTo>
+                    <a:pt x="3939291" y="350979"/>
+                  </a:lnTo>
+                  <a:lnTo>
+                    <a:pt x="4009635" y="354917"/>
+                  </a:lnTo>
+                  <a:lnTo>
+                    <a:pt x="4079980" y="358796"/>
+                  </a:lnTo>
+                  <a:lnTo>
+                    <a:pt x="4150324" y="362616"/>
+                  </a:lnTo>
+                  <a:lnTo>
+                    <a:pt x="4220669" y="366378"/>
+                  </a:lnTo>
+                  <a:lnTo>
+                    <a:pt x="4291013" y="370084"/>
+                  </a:lnTo>
+                  <a:lnTo>
+                    <a:pt x="4361358" y="373733"/>
+                  </a:lnTo>
+                  <a:lnTo>
+                    <a:pt x="4431702" y="377327"/>
+                  </a:lnTo>
+                  <a:lnTo>
+                    <a:pt x="4502047" y="380867"/>
+                  </a:lnTo>
+                  <a:lnTo>
+                    <a:pt x="4572391" y="384353"/>
+                  </a:lnTo>
+                  <a:lnTo>
+                    <a:pt x="4642736" y="387786"/>
+                  </a:lnTo>
+                  <a:lnTo>
+                    <a:pt x="4713080" y="391168"/>
+                  </a:lnTo>
+                  <a:lnTo>
+                    <a:pt x="4783425" y="394498"/>
+                  </a:lnTo>
+                  <a:lnTo>
+                    <a:pt x="4853769" y="397778"/>
+                  </a:lnTo>
+                  <a:lnTo>
+                    <a:pt x="4924114" y="401008"/>
+                  </a:lnTo>
+                  <a:lnTo>
+                    <a:pt x="4994458" y="404190"/>
+                  </a:lnTo>
+                  <a:lnTo>
+                    <a:pt x="5064803" y="407323"/>
+                  </a:lnTo>
+                  <a:lnTo>
+                    <a:pt x="5135147" y="410409"/>
+                  </a:lnTo>
+                  <a:lnTo>
+                    <a:pt x="5205492" y="413448"/>
+                  </a:lnTo>
+                  <a:lnTo>
+                    <a:pt x="5275836" y="416442"/>
+                  </a:lnTo>
+                  <a:lnTo>
+                    <a:pt x="5346181" y="419390"/>
+                  </a:lnTo>
+                  <a:lnTo>
+                    <a:pt x="5416525" y="422293"/>
+                  </a:lnTo>
+                  <a:lnTo>
+                    <a:pt x="5486870" y="425153"/>
+                  </a:lnTo>
+                  <a:lnTo>
+                    <a:pt x="5557214" y="427969"/>
+                  </a:lnTo>
+                  <a:lnTo>
+                    <a:pt x="5627559" y="430742"/>
+                  </a:lnTo>
+                  <a:lnTo>
+                    <a:pt x="5697903" y="433474"/>
+                  </a:lnTo>
+                  <a:lnTo>
+                    <a:pt x="5768248" y="436164"/>
+                  </a:lnTo>
+                  <a:lnTo>
+                    <a:pt x="5838592" y="438814"/>
+                  </a:lnTo>
+                  <a:lnTo>
+                    <a:pt x="5908937" y="441423"/>
+                  </a:lnTo>
+                  <a:lnTo>
+                    <a:pt x="5979281" y="443994"/>
+                  </a:lnTo>
+                  <a:lnTo>
+                    <a:pt x="6049626" y="446525"/>
+                  </a:lnTo>
+                  <a:lnTo>
+                    <a:pt x="6119970" y="449018"/>
+                  </a:lnTo>
+                  <a:lnTo>
+                    <a:pt x="6190315" y="451473"/>
+                  </a:lnTo>
+                  <a:lnTo>
+                    <a:pt x="6260659" y="453891"/>
+                  </a:lnTo>
+                  <a:lnTo>
+                    <a:pt x="6331004" y="456272"/>
+                  </a:lnTo>
+                  <a:lnTo>
+                    <a:pt x="6401348" y="458618"/>
+                  </a:lnTo>
+                  <a:lnTo>
+                    <a:pt x="6471693" y="460928"/>
+                  </a:lnTo>
+                  <a:lnTo>
+                    <a:pt x="6542037" y="463203"/>
+                  </a:lnTo>
+                  <a:lnTo>
+                    <a:pt x="6612382" y="465443"/>
+                  </a:lnTo>
+                  <a:lnTo>
+                    <a:pt x="6682726" y="467650"/>
+                  </a:lnTo>
+                  <a:lnTo>
+                    <a:pt x="6753071" y="469823"/>
+                  </a:lnTo>
+                  <a:lnTo>
+                    <a:pt x="6823415" y="471964"/>
+                  </a:lnTo>
+                  <a:lnTo>
+                    <a:pt x="6893760" y="474072"/>
+                  </a:lnTo>
+                  <a:lnTo>
+                    <a:pt x="6964104" y="476148"/>
+                  </a:lnTo>
+                </a:path>
+              </a:pathLst>
+            </a:custGeom>
+            <a:ln w="27101" cap="flat">
+              <a:solidFill>
+                <a:srgbClr val="FF8C00">
+                  <a:alpha val="100000"/>
+                </a:srgbClr>
+              </a:solidFill>
+              <a:prstDash val="solid"/>
+              <a:round/>
+            </a:ln>
+          </p:spPr>
+          <p:txBody>
+            <a:bodyPr/>
+            <a:lstStyle/>
+            <a:p/>
+          </p:txBody>
+        </p:sp>
+        <p:sp>
+          <p:nvSpPr>
+            <p:cNvPr id="71" name="pl71"/>
+            <p:cNvSpPr/>
+            <p:nvPr/>
+          </p:nvSpPr>
+          <p:spPr>
+            <a:xfrm>
+              <a:off x="887106" y="5294352"/>
+              <a:ext cx="7660515" cy="0"/>
+            </a:xfrm>
+            <a:custGeom>
+              <a:avLst/>
+              <a:pathLst>
+                <a:path w="7660515" h="0">
+                  <a:moveTo>
+                    <a:pt x="0" y="0"/>
+                  </a:moveTo>
+                  <a:lnTo>
+                    <a:pt x="7660515" y="0"/>
+                  </a:lnTo>
+                  <a:lnTo>
+                    <a:pt x="7660515" y="0"/>
+                  </a:lnTo>
+                </a:path>
+              </a:pathLst>
+            </a:custGeom>
+            <a:ln w="13550" cap="flat">
+              <a:solidFill>
+                <a:srgbClr val="7F7F7F">
+                  <a:alpha val="100000"/>
+                </a:srgbClr>
+              </a:solidFill>
+              <a:prstDash val="dash"/>
+              <a:round/>
+            </a:ln>
+          </p:spPr>
+          <p:txBody>
+            <a:bodyPr/>
+            <a:lstStyle/>
+            <a:p/>
+          </p:txBody>
+        </p:sp>
+        <p:sp>
+          <p:nvSpPr>
+            <p:cNvPr id="72" name="pl72"/>
+            <p:cNvSpPr/>
+            <p:nvPr/>
+          </p:nvSpPr>
+          <p:spPr>
+            <a:xfrm>
+              <a:off x="4530353" y="4336484"/>
+              <a:ext cx="0" cy="1317069"/>
+            </a:xfrm>
+            <a:custGeom>
+              <a:avLst/>
+              <a:pathLst>
+                <a:path w="0" h="1317069">
+                  <a:moveTo>
+                    <a:pt x="0" y="1317069"/>
+                  </a:moveTo>
+                  <a:lnTo>
+                    <a:pt x="0" y="0"/>
+                  </a:lnTo>
+                  <a:lnTo>
+                    <a:pt x="0" y="0"/>
+                  </a:lnTo>
+                </a:path>
+              </a:pathLst>
+            </a:custGeom>
+            <a:ln w="13550" cap="flat">
+              <a:solidFill>
+                <a:srgbClr val="666666">
+                  <a:alpha val="100000"/>
+                </a:srgbClr>
+              </a:solidFill>
+              <a:prstDash val="dot"/>
+              <a:round/>
+            </a:ln>
+          </p:spPr>
+          <p:txBody>
+            <a:bodyPr/>
+            <a:lstStyle/>
+            <a:p/>
+          </p:txBody>
+        </p:sp>
+        <p:sp>
+          <p:nvSpPr>
+            <p:cNvPr id="73" name="tx73"/>
+            <p:cNvSpPr/>
+            <p:nvPr/>
+          </p:nvSpPr>
+          <p:spPr>
+            <a:xfrm>
+              <a:off x="762297" y="5553636"/>
+              <a:ext cx="62179" cy="80101"/>
+            </a:xfrm>
+            <a:prstGeom prst="rect">
+              <a:avLst/>
+            </a:prstGeom>
+            <a:noFill/>
+          </p:spPr>
+          <p:txBody>
+            <a:bodyPr lIns="0" rIns="0" tIns="0" bIns="0" anchorCtr="1" anchor="ctr" wrap="none"/>
+            <a:lstStyle/>
+            <a:p>
+              <a:pPr algn="l" marL="0" marR="0" indent="0">
+                <a:lnSpc>
+                  <a:spcPts val="880"/>
+                </a:lnSpc>
+                <a:spcBef>
+                  <a:spcPts val="0"/>
+                </a:spcBef>
+                <a:spcAft>
+                  <a:spcPts val="0"/>
+                </a:spcAft>
+              </a:pPr>
+              <a:r>
+                <a:rPr sz="880">
+                  <a:solidFill>
+                    <a:srgbClr val="4D4D4D">
+                      <a:alpha val="100000"/>
+                    </a:srgbClr>
+                  </a:solidFill>
+                  <a:latin typeface="Helvetica"/>
+                  <a:cs typeface="Helvetica"/>
+                </a:rPr>
+                <a:t>0</a:t>
+              </a:r>
+            </a:p>
+          </p:txBody>
+        </p:sp>
+        <p:sp>
+          <p:nvSpPr>
+            <p:cNvPr id="74" name="tx74"/>
+            <p:cNvSpPr/>
+            <p:nvPr/>
+          </p:nvSpPr>
+          <p:spPr>
+            <a:xfrm>
+              <a:off x="762297" y="5254302"/>
+              <a:ext cx="62179" cy="80101"/>
+            </a:xfrm>
+            <a:prstGeom prst="rect">
+              <a:avLst/>
+            </a:prstGeom>
+            <a:noFill/>
+          </p:spPr>
+          <p:txBody>
+            <a:bodyPr lIns="0" rIns="0" tIns="0" bIns="0" anchorCtr="1" anchor="ctr" wrap="none"/>
+            <a:lstStyle/>
+            <a:p>
+              <a:pPr algn="l" marL="0" marR="0" indent="0">
+                <a:lnSpc>
+                  <a:spcPts val="880"/>
+                </a:lnSpc>
+                <a:spcBef>
+                  <a:spcPts val="0"/>
+                </a:spcBef>
+                <a:spcAft>
+                  <a:spcPts val="0"/>
+                </a:spcAft>
+              </a:pPr>
+              <a:r>
+                <a:rPr sz="880">
+                  <a:solidFill>
+                    <a:srgbClr val="4D4D4D">
+                      <a:alpha val="100000"/>
+                    </a:srgbClr>
+                  </a:solidFill>
+                  <a:latin typeface="Helvetica"/>
+                  <a:cs typeface="Helvetica"/>
+                </a:rPr>
+                <a:t>1</a:t>
+              </a:r>
+            </a:p>
+          </p:txBody>
+        </p:sp>
+        <p:sp>
+          <p:nvSpPr>
+            <p:cNvPr id="75" name="tx75"/>
+            <p:cNvSpPr/>
+            <p:nvPr/>
+          </p:nvSpPr>
+          <p:spPr>
+            <a:xfrm>
+              <a:off x="762297" y="4954968"/>
+              <a:ext cx="62179" cy="80101"/>
+            </a:xfrm>
+            <a:prstGeom prst="rect">
+              <a:avLst/>
+            </a:prstGeom>
+            <a:noFill/>
+          </p:spPr>
+          <p:txBody>
+            <a:bodyPr lIns="0" rIns="0" tIns="0" bIns="0" anchorCtr="1" anchor="ctr" wrap="none"/>
+            <a:lstStyle/>
+            <a:p>
+              <a:pPr algn="l" marL="0" marR="0" indent="0">
+                <a:lnSpc>
+                  <a:spcPts val="880"/>
+                </a:lnSpc>
+                <a:spcBef>
+                  <a:spcPts val="0"/>
+                </a:spcBef>
+                <a:spcAft>
+                  <a:spcPts val="0"/>
+                </a:spcAft>
+              </a:pPr>
+              <a:r>
+                <a:rPr sz="880">
+                  <a:solidFill>
+                    <a:srgbClr val="4D4D4D">
+                      <a:alpha val="100000"/>
+                    </a:srgbClr>
+                  </a:solidFill>
+                  <a:latin typeface="Helvetica"/>
+                  <a:cs typeface="Helvetica"/>
+                </a:rPr>
+                <a:t>2</a:t>
+              </a:r>
+            </a:p>
+          </p:txBody>
+        </p:sp>
+        <p:sp>
+          <p:nvSpPr>
+            <p:cNvPr id="76" name="tx76"/>
+            <p:cNvSpPr/>
+            <p:nvPr/>
+          </p:nvSpPr>
+          <p:spPr>
+            <a:xfrm>
+              <a:off x="762297" y="4655634"/>
+              <a:ext cx="62179" cy="80101"/>
+            </a:xfrm>
+            <a:prstGeom prst="rect">
+              <a:avLst/>
+            </a:prstGeom>
+            <a:noFill/>
+          </p:spPr>
+          <p:txBody>
+            <a:bodyPr lIns="0" rIns="0" tIns="0" bIns="0" anchorCtr="1" anchor="ctr" wrap="none"/>
+            <a:lstStyle/>
+            <a:p>
+              <a:pPr algn="l" marL="0" marR="0" indent="0">
+                <a:lnSpc>
+                  <a:spcPts val="880"/>
+                </a:lnSpc>
+                <a:spcBef>
+                  <a:spcPts val="0"/>
+                </a:spcBef>
+                <a:spcAft>
+                  <a:spcPts val="0"/>
+                </a:spcAft>
+              </a:pPr>
+              <a:r>
+                <a:rPr sz="880">
+                  <a:solidFill>
+                    <a:srgbClr val="4D4D4D">
+                      <a:alpha val="100000"/>
+                    </a:srgbClr>
+                  </a:solidFill>
+                  <a:latin typeface="Helvetica"/>
+                  <a:cs typeface="Helvetica"/>
+                </a:rPr>
+                <a:t>3</a:t>
+              </a:r>
+            </a:p>
+          </p:txBody>
+        </p:sp>
+        <p:sp>
+          <p:nvSpPr>
+            <p:cNvPr id="77" name="tx77"/>
+            <p:cNvSpPr/>
+            <p:nvPr/>
+          </p:nvSpPr>
+          <p:spPr>
+            <a:xfrm>
+              <a:off x="762297" y="4356300"/>
+              <a:ext cx="62179" cy="80101"/>
+            </a:xfrm>
+            <a:prstGeom prst="rect">
+              <a:avLst/>
+            </a:prstGeom>
+            <a:noFill/>
+          </p:spPr>
+          <p:txBody>
+            <a:bodyPr lIns="0" rIns="0" tIns="0" bIns="0" anchorCtr="1" anchor="ctr" wrap="none"/>
+            <a:lstStyle/>
+            <a:p>
+              <a:pPr algn="l" marL="0" marR="0" indent="0">
+                <a:lnSpc>
+                  <a:spcPts val="880"/>
+                </a:lnSpc>
+                <a:spcBef>
+                  <a:spcPts val="0"/>
+                </a:spcBef>
+                <a:spcAft>
+                  <a:spcPts val="0"/>
+                </a:spcAft>
+              </a:pPr>
+              <a:r>
+                <a:rPr sz="880">
+                  <a:solidFill>
+                    <a:srgbClr val="4D4D4D">
+                      <a:alpha val="100000"/>
+                    </a:srgbClr>
+                  </a:solidFill>
+                  <a:latin typeface="Helvetica"/>
+                  <a:cs typeface="Helvetica"/>
+                </a:rPr>
+                <a:t>4</a:t>
+              </a:r>
+            </a:p>
+          </p:txBody>
+        </p:sp>
+        <p:sp>
+          <p:nvSpPr>
+            <p:cNvPr id="78" name="tx78"/>
+            <p:cNvSpPr/>
+            <p:nvPr/>
+          </p:nvSpPr>
+          <p:spPr>
+            <a:xfrm>
+              <a:off x="1241001" y="5716183"/>
+              <a:ext cx="161574" cy="80101"/>
+            </a:xfrm>
+            <a:prstGeom prst="rect">
+              <a:avLst/>
+            </a:prstGeom>
+            <a:noFill/>
+          </p:spPr>
+          <p:txBody>
+            <a:bodyPr lIns="0" rIns="0" tIns="0" bIns="0" anchorCtr="1" anchor="ctr" wrap="none"/>
+            <a:lstStyle/>
+            <a:p>
+              <a:pPr algn="l" marL="0" marR="0" indent="0">
+                <a:lnSpc>
+                  <a:spcPts val="880"/>
+                </a:lnSpc>
+                <a:spcBef>
+                  <a:spcPts val="0"/>
+                </a:spcBef>
+                <a:spcAft>
+                  <a:spcPts val="0"/>
+                </a:spcAft>
+              </a:pPr>
+              <a:r>
+                <a:rPr sz="880">
+                  <a:solidFill>
+                    <a:srgbClr val="4D4D4D">
+                      <a:alpha val="100000"/>
+                    </a:srgbClr>
+                  </a:solidFill>
+                  <a:latin typeface="Helvetica"/>
+                  <a:cs typeface="Helvetica"/>
+                </a:rPr>
+                <a:t>-40</a:t>
+              </a:r>
+            </a:p>
+          </p:txBody>
+        </p:sp>
+        <p:sp>
+          <p:nvSpPr>
+            <p:cNvPr id="79" name="tx79"/>
+            <p:cNvSpPr/>
+            <p:nvPr/>
+          </p:nvSpPr>
+          <p:spPr>
+            <a:xfrm>
+              <a:off x="2054602" y="5716183"/>
+              <a:ext cx="161574" cy="80101"/>
+            </a:xfrm>
+            <a:prstGeom prst="rect">
+              <a:avLst/>
+            </a:prstGeom>
+            <a:noFill/>
+          </p:spPr>
+          <p:txBody>
+            <a:bodyPr lIns="0" rIns="0" tIns="0" bIns="0" anchorCtr="1" anchor="ctr" wrap="none"/>
+            <a:lstStyle/>
+            <a:p>
+              <a:pPr algn="l" marL="0" marR="0" indent="0">
+                <a:lnSpc>
+                  <a:spcPts val="880"/>
+                </a:lnSpc>
+                <a:spcBef>
+                  <a:spcPts val="0"/>
+                </a:spcBef>
+                <a:spcAft>
+                  <a:spcPts val="0"/>
+                </a:spcAft>
+              </a:pPr>
+              <a:r>
+                <a:rPr sz="880">
+                  <a:solidFill>
+                    <a:srgbClr val="4D4D4D">
+                      <a:alpha val="100000"/>
+                    </a:srgbClr>
+                  </a:solidFill>
+                  <a:latin typeface="Helvetica"/>
+                  <a:cs typeface="Helvetica"/>
+                </a:rPr>
+                <a:t>-30</a:t>
+              </a:r>
+            </a:p>
+          </p:txBody>
+        </p:sp>
+        <p:sp>
+          <p:nvSpPr>
+            <p:cNvPr id="80" name="tx80"/>
+            <p:cNvSpPr/>
+            <p:nvPr/>
+          </p:nvSpPr>
+          <p:spPr>
+            <a:xfrm>
+              <a:off x="2868203" y="5716183"/>
+              <a:ext cx="161574" cy="80101"/>
+            </a:xfrm>
+            <a:prstGeom prst="rect">
+              <a:avLst/>
+            </a:prstGeom>
+            <a:noFill/>
+          </p:spPr>
+          <p:txBody>
+            <a:bodyPr lIns="0" rIns="0" tIns="0" bIns="0" anchorCtr="1" anchor="ctr" wrap="none"/>
+            <a:lstStyle/>
+            <a:p>
+              <a:pPr algn="l" marL="0" marR="0" indent="0">
+                <a:lnSpc>
+                  <a:spcPts val="880"/>
+                </a:lnSpc>
+                <a:spcBef>
+                  <a:spcPts val="0"/>
+                </a:spcBef>
+                <a:spcAft>
+                  <a:spcPts val="0"/>
+                </a:spcAft>
+              </a:pPr>
+              <a:r>
+                <a:rPr sz="880">
+                  <a:solidFill>
+                    <a:srgbClr val="4D4D4D">
+                      <a:alpha val="100000"/>
+                    </a:srgbClr>
+                  </a:solidFill>
+                  <a:latin typeface="Helvetica"/>
+                  <a:cs typeface="Helvetica"/>
+                </a:rPr>
+                <a:t>-20</a:t>
+              </a:r>
+            </a:p>
+          </p:txBody>
+        </p:sp>
+        <p:sp>
+          <p:nvSpPr>
+            <p:cNvPr id="81" name="tx81"/>
+            <p:cNvSpPr/>
+            <p:nvPr/>
+          </p:nvSpPr>
+          <p:spPr>
+            <a:xfrm>
+              <a:off x="3681805" y="5716183"/>
+              <a:ext cx="161574" cy="80101"/>
+            </a:xfrm>
+            <a:prstGeom prst="rect">
+              <a:avLst/>
+            </a:prstGeom>
+            <a:noFill/>
+          </p:spPr>
+          <p:txBody>
+            <a:bodyPr lIns="0" rIns="0" tIns="0" bIns="0" anchorCtr="1" anchor="ctr" wrap="none"/>
+            <a:lstStyle/>
+            <a:p>
+              <a:pPr algn="l" marL="0" marR="0" indent="0">
+                <a:lnSpc>
+                  <a:spcPts val="880"/>
+                </a:lnSpc>
+                <a:spcBef>
+                  <a:spcPts val="0"/>
+                </a:spcBef>
+                <a:spcAft>
+                  <a:spcPts val="0"/>
+                </a:spcAft>
+              </a:pPr>
+              <a:r>
+                <a:rPr sz="880">
+                  <a:solidFill>
+                    <a:srgbClr val="4D4D4D">
+                      <a:alpha val="100000"/>
+                    </a:srgbClr>
+                  </a:solidFill>
+                  <a:latin typeface="Helvetica"/>
+                  <a:cs typeface="Helvetica"/>
+                </a:rPr>
+                <a:t>-10</a:t>
+              </a:r>
+            </a:p>
+          </p:txBody>
+        </p:sp>
+        <p:sp>
+          <p:nvSpPr>
+            <p:cNvPr id="82" name="tx82"/>
+            <p:cNvSpPr/>
+            <p:nvPr/>
+          </p:nvSpPr>
+          <p:spPr>
+            <a:xfrm>
+              <a:off x="4545104" y="5716183"/>
+              <a:ext cx="62179" cy="80101"/>
+            </a:xfrm>
+            <a:prstGeom prst="rect">
+              <a:avLst/>
+            </a:prstGeom>
+            <a:noFill/>
+          </p:spPr>
+          <p:txBody>
+            <a:bodyPr lIns="0" rIns="0" tIns="0" bIns="0" anchorCtr="1" anchor="ctr" wrap="none"/>
+            <a:lstStyle/>
+            <a:p>
+              <a:pPr algn="l" marL="0" marR="0" indent="0">
+                <a:lnSpc>
+                  <a:spcPts val="880"/>
+                </a:lnSpc>
+                <a:spcBef>
+                  <a:spcPts val="0"/>
+                </a:spcBef>
+                <a:spcAft>
+                  <a:spcPts val="0"/>
+                </a:spcAft>
+              </a:pPr>
+              <a:r>
+                <a:rPr sz="880">
+                  <a:solidFill>
+                    <a:srgbClr val="4D4D4D">
+                      <a:alpha val="100000"/>
+                    </a:srgbClr>
+                  </a:solidFill>
+                  <a:latin typeface="Helvetica"/>
+                  <a:cs typeface="Helvetica"/>
+                </a:rPr>
+                <a:t>0</a:t>
+              </a:r>
+            </a:p>
+          </p:txBody>
+        </p:sp>
+        <p:sp>
+          <p:nvSpPr>
+            <p:cNvPr id="83" name="tx83"/>
+            <p:cNvSpPr/>
+            <p:nvPr/>
+          </p:nvSpPr>
+          <p:spPr>
+            <a:xfrm>
+              <a:off x="5327615" y="5716183"/>
+              <a:ext cx="124358" cy="80101"/>
+            </a:xfrm>
+            <a:prstGeom prst="rect">
+              <a:avLst/>
+            </a:prstGeom>
+            <a:noFill/>
+          </p:spPr>
+          <p:txBody>
+            <a:bodyPr lIns="0" rIns="0" tIns="0" bIns="0" anchorCtr="1" anchor="ctr" wrap="none"/>
+            <a:lstStyle/>
+            <a:p>
+              <a:pPr algn="l" marL="0" marR="0" indent="0">
+                <a:lnSpc>
+                  <a:spcPts val="880"/>
+                </a:lnSpc>
+                <a:spcBef>
+                  <a:spcPts val="0"/>
+                </a:spcBef>
+                <a:spcAft>
+                  <a:spcPts val="0"/>
+                </a:spcAft>
+              </a:pPr>
+              <a:r>
+                <a:rPr sz="880">
+                  <a:solidFill>
+                    <a:srgbClr val="4D4D4D">
+                      <a:alpha val="100000"/>
+                    </a:srgbClr>
+                  </a:solidFill>
+                  <a:latin typeface="Helvetica"/>
+                  <a:cs typeface="Helvetica"/>
+                </a:rPr>
+                <a:t>10</a:t>
+              </a:r>
+            </a:p>
+          </p:txBody>
+        </p:sp>
+        <p:sp>
+          <p:nvSpPr>
+            <p:cNvPr id="84" name="tx84"/>
+            <p:cNvSpPr/>
+            <p:nvPr/>
+          </p:nvSpPr>
+          <p:spPr>
+            <a:xfrm>
+              <a:off x="6141217" y="5716183"/>
+              <a:ext cx="124358" cy="80101"/>
+            </a:xfrm>
+            <a:prstGeom prst="rect">
+              <a:avLst/>
+            </a:prstGeom>
+            <a:noFill/>
+          </p:spPr>
+          <p:txBody>
+            <a:bodyPr lIns="0" rIns="0" tIns="0" bIns="0" anchorCtr="1" anchor="ctr" wrap="none"/>
+            <a:lstStyle/>
+            <a:p>
+              <a:pPr algn="l" marL="0" marR="0" indent="0">
+                <a:lnSpc>
+                  <a:spcPts val="880"/>
+                </a:lnSpc>
+                <a:spcBef>
+                  <a:spcPts val="0"/>
+                </a:spcBef>
+                <a:spcAft>
+                  <a:spcPts val="0"/>
+                </a:spcAft>
+              </a:pPr>
+              <a:r>
+                <a:rPr sz="880">
+                  <a:solidFill>
+                    <a:srgbClr val="4D4D4D">
+                      <a:alpha val="100000"/>
+                    </a:srgbClr>
+                  </a:solidFill>
+                  <a:latin typeface="Helvetica"/>
+                  <a:cs typeface="Helvetica"/>
+                </a:rPr>
+                <a:t>20</a:t>
+              </a:r>
+            </a:p>
+          </p:txBody>
+        </p:sp>
+        <p:sp>
+          <p:nvSpPr>
+            <p:cNvPr id="85" name="tx85"/>
+            <p:cNvSpPr/>
+            <p:nvPr/>
+          </p:nvSpPr>
+          <p:spPr>
+            <a:xfrm>
+              <a:off x="6954818" y="5716183"/>
+              <a:ext cx="124358" cy="80101"/>
+            </a:xfrm>
+            <a:prstGeom prst="rect">
+              <a:avLst/>
+            </a:prstGeom>
+            <a:noFill/>
+          </p:spPr>
+          <p:txBody>
+            <a:bodyPr lIns="0" rIns="0" tIns="0" bIns="0" anchorCtr="1" anchor="ctr" wrap="none"/>
+            <a:lstStyle/>
+            <a:p>
+              <a:pPr algn="l" marL="0" marR="0" indent="0">
+                <a:lnSpc>
+                  <a:spcPts val="880"/>
+                </a:lnSpc>
+                <a:spcBef>
+                  <a:spcPts val="0"/>
+                </a:spcBef>
+                <a:spcAft>
+                  <a:spcPts val="0"/>
+                </a:spcAft>
+              </a:pPr>
+              <a:r>
+                <a:rPr sz="880">
+                  <a:solidFill>
+                    <a:srgbClr val="4D4D4D">
+                      <a:alpha val="100000"/>
+                    </a:srgbClr>
+                  </a:solidFill>
+                  <a:latin typeface="Helvetica"/>
+                  <a:cs typeface="Helvetica"/>
+                </a:rPr>
+                <a:t>30</a:t>
+              </a:r>
+            </a:p>
+          </p:txBody>
+        </p:sp>
+        <p:sp>
+          <p:nvSpPr>
+            <p:cNvPr id="86" name="tx86"/>
+            <p:cNvSpPr/>
+            <p:nvPr/>
+          </p:nvSpPr>
+          <p:spPr>
+            <a:xfrm>
+              <a:off x="7768419" y="5716183"/>
+              <a:ext cx="124358" cy="80101"/>
+            </a:xfrm>
+            <a:prstGeom prst="rect">
+              <a:avLst/>
+            </a:prstGeom>
+            <a:noFill/>
+          </p:spPr>
+          <p:txBody>
+            <a:bodyPr lIns="0" rIns="0" tIns="0" bIns="0" anchorCtr="1" anchor="ctr" wrap="none"/>
+            <a:lstStyle/>
+            <a:p>
+              <a:pPr algn="l" marL="0" marR="0" indent="0">
+                <a:lnSpc>
+                  <a:spcPts val="880"/>
+                </a:lnSpc>
+                <a:spcBef>
+                  <a:spcPts val="0"/>
+                </a:spcBef>
+                <a:spcAft>
+                  <a:spcPts val="0"/>
+                </a:spcAft>
+              </a:pPr>
+              <a:r>
+                <a:rPr sz="880">
+                  <a:solidFill>
+                    <a:srgbClr val="4D4D4D">
+                      <a:alpha val="100000"/>
+                    </a:srgbClr>
+                  </a:solidFill>
+                  <a:latin typeface="Helvetica"/>
+                  <a:cs typeface="Helvetica"/>
+                </a:rPr>
+                <a:t>40</a:t>
+              </a:r>
+            </a:p>
+          </p:txBody>
+        </p:sp>
+        <p:sp>
+          <p:nvSpPr>
+            <p:cNvPr id="87" name="tx87"/>
+            <p:cNvSpPr/>
+            <p:nvPr/>
+          </p:nvSpPr>
+          <p:spPr>
+            <a:xfrm>
+              <a:off x="2928340" y="5855859"/>
+              <a:ext cx="3578047" cy="100218"/>
+            </a:xfrm>
+            <a:prstGeom prst="rect">
+              <a:avLst/>
+            </a:prstGeom>
+            <a:noFill/>
+          </p:spPr>
+          <p:txBody>
+            <a:bodyPr lIns="0" rIns="0" tIns="0" bIns="0" anchorCtr="1" anchor="ctr" wrap="none"/>
+            <a:lstStyle/>
+            <a:p>
+              <a:pPr algn="l" marL="0" marR="0" indent="0">
+                <a:lnSpc>
+                  <a:spcPts val="1100"/>
+                </a:lnSpc>
+                <a:spcBef>
+                  <a:spcPts val="0"/>
+                </a:spcBef>
+                <a:spcAft>
+                  <a:spcPts val="0"/>
+                </a:spcAft>
+              </a:pPr>
+              <a:r>
+                <a:rPr sz="1100">
+                  <a:solidFill>
+                    <a:srgbClr val="000000">
+                      <a:alpha val="100000"/>
+                    </a:srgbClr>
+                  </a:solidFill>
+                  <a:latin typeface="Helvetica"/>
+                  <a:cs typeface="Helvetica"/>
+                </a:rPr>
+                <a:t>eGFR difference (%): 100 × (CKD-EPI Cr-Cys − CG) / CG</a:t>
+              </a:r>
+            </a:p>
+          </p:txBody>
+        </p:sp>
+        <p:sp>
+          <p:nvSpPr>
+            <p:cNvPr id="88" name="tx88"/>
+            <p:cNvSpPr/>
+            <p:nvPr/>
+          </p:nvSpPr>
+          <p:spPr>
+            <a:xfrm rot="-5400000">
+              <a:off x="138035" y="4944909"/>
+              <a:ext cx="1016904" cy="100218"/>
+            </a:xfrm>
+            <a:prstGeom prst="rect">
+              <a:avLst/>
+            </a:prstGeom>
+            <a:noFill/>
+          </p:spPr>
+          <p:txBody>
+            <a:bodyPr lIns="0" rIns="0" tIns="0" bIns="0" anchorCtr="1" anchor="ctr" wrap="none"/>
+            <a:lstStyle/>
+            <a:p>
+              <a:pPr algn="l" marL="0" marR="0" indent="0">
+                <a:lnSpc>
+                  <a:spcPts val="1100"/>
+                </a:lnSpc>
+                <a:spcBef>
+                  <a:spcPts val="0"/>
+                </a:spcBef>
+                <a:spcAft>
+                  <a:spcPts val="0"/>
+                </a:spcAft>
+              </a:pPr>
+              <a:r>
+                <a:rPr sz="1100">
+                  <a:solidFill>
+                    <a:srgbClr val="000000">
+                      <a:alpha val="100000"/>
+                    </a:srgbClr>
+                  </a:solidFill>
+                  <a:latin typeface="Helvetica"/>
+                  <a:cs typeface="Helvetica"/>
+                </a:rPr>
+                <a:t>subHR (95% CI)</a:t>
+              </a:r>
+            </a:p>
+          </p:txBody>
+        </p:sp>
+        <p:sp>
+          <p:nvSpPr>
+            <p:cNvPr id="89" name="tx89"/>
+            <p:cNvSpPr/>
+            <p:nvPr/>
+          </p:nvSpPr>
+          <p:spPr>
+            <a:xfrm>
+              <a:off x="887106" y="4159544"/>
+              <a:ext cx="6321612" cy="82021"/>
+            </a:xfrm>
+            <a:prstGeom prst="rect">
+              <a:avLst/>
+            </a:prstGeom>
+            <a:noFill/>
+          </p:spPr>
+          <p:txBody>
+            <a:bodyPr lIns="0" rIns="0" tIns="0" bIns="0" anchorCtr="1" anchor="ctr" wrap="none"/>
+            <a:lstStyle/>
+            <a:p>
+              <a:pPr algn="l" marL="0" marR="0" indent="0">
+                <a:lnSpc>
+                  <a:spcPts val="900"/>
+                </a:lnSpc>
+                <a:spcBef>
+                  <a:spcPts val="0"/>
+                </a:spcBef>
+                <a:spcAft>
+                  <a:spcPts val="0"/>
+                </a:spcAft>
+              </a:pPr>
+              <a:r>
+                <a:rPr sz="900">
+                  <a:solidFill>
+                    <a:srgbClr val="404040">
+                      <a:alpha val="100000"/>
+                    </a:srgbClr>
+                  </a:solidFill>
+                  <a:latin typeface="Helvetica"/>
+                  <a:cs typeface="Helvetica"/>
+                </a:rPr>
+                <a:t>subHR per 10 % decline: 1.19 (0.97-1.47), p = 0.097  |  per IQR decline (Δ = 29.9 %): 1.69 (0.91-3.16)  |  IQR: [-15.0, 14.9] %</a:t>
+              </a:r>
+            </a:p>
+          </p:txBody>
+        </p:sp>
+        <p:sp>
+          <p:nvSpPr>
+            <p:cNvPr id="90" name="tx90"/>
+            <p:cNvSpPr/>
+            <p:nvPr/>
+          </p:nvSpPr>
+          <p:spPr>
+            <a:xfrm>
+              <a:off x="887106" y="3932770"/>
               <a:ext cx="3081893" cy="120152"/>
             </a:xfrm>
             <a:prstGeom prst="rect">
